--- a/W12/W12S1 - IR Optim Mid/W12S1.pptx
+++ b/W12/W12S1 - IR Optim Mid/W12S1.pptx
@@ -338,5416 +338,183 @@
 </p188:authorLst>
 </file>
 
+<file path=ppt/revisionInfo.xml><?xml version="1.0" encoding="utf-8"?>
+<p1510:revInfo xmlns:a="http://schemas.openxmlformats.org/drawingml/2006/main" xmlns:r="http://schemas.openxmlformats.org/officeDocument/2006/relationships" xmlns:p1510="http://schemas.microsoft.com/office/powerpoint/2015/10/main">
+  <p1510:revLst>
+    <p1510:client id="{B70AD9B9-1295-461A-B0FB-4E56577DF72D}" v="8" dt="2026-01-14T10:02:30.721"/>
+  </p1510:revLst>
+</p1510:revInfo>
+</file>
+
 <file path=ppt/changesInfos/changesInfo1.xml><?xml version="1.0" encoding="utf-8"?>
 <pc:chgInfo xmlns:a="http://schemas.openxmlformats.org/drawingml/2006/main" xmlns:r="http://schemas.openxmlformats.org/officeDocument/2006/relationships" xmlns:ac="http://schemas.microsoft.com/office/drawing/2013/main/command" xmlns:pc="http://schemas.microsoft.com/office/powerpoint/2013/main/command">
   <pc:docChgLst>
-    <pc:chgData name="Matthieu De Mari" userId="dfb708c9-d8dc-439f-9a3b-c772bf4a311c" providerId="ADAL" clId="{290EF014-B879-4758-A64A-0476D4B3625C}"/>
-    <pc:docChg chg="modSld">
-      <pc:chgData name="Matthieu De Mari" userId="dfb708c9-d8dc-439f-9a3b-c772bf4a311c" providerId="ADAL" clId="{290EF014-B879-4758-A64A-0476D4B3625C}" dt="2023-03-27T06:30:25.474" v="30" actId="20577"/>
+    <pc:chgData name="Matthieu De Mari" userId="dfb708c9-d8dc-439f-9a3b-c772bf4a311c" providerId="ADAL" clId="{81E9B007-0C2C-493E-9B93-55A62C9C1F12}"/>
+    <pc:docChg chg="undo custSel modSld">
+      <pc:chgData name="Matthieu De Mari" userId="dfb708c9-d8dc-439f-9a3b-c772bf4a311c" providerId="ADAL" clId="{81E9B007-0C2C-493E-9B93-55A62C9C1F12}" dt="2026-01-14T10:02:30.721" v="159"/>
       <pc:docMkLst>
         <pc:docMk/>
       </pc:docMkLst>
       <pc:sldChg chg="modSp mod">
-        <pc:chgData name="Matthieu De Mari" userId="dfb708c9-d8dc-439f-9a3b-c772bf4a311c" providerId="ADAL" clId="{290EF014-B879-4758-A64A-0476D4B3625C}" dt="2023-03-27T06:30:25.474" v="30" actId="20577"/>
-        <pc:sldMkLst>
-          <pc:docMk/>
-          <pc:sldMk cId="1040156172" sldId="377"/>
-        </pc:sldMkLst>
-      </pc:sldChg>
-    </pc:docChg>
-  </pc:docChgLst>
-  <pc:docChgLst>
-    <pc:chgData name="Matthieu De Mari" userId="dfb708c9-d8dc-439f-9a3b-c772bf4a311c" providerId="ADAL" clId="{0F105625-1089-41E8-8768-808B0A76332B}"/>
-    <pc:docChg chg="undo redo custSel addSld delSld modSld sldOrd addSection modSection">
-      <pc:chgData name="Matthieu De Mari" userId="dfb708c9-d8dc-439f-9a3b-c772bf4a311c" providerId="ADAL" clId="{0F105625-1089-41E8-8768-808B0A76332B}" dt="2023-04-18T12:37:12.793" v="13050" actId="6549"/>
-      <pc:docMkLst>
-        <pc:docMk/>
-      </pc:docMkLst>
-      <pc:sldChg chg="addSp delSp modSp new mod">
-        <pc:chgData name="Matthieu De Mari" userId="dfb708c9-d8dc-439f-9a3b-c772bf4a311c" providerId="ADAL" clId="{0F105625-1089-41E8-8768-808B0A76332B}" dt="2023-04-17T06:20:37.577" v="507"/>
-        <pc:sldMkLst>
-          <pc:docMk/>
-          <pc:sldMk cId="3624888120" sldId="378"/>
-        </pc:sldMkLst>
-      </pc:sldChg>
-      <pc:sldChg chg="add">
-        <pc:chgData name="Matthieu De Mari" userId="dfb708c9-d8dc-439f-9a3b-c772bf4a311c" providerId="ADAL" clId="{0F105625-1089-41E8-8768-808B0A76332B}" dt="2023-04-17T06:17:46.911" v="15"/>
-        <pc:sldMkLst>
-          <pc:docMk/>
-          <pc:sldMk cId="4217274173" sldId="380"/>
-        </pc:sldMkLst>
-      </pc:sldChg>
-      <pc:sldChg chg="modSp add mod">
-        <pc:chgData name="Matthieu De Mari" userId="dfb708c9-d8dc-439f-9a3b-c772bf4a311c" providerId="ADAL" clId="{0F105625-1089-41E8-8768-808B0A76332B}" dt="2023-04-17T06:23:55.293" v="820" actId="20577"/>
+        <pc:chgData name="Matthieu De Mari" userId="dfb708c9-d8dc-439f-9a3b-c772bf4a311c" providerId="ADAL" clId="{81E9B007-0C2C-493E-9B93-55A62C9C1F12}" dt="2026-01-14T09:57:51.893" v="131" actId="14100"/>
         <pc:sldMkLst>
           <pc:docMk/>
           <pc:sldMk cId="672202442" sldId="381"/>
         </pc:sldMkLst>
+        <pc:spChg chg="mod">
+          <ac:chgData name="Matthieu De Mari" userId="dfb708c9-d8dc-439f-9a3b-c772bf4a311c" providerId="ADAL" clId="{81E9B007-0C2C-493E-9B93-55A62C9C1F12}" dt="2026-01-14T09:57:51.893" v="131" actId="14100"/>
+          <ac:spMkLst>
+            <pc:docMk/>
+            <pc:sldMk cId="672202442" sldId="381"/>
+            <ac:spMk id="3" creationId="{8A7BCC9A-5BF5-D8BF-7D18-2406987D8762}"/>
+          </ac:spMkLst>
+        </pc:spChg>
       </pc:sldChg>
-      <pc:sldChg chg="modSp add mod">
-        <pc:chgData name="Matthieu De Mari" userId="dfb708c9-d8dc-439f-9a3b-c772bf4a311c" providerId="ADAL" clId="{0F105625-1089-41E8-8768-808B0A76332B}" dt="2023-04-17T06:26:18.809" v="1229" actId="207"/>
-        <pc:sldMkLst>
-          <pc:docMk/>
-          <pc:sldMk cId="1493428235" sldId="382"/>
-        </pc:sldMkLst>
-      </pc:sldChg>
-      <pc:sldChg chg="delSp modSp add mod chgLayout">
-        <pc:chgData name="Matthieu De Mari" userId="dfb708c9-d8dc-439f-9a3b-c772bf4a311c" providerId="ADAL" clId="{0F105625-1089-41E8-8768-808B0A76332B}" dt="2023-04-17T06:30:47.590" v="1688" actId="20577"/>
-        <pc:sldMkLst>
-          <pc:docMk/>
-          <pc:sldMk cId="1695873005" sldId="383"/>
-        </pc:sldMkLst>
-      </pc:sldChg>
-      <pc:sldChg chg="add">
-        <pc:chgData name="Matthieu De Mari" userId="dfb708c9-d8dc-439f-9a3b-c772bf4a311c" providerId="ADAL" clId="{0F105625-1089-41E8-8768-808B0A76332B}" dt="2023-04-17T06:31:25.688" v="1689"/>
-        <pc:sldMkLst>
-          <pc:docMk/>
-          <pc:sldMk cId="2107224318" sldId="555"/>
-        </pc:sldMkLst>
-      </pc:sldChg>
-      <pc:sldChg chg="modSp add mod">
-        <pc:chgData name="Matthieu De Mari" userId="dfb708c9-d8dc-439f-9a3b-c772bf4a311c" providerId="ADAL" clId="{0F105625-1089-41E8-8768-808B0A76332B}" dt="2023-04-17T06:34:20.361" v="2118" actId="113"/>
-        <pc:sldMkLst>
-          <pc:docMk/>
-          <pc:sldMk cId="406923035" sldId="556"/>
-        </pc:sldMkLst>
-      </pc:sldChg>
-      <pc:sldChg chg="add">
-        <pc:chgData name="Matthieu De Mari" userId="dfb708c9-d8dc-439f-9a3b-c772bf4a311c" providerId="ADAL" clId="{0F105625-1089-41E8-8768-808B0A76332B}" dt="2023-04-17T06:34:34.054" v="2119"/>
-        <pc:sldMkLst>
-          <pc:docMk/>
-          <pc:sldMk cId="863606253" sldId="561"/>
-        </pc:sldMkLst>
-      </pc:sldChg>
-      <pc:sldChg chg="addSp delSp modSp new mod modClrScheme chgLayout">
-        <pc:chgData name="Matthieu De Mari" userId="dfb708c9-d8dc-439f-9a3b-c772bf4a311c" providerId="ADAL" clId="{0F105625-1089-41E8-8768-808B0A76332B}" dt="2023-04-17T06:39:06.491" v="2726" actId="20577"/>
-        <pc:sldMkLst>
-          <pc:docMk/>
-          <pc:sldMk cId="1427723061" sldId="562"/>
-        </pc:sldMkLst>
-      </pc:sldChg>
-      <pc:sldChg chg="modSp new mod">
-        <pc:chgData name="Matthieu De Mari" userId="dfb708c9-d8dc-439f-9a3b-c772bf4a311c" providerId="ADAL" clId="{0F105625-1089-41E8-8768-808B0A76332B}" dt="2023-04-17T06:51:08.263" v="4043" actId="20577"/>
+      <pc:sldChg chg="modSp mod">
+        <pc:chgData name="Matthieu De Mari" userId="dfb708c9-d8dc-439f-9a3b-c772bf4a311c" providerId="ADAL" clId="{81E9B007-0C2C-493E-9B93-55A62C9C1F12}" dt="2026-01-14T09:58:12.009" v="132" actId="20577"/>
         <pc:sldMkLst>
           <pc:docMk/>
           <pc:sldMk cId="2027123230" sldId="563"/>
         </pc:sldMkLst>
+        <pc:spChg chg="mod">
+          <ac:chgData name="Matthieu De Mari" userId="dfb708c9-d8dc-439f-9a3b-c772bf4a311c" providerId="ADAL" clId="{81E9B007-0C2C-493E-9B93-55A62C9C1F12}" dt="2026-01-14T09:58:12.009" v="132" actId="20577"/>
+          <ac:spMkLst>
+            <pc:docMk/>
+            <pc:sldMk cId="2027123230" sldId="563"/>
+            <ac:spMk id="3" creationId="{35943EA2-7B10-14F2-DEAD-0F1778A1940C}"/>
+          </ac:spMkLst>
+        </pc:spChg>
       </pc:sldChg>
-      <pc:sldChg chg="modSp add mod">
-        <pc:chgData name="Matthieu De Mari" userId="dfb708c9-d8dc-439f-9a3b-c772bf4a311c" providerId="ADAL" clId="{0F105625-1089-41E8-8768-808B0A76332B}" dt="2023-04-17T06:47:15.951" v="3412" actId="20577"/>
-        <pc:sldMkLst>
-          <pc:docMk/>
-          <pc:sldMk cId="629787424" sldId="564"/>
-        </pc:sldMkLst>
-      </pc:sldChg>
-      <pc:sldChg chg="modSp add mod">
-        <pc:chgData name="Matthieu De Mari" userId="dfb708c9-d8dc-439f-9a3b-c772bf4a311c" providerId="ADAL" clId="{0F105625-1089-41E8-8768-808B0A76332B}" dt="2023-04-17T06:55:36.448" v="4767" actId="20577"/>
-        <pc:sldMkLst>
-          <pc:docMk/>
-          <pc:sldMk cId="2146671264" sldId="565"/>
-        </pc:sldMkLst>
-      </pc:sldChg>
-      <pc:sldChg chg="modSp add mod">
-        <pc:chgData name="Matthieu De Mari" userId="dfb708c9-d8dc-439f-9a3b-c772bf4a311c" providerId="ADAL" clId="{0F105625-1089-41E8-8768-808B0A76332B}" dt="2023-04-17T06:58:09.947" v="5431" actId="207"/>
-        <pc:sldMkLst>
-          <pc:docMk/>
-          <pc:sldMk cId="380386528" sldId="566"/>
-        </pc:sldMkLst>
-      </pc:sldChg>
-      <pc:sldChg chg="modSp new mod">
-        <pc:chgData name="Matthieu De Mari" userId="dfb708c9-d8dc-439f-9a3b-c772bf4a311c" providerId="ADAL" clId="{0F105625-1089-41E8-8768-808B0A76332B}" dt="2023-04-17T07:15:52.103" v="6545" actId="207"/>
-        <pc:sldMkLst>
-          <pc:docMk/>
-          <pc:sldMk cId="4105905870" sldId="567"/>
-        </pc:sldMkLst>
-      </pc:sldChg>
-      <pc:sldChg chg="modSp add mod">
-        <pc:chgData name="Matthieu De Mari" userId="dfb708c9-d8dc-439f-9a3b-c772bf4a311c" providerId="ADAL" clId="{0F105625-1089-41E8-8768-808B0A76332B}" dt="2023-04-17T07:10:23.846" v="6112" actId="20577"/>
-        <pc:sldMkLst>
-          <pc:docMk/>
-          <pc:sldMk cId="1427756346" sldId="568"/>
-        </pc:sldMkLst>
-      </pc:sldChg>
-      <pc:sldChg chg="modSp add mod">
-        <pc:chgData name="Matthieu De Mari" userId="dfb708c9-d8dc-439f-9a3b-c772bf4a311c" providerId="ADAL" clId="{0F105625-1089-41E8-8768-808B0A76332B}" dt="2023-04-17T07:11:24.303" v="6249" actId="207"/>
-        <pc:sldMkLst>
-          <pc:docMk/>
-          <pc:sldMk cId="857736393" sldId="569"/>
-        </pc:sldMkLst>
-      </pc:sldChg>
-      <pc:sldChg chg="modSp add mod">
-        <pc:chgData name="Matthieu De Mari" userId="dfb708c9-d8dc-439f-9a3b-c772bf4a311c" providerId="ADAL" clId="{0F105625-1089-41E8-8768-808B0A76332B}" dt="2023-04-17T07:39:25.331" v="7309" actId="113"/>
-        <pc:sldMkLst>
-          <pc:docMk/>
-          <pc:sldMk cId="153167937" sldId="570"/>
-        </pc:sldMkLst>
-      </pc:sldChg>
-      <pc:sldChg chg="modSp add mod">
-        <pc:chgData name="Matthieu De Mari" userId="dfb708c9-d8dc-439f-9a3b-c772bf4a311c" providerId="ADAL" clId="{0F105625-1089-41E8-8768-808B0A76332B}" dt="2023-04-17T07:12:48.955" v="6481" actId="20577"/>
-        <pc:sldMkLst>
-          <pc:docMk/>
-          <pc:sldMk cId="102345140" sldId="571"/>
-        </pc:sldMkLst>
-      </pc:sldChg>
-      <pc:sldChg chg="modSp add mod">
-        <pc:chgData name="Matthieu De Mari" userId="dfb708c9-d8dc-439f-9a3b-c772bf4a311c" providerId="ADAL" clId="{0F105625-1089-41E8-8768-808B0A76332B}" dt="2023-04-17T07:13:27.695" v="6518" actId="113"/>
-        <pc:sldMkLst>
-          <pc:docMk/>
-          <pc:sldMk cId="3440767209" sldId="572"/>
-        </pc:sldMkLst>
-      </pc:sldChg>
-      <pc:sldChg chg="modSp add mod">
-        <pc:chgData name="Matthieu De Mari" userId="dfb708c9-d8dc-439f-9a3b-c772bf4a311c" providerId="ADAL" clId="{0F105625-1089-41E8-8768-808B0A76332B}" dt="2023-04-17T07:13:40.392" v="6520" actId="20577"/>
-        <pc:sldMkLst>
-          <pc:docMk/>
-          <pc:sldMk cId="2263684504" sldId="573"/>
-        </pc:sldMkLst>
-      </pc:sldChg>
-      <pc:sldChg chg="modSp new mod">
-        <pc:chgData name="Matthieu De Mari" userId="dfb708c9-d8dc-439f-9a3b-c772bf4a311c" providerId="ADAL" clId="{0F105625-1089-41E8-8768-808B0A76332B}" dt="2023-04-17T07:41:48.064" v="7367"/>
-        <pc:sldMkLst>
-          <pc:docMk/>
-          <pc:sldMk cId="3881318595" sldId="574"/>
-        </pc:sldMkLst>
-      </pc:sldChg>
-      <pc:sldChg chg="addSp delSp modSp new mod">
-        <pc:chgData name="Matthieu De Mari" userId="dfb708c9-d8dc-439f-9a3b-c772bf4a311c" providerId="ADAL" clId="{0F105625-1089-41E8-8768-808B0A76332B}" dt="2023-04-17T07:22:53.118" v="6650" actId="1076"/>
-        <pc:sldMkLst>
-          <pc:docMk/>
-          <pc:sldMk cId="2175833871" sldId="575"/>
-        </pc:sldMkLst>
-      </pc:sldChg>
-      <pc:sldChg chg="addSp delSp modSp add mod">
-        <pc:chgData name="Matthieu De Mari" userId="dfb708c9-d8dc-439f-9a3b-c772bf4a311c" providerId="ADAL" clId="{0F105625-1089-41E8-8768-808B0A76332B}" dt="2023-04-17T07:23:25.391" v="6670" actId="20577"/>
-        <pc:sldMkLst>
-          <pc:docMk/>
-          <pc:sldMk cId="1156625420" sldId="576"/>
-        </pc:sldMkLst>
-      </pc:sldChg>
-      <pc:sldChg chg="addSp delSp modSp add mod">
-        <pc:chgData name="Matthieu De Mari" userId="dfb708c9-d8dc-439f-9a3b-c772bf4a311c" providerId="ADAL" clId="{0F105625-1089-41E8-8768-808B0A76332B}" dt="2023-04-17T07:24:32.494" v="6706" actId="1076"/>
-        <pc:sldMkLst>
-          <pc:docMk/>
-          <pc:sldMk cId="2671514822" sldId="577"/>
-        </pc:sldMkLst>
-      </pc:sldChg>
-      <pc:sldChg chg="modSp new mod">
-        <pc:chgData name="Matthieu De Mari" userId="dfb708c9-d8dc-439f-9a3b-c772bf4a311c" providerId="ADAL" clId="{0F105625-1089-41E8-8768-808B0A76332B}" dt="2023-04-17T07:55:36.327" v="8234"/>
-        <pc:sldMkLst>
-          <pc:docMk/>
-          <pc:sldMk cId="903829735" sldId="578"/>
-        </pc:sldMkLst>
-      </pc:sldChg>
-      <pc:sldChg chg="modSp add mod">
-        <pc:chgData name="Matthieu De Mari" userId="dfb708c9-d8dc-439f-9a3b-c772bf4a311c" providerId="ADAL" clId="{0F105625-1089-41E8-8768-808B0A76332B}" dt="2023-04-17T07:35:41.120" v="6887" actId="20577"/>
-        <pc:sldMkLst>
-          <pc:docMk/>
-          <pc:sldMk cId="223971887" sldId="579"/>
-        </pc:sldMkLst>
-      </pc:sldChg>
-      <pc:sldChg chg="modSp add mod">
-        <pc:chgData name="Matthieu De Mari" userId="dfb708c9-d8dc-439f-9a3b-c772bf4a311c" providerId="ADAL" clId="{0F105625-1089-41E8-8768-808B0A76332B}" dt="2023-04-17T07:37:37.532" v="6949" actId="113"/>
-        <pc:sldMkLst>
-          <pc:docMk/>
-          <pc:sldMk cId="630239867" sldId="580"/>
-        </pc:sldMkLst>
-      </pc:sldChg>
-      <pc:sldChg chg="add del">
-        <pc:chgData name="Matthieu De Mari" userId="dfb708c9-d8dc-439f-9a3b-c772bf4a311c" providerId="ADAL" clId="{0F105625-1089-41E8-8768-808B0A76332B}" dt="2023-04-17T07:29:21.885" v="6859" actId="47"/>
-        <pc:sldMkLst>
-          <pc:docMk/>
-          <pc:sldMk cId="3593082609" sldId="580"/>
-        </pc:sldMkLst>
-      </pc:sldChg>
-      <pc:sldChg chg="modSp add mod">
-        <pc:chgData name="Matthieu De Mari" userId="dfb708c9-d8dc-439f-9a3b-c772bf4a311c" providerId="ADAL" clId="{0F105625-1089-41E8-8768-808B0A76332B}" dt="2023-04-17T07:39:19.188" v="7308" actId="113"/>
-        <pc:sldMkLst>
-          <pc:docMk/>
-          <pc:sldMk cId="2402577882" sldId="581"/>
-        </pc:sldMkLst>
-      </pc:sldChg>
-      <pc:sldChg chg="modSp add mod">
-        <pc:chgData name="Matthieu De Mari" userId="dfb708c9-d8dc-439f-9a3b-c772bf4a311c" providerId="ADAL" clId="{0F105625-1089-41E8-8768-808B0A76332B}" dt="2023-04-17T07:39:11.434" v="7307" actId="20577"/>
-        <pc:sldMkLst>
-          <pc:docMk/>
-          <pc:sldMk cId="2110971227" sldId="582"/>
-        </pc:sldMkLst>
-      </pc:sldChg>
-      <pc:sldChg chg="modSp add mod">
-        <pc:chgData name="Matthieu De Mari" userId="dfb708c9-d8dc-439f-9a3b-c772bf4a311c" providerId="ADAL" clId="{0F105625-1089-41E8-8768-808B0A76332B}" dt="2023-04-17T07:40:33.688" v="7365" actId="20577"/>
-        <pc:sldMkLst>
-          <pc:docMk/>
-          <pc:sldMk cId="1701180683" sldId="583"/>
-        </pc:sldMkLst>
-      </pc:sldChg>
-      <pc:sldChg chg="modSp new mod">
-        <pc:chgData name="Matthieu De Mari" userId="dfb708c9-d8dc-439f-9a3b-c772bf4a311c" providerId="ADAL" clId="{0F105625-1089-41E8-8768-808B0A76332B}" dt="2023-04-17T07:47:08.252" v="7516" actId="27636"/>
-        <pc:sldMkLst>
-          <pc:docMk/>
-          <pc:sldMk cId="1712920117" sldId="584"/>
-        </pc:sldMkLst>
-      </pc:sldChg>
-      <pc:sldChg chg="modSp add del mod">
-        <pc:chgData name="Matthieu De Mari" userId="dfb708c9-d8dc-439f-9a3b-c772bf4a311c" providerId="ADAL" clId="{0F105625-1089-41E8-8768-808B0A76332B}" dt="2023-04-17T07:45:26.651" v="7426" actId="47"/>
-        <pc:sldMkLst>
-          <pc:docMk/>
-          <pc:sldMk cId="4154185612" sldId="584"/>
-        </pc:sldMkLst>
-      </pc:sldChg>
-      <pc:sldChg chg="addSp modSp add mod">
-        <pc:chgData name="Matthieu De Mari" userId="dfb708c9-d8dc-439f-9a3b-c772bf4a311c" providerId="ADAL" clId="{0F105625-1089-41E8-8768-808B0A76332B}" dt="2023-04-17T07:52:05.498" v="8042" actId="6549"/>
+      <pc:sldChg chg="modSp mod">
+        <pc:chgData name="Matthieu De Mari" userId="dfb708c9-d8dc-439f-9a3b-c772bf4a311c" providerId="ADAL" clId="{81E9B007-0C2C-493E-9B93-55A62C9C1F12}" dt="2026-01-14T09:59:30.004" v="141" actId="20577"/>
         <pc:sldMkLst>
           <pc:docMk/>
           <pc:sldMk cId="865857436" sldId="585"/>
         </pc:sldMkLst>
+        <pc:spChg chg="mod">
+          <ac:chgData name="Matthieu De Mari" userId="dfb708c9-d8dc-439f-9a3b-c772bf4a311c" providerId="ADAL" clId="{81E9B007-0C2C-493E-9B93-55A62C9C1F12}" dt="2026-01-14T09:59:16.610" v="137"/>
+          <ac:spMkLst>
+            <pc:docMk/>
+            <pc:sldMk cId="865857436" sldId="585"/>
+            <ac:spMk id="4" creationId="{5462A23C-7DB1-D084-2C28-550BCB99A7A9}"/>
+          </ac:spMkLst>
+        </pc:spChg>
+        <pc:spChg chg="mod">
+          <ac:chgData name="Matthieu De Mari" userId="dfb708c9-d8dc-439f-9a3b-c772bf4a311c" providerId="ADAL" clId="{81E9B007-0C2C-493E-9B93-55A62C9C1F12}" dt="2026-01-14T09:59:30.004" v="141" actId="20577"/>
+          <ac:spMkLst>
+            <pc:docMk/>
+            <pc:sldMk cId="865857436" sldId="585"/>
+            <ac:spMk id="5" creationId="{6486D35B-3C22-CCAB-9B50-37AE59CC76D9}"/>
+          </ac:spMkLst>
+        </pc:spChg>
+        <pc:spChg chg="mod">
+          <ac:chgData name="Matthieu De Mari" userId="dfb708c9-d8dc-439f-9a3b-c772bf4a311c" providerId="ADAL" clId="{81E9B007-0C2C-493E-9B93-55A62C9C1F12}" dt="2026-01-14T09:59:06.608" v="134" actId="688"/>
+          <ac:spMkLst>
+            <pc:docMk/>
+            <pc:sldMk cId="865857436" sldId="585"/>
+            <ac:spMk id="6" creationId="{78119F65-1FE5-6B28-B98A-977F63927BD6}"/>
+          </ac:spMkLst>
+        </pc:spChg>
       </pc:sldChg>
-      <pc:sldChg chg="modSp new mod">
-        <pc:chgData name="Matthieu De Mari" userId="dfb708c9-d8dc-439f-9a3b-c772bf4a311c" providerId="ADAL" clId="{0F105625-1089-41E8-8768-808B0A76332B}" dt="2023-04-17T08:15:49.036" v="8718"/>
-        <pc:sldMkLst>
-          <pc:docMk/>
-          <pc:sldMk cId="2639472362" sldId="586"/>
-        </pc:sldMkLst>
-      </pc:sldChg>
-      <pc:sldChg chg="modSp add mod ord">
-        <pc:chgData name="Matthieu De Mari" userId="dfb708c9-d8dc-439f-9a3b-c772bf4a311c" providerId="ADAL" clId="{0F105625-1089-41E8-8768-808B0A76332B}" dt="2023-04-17T07:55:49.933" v="8244" actId="20577"/>
-        <pc:sldMkLst>
-          <pc:docMk/>
-          <pc:sldMk cId="2275553267" sldId="587"/>
-        </pc:sldMkLst>
-      </pc:sldChg>
-      <pc:sldChg chg="modSp add mod">
-        <pc:chgData name="Matthieu De Mari" userId="dfb708c9-d8dc-439f-9a3b-c772bf4a311c" providerId="ADAL" clId="{0F105625-1089-41E8-8768-808B0A76332B}" dt="2023-04-17T07:56:05.413" v="8255" actId="20577"/>
+      <pc:sldChg chg="modSp mod">
+        <pc:chgData name="Matthieu De Mari" userId="dfb708c9-d8dc-439f-9a3b-c772bf4a311c" providerId="ADAL" clId="{81E9B007-0C2C-493E-9B93-55A62C9C1F12}" dt="2026-01-14T09:59:47.568" v="146"/>
         <pc:sldMkLst>
           <pc:docMk/>
           <pc:sldMk cId="682453270" sldId="588"/>
         </pc:sldMkLst>
+        <pc:spChg chg="mod">
+          <ac:chgData name="Matthieu De Mari" userId="dfb708c9-d8dc-439f-9a3b-c772bf4a311c" providerId="ADAL" clId="{81E9B007-0C2C-493E-9B93-55A62C9C1F12}" dt="2026-01-14T09:59:45.972" v="145" actId="20577"/>
+          <ac:spMkLst>
+            <pc:docMk/>
+            <pc:sldMk cId="682453270" sldId="588"/>
+            <ac:spMk id="4" creationId="{5462A23C-7DB1-D084-2C28-550BCB99A7A9}"/>
+          </ac:spMkLst>
+        </pc:spChg>
+        <pc:spChg chg="mod">
+          <ac:chgData name="Matthieu De Mari" userId="dfb708c9-d8dc-439f-9a3b-c772bf4a311c" providerId="ADAL" clId="{81E9B007-0C2C-493E-9B93-55A62C9C1F12}" dt="2026-01-14T09:59:47.568" v="146"/>
+          <ac:spMkLst>
+            <pc:docMk/>
+            <pc:sldMk cId="682453270" sldId="588"/>
+            <ac:spMk id="5" creationId="{6486D35B-3C22-CCAB-9B50-37AE59CC76D9}"/>
+          </ac:spMkLst>
+        </pc:spChg>
       </pc:sldChg>
-      <pc:sldChg chg="modSp add mod">
-        <pc:chgData name="Matthieu De Mari" userId="dfb708c9-d8dc-439f-9a3b-c772bf4a311c" providerId="ADAL" clId="{0F105625-1089-41E8-8768-808B0A76332B}" dt="2023-04-17T07:52:15.552" v="8095" actId="20577"/>
+      <pc:sldChg chg="modSp mod">
+        <pc:chgData name="Matthieu De Mari" userId="dfb708c9-d8dc-439f-9a3b-c772bf4a311c" providerId="ADAL" clId="{81E9B007-0C2C-493E-9B93-55A62C9C1F12}" dt="2026-01-14T09:59:28.143" v="140" actId="20577"/>
         <pc:sldMkLst>
           <pc:docMk/>
           <pc:sldMk cId="4062348375" sldId="589"/>
         </pc:sldMkLst>
+        <pc:spChg chg="mod">
+          <ac:chgData name="Matthieu De Mari" userId="dfb708c9-d8dc-439f-9a3b-c772bf4a311c" providerId="ADAL" clId="{81E9B007-0C2C-493E-9B93-55A62C9C1F12}" dt="2026-01-14T09:59:23.403" v="138"/>
+          <ac:spMkLst>
+            <pc:docMk/>
+            <pc:sldMk cId="4062348375" sldId="589"/>
+            <ac:spMk id="4" creationId="{5462A23C-7DB1-D084-2C28-550BCB99A7A9}"/>
+          </ac:spMkLst>
+        </pc:spChg>
+        <pc:spChg chg="mod">
+          <ac:chgData name="Matthieu De Mari" userId="dfb708c9-d8dc-439f-9a3b-c772bf4a311c" providerId="ADAL" clId="{81E9B007-0C2C-493E-9B93-55A62C9C1F12}" dt="2026-01-14T09:59:28.143" v="140" actId="20577"/>
+          <ac:spMkLst>
+            <pc:docMk/>
+            <pc:sldMk cId="4062348375" sldId="589"/>
+            <ac:spMk id="5" creationId="{6486D35B-3C22-CCAB-9B50-37AE59CC76D9}"/>
+          </ac:spMkLst>
+        </pc:spChg>
       </pc:sldChg>
-      <pc:sldChg chg="modSp add mod">
-        <pc:chgData name="Matthieu De Mari" userId="dfb708c9-d8dc-439f-9a3b-c772bf4a311c" providerId="ADAL" clId="{0F105625-1089-41E8-8768-808B0A76332B}" dt="2023-04-17T08:15:43.970" v="8717" actId="20577"/>
+      <pc:sldChg chg="modSp mod">
+        <pc:chgData name="Matthieu De Mari" userId="dfb708c9-d8dc-439f-9a3b-c772bf4a311c" providerId="ADAL" clId="{81E9B007-0C2C-493E-9B93-55A62C9C1F12}" dt="2026-01-14T10:00:06.191" v="154" actId="20577"/>
         <pc:sldMkLst>
           <pc:docMk/>
           <pc:sldMk cId="1628147713" sldId="590"/>
         </pc:sldMkLst>
+        <pc:spChg chg="mod">
+          <ac:chgData name="Matthieu De Mari" userId="dfb708c9-d8dc-439f-9a3b-c772bf4a311c" providerId="ADAL" clId="{81E9B007-0C2C-493E-9B93-55A62C9C1F12}" dt="2026-01-14T10:00:06.191" v="154" actId="20577"/>
+          <ac:spMkLst>
+            <pc:docMk/>
+            <pc:sldMk cId="1628147713" sldId="590"/>
+            <ac:spMk id="3" creationId="{5D027332-01C3-F305-196B-D36943C374A6}"/>
+          </ac:spMkLst>
+        </pc:spChg>
       </pc:sldChg>
-      <pc:sldChg chg="modSp new mod">
-        <pc:chgData name="Matthieu De Mari" userId="dfb708c9-d8dc-439f-9a3b-c772bf4a311c" providerId="ADAL" clId="{0F105625-1089-41E8-8768-808B0A76332B}" dt="2023-04-17T08:19:28.408" v="8943" actId="113"/>
-        <pc:sldMkLst>
-          <pc:docMk/>
-          <pc:sldMk cId="290816589" sldId="591"/>
-        </pc:sldMkLst>
-      </pc:sldChg>
-      <pc:sldChg chg="modSp new mod">
-        <pc:chgData name="Matthieu De Mari" userId="dfb708c9-d8dc-439f-9a3b-c772bf4a311c" providerId="ADAL" clId="{0F105625-1089-41E8-8768-808B0A76332B}" dt="2023-04-17T08:22:11.405" v="9036" actId="114"/>
-        <pc:sldMkLst>
-          <pc:docMk/>
-          <pc:sldMk cId="2477033199" sldId="592"/>
-        </pc:sldMkLst>
-      </pc:sldChg>
-      <pc:sldChg chg="addSp delSp modSp new mod">
-        <pc:chgData name="Matthieu De Mari" userId="dfb708c9-d8dc-439f-9a3b-c772bf4a311c" providerId="ADAL" clId="{0F105625-1089-41E8-8768-808B0A76332B}" dt="2023-04-18T12:34:57.340" v="13012" actId="20577"/>
-        <pc:sldMkLst>
-          <pc:docMk/>
-          <pc:sldMk cId="2385100266" sldId="593"/>
-        </pc:sldMkLst>
-      </pc:sldChg>
-      <pc:sldChg chg="modSp add del mod">
-        <pc:chgData name="Matthieu De Mari" userId="dfb708c9-d8dc-439f-9a3b-c772bf4a311c" providerId="ADAL" clId="{0F105625-1089-41E8-8768-808B0A76332B}" dt="2023-04-18T12:36:52.624" v="13035" actId="47"/>
-        <pc:sldMkLst>
-          <pc:docMk/>
-          <pc:sldMk cId="57453552" sldId="594"/>
-        </pc:sldMkLst>
-      </pc:sldChg>
-      <pc:sldChg chg="modSp add del mod">
-        <pc:chgData name="Matthieu De Mari" userId="dfb708c9-d8dc-439f-9a3b-c772bf4a311c" providerId="ADAL" clId="{0F105625-1089-41E8-8768-808B0A76332B}" dt="2023-04-18T12:35:54.327" v="13021" actId="47"/>
-        <pc:sldMkLst>
-          <pc:docMk/>
-          <pc:sldMk cId="3128059839" sldId="595"/>
-        </pc:sldMkLst>
-      </pc:sldChg>
-      <pc:sldChg chg="modSp add del mod">
-        <pc:chgData name="Matthieu De Mari" userId="dfb708c9-d8dc-439f-9a3b-c772bf4a311c" providerId="ADAL" clId="{0F105625-1089-41E8-8768-808B0A76332B}" dt="2023-04-18T12:35:56.213" v="13022" actId="47"/>
-        <pc:sldMkLst>
-          <pc:docMk/>
-          <pc:sldMk cId="2882394214" sldId="596"/>
-        </pc:sldMkLst>
-      </pc:sldChg>
-      <pc:sldChg chg="modSp add del mod">
-        <pc:chgData name="Matthieu De Mari" userId="dfb708c9-d8dc-439f-9a3b-c772bf4a311c" providerId="ADAL" clId="{0F105625-1089-41E8-8768-808B0A76332B}" dt="2023-04-18T12:35:57.021" v="13023" actId="47"/>
-        <pc:sldMkLst>
-          <pc:docMk/>
-          <pc:sldMk cId="2125982656" sldId="597"/>
-        </pc:sldMkLst>
-      </pc:sldChg>
-      <pc:sldChg chg="modSp add del mod">
-        <pc:chgData name="Matthieu De Mari" userId="dfb708c9-d8dc-439f-9a3b-c772bf4a311c" providerId="ADAL" clId="{0F105625-1089-41E8-8768-808B0A76332B}" dt="2023-04-18T12:35:58.184" v="13024" actId="47"/>
-        <pc:sldMkLst>
-          <pc:docMk/>
-          <pc:sldMk cId="1368333128" sldId="598"/>
-        </pc:sldMkLst>
-      </pc:sldChg>
-      <pc:sldChg chg="modSp add mod">
-        <pc:chgData name="Matthieu De Mari" userId="dfb708c9-d8dc-439f-9a3b-c772bf4a311c" providerId="ADAL" clId="{0F105625-1089-41E8-8768-808B0A76332B}" dt="2023-04-18T12:36:13.209" v="13028" actId="20577"/>
-        <pc:sldMkLst>
-          <pc:docMk/>
-          <pc:sldMk cId="2924132573" sldId="599"/>
-        </pc:sldMkLst>
-      </pc:sldChg>
-      <pc:sldChg chg="addSp delSp modSp add del mod">
-        <pc:chgData name="Matthieu De Mari" userId="dfb708c9-d8dc-439f-9a3b-c772bf4a311c" providerId="ADAL" clId="{0F105625-1089-41E8-8768-808B0A76332B}" dt="2023-04-18T12:36:57.819" v="13037" actId="47"/>
-        <pc:sldMkLst>
-          <pc:docMk/>
-          <pc:sldMk cId="3132408082" sldId="600"/>
-        </pc:sldMkLst>
-      </pc:sldChg>
-      <pc:sldChg chg="modSp add del mod">
-        <pc:chgData name="Matthieu De Mari" userId="dfb708c9-d8dc-439f-9a3b-c772bf4a311c" providerId="ADAL" clId="{0F105625-1089-41E8-8768-808B0A76332B}" dt="2023-04-18T12:36:22.387" v="13030" actId="47"/>
-        <pc:sldMkLst>
-          <pc:docMk/>
-          <pc:sldMk cId="1163000297" sldId="601"/>
-        </pc:sldMkLst>
-      </pc:sldChg>
-      <pc:sldChg chg="modSp add del mod ord">
-        <pc:chgData name="Matthieu De Mari" userId="dfb708c9-d8dc-439f-9a3b-c772bf4a311c" providerId="ADAL" clId="{0F105625-1089-41E8-8768-808B0A76332B}" dt="2023-04-18T12:36:20.440" v="13029" actId="47"/>
-        <pc:sldMkLst>
-          <pc:docMk/>
-          <pc:sldMk cId="4197894078" sldId="602"/>
-        </pc:sldMkLst>
-      </pc:sldChg>
-      <pc:sldChg chg="modSp add del mod">
-        <pc:chgData name="Matthieu De Mari" userId="dfb708c9-d8dc-439f-9a3b-c772bf4a311c" providerId="ADAL" clId="{0F105625-1089-41E8-8768-808B0A76332B}" dt="2023-04-18T12:36:23.730" v="13031" actId="47"/>
-        <pc:sldMkLst>
-          <pc:docMk/>
-          <pc:sldMk cId="994252998" sldId="603"/>
-        </pc:sldMkLst>
-      </pc:sldChg>
-      <pc:sldChg chg="modSp add mod">
-        <pc:chgData name="Matthieu De Mari" userId="dfb708c9-d8dc-439f-9a3b-c772bf4a311c" providerId="ADAL" clId="{0F105625-1089-41E8-8768-808B0A76332B}" dt="2023-04-18T12:34:20.254" v="12996" actId="20577"/>
-        <pc:sldMkLst>
-          <pc:docMk/>
-          <pc:sldMk cId="598831876" sldId="604"/>
-        </pc:sldMkLst>
-      </pc:sldChg>
-      <pc:sldChg chg="modSp add del mod">
-        <pc:chgData name="Matthieu De Mari" userId="dfb708c9-d8dc-439f-9a3b-c772bf4a311c" providerId="ADAL" clId="{0F105625-1089-41E8-8768-808B0A76332B}" dt="2023-04-17T08:34:35.959" v="9973" actId="47"/>
-        <pc:sldMkLst>
-          <pc:docMk/>
-          <pc:sldMk cId="1061330656" sldId="604"/>
-        </pc:sldMkLst>
-      </pc:sldChg>
-      <pc:sldChg chg="modSp add del mod">
-        <pc:chgData name="Matthieu De Mari" userId="dfb708c9-d8dc-439f-9a3b-c772bf4a311c" providerId="ADAL" clId="{0F105625-1089-41E8-8768-808B0A76332B}" dt="2023-04-18T12:36:46.500" v="13032" actId="47"/>
-        <pc:sldMkLst>
-          <pc:docMk/>
-          <pc:sldMk cId="3596215706" sldId="605"/>
-        </pc:sldMkLst>
-      </pc:sldChg>
-      <pc:sldChg chg="modSp new mod">
-        <pc:chgData name="Matthieu De Mari" userId="dfb708c9-d8dc-439f-9a3b-c772bf4a311c" providerId="ADAL" clId="{0F105625-1089-41E8-8768-808B0A76332B}" dt="2023-04-17T08:49:24.949" v="10653" actId="20577"/>
-        <pc:sldMkLst>
-          <pc:docMk/>
-          <pc:sldMk cId="4103065477" sldId="606"/>
-        </pc:sldMkLst>
-      </pc:sldChg>
-      <pc:sldChg chg="modSp add mod">
-        <pc:chgData name="Matthieu De Mari" userId="dfb708c9-d8dc-439f-9a3b-c772bf4a311c" providerId="ADAL" clId="{0F105625-1089-41E8-8768-808B0A76332B}" dt="2023-04-18T12:37:12.793" v="13050" actId="6549"/>
-        <pc:sldMkLst>
-          <pc:docMk/>
-          <pc:sldMk cId="3111768560" sldId="607"/>
-        </pc:sldMkLst>
-      </pc:sldChg>
-      <pc:sldChg chg="modSp add mod">
-        <pc:chgData name="Matthieu De Mari" userId="dfb708c9-d8dc-439f-9a3b-c772bf4a311c" providerId="ADAL" clId="{0F105625-1089-41E8-8768-808B0A76332B}" dt="2023-04-17T08:51:48.059" v="10864" actId="20577"/>
-        <pc:sldMkLst>
-          <pc:docMk/>
-          <pc:sldMk cId="3853606339" sldId="608"/>
-        </pc:sldMkLst>
-      </pc:sldChg>
-      <pc:sldChg chg="modSp add mod">
-        <pc:chgData name="Matthieu De Mari" userId="dfb708c9-d8dc-439f-9a3b-c772bf4a311c" providerId="ADAL" clId="{0F105625-1089-41E8-8768-808B0A76332B}" dt="2023-04-17T08:51:45.404" v="10861" actId="27636"/>
-        <pc:sldMkLst>
-          <pc:docMk/>
-          <pc:sldMk cId="2162267674" sldId="609"/>
-        </pc:sldMkLst>
-      </pc:sldChg>
-      <pc:sldChg chg="modSp add mod">
-        <pc:chgData name="Matthieu De Mari" userId="dfb708c9-d8dc-439f-9a3b-c772bf4a311c" providerId="ADAL" clId="{0F105625-1089-41E8-8768-808B0A76332B}" dt="2023-04-17T08:51:38.485" v="10856" actId="20577"/>
-        <pc:sldMkLst>
-          <pc:docMk/>
-          <pc:sldMk cId="2905137462" sldId="610"/>
-        </pc:sldMkLst>
-      </pc:sldChg>
-      <pc:sldChg chg="modSp add mod">
-        <pc:chgData name="Matthieu De Mari" userId="dfb708c9-d8dc-439f-9a3b-c772bf4a311c" providerId="ADAL" clId="{0F105625-1089-41E8-8768-808B0A76332B}" dt="2023-04-17T08:52:22.007" v="10873" actId="20577"/>
-        <pc:sldMkLst>
-          <pc:docMk/>
-          <pc:sldMk cId="338852897" sldId="611"/>
-        </pc:sldMkLst>
-      </pc:sldChg>
-      <pc:sldChg chg="modSp add mod">
-        <pc:chgData name="Matthieu De Mari" userId="dfb708c9-d8dc-439f-9a3b-c772bf4a311c" providerId="ADAL" clId="{0F105625-1089-41E8-8768-808B0A76332B}" dt="2023-04-17T08:52:28.779" v="10875" actId="20577"/>
-        <pc:sldMkLst>
-          <pc:docMk/>
-          <pc:sldMk cId="3391969214" sldId="612"/>
-        </pc:sldMkLst>
-      </pc:sldChg>
-      <pc:sldChg chg="modSp add mod">
-        <pc:chgData name="Matthieu De Mari" userId="dfb708c9-d8dc-439f-9a3b-c772bf4a311c" providerId="ADAL" clId="{0F105625-1089-41E8-8768-808B0A76332B}" dt="2023-04-17T08:52:46.798" v="10886" actId="20577"/>
-        <pc:sldMkLst>
-          <pc:docMk/>
-          <pc:sldMk cId="3273655504" sldId="613"/>
-        </pc:sldMkLst>
-      </pc:sldChg>
-      <pc:sldChg chg="modSp add mod">
-        <pc:chgData name="Matthieu De Mari" userId="dfb708c9-d8dc-439f-9a3b-c772bf4a311c" providerId="ADAL" clId="{0F105625-1089-41E8-8768-808B0A76332B}" dt="2023-04-17T08:52:52.696" v="10888" actId="20577"/>
-        <pc:sldMkLst>
-          <pc:docMk/>
-          <pc:sldMk cId="895323114" sldId="614"/>
-        </pc:sldMkLst>
-      </pc:sldChg>
-      <pc:sldChg chg="modSp add mod">
-        <pc:chgData name="Matthieu De Mari" userId="dfb708c9-d8dc-439f-9a3b-c772bf4a311c" providerId="ADAL" clId="{0F105625-1089-41E8-8768-808B0A76332B}" dt="2023-04-17T08:53:42.651" v="10903" actId="207"/>
-        <pc:sldMkLst>
-          <pc:docMk/>
-          <pc:sldMk cId="2198094589" sldId="615"/>
-        </pc:sldMkLst>
-      </pc:sldChg>
-      <pc:sldChg chg="modSp add mod">
-        <pc:chgData name="Matthieu De Mari" userId="dfb708c9-d8dc-439f-9a3b-c772bf4a311c" providerId="ADAL" clId="{0F105625-1089-41E8-8768-808B0A76332B}" dt="2023-04-17T08:53:36.435" v="10901" actId="20577"/>
-        <pc:sldMkLst>
-          <pc:docMk/>
-          <pc:sldMk cId="3982159481" sldId="616"/>
-        </pc:sldMkLst>
-      </pc:sldChg>
-      <pc:sldChg chg="modSp add mod">
-        <pc:chgData name="Matthieu De Mari" userId="dfb708c9-d8dc-439f-9a3b-c772bf4a311c" providerId="ADAL" clId="{0F105625-1089-41E8-8768-808B0A76332B}" dt="2023-04-17T08:55:34.063" v="11062" actId="20577"/>
-        <pc:sldMkLst>
-          <pc:docMk/>
-          <pc:sldMk cId="369381578" sldId="617"/>
-        </pc:sldMkLst>
-      </pc:sldChg>
-      <pc:sldChg chg="modSp new mod">
-        <pc:chgData name="Matthieu De Mari" userId="dfb708c9-d8dc-439f-9a3b-c772bf4a311c" providerId="ADAL" clId="{0F105625-1089-41E8-8768-808B0A76332B}" dt="2023-04-17T08:59:08.828" v="11578" actId="113"/>
-        <pc:sldMkLst>
-          <pc:docMk/>
-          <pc:sldMk cId="354933213" sldId="618"/>
-        </pc:sldMkLst>
-      </pc:sldChg>
-      <pc:sldChg chg="modSp add del mod">
-        <pc:chgData name="Matthieu De Mari" userId="dfb708c9-d8dc-439f-9a3b-c772bf4a311c" providerId="ADAL" clId="{0F105625-1089-41E8-8768-808B0A76332B}" dt="2023-04-17T08:54:43.156" v="10918" actId="47"/>
-        <pc:sldMkLst>
-          <pc:docMk/>
-          <pc:sldMk cId="1917277297" sldId="618"/>
-        </pc:sldMkLst>
-      </pc:sldChg>
-      <pc:sldChg chg="modSp new mod">
-        <pc:chgData name="Matthieu De Mari" userId="dfb708c9-d8dc-439f-9a3b-c772bf4a311c" providerId="ADAL" clId="{0F105625-1089-41E8-8768-808B0A76332B}" dt="2023-04-17T09:09:05.234" v="11737" actId="20577"/>
-        <pc:sldMkLst>
-          <pc:docMk/>
-          <pc:sldMk cId="3867480745" sldId="619"/>
-        </pc:sldMkLst>
-      </pc:sldChg>
-      <pc:sldChg chg="modSp add mod">
-        <pc:chgData name="Matthieu De Mari" userId="dfb708c9-d8dc-439f-9a3b-c772bf4a311c" providerId="ADAL" clId="{0F105625-1089-41E8-8768-808B0A76332B}" dt="2023-04-17T09:09:08.947" v="11741" actId="20577"/>
-        <pc:sldMkLst>
-          <pc:docMk/>
-          <pc:sldMk cId="1664485367" sldId="620"/>
-        </pc:sldMkLst>
-      </pc:sldChg>
-      <pc:sldChg chg="modSp new mod">
-        <pc:chgData name="Matthieu De Mari" userId="dfb708c9-d8dc-439f-9a3b-c772bf4a311c" providerId="ADAL" clId="{0F105625-1089-41E8-8768-808B0A76332B}" dt="2023-04-17T09:14:48.821" v="11849" actId="207"/>
-        <pc:sldMkLst>
-          <pc:docMk/>
-          <pc:sldMk cId="1545656332" sldId="621"/>
-        </pc:sldMkLst>
-      </pc:sldChg>
-      <pc:sldChg chg="modSp add mod">
-        <pc:chgData name="Matthieu De Mari" userId="dfb708c9-d8dc-439f-9a3b-c772bf4a311c" providerId="ADAL" clId="{0F105625-1089-41E8-8768-808B0A76332B}" dt="2023-04-17T09:15:29.924" v="11921" actId="207"/>
-        <pc:sldMkLst>
-          <pc:docMk/>
-          <pc:sldMk cId="3531787480" sldId="622"/>
-        </pc:sldMkLst>
-      </pc:sldChg>
-      <pc:sldChg chg="modSp new mod">
-        <pc:chgData name="Matthieu De Mari" userId="dfb708c9-d8dc-439f-9a3b-c772bf4a311c" providerId="ADAL" clId="{0F105625-1089-41E8-8768-808B0A76332B}" dt="2023-04-17T09:18:15.793" v="12035" actId="20577"/>
-        <pc:sldMkLst>
-          <pc:docMk/>
-          <pc:sldMk cId="1061109222" sldId="623"/>
-        </pc:sldMkLst>
-      </pc:sldChg>
-      <pc:sldChg chg="addSp delSp modSp new del mod modClrScheme chgLayout">
-        <pc:chgData name="Matthieu De Mari" userId="dfb708c9-d8dc-439f-9a3b-c772bf4a311c" providerId="ADAL" clId="{0F105625-1089-41E8-8768-808B0A76332B}" dt="2023-04-17T09:21:48.130" v="12130" actId="47"/>
-        <pc:sldMkLst>
-          <pc:docMk/>
-          <pc:sldMk cId="3231337936" sldId="624"/>
-        </pc:sldMkLst>
-      </pc:sldChg>
-      <pc:sldChg chg="addSp delSp modSp add mod ord">
-        <pc:chgData name="Matthieu De Mari" userId="dfb708c9-d8dc-439f-9a3b-c772bf4a311c" providerId="ADAL" clId="{0F105625-1089-41E8-8768-808B0A76332B}" dt="2023-04-17T09:21:46.611" v="12129"/>
-        <pc:sldMkLst>
-          <pc:docMk/>
-          <pc:sldMk cId="693720584" sldId="625"/>
-        </pc:sldMkLst>
-      </pc:sldChg>
-      <pc:sldChg chg="addSp modSp add del mod">
-        <pc:chgData name="Matthieu De Mari" userId="dfb708c9-d8dc-439f-9a3b-c772bf4a311c" providerId="ADAL" clId="{0F105625-1089-41E8-8768-808B0A76332B}" dt="2023-04-17T09:27:55.647" v="12412" actId="20577"/>
-        <pc:sldMkLst>
-          <pc:docMk/>
-          <pc:sldMk cId="3266357777" sldId="626"/>
-        </pc:sldMkLst>
-      </pc:sldChg>
-      <pc:sldChg chg="addSp delSp modSp add mod">
-        <pc:chgData name="Matthieu De Mari" userId="dfb708c9-d8dc-439f-9a3b-c772bf4a311c" providerId="ADAL" clId="{0F105625-1089-41E8-8768-808B0A76332B}" dt="2023-04-17T09:26:56.313" v="12292" actId="20577"/>
-        <pc:sldMkLst>
-          <pc:docMk/>
-          <pc:sldMk cId="2434741258" sldId="627"/>
-        </pc:sldMkLst>
-      </pc:sldChg>
-      <pc:sldChg chg="delSp modSp add mod">
-        <pc:chgData name="Matthieu De Mari" userId="dfb708c9-d8dc-439f-9a3b-c772bf4a311c" providerId="ADAL" clId="{0F105625-1089-41E8-8768-808B0A76332B}" dt="2023-04-17T09:29:40.704" v="12630" actId="20577"/>
-        <pc:sldMkLst>
-          <pc:docMk/>
-          <pc:sldMk cId="2975648085" sldId="628"/>
-        </pc:sldMkLst>
-      </pc:sldChg>
-      <pc:sldChg chg="addSp delSp modSp new mod modClrScheme chgLayout">
-        <pc:chgData name="Matthieu De Mari" userId="dfb708c9-d8dc-439f-9a3b-c772bf4a311c" providerId="ADAL" clId="{0F105625-1089-41E8-8768-808B0A76332B}" dt="2023-04-17T09:34:59.599" v="12709" actId="113"/>
-        <pc:sldMkLst>
-          <pc:docMk/>
-          <pc:sldMk cId="3059314061" sldId="629"/>
-        </pc:sldMkLst>
-      </pc:sldChg>
-      <pc:sldChg chg="modSp add mod">
-        <pc:chgData name="Matthieu De Mari" userId="dfb708c9-d8dc-439f-9a3b-c772bf4a311c" providerId="ADAL" clId="{0F105625-1089-41E8-8768-808B0A76332B}" dt="2023-04-17T09:32:54.882" v="12680" actId="20577"/>
-        <pc:sldMkLst>
-          <pc:docMk/>
-          <pc:sldMk cId="2561645591" sldId="630"/>
-        </pc:sldMkLst>
-      </pc:sldChg>
-      <pc:sldChg chg="modSp add mod">
-        <pc:chgData name="Matthieu De Mari" userId="dfb708c9-d8dc-439f-9a3b-c772bf4a311c" providerId="ADAL" clId="{0F105625-1089-41E8-8768-808B0A76332B}" dt="2023-04-17T09:35:05.205" v="12712" actId="207"/>
-        <pc:sldMkLst>
-          <pc:docMk/>
-          <pc:sldMk cId="4083382864" sldId="631"/>
-        </pc:sldMkLst>
-      </pc:sldChg>
-      <pc:sldChg chg="modSp new mod">
-        <pc:chgData name="Matthieu De Mari" userId="dfb708c9-d8dc-439f-9a3b-c772bf4a311c" providerId="ADAL" clId="{0F105625-1089-41E8-8768-808B0A76332B}" dt="2023-04-17T09:36:02.537" v="12745"/>
-        <pc:sldMkLst>
-          <pc:docMk/>
-          <pc:sldMk cId="2011251291" sldId="632"/>
-        </pc:sldMkLst>
-      </pc:sldChg>
-      <pc:sldChg chg="modSp add mod">
-        <pc:chgData name="Matthieu De Mari" userId="dfb708c9-d8dc-439f-9a3b-c772bf4a311c" providerId="ADAL" clId="{0F105625-1089-41E8-8768-808B0A76332B}" dt="2023-04-17T09:36:07.929" v="12748" actId="207"/>
-        <pc:sldMkLst>
-          <pc:docMk/>
-          <pc:sldMk cId="2607341902" sldId="633"/>
-        </pc:sldMkLst>
-      </pc:sldChg>
-      <pc:sldChg chg="modSp new mod">
-        <pc:chgData name="Matthieu De Mari" userId="dfb708c9-d8dc-439f-9a3b-c772bf4a311c" providerId="ADAL" clId="{0F105625-1089-41E8-8768-808B0A76332B}" dt="2023-04-17T09:36:55.584" v="12784"/>
-        <pc:sldMkLst>
-          <pc:docMk/>
-          <pc:sldMk cId="1902116783" sldId="634"/>
-        </pc:sldMkLst>
-      </pc:sldChg>
-      <pc:sldChg chg="modSp add mod">
-        <pc:chgData name="Matthieu De Mari" userId="dfb708c9-d8dc-439f-9a3b-c772bf4a311c" providerId="ADAL" clId="{0F105625-1089-41E8-8768-808B0A76332B}" dt="2023-04-17T09:37:01.963" v="12787" actId="207"/>
+      <pc:sldChg chg="modSp mod">
+        <pc:chgData name="Matthieu De Mari" userId="dfb708c9-d8dc-439f-9a3b-c772bf4a311c" providerId="ADAL" clId="{81E9B007-0C2C-493E-9B93-55A62C9C1F12}" dt="2026-01-14T10:01:58.940" v="155" actId="14100"/>
         <pc:sldMkLst>
           <pc:docMk/>
           <pc:sldMk cId="1199289294" sldId="635"/>
         </pc:sldMkLst>
+        <pc:spChg chg="mod">
+          <ac:chgData name="Matthieu De Mari" userId="dfb708c9-d8dc-439f-9a3b-c772bf4a311c" providerId="ADAL" clId="{81E9B007-0C2C-493E-9B93-55A62C9C1F12}" dt="2026-01-14T10:01:58.940" v="155" actId="14100"/>
+          <ac:spMkLst>
+            <pc:docMk/>
+            <pc:sldMk cId="1199289294" sldId="635"/>
+            <ac:spMk id="3" creationId="{BA4C42E6-ADE3-547A-078B-999311B4EAB3}"/>
+          </ac:spMkLst>
+        </pc:spChg>
       </pc:sldChg>
-      <pc:sldChg chg="modSp new mod">
-        <pc:chgData name="Matthieu De Mari" userId="dfb708c9-d8dc-439f-9a3b-c772bf4a311c" providerId="ADAL" clId="{0F105625-1089-41E8-8768-808B0A76332B}" dt="2023-04-17T09:37:47.674" v="12818" actId="113"/>
-        <pc:sldMkLst>
-          <pc:docMk/>
-          <pc:sldMk cId="3681165724" sldId="636"/>
-        </pc:sldMkLst>
-      </pc:sldChg>
-      <pc:sldChg chg="modSp add mod">
-        <pc:chgData name="Matthieu De Mari" userId="dfb708c9-d8dc-439f-9a3b-c772bf4a311c" providerId="ADAL" clId="{0F105625-1089-41E8-8768-808B0A76332B}" dt="2023-04-17T09:37:54.809" v="12821" actId="207"/>
-        <pc:sldMkLst>
-          <pc:docMk/>
-          <pc:sldMk cId="48325011" sldId="637"/>
-        </pc:sldMkLst>
-      </pc:sldChg>
-      <pc:sldChg chg="new del">
-        <pc:chgData name="Matthieu De Mari" userId="dfb708c9-d8dc-439f-9a3b-c772bf4a311c" providerId="ADAL" clId="{0F105625-1089-41E8-8768-808B0A76332B}" dt="2023-04-17T09:41:47.452" v="12828" actId="47"/>
-        <pc:sldMkLst>
-          <pc:docMk/>
-          <pc:sldMk cId="3208161536" sldId="638"/>
-        </pc:sldMkLst>
-      </pc:sldChg>
-      <pc:sldChg chg="modSp add mod">
-        <pc:chgData name="Matthieu De Mari" userId="dfb708c9-d8dc-439f-9a3b-c772bf4a311c" providerId="ADAL" clId="{0F105625-1089-41E8-8768-808B0A76332B}" dt="2023-04-17T09:42:19.970" v="12892" actId="20577"/>
+      <pc:sldChg chg="modSp mod">
+        <pc:chgData name="Matthieu De Mari" userId="dfb708c9-d8dc-439f-9a3b-c772bf4a311c" providerId="ADAL" clId="{81E9B007-0C2C-493E-9B93-55A62C9C1F12}" dt="2026-01-14T10:02:30.721" v="159"/>
         <pc:sldMkLst>
           <pc:docMk/>
           <pc:sldMk cId="1261878350" sldId="639"/>
         </pc:sldMkLst>
+        <pc:spChg chg="mod">
+          <ac:chgData name="Matthieu De Mari" userId="dfb708c9-d8dc-439f-9a3b-c772bf4a311c" providerId="ADAL" clId="{81E9B007-0C2C-493E-9B93-55A62C9C1F12}" dt="2026-01-14T10:02:29.164" v="158" actId="20577"/>
+          <ac:spMkLst>
+            <pc:docMk/>
+            <pc:sldMk cId="1261878350" sldId="639"/>
+            <ac:spMk id="4" creationId="{5462A23C-7DB1-D084-2C28-550BCB99A7A9}"/>
+          </ac:spMkLst>
+        </pc:spChg>
+        <pc:spChg chg="mod">
+          <ac:chgData name="Matthieu De Mari" userId="dfb708c9-d8dc-439f-9a3b-c772bf4a311c" providerId="ADAL" clId="{81E9B007-0C2C-493E-9B93-55A62C9C1F12}" dt="2026-01-14T10:02:30.721" v="159"/>
+          <ac:spMkLst>
+            <pc:docMk/>
+            <pc:sldMk cId="1261878350" sldId="639"/>
+            <ac:spMk id="5" creationId="{6486D35B-3C22-CCAB-9B50-37AE59CC76D9}"/>
+          </ac:spMkLst>
+        </pc:spChg>
       </pc:sldChg>
-      <pc:sldChg chg="modSp add mod">
-        <pc:chgData name="Matthieu De Mari" userId="dfb708c9-d8dc-439f-9a3b-c772bf4a311c" providerId="ADAL" clId="{0F105625-1089-41E8-8768-808B0A76332B}" dt="2023-04-17T09:42:24.022" v="12895" actId="114"/>
-        <pc:sldMkLst>
-          <pc:docMk/>
-          <pc:sldMk cId="1776332178" sldId="640"/>
-        </pc:sldMkLst>
-      </pc:sldChg>
-      <pc:sldChg chg="modSp add mod">
-        <pc:chgData name="Matthieu De Mari" userId="dfb708c9-d8dc-439f-9a3b-c772bf4a311c" providerId="ADAL" clId="{0F105625-1089-41E8-8768-808B0A76332B}" dt="2023-04-17T09:42:15.594" v="12890" actId="207"/>
-        <pc:sldMkLst>
-          <pc:docMk/>
-          <pc:sldMk cId="2313253270" sldId="641"/>
-        </pc:sldMkLst>
-      </pc:sldChg>
-    </pc:docChg>
-  </pc:docChgLst>
-  <pc:docChgLst>
-    <pc:chgData name="Matthieu De Mari" userId="dfb708c9-d8dc-439f-9a3b-c772bf4a311c" providerId="ADAL" clId="{B062104F-1E69-4CDF-A22D-D1D6E8C24F26}"/>
-    <pc:docChg chg="custSel addSld delSld modSld sldOrd addSection delSection modSection">
-      <pc:chgData name="Matthieu De Mari" userId="dfb708c9-d8dc-439f-9a3b-c772bf4a311c" providerId="ADAL" clId="{B062104F-1E69-4CDF-A22D-D1D6E8C24F26}" dt="2023-03-21T09:52:13.789" v="1681" actId="20577"/>
-      <pc:docMkLst>
-        <pc:docMk/>
-      </pc:docMkLst>
-      <pc:sldChg chg="del">
-        <pc:chgData name="Matthieu De Mari" userId="dfb708c9-d8dc-439f-9a3b-c772bf4a311c" providerId="ADAL" clId="{B062104F-1E69-4CDF-A22D-D1D6E8C24F26}" dt="2023-03-21T06:06:10.983" v="15" actId="47"/>
-        <pc:sldMkLst>
-          <pc:docMk/>
-          <pc:sldMk cId="1813455260" sldId="274"/>
-        </pc:sldMkLst>
-      </pc:sldChg>
-      <pc:sldChg chg="del">
-        <pc:chgData name="Matthieu De Mari" userId="dfb708c9-d8dc-439f-9a3b-c772bf4a311c" providerId="ADAL" clId="{B062104F-1E69-4CDF-A22D-D1D6E8C24F26}" dt="2023-03-21T06:06:10.983" v="15" actId="47"/>
-        <pc:sldMkLst>
-          <pc:docMk/>
-          <pc:sldMk cId="144954399" sldId="275"/>
-        </pc:sldMkLst>
-      </pc:sldChg>
-      <pc:sldChg chg="del">
-        <pc:chgData name="Matthieu De Mari" userId="dfb708c9-d8dc-439f-9a3b-c772bf4a311c" providerId="ADAL" clId="{B062104F-1E69-4CDF-A22D-D1D6E8C24F26}" dt="2023-03-21T06:06:10.983" v="15" actId="47"/>
-        <pc:sldMkLst>
-          <pc:docMk/>
-          <pc:sldMk cId="885607022" sldId="278"/>
-        </pc:sldMkLst>
-      </pc:sldChg>
-      <pc:sldChg chg="del">
-        <pc:chgData name="Matthieu De Mari" userId="dfb708c9-d8dc-439f-9a3b-c772bf4a311c" providerId="ADAL" clId="{B062104F-1E69-4CDF-A22D-D1D6E8C24F26}" dt="2023-03-21T06:06:10.983" v="15" actId="47"/>
-        <pc:sldMkLst>
-          <pc:docMk/>
-          <pc:sldMk cId="3941141626" sldId="279"/>
-        </pc:sldMkLst>
-      </pc:sldChg>
-      <pc:sldChg chg="del">
-        <pc:chgData name="Matthieu De Mari" userId="dfb708c9-d8dc-439f-9a3b-c772bf4a311c" providerId="ADAL" clId="{B062104F-1E69-4CDF-A22D-D1D6E8C24F26}" dt="2023-03-21T06:06:10.983" v="15" actId="47"/>
-        <pc:sldMkLst>
-          <pc:docMk/>
-          <pc:sldMk cId="2409304258" sldId="280"/>
-        </pc:sldMkLst>
-      </pc:sldChg>
-      <pc:sldChg chg="del">
-        <pc:chgData name="Matthieu De Mari" userId="dfb708c9-d8dc-439f-9a3b-c772bf4a311c" providerId="ADAL" clId="{B062104F-1E69-4CDF-A22D-D1D6E8C24F26}" dt="2023-03-21T06:06:10.983" v="15" actId="47"/>
-        <pc:sldMkLst>
-          <pc:docMk/>
-          <pc:sldMk cId="2949375831" sldId="281"/>
-        </pc:sldMkLst>
-      </pc:sldChg>
-      <pc:sldChg chg="del">
-        <pc:chgData name="Matthieu De Mari" userId="dfb708c9-d8dc-439f-9a3b-c772bf4a311c" providerId="ADAL" clId="{B062104F-1E69-4CDF-A22D-D1D6E8C24F26}" dt="2023-03-21T06:06:10.983" v="15" actId="47"/>
-        <pc:sldMkLst>
-          <pc:docMk/>
-          <pc:sldMk cId="1567445271" sldId="285"/>
-        </pc:sldMkLst>
-      </pc:sldChg>
-      <pc:sldChg chg="modSp mod">
-        <pc:chgData name="Matthieu De Mari" userId="dfb708c9-d8dc-439f-9a3b-c772bf4a311c" providerId="ADAL" clId="{B062104F-1E69-4CDF-A22D-D1D6E8C24F26}" dt="2023-03-21T06:06:01.918" v="14" actId="20577"/>
-        <pc:sldMkLst>
-          <pc:docMk/>
-          <pc:sldMk cId="1040156172" sldId="377"/>
-        </pc:sldMkLst>
-      </pc:sldChg>
-      <pc:sldChg chg="modSp new mod">
-        <pc:chgData name="Matthieu De Mari" userId="dfb708c9-d8dc-439f-9a3b-c772bf4a311c" providerId="ADAL" clId="{B062104F-1E69-4CDF-A22D-D1D6E8C24F26}" dt="2023-03-21T06:09:14.369" v="570" actId="20577"/>
-        <pc:sldMkLst>
-          <pc:docMk/>
-          <pc:sldMk cId="1571224013" sldId="378"/>
-        </pc:sldMkLst>
-      </pc:sldChg>
-      <pc:sldChg chg="new">
-        <pc:chgData name="Matthieu De Mari" userId="dfb708c9-d8dc-439f-9a3b-c772bf4a311c" providerId="ADAL" clId="{B062104F-1E69-4CDF-A22D-D1D6E8C24F26}" dt="2023-03-21T06:09:43.838" v="573" actId="680"/>
-        <pc:sldMkLst>
-          <pc:docMk/>
-          <pc:sldMk cId="319636625" sldId="379"/>
-        </pc:sldMkLst>
-      </pc:sldChg>
-      <pc:sldChg chg="del">
-        <pc:chgData name="Matthieu De Mari" userId="dfb708c9-d8dc-439f-9a3b-c772bf4a311c" providerId="ADAL" clId="{B062104F-1E69-4CDF-A22D-D1D6E8C24F26}" dt="2023-03-21T06:06:10.983" v="15" actId="47"/>
-        <pc:sldMkLst>
-          <pc:docMk/>
-          <pc:sldMk cId="3856210223" sldId="379"/>
-        </pc:sldMkLst>
-      </pc:sldChg>
-      <pc:sldChg chg="modSp add mod">
-        <pc:chgData name="Matthieu De Mari" userId="dfb708c9-d8dc-439f-9a3b-c772bf4a311c" providerId="ADAL" clId="{B062104F-1E69-4CDF-A22D-D1D6E8C24F26}" dt="2023-03-21T07:09:11.418" v="629" actId="20577"/>
-        <pc:sldMkLst>
-          <pc:docMk/>
-          <pc:sldMk cId="2412436523" sldId="380"/>
-        </pc:sldMkLst>
-      </pc:sldChg>
-      <pc:sldChg chg="new">
-        <pc:chgData name="Matthieu De Mari" userId="dfb708c9-d8dc-439f-9a3b-c772bf4a311c" providerId="ADAL" clId="{B062104F-1E69-4CDF-A22D-D1D6E8C24F26}" dt="2023-03-21T07:09:36.323" v="632" actId="680"/>
-        <pc:sldMkLst>
-          <pc:docMk/>
-          <pc:sldMk cId="3929722451" sldId="381"/>
-        </pc:sldMkLst>
-      </pc:sldChg>
-      <pc:sldChg chg="modSp new mod ord">
-        <pc:chgData name="Matthieu De Mari" userId="dfb708c9-d8dc-439f-9a3b-c772bf4a311c" providerId="ADAL" clId="{B062104F-1E69-4CDF-A22D-D1D6E8C24F26}" dt="2023-03-21T09:49:10.062" v="1328" actId="5793"/>
-        <pc:sldMkLst>
-          <pc:docMk/>
-          <pc:sldMk cId="2291200604" sldId="382"/>
-        </pc:sldMkLst>
-      </pc:sldChg>
-      <pc:sldChg chg="new">
-        <pc:chgData name="Matthieu De Mari" userId="dfb708c9-d8dc-439f-9a3b-c772bf4a311c" providerId="ADAL" clId="{B062104F-1E69-4CDF-A22D-D1D6E8C24F26}" dt="2023-03-21T09:35:26.775" v="1320" actId="680"/>
-        <pc:sldMkLst>
-          <pc:docMk/>
-          <pc:sldMk cId="3242948426" sldId="383"/>
-        </pc:sldMkLst>
-      </pc:sldChg>
-      <pc:sldChg chg="new">
-        <pc:chgData name="Matthieu De Mari" userId="dfb708c9-d8dc-439f-9a3b-c772bf4a311c" providerId="ADAL" clId="{B062104F-1E69-4CDF-A22D-D1D6E8C24F26}" dt="2023-03-21T09:35:38.917" v="1323" actId="680"/>
-        <pc:sldMkLst>
-          <pc:docMk/>
-          <pc:sldMk cId="1463768414" sldId="384"/>
-        </pc:sldMkLst>
-      </pc:sldChg>
-      <pc:sldChg chg="modSp new mod">
-        <pc:chgData name="Matthieu De Mari" userId="dfb708c9-d8dc-439f-9a3b-c772bf4a311c" providerId="ADAL" clId="{B062104F-1E69-4CDF-A22D-D1D6E8C24F26}" dt="2023-03-21T09:52:13.789" v="1681" actId="20577"/>
-        <pc:sldMkLst>
-          <pc:docMk/>
-          <pc:sldMk cId="1117217621" sldId="385"/>
-        </pc:sldMkLst>
-      </pc:sldChg>
-      <pc:sldChg chg="del">
-        <pc:chgData name="Matthieu De Mari" userId="dfb708c9-d8dc-439f-9a3b-c772bf4a311c" providerId="ADAL" clId="{B062104F-1E69-4CDF-A22D-D1D6E8C24F26}" dt="2023-03-21T06:06:32.194" v="30" actId="47"/>
-        <pc:sldMkLst>
-          <pc:docMk/>
-          <pc:sldMk cId="540619278" sldId="386"/>
-        </pc:sldMkLst>
-      </pc:sldChg>
-      <pc:sldChg chg="new">
-        <pc:chgData name="Matthieu De Mari" userId="dfb708c9-d8dc-439f-9a3b-c772bf4a311c" providerId="ADAL" clId="{B062104F-1E69-4CDF-A22D-D1D6E8C24F26}" dt="2023-03-21T09:49:43.592" v="1331" actId="680"/>
-        <pc:sldMkLst>
-          <pc:docMk/>
-          <pc:sldMk cId="1472440386" sldId="386"/>
-        </pc:sldMkLst>
-      </pc:sldChg>
-      <pc:sldChg chg="new">
-        <pc:chgData name="Matthieu De Mari" userId="dfb708c9-d8dc-439f-9a3b-c772bf4a311c" providerId="ADAL" clId="{B062104F-1E69-4CDF-A22D-D1D6E8C24F26}" dt="2023-03-21T09:50:00.454" v="1334" actId="680"/>
-        <pc:sldMkLst>
-          <pc:docMk/>
-          <pc:sldMk cId="3529830610" sldId="387"/>
-        </pc:sldMkLst>
-      </pc:sldChg>
-      <pc:sldChg chg="del">
-        <pc:chgData name="Matthieu De Mari" userId="dfb708c9-d8dc-439f-9a3b-c772bf4a311c" providerId="ADAL" clId="{B062104F-1E69-4CDF-A22D-D1D6E8C24F26}" dt="2023-03-21T06:06:12.238" v="16" actId="47"/>
-        <pc:sldMkLst>
-          <pc:docMk/>
-          <pc:sldMk cId="4192428753" sldId="387"/>
-        </pc:sldMkLst>
-      </pc:sldChg>
-      <pc:sldChg chg="del">
-        <pc:chgData name="Matthieu De Mari" userId="dfb708c9-d8dc-439f-9a3b-c772bf4a311c" providerId="ADAL" clId="{B062104F-1E69-4CDF-A22D-D1D6E8C24F26}" dt="2023-03-21T06:06:13.047" v="17" actId="47"/>
-        <pc:sldMkLst>
-          <pc:docMk/>
-          <pc:sldMk cId="1602756966" sldId="388"/>
-        </pc:sldMkLst>
-      </pc:sldChg>
-      <pc:sldChg chg="del">
-        <pc:chgData name="Matthieu De Mari" userId="dfb708c9-d8dc-439f-9a3b-c772bf4a311c" providerId="ADAL" clId="{B062104F-1E69-4CDF-A22D-D1D6E8C24F26}" dt="2023-03-21T06:06:13.047" v="17" actId="47"/>
-        <pc:sldMkLst>
-          <pc:docMk/>
-          <pc:sldMk cId="1922111427" sldId="389"/>
-        </pc:sldMkLst>
-      </pc:sldChg>
-      <pc:sldChg chg="del">
-        <pc:chgData name="Matthieu De Mari" userId="dfb708c9-d8dc-439f-9a3b-c772bf4a311c" providerId="ADAL" clId="{B062104F-1E69-4CDF-A22D-D1D6E8C24F26}" dt="2023-03-21T06:06:13.794" v="18" actId="47"/>
-        <pc:sldMkLst>
-          <pc:docMk/>
-          <pc:sldMk cId="664874362" sldId="390"/>
-        </pc:sldMkLst>
-      </pc:sldChg>
-      <pc:sldChg chg="del">
-        <pc:chgData name="Matthieu De Mari" userId="dfb708c9-d8dc-439f-9a3b-c772bf4a311c" providerId="ADAL" clId="{B062104F-1E69-4CDF-A22D-D1D6E8C24F26}" dt="2023-03-21T06:06:13.794" v="18" actId="47"/>
-        <pc:sldMkLst>
-          <pc:docMk/>
-          <pc:sldMk cId="2030689423" sldId="391"/>
-        </pc:sldMkLst>
-      </pc:sldChg>
-      <pc:sldChg chg="del">
-        <pc:chgData name="Matthieu De Mari" userId="dfb708c9-d8dc-439f-9a3b-c772bf4a311c" providerId="ADAL" clId="{B062104F-1E69-4CDF-A22D-D1D6E8C24F26}" dt="2023-03-21T06:06:14.506" v="19" actId="47"/>
-        <pc:sldMkLst>
-          <pc:docMk/>
-          <pc:sldMk cId="715460662" sldId="392"/>
-        </pc:sldMkLst>
-      </pc:sldChg>
-      <pc:sldChg chg="del">
-        <pc:chgData name="Matthieu De Mari" userId="dfb708c9-d8dc-439f-9a3b-c772bf4a311c" providerId="ADAL" clId="{B062104F-1E69-4CDF-A22D-D1D6E8C24F26}" dt="2023-03-21T06:06:15.160" v="20" actId="47"/>
-        <pc:sldMkLst>
-          <pc:docMk/>
-          <pc:sldMk cId="2284998225" sldId="394"/>
-        </pc:sldMkLst>
-      </pc:sldChg>
-      <pc:sldChg chg="del">
-        <pc:chgData name="Matthieu De Mari" userId="dfb708c9-d8dc-439f-9a3b-c772bf4a311c" providerId="ADAL" clId="{B062104F-1E69-4CDF-A22D-D1D6E8C24F26}" dt="2023-03-21T06:06:15.160" v="20" actId="47"/>
-        <pc:sldMkLst>
-          <pc:docMk/>
-          <pc:sldMk cId="351971478" sldId="395"/>
-        </pc:sldMkLst>
-      </pc:sldChg>
-      <pc:sldChg chg="del">
-        <pc:chgData name="Matthieu De Mari" userId="dfb708c9-d8dc-439f-9a3b-c772bf4a311c" providerId="ADAL" clId="{B062104F-1E69-4CDF-A22D-D1D6E8C24F26}" dt="2023-03-21T06:06:15.160" v="20" actId="47"/>
-        <pc:sldMkLst>
-          <pc:docMk/>
-          <pc:sldMk cId="1697348003" sldId="396"/>
-        </pc:sldMkLst>
-      </pc:sldChg>
-      <pc:sldChg chg="del">
-        <pc:chgData name="Matthieu De Mari" userId="dfb708c9-d8dc-439f-9a3b-c772bf4a311c" providerId="ADAL" clId="{B062104F-1E69-4CDF-A22D-D1D6E8C24F26}" dt="2023-03-21T06:06:15.160" v="20" actId="47"/>
-        <pc:sldMkLst>
-          <pc:docMk/>
-          <pc:sldMk cId="190215950" sldId="397"/>
-        </pc:sldMkLst>
-      </pc:sldChg>
-      <pc:sldChg chg="del">
-        <pc:chgData name="Matthieu De Mari" userId="dfb708c9-d8dc-439f-9a3b-c772bf4a311c" providerId="ADAL" clId="{B062104F-1E69-4CDF-A22D-D1D6E8C24F26}" dt="2023-03-21T06:06:15.839" v="21" actId="47"/>
-        <pc:sldMkLst>
-          <pc:docMk/>
-          <pc:sldMk cId="745490463" sldId="398"/>
-        </pc:sldMkLst>
-      </pc:sldChg>
-      <pc:sldChg chg="del">
-        <pc:chgData name="Matthieu De Mari" userId="dfb708c9-d8dc-439f-9a3b-c772bf4a311c" providerId="ADAL" clId="{B062104F-1E69-4CDF-A22D-D1D6E8C24F26}" dt="2023-03-21T06:06:15.839" v="21" actId="47"/>
-        <pc:sldMkLst>
-          <pc:docMk/>
-          <pc:sldMk cId="1555117061" sldId="399"/>
-        </pc:sldMkLst>
-      </pc:sldChg>
-      <pc:sldChg chg="del">
-        <pc:chgData name="Matthieu De Mari" userId="dfb708c9-d8dc-439f-9a3b-c772bf4a311c" providerId="ADAL" clId="{B062104F-1E69-4CDF-A22D-D1D6E8C24F26}" dt="2023-03-21T06:06:15.839" v="21" actId="47"/>
-        <pc:sldMkLst>
-          <pc:docMk/>
-          <pc:sldMk cId="18795257" sldId="400"/>
-        </pc:sldMkLst>
-      </pc:sldChg>
-      <pc:sldChg chg="del">
-        <pc:chgData name="Matthieu De Mari" userId="dfb708c9-d8dc-439f-9a3b-c772bf4a311c" providerId="ADAL" clId="{B062104F-1E69-4CDF-A22D-D1D6E8C24F26}" dt="2023-03-21T06:06:28.094" v="27" actId="47"/>
-        <pc:sldMkLst>
-          <pc:docMk/>
-          <pc:sldMk cId="522259521" sldId="402"/>
-        </pc:sldMkLst>
-      </pc:sldChg>
-      <pc:sldChg chg="del">
-        <pc:chgData name="Matthieu De Mari" userId="dfb708c9-d8dc-439f-9a3b-c772bf4a311c" providerId="ADAL" clId="{B062104F-1E69-4CDF-A22D-D1D6E8C24F26}" dt="2023-03-21T06:06:28.094" v="27" actId="47"/>
-        <pc:sldMkLst>
-          <pc:docMk/>
-          <pc:sldMk cId="3794044645" sldId="403"/>
-        </pc:sldMkLst>
-      </pc:sldChg>
-      <pc:sldChg chg="del">
-        <pc:chgData name="Matthieu De Mari" userId="dfb708c9-d8dc-439f-9a3b-c772bf4a311c" providerId="ADAL" clId="{B062104F-1E69-4CDF-A22D-D1D6E8C24F26}" dt="2023-03-21T06:06:29.201" v="28" actId="47"/>
-        <pc:sldMkLst>
-          <pc:docMk/>
-          <pc:sldMk cId="3564327451" sldId="404"/>
-        </pc:sldMkLst>
-      </pc:sldChg>
-      <pc:sldChg chg="del">
-        <pc:chgData name="Matthieu De Mari" userId="dfb708c9-d8dc-439f-9a3b-c772bf4a311c" providerId="ADAL" clId="{B062104F-1E69-4CDF-A22D-D1D6E8C24F26}" dt="2023-03-21T06:06:16.754" v="22" actId="47"/>
-        <pc:sldMkLst>
-          <pc:docMk/>
-          <pc:sldMk cId="3917151320" sldId="405"/>
-        </pc:sldMkLst>
-      </pc:sldChg>
-      <pc:sldChg chg="del">
-        <pc:chgData name="Matthieu De Mari" userId="dfb708c9-d8dc-439f-9a3b-c772bf4a311c" providerId="ADAL" clId="{B062104F-1E69-4CDF-A22D-D1D6E8C24F26}" dt="2023-03-21T06:06:21.100" v="24" actId="47"/>
-        <pc:sldMkLst>
-          <pc:docMk/>
-          <pc:sldMk cId="1053501067" sldId="406"/>
-        </pc:sldMkLst>
-      </pc:sldChg>
-      <pc:sldChg chg="del">
-        <pc:chgData name="Matthieu De Mari" userId="dfb708c9-d8dc-439f-9a3b-c772bf4a311c" providerId="ADAL" clId="{B062104F-1E69-4CDF-A22D-D1D6E8C24F26}" dt="2023-03-21T06:06:24.675" v="26" actId="47"/>
-        <pc:sldMkLst>
-          <pc:docMk/>
-          <pc:sldMk cId="2333808755" sldId="407"/>
-        </pc:sldMkLst>
-      </pc:sldChg>
-      <pc:sldChg chg="del">
-        <pc:chgData name="Matthieu De Mari" userId="dfb708c9-d8dc-439f-9a3b-c772bf4a311c" providerId="ADAL" clId="{B062104F-1E69-4CDF-A22D-D1D6E8C24F26}" dt="2023-03-21T06:06:31.076" v="29" actId="47"/>
-        <pc:sldMkLst>
-          <pc:docMk/>
-          <pc:sldMk cId="2257717264" sldId="408"/>
-        </pc:sldMkLst>
-      </pc:sldChg>
-      <pc:sldChg chg="del">
-        <pc:chgData name="Matthieu De Mari" userId="dfb708c9-d8dc-439f-9a3b-c772bf4a311c" providerId="ADAL" clId="{B062104F-1E69-4CDF-A22D-D1D6E8C24F26}" dt="2023-03-21T06:06:17.385" v="23" actId="47"/>
-        <pc:sldMkLst>
-          <pc:docMk/>
-          <pc:sldMk cId="495269238" sldId="409"/>
-        </pc:sldMkLst>
-      </pc:sldChg>
-      <pc:sldChg chg="del">
-        <pc:chgData name="Matthieu De Mari" userId="dfb708c9-d8dc-439f-9a3b-c772bf4a311c" providerId="ADAL" clId="{B062104F-1E69-4CDF-A22D-D1D6E8C24F26}" dt="2023-03-21T06:06:12.238" v="16" actId="47"/>
-        <pc:sldMkLst>
-          <pc:docMk/>
-          <pc:sldMk cId="2277689196" sldId="410"/>
-        </pc:sldMkLst>
-      </pc:sldChg>
-      <pc:sldChg chg="del">
-        <pc:chgData name="Matthieu De Mari" userId="dfb708c9-d8dc-439f-9a3b-c772bf4a311c" providerId="ADAL" clId="{B062104F-1E69-4CDF-A22D-D1D6E8C24F26}" dt="2023-03-21T06:06:22.918" v="25" actId="47"/>
-        <pc:sldMkLst>
-          <pc:docMk/>
-          <pc:sldMk cId="4052331108" sldId="411"/>
-        </pc:sldMkLst>
-      </pc:sldChg>
-      <pc:sldChg chg="del">
-        <pc:chgData name="Matthieu De Mari" userId="dfb708c9-d8dc-439f-9a3b-c772bf4a311c" providerId="ADAL" clId="{B062104F-1E69-4CDF-A22D-D1D6E8C24F26}" dt="2023-03-21T06:06:12.238" v="16" actId="47"/>
-        <pc:sldMkLst>
-          <pc:docMk/>
-          <pc:sldMk cId="224038096" sldId="412"/>
-        </pc:sldMkLst>
-      </pc:sldChg>
-      <pc:sldChg chg="del">
-        <pc:chgData name="Matthieu De Mari" userId="dfb708c9-d8dc-439f-9a3b-c772bf4a311c" providerId="ADAL" clId="{B062104F-1E69-4CDF-A22D-D1D6E8C24F26}" dt="2023-03-21T06:06:12.238" v="16" actId="47"/>
-        <pc:sldMkLst>
-          <pc:docMk/>
-          <pc:sldMk cId="1129488317" sldId="413"/>
-        </pc:sldMkLst>
-      </pc:sldChg>
-      <pc:sldChg chg="del">
-        <pc:chgData name="Matthieu De Mari" userId="dfb708c9-d8dc-439f-9a3b-c772bf4a311c" providerId="ADAL" clId="{B062104F-1E69-4CDF-A22D-D1D6E8C24F26}" dt="2023-03-21T06:06:12.238" v="16" actId="47"/>
-        <pc:sldMkLst>
-          <pc:docMk/>
-          <pc:sldMk cId="1383390466" sldId="414"/>
-        </pc:sldMkLst>
-      </pc:sldChg>
-      <pc:sldChg chg="del">
-        <pc:chgData name="Matthieu De Mari" userId="dfb708c9-d8dc-439f-9a3b-c772bf4a311c" providerId="ADAL" clId="{B062104F-1E69-4CDF-A22D-D1D6E8C24F26}" dt="2023-03-21T06:06:13.047" v="17" actId="47"/>
-        <pc:sldMkLst>
-          <pc:docMk/>
-          <pc:sldMk cId="1808429987" sldId="415"/>
-        </pc:sldMkLst>
-      </pc:sldChg>
-      <pc:sldChg chg="del">
-        <pc:chgData name="Matthieu De Mari" userId="dfb708c9-d8dc-439f-9a3b-c772bf4a311c" providerId="ADAL" clId="{B062104F-1E69-4CDF-A22D-D1D6E8C24F26}" dt="2023-03-21T06:06:13.047" v="17" actId="47"/>
-        <pc:sldMkLst>
-          <pc:docMk/>
-          <pc:sldMk cId="1582022426" sldId="416"/>
-        </pc:sldMkLst>
-      </pc:sldChg>
-      <pc:sldChg chg="del">
-        <pc:chgData name="Matthieu De Mari" userId="dfb708c9-d8dc-439f-9a3b-c772bf4a311c" providerId="ADAL" clId="{B062104F-1E69-4CDF-A22D-D1D6E8C24F26}" dt="2023-03-21T06:06:13.047" v="17" actId="47"/>
-        <pc:sldMkLst>
-          <pc:docMk/>
-          <pc:sldMk cId="1158748637" sldId="417"/>
-        </pc:sldMkLst>
-      </pc:sldChg>
-      <pc:sldChg chg="del">
-        <pc:chgData name="Matthieu De Mari" userId="dfb708c9-d8dc-439f-9a3b-c772bf4a311c" providerId="ADAL" clId="{B062104F-1E69-4CDF-A22D-D1D6E8C24F26}" dt="2023-03-21T06:06:13.047" v="17" actId="47"/>
-        <pc:sldMkLst>
-          <pc:docMk/>
-          <pc:sldMk cId="508583681" sldId="418"/>
-        </pc:sldMkLst>
-      </pc:sldChg>
-      <pc:sldChg chg="del">
-        <pc:chgData name="Matthieu De Mari" userId="dfb708c9-d8dc-439f-9a3b-c772bf4a311c" providerId="ADAL" clId="{B062104F-1E69-4CDF-A22D-D1D6E8C24F26}" dt="2023-03-21T06:06:13.047" v="17" actId="47"/>
-        <pc:sldMkLst>
-          <pc:docMk/>
-          <pc:sldMk cId="2453299544" sldId="419"/>
-        </pc:sldMkLst>
-      </pc:sldChg>
-      <pc:sldChg chg="del">
-        <pc:chgData name="Matthieu De Mari" userId="dfb708c9-d8dc-439f-9a3b-c772bf4a311c" providerId="ADAL" clId="{B062104F-1E69-4CDF-A22D-D1D6E8C24F26}" dt="2023-03-21T06:06:13.794" v="18" actId="47"/>
-        <pc:sldMkLst>
-          <pc:docMk/>
-          <pc:sldMk cId="2455924593" sldId="420"/>
-        </pc:sldMkLst>
-      </pc:sldChg>
-      <pc:sldChg chg="del">
-        <pc:chgData name="Matthieu De Mari" userId="dfb708c9-d8dc-439f-9a3b-c772bf4a311c" providerId="ADAL" clId="{B062104F-1E69-4CDF-A22D-D1D6E8C24F26}" dt="2023-03-21T06:06:13.794" v="18" actId="47"/>
-        <pc:sldMkLst>
-          <pc:docMk/>
-          <pc:sldMk cId="3719237298" sldId="421"/>
-        </pc:sldMkLst>
-      </pc:sldChg>
-      <pc:sldChg chg="del">
-        <pc:chgData name="Matthieu De Mari" userId="dfb708c9-d8dc-439f-9a3b-c772bf4a311c" providerId="ADAL" clId="{B062104F-1E69-4CDF-A22D-D1D6E8C24F26}" dt="2023-03-21T06:06:13.794" v="18" actId="47"/>
-        <pc:sldMkLst>
-          <pc:docMk/>
-          <pc:sldMk cId="2067717828" sldId="422"/>
-        </pc:sldMkLst>
-      </pc:sldChg>
-      <pc:sldChg chg="del">
-        <pc:chgData name="Matthieu De Mari" userId="dfb708c9-d8dc-439f-9a3b-c772bf4a311c" providerId="ADAL" clId="{B062104F-1E69-4CDF-A22D-D1D6E8C24F26}" dt="2023-03-21T06:06:13.794" v="18" actId="47"/>
-        <pc:sldMkLst>
-          <pc:docMk/>
-          <pc:sldMk cId="2542189070" sldId="423"/>
-        </pc:sldMkLst>
-      </pc:sldChg>
-      <pc:sldChg chg="del">
-        <pc:chgData name="Matthieu De Mari" userId="dfb708c9-d8dc-439f-9a3b-c772bf4a311c" providerId="ADAL" clId="{B062104F-1E69-4CDF-A22D-D1D6E8C24F26}" dt="2023-03-21T06:06:13.794" v="18" actId="47"/>
-        <pc:sldMkLst>
-          <pc:docMk/>
-          <pc:sldMk cId="218642185" sldId="424"/>
-        </pc:sldMkLst>
-      </pc:sldChg>
-      <pc:sldChg chg="del">
-        <pc:chgData name="Matthieu De Mari" userId="dfb708c9-d8dc-439f-9a3b-c772bf4a311c" providerId="ADAL" clId="{B062104F-1E69-4CDF-A22D-D1D6E8C24F26}" dt="2023-03-21T06:06:13.794" v="18" actId="47"/>
-        <pc:sldMkLst>
-          <pc:docMk/>
-          <pc:sldMk cId="424111310" sldId="425"/>
-        </pc:sldMkLst>
-      </pc:sldChg>
-      <pc:sldChg chg="del">
-        <pc:chgData name="Matthieu De Mari" userId="dfb708c9-d8dc-439f-9a3b-c772bf4a311c" providerId="ADAL" clId="{B062104F-1E69-4CDF-A22D-D1D6E8C24F26}" dt="2023-03-21T06:06:13.794" v="18" actId="47"/>
-        <pc:sldMkLst>
-          <pc:docMk/>
-          <pc:sldMk cId="451959142" sldId="426"/>
-        </pc:sldMkLst>
-      </pc:sldChg>
-      <pc:sldChg chg="del">
-        <pc:chgData name="Matthieu De Mari" userId="dfb708c9-d8dc-439f-9a3b-c772bf4a311c" providerId="ADAL" clId="{B062104F-1E69-4CDF-A22D-D1D6E8C24F26}" dt="2023-03-21T06:06:14.506" v="19" actId="47"/>
-        <pc:sldMkLst>
-          <pc:docMk/>
-          <pc:sldMk cId="2562731947" sldId="427"/>
-        </pc:sldMkLst>
-      </pc:sldChg>
-      <pc:sldChg chg="del">
-        <pc:chgData name="Matthieu De Mari" userId="dfb708c9-d8dc-439f-9a3b-c772bf4a311c" providerId="ADAL" clId="{B062104F-1E69-4CDF-A22D-D1D6E8C24F26}" dt="2023-03-21T06:06:15.160" v="20" actId="47"/>
-        <pc:sldMkLst>
-          <pc:docMk/>
-          <pc:sldMk cId="1434956895" sldId="428"/>
-        </pc:sldMkLst>
-      </pc:sldChg>
-      <pc:sldChg chg="del">
-        <pc:chgData name="Matthieu De Mari" userId="dfb708c9-d8dc-439f-9a3b-c772bf4a311c" providerId="ADAL" clId="{B062104F-1E69-4CDF-A22D-D1D6E8C24F26}" dt="2023-03-21T06:06:15.160" v="20" actId="47"/>
-        <pc:sldMkLst>
-          <pc:docMk/>
-          <pc:sldMk cId="2281408142" sldId="429"/>
-        </pc:sldMkLst>
-      </pc:sldChg>
-      <pc:sldChg chg="del">
-        <pc:chgData name="Matthieu De Mari" userId="dfb708c9-d8dc-439f-9a3b-c772bf4a311c" providerId="ADAL" clId="{B062104F-1E69-4CDF-A22D-D1D6E8C24F26}" dt="2023-03-21T06:06:15.839" v="21" actId="47"/>
-        <pc:sldMkLst>
-          <pc:docMk/>
-          <pc:sldMk cId="1452149184" sldId="430"/>
-        </pc:sldMkLst>
-      </pc:sldChg>
-      <pc:sldChg chg="del">
-        <pc:chgData name="Matthieu De Mari" userId="dfb708c9-d8dc-439f-9a3b-c772bf4a311c" providerId="ADAL" clId="{B062104F-1E69-4CDF-A22D-D1D6E8C24F26}" dt="2023-03-21T06:06:15.839" v="21" actId="47"/>
-        <pc:sldMkLst>
-          <pc:docMk/>
-          <pc:sldMk cId="1438970372" sldId="431"/>
-        </pc:sldMkLst>
-      </pc:sldChg>
-      <pc:sldChg chg="del">
-        <pc:chgData name="Matthieu De Mari" userId="dfb708c9-d8dc-439f-9a3b-c772bf4a311c" providerId="ADAL" clId="{B062104F-1E69-4CDF-A22D-D1D6E8C24F26}" dt="2023-03-21T06:06:15.839" v="21" actId="47"/>
-        <pc:sldMkLst>
-          <pc:docMk/>
-          <pc:sldMk cId="1303576390" sldId="432"/>
-        </pc:sldMkLst>
-      </pc:sldChg>
-    </pc:docChg>
-  </pc:docChgLst>
-  <pc:docChgLst>
-    <pc:chgData name="Matthieu De Mari" userId="dfb708c9-d8dc-439f-9a3b-c772bf4a311c" providerId="ADAL" clId="{96A30238-42BA-4EEC-B688-5D869327C7FF}"/>
-    <pc:docChg chg="modSld">
-      <pc:chgData name="Matthieu De Mari" userId="dfb708c9-d8dc-439f-9a3b-c772bf4a311c" providerId="ADAL" clId="{96A30238-42BA-4EEC-B688-5D869327C7FF}" dt="2023-03-27T06:28:18.709" v="25" actId="20577"/>
-      <pc:docMkLst>
-        <pc:docMk/>
-      </pc:docMkLst>
-    </pc:docChg>
-  </pc:docChgLst>
-  <pc:docChgLst>
-    <pc:chgData name="Matthieu De Mari" userId="dfb708c9-d8dc-439f-9a3b-c772bf4a311c" providerId="ADAL" clId="{EFCD68A6-DD5E-4431-B69D-11E3FB547F3B}"/>
-    <pc:docChg chg="delSld modSld delSection modSection">
-      <pc:chgData name="Matthieu De Mari" userId="dfb708c9-d8dc-439f-9a3b-c772bf4a311c" providerId="ADAL" clId="{EFCD68A6-DD5E-4431-B69D-11E3FB547F3B}" dt="2023-03-27T06:27:52.663" v="66" actId="47"/>
-      <pc:docMkLst>
-        <pc:docMk/>
-      </pc:docMkLst>
-      <pc:sldChg chg="modSp mod">
-        <pc:chgData name="Matthieu De Mari" userId="dfb708c9-d8dc-439f-9a3b-c772bf4a311c" providerId="ADAL" clId="{EFCD68A6-DD5E-4431-B69D-11E3FB547F3B}" dt="2023-03-27T06:27:49.302" v="64" actId="20577"/>
-        <pc:sldMkLst>
-          <pc:docMk/>
-          <pc:sldMk cId="1040156172" sldId="377"/>
-        </pc:sldMkLst>
-      </pc:sldChg>
-      <pc:sldChg chg="del">
-        <pc:chgData name="Matthieu De Mari" userId="dfb708c9-d8dc-439f-9a3b-c772bf4a311c" providerId="ADAL" clId="{EFCD68A6-DD5E-4431-B69D-11E3FB547F3B}" dt="2023-03-27T06:27:51.976" v="65" actId="47"/>
-        <pc:sldMkLst>
-          <pc:docMk/>
-          <pc:sldMk cId="3951386030" sldId="378"/>
-        </pc:sldMkLst>
-      </pc:sldChg>
-      <pc:sldChg chg="del">
-        <pc:chgData name="Matthieu De Mari" userId="dfb708c9-d8dc-439f-9a3b-c772bf4a311c" providerId="ADAL" clId="{EFCD68A6-DD5E-4431-B69D-11E3FB547F3B}" dt="2023-03-27T06:27:52.663" v="66" actId="47"/>
-        <pc:sldMkLst>
-          <pc:docMk/>
-          <pc:sldMk cId="3273590381" sldId="379"/>
-        </pc:sldMkLst>
-      </pc:sldChg>
-      <pc:sldChg chg="del">
-        <pc:chgData name="Matthieu De Mari" userId="dfb708c9-d8dc-439f-9a3b-c772bf4a311c" providerId="ADAL" clId="{EFCD68A6-DD5E-4431-B69D-11E3FB547F3B}" dt="2023-03-27T06:27:52.663" v="66" actId="47"/>
-        <pc:sldMkLst>
-          <pc:docMk/>
-          <pc:sldMk cId="560452419" sldId="380"/>
-        </pc:sldMkLst>
-      </pc:sldChg>
-      <pc:sldChg chg="del">
-        <pc:chgData name="Matthieu De Mari" userId="dfb708c9-d8dc-439f-9a3b-c772bf4a311c" providerId="ADAL" clId="{EFCD68A6-DD5E-4431-B69D-11E3FB547F3B}" dt="2023-03-27T06:27:52.663" v="66" actId="47"/>
-        <pc:sldMkLst>
-          <pc:docMk/>
-          <pc:sldMk cId="3980915418" sldId="381"/>
-        </pc:sldMkLst>
-      </pc:sldChg>
-      <pc:sldChg chg="del">
-        <pc:chgData name="Matthieu De Mari" userId="dfb708c9-d8dc-439f-9a3b-c772bf4a311c" providerId="ADAL" clId="{EFCD68A6-DD5E-4431-B69D-11E3FB547F3B}" dt="2023-03-27T06:27:52.663" v="66" actId="47"/>
-        <pc:sldMkLst>
-          <pc:docMk/>
-          <pc:sldMk cId="173920476" sldId="382"/>
-        </pc:sldMkLst>
-      </pc:sldChg>
-    </pc:docChg>
-  </pc:docChgLst>
-  <pc:docChgLst>
-    <pc:chgData name="Matthieu De Mari" userId="dfb708c9-d8dc-439f-9a3b-c772bf4a311c" providerId="ADAL" clId="{5AF9E225-0E3D-4808-B523-40F6E9A1D59D}"/>
-    <pc:docChg chg="undo custSel mod addSld delSld modSld sldOrd modMainMaster addSection modSection">
-      <pc:chgData name="Matthieu De Mari" userId="dfb708c9-d8dc-439f-9a3b-c772bf4a311c" providerId="ADAL" clId="{5AF9E225-0E3D-4808-B523-40F6E9A1D59D}" dt="2023-03-02T09:21:50.474" v="4687" actId="17846"/>
-      <pc:docMkLst>
-        <pc:docMk/>
-      </pc:docMkLst>
-      <pc:sldChg chg="modSp add del mod">
-        <pc:chgData name="Matthieu De Mari" userId="dfb708c9-d8dc-439f-9a3b-c772bf4a311c" providerId="ADAL" clId="{5AF9E225-0E3D-4808-B523-40F6E9A1D59D}" dt="2023-03-02T09:21:44.969" v="4686" actId="47"/>
-        <pc:sldMkLst>
-          <pc:docMk/>
-          <pc:sldMk cId="901767542" sldId="256"/>
-        </pc:sldMkLst>
-      </pc:sldChg>
-      <pc:sldChg chg="addSp delSp modSp add mod chgLayout">
-        <pc:chgData name="Matthieu De Mari" userId="dfb708c9-d8dc-439f-9a3b-c772bf4a311c" providerId="ADAL" clId="{5AF9E225-0E3D-4808-B523-40F6E9A1D59D}" dt="2023-03-02T07:05:19.188" v="526" actId="20577"/>
-        <pc:sldMkLst>
-          <pc:docMk/>
-          <pc:sldMk cId="3239548726" sldId="257"/>
-        </pc:sldMkLst>
-      </pc:sldChg>
-      <pc:sldChg chg="modSp add mod">
-        <pc:chgData name="Matthieu De Mari" userId="dfb708c9-d8dc-439f-9a3b-c772bf4a311c" providerId="ADAL" clId="{5AF9E225-0E3D-4808-B523-40F6E9A1D59D}" dt="2023-03-02T07:01:55.363" v="524" actId="20577"/>
-        <pc:sldMkLst>
-          <pc:docMk/>
-          <pc:sldMk cId="1495819743" sldId="258"/>
-        </pc:sldMkLst>
-      </pc:sldChg>
-      <pc:sldChg chg="addSp modSp add mod modClrScheme chgLayout">
-        <pc:chgData name="Matthieu De Mari" userId="dfb708c9-d8dc-439f-9a3b-c772bf4a311c" providerId="ADAL" clId="{5AF9E225-0E3D-4808-B523-40F6E9A1D59D}" dt="2023-03-02T07:07:22.195" v="628" actId="20577"/>
-        <pc:sldMkLst>
-          <pc:docMk/>
-          <pc:sldMk cId="609186567" sldId="259"/>
-        </pc:sldMkLst>
-      </pc:sldChg>
-      <pc:sldChg chg="modSp add mod">
-        <pc:chgData name="Matthieu De Mari" userId="dfb708c9-d8dc-439f-9a3b-c772bf4a311c" providerId="ADAL" clId="{5AF9E225-0E3D-4808-B523-40F6E9A1D59D}" dt="2023-03-02T07:05:58.205" v="582" actId="20577"/>
-        <pc:sldMkLst>
-          <pc:docMk/>
-          <pc:sldMk cId="1812694891" sldId="260"/>
-        </pc:sldMkLst>
-      </pc:sldChg>
-      <pc:sldChg chg="modSp add mod">
-        <pc:chgData name="Matthieu De Mari" userId="dfb708c9-d8dc-439f-9a3b-c772bf4a311c" providerId="ADAL" clId="{5AF9E225-0E3D-4808-B523-40F6E9A1D59D}" dt="2023-03-02T07:08:41.284" v="667" actId="20577"/>
-        <pc:sldMkLst>
-          <pc:docMk/>
-          <pc:sldMk cId="2172647381" sldId="261"/>
-        </pc:sldMkLst>
-      </pc:sldChg>
-      <pc:sldChg chg="modSp add mod">
-        <pc:chgData name="Matthieu De Mari" userId="dfb708c9-d8dc-439f-9a3b-c772bf4a311c" providerId="ADAL" clId="{5AF9E225-0E3D-4808-B523-40F6E9A1D59D}" dt="2023-03-02T07:09:13.009" v="690" actId="20577"/>
-        <pc:sldMkLst>
-          <pc:docMk/>
-          <pc:sldMk cId="3166947328" sldId="262"/>
-        </pc:sldMkLst>
-      </pc:sldChg>
-      <pc:sldChg chg="modSp add mod">
-        <pc:chgData name="Matthieu De Mari" userId="dfb708c9-d8dc-439f-9a3b-c772bf4a311c" providerId="ADAL" clId="{5AF9E225-0E3D-4808-B523-40F6E9A1D59D}" dt="2023-03-02T07:09:44.442" v="694" actId="20577"/>
-        <pc:sldMkLst>
-          <pc:docMk/>
-          <pc:sldMk cId="2723458640" sldId="263"/>
-        </pc:sldMkLst>
-      </pc:sldChg>
-      <pc:sldChg chg="add">
-        <pc:chgData name="Matthieu De Mari" userId="dfb708c9-d8dc-439f-9a3b-c772bf4a311c" providerId="ADAL" clId="{5AF9E225-0E3D-4808-B523-40F6E9A1D59D}" dt="2023-03-02T06:54:29.623" v="2"/>
-        <pc:sldMkLst>
-          <pc:docMk/>
-          <pc:sldMk cId="649892368" sldId="264"/>
-        </pc:sldMkLst>
-      </pc:sldChg>
-      <pc:sldChg chg="add">
-        <pc:chgData name="Matthieu De Mari" userId="dfb708c9-d8dc-439f-9a3b-c772bf4a311c" providerId="ADAL" clId="{5AF9E225-0E3D-4808-B523-40F6E9A1D59D}" dt="2023-03-02T06:54:29.623" v="2"/>
-        <pc:sldMkLst>
-          <pc:docMk/>
-          <pc:sldMk cId="4127898596" sldId="265"/>
-        </pc:sldMkLst>
-      </pc:sldChg>
-      <pc:sldChg chg="addSp delSp modSp add mod modClrScheme chgLayout">
-        <pc:chgData name="Matthieu De Mari" userId="dfb708c9-d8dc-439f-9a3b-c772bf4a311c" providerId="ADAL" clId="{5AF9E225-0E3D-4808-B523-40F6E9A1D59D}" dt="2023-03-02T08:47:11.979" v="3217" actId="20577"/>
-        <pc:sldMkLst>
-          <pc:docMk/>
-          <pc:sldMk cId="256269341" sldId="266"/>
-        </pc:sldMkLst>
-      </pc:sldChg>
-      <pc:sldChg chg="modSp add mod">
-        <pc:chgData name="Matthieu De Mari" userId="dfb708c9-d8dc-439f-9a3b-c772bf4a311c" providerId="ADAL" clId="{5AF9E225-0E3D-4808-B523-40F6E9A1D59D}" dt="2023-03-02T07:01:21.208" v="484" actId="115"/>
-        <pc:sldMkLst>
-          <pc:docMk/>
-          <pc:sldMk cId="2566504203" sldId="267"/>
-        </pc:sldMkLst>
-      </pc:sldChg>
-      <pc:sldChg chg="addSp delSp modSp add mod chgLayout">
-        <pc:chgData name="Matthieu De Mari" userId="dfb708c9-d8dc-439f-9a3b-c772bf4a311c" providerId="ADAL" clId="{5AF9E225-0E3D-4808-B523-40F6E9A1D59D}" dt="2023-03-02T07:00:12.794" v="471" actId="115"/>
-        <pc:sldMkLst>
-          <pc:docMk/>
-          <pc:sldMk cId="1205920737" sldId="268"/>
-        </pc:sldMkLst>
-      </pc:sldChg>
-      <pc:sldChg chg="delSp modSp add mod modClrScheme chgLayout">
-        <pc:chgData name="Matthieu De Mari" userId="dfb708c9-d8dc-439f-9a3b-c772bf4a311c" providerId="ADAL" clId="{5AF9E225-0E3D-4808-B523-40F6E9A1D59D}" dt="2023-03-02T07:13:38.493" v="793" actId="114"/>
-        <pc:sldMkLst>
-          <pc:docMk/>
-          <pc:sldMk cId="4188287311" sldId="269"/>
-        </pc:sldMkLst>
-      </pc:sldChg>
-      <pc:sldChg chg="modSp add mod">
-        <pc:chgData name="Matthieu De Mari" userId="dfb708c9-d8dc-439f-9a3b-c772bf4a311c" providerId="ADAL" clId="{5AF9E225-0E3D-4808-B523-40F6E9A1D59D}" dt="2023-03-02T07:25:33.827" v="1288" actId="1076"/>
-        <pc:sldMkLst>
-          <pc:docMk/>
-          <pc:sldMk cId="997896339" sldId="270"/>
-        </pc:sldMkLst>
-      </pc:sldChg>
-      <pc:sldChg chg="modSp add mod">
-        <pc:chgData name="Matthieu De Mari" userId="dfb708c9-d8dc-439f-9a3b-c772bf4a311c" providerId="ADAL" clId="{5AF9E225-0E3D-4808-B523-40F6E9A1D59D}" dt="2023-03-02T07:23:39.008" v="1244" actId="113"/>
-        <pc:sldMkLst>
-          <pc:docMk/>
-          <pc:sldMk cId="961845771" sldId="271"/>
-        </pc:sldMkLst>
-      </pc:sldChg>
-      <pc:sldChg chg="addSp delSp modSp new mod ord modClrScheme chgLayout">
-        <pc:chgData name="Matthieu De Mari" userId="dfb708c9-d8dc-439f-9a3b-c772bf4a311c" providerId="ADAL" clId="{5AF9E225-0E3D-4808-B523-40F6E9A1D59D}" dt="2023-03-02T07:31:21.011" v="1491" actId="20577"/>
-        <pc:sldMkLst>
-          <pc:docMk/>
-          <pc:sldMk cId="1628130454" sldId="272"/>
-        </pc:sldMkLst>
-      </pc:sldChg>
-      <pc:sldChg chg="addSp delSp modSp add mod modClrScheme chgLayout">
-        <pc:chgData name="Matthieu De Mari" userId="dfb708c9-d8dc-439f-9a3b-c772bf4a311c" providerId="ADAL" clId="{5AF9E225-0E3D-4808-B523-40F6E9A1D59D}" dt="2023-03-02T07:30:59.874" v="1470" actId="1076"/>
-        <pc:sldMkLst>
-          <pc:docMk/>
-          <pc:sldMk cId="3014069118" sldId="273"/>
-        </pc:sldMkLst>
-      </pc:sldChg>
-      <pc:sldChg chg="addSp delSp modSp new mod modClrScheme chgLayout">
-        <pc:chgData name="Matthieu De Mari" userId="dfb708c9-d8dc-439f-9a3b-c772bf4a311c" providerId="ADAL" clId="{5AF9E225-0E3D-4808-B523-40F6E9A1D59D}" dt="2023-03-02T09:06:53.193" v="4236" actId="20577"/>
-        <pc:sldMkLst>
-          <pc:docMk/>
-          <pc:sldMk cId="1813455260" sldId="274"/>
-        </pc:sldMkLst>
-      </pc:sldChg>
-      <pc:sldChg chg="addSp modSp add mod modClrScheme chgLayout">
-        <pc:chgData name="Matthieu De Mari" userId="dfb708c9-d8dc-439f-9a3b-c772bf4a311c" providerId="ADAL" clId="{5AF9E225-0E3D-4808-B523-40F6E9A1D59D}" dt="2023-03-02T08:43:42.183" v="3020" actId="13822"/>
-        <pc:sldMkLst>
-          <pc:docMk/>
-          <pc:sldMk cId="144954399" sldId="275"/>
-        </pc:sldMkLst>
-      </pc:sldChg>
-      <pc:sldChg chg="modSp add mod modClrScheme chgLayout">
-        <pc:chgData name="Matthieu De Mari" userId="dfb708c9-d8dc-439f-9a3b-c772bf4a311c" providerId="ADAL" clId="{5AF9E225-0E3D-4808-B523-40F6E9A1D59D}" dt="2023-03-02T08:31:32.489" v="2596" actId="20577"/>
-        <pc:sldMkLst>
-          <pc:docMk/>
-          <pc:sldMk cId="4217769597" sldId="276"/>
-        </pc:sldMkLst>
-      </pc:sldChg>
-      <pc:sldChg chg="modSp add mod modClrScheme chgLayout">
-        <pc:chgData name="Matthieu De Mari" userId="dfb708c9-d8dc-439f-9a3b-c772bf4a311c" providerId="ADAL" clId="{5AF9E225-0E3D-4808-B523-40F6E9A1D59D}" dt="2023-03-02T09:05:04.931" v="4179" actId="207"/>
-        <pc:sldMkLst>
-          <pc:docMk/>
-          <pc:sldMk cId="1233188664" sldId="277"/>
-        </pc:sldMkLst>
-      </pc:sldChg>
-      <pc:sldChg chg="addSp modSp add mod chgLayout">
-        <pc:chgData name="Matthieu De Mari" userId="dfb708c9-d8dc-439f-9a3b-c772bf4a311c" providerId="ADAL" clId="{5AF9E225-0E3D-4808-B523-40F6E9A1D59D}" dt="2023-03-02T07:40:29.138" v="1964" actId="20577"/>
-        <pc:sldMkLst>
-          <pc:docMk/>
-          <pc:sldMk cId="885607022" sldId="278"/>
-        </pc:sldMkLst>
-      </pc:sldChg>
-      <pc:sldChg chg="modSp add mod">
-        <pc:chgData name="Matthieu De Mari" userId="dfb708c9-d8dc-439f-9a3b-c772bf4a311c" providerId="ADAL" clId="{5AF9E225-0E3D-4808-B523-40F6E9A1D59D}" dt="2023-03-02T07:41:39.244" v="2020" actId="27636"/>
-        <pc:sldMkLst>
-          <pc:docMk/>
-          <pc:sldMk cId="3941141626" sldId="279"/>
-        </pc:sldMkLst>
-      </pc:sldChg>
-      <pc:sldChg chg="modSp add mod">
-        <pc:chgData name="Matthieu De Mari" userId="dfb708c9-d8dc-439f-9a3b-c772bf4a311c" providerId="ADAL" clId="{5AF9E225-0E3D-4808-B523-40F6E9A1D59D}" dt="2023-03-02T07:42:09.869" v="2043" actId="14100"/>
-        <pc:sldMkLst>
-          <pc:docMk/>
-          <pc:sldMk cId="2409304258" sldId="280"/>
-        </pc:sldMkLst>
-      </pc:sldChg>
-      <pc:sldChg chg="modSp add mod">
-        <pc:chgData name="Matthieu De Mari" userId="dfb708c9-d8dc-439f-9a3b-c772bf4a311c" providerId="ADAL" clId="{5AF9E225-0E3D-4808-B523-40F6E9A1D59D}" dt="2023-03-02T07:43:05.203" v="2098" actId="27636"/>
-        <pc:sldMkLst>
-          <pc:docMk/>
-          <pc:sldMk cId="2949375831" sldId="281"/>
-        </pc:sldMkLst>
-      </pc:sldChg>
-      <pc:sldChg chg="addSp delSp modSp add mod modClrScheme chgLayout">
-        <pc:chgData name="Matthieu De Mari" userId="dfb708c9-d8dc-439f-9a3b-c772bf4a311c" providerId="ADAL" clId="{5AF9E225-0E3D-4808-B523-40F6E9A1D59D}" dt="2023-03-02T08:43:47.428" v="3024"/>
-        <pc:sldMkLst>
-          <pc:docMk/>
-          <pc:sldMk cId="2432782764" sldId="282"/>
-        </pc:sldMkLst>
-      </pc:sldChg>
-      <pc:sldChg chg="modSp add del mod modClrScheme chgLayout">
-        <pc:chgData name="Matthieu De Mari" userId="dfb708c9-d8dc-439f-9a3b-c772bf4a311c" providerId="ADAL" clId="{5AF9E225-0E3D-4808-B523-40F6E9A1D59D}" dt="2023-03-02T07:50:30.713" v="2314" actId="47"/>
-        <pc:sldMkLst>
-          <pc:docMk/>
-          <pc:sldMk cId="3346743662" sldId="283"/>
-        </pc:sldMkLst>
-      </pc:sldChg>
-      <pc:sldChg chg="modSp add mod">
-        <pc:chgData name="Matthieu De Mari" userId="dfb708c9-d8dc-439f-9a3b-c772bf4a311c" providerId="ADAL" clId="{5AF9E225-0E3D-4808-B523-40F6E9A1D59D}" dt="2023-03-02T08:49:01.268" v="3268" actId="20577"/>
-        <pc:sldMkLst>
-          <pc:docMk/>
-          <pc:sldMk cId="3869391851" sldId="284"/>
-        </pc:sldMkLst>
-      </pc:sldChg>
-      <pc:sldChg chg="modSp add mod ord">
-        <pc:chgData name="Matthieu De Mari" userId="dfb708c9-d8dc-439f-9a3b-c772bf4a311c" providerId="ADAL" clId="{5AF9E225-0E3D-4808-B523-40F6E9A1D59D}" dt="2023-03-02T08:47:17.468" v="3221" actId="20577"/>
-        <pc:sldMkLst>
-          <pc:docMk/>
-          <pc:sldMk cId="1567445271" sldId="285"/>
-        </pc:sldMkLst>
-      </pc:sldChg>
-      <pc:sldChg chg="new del">
-        <pc:chgData name="Matthieu De Mari" userId="dfb708c9-d8dc-439f-9a3b-c772bf4a311c" providerId="ADAL" clId="{5AF9E225-0E3D-4808-B523-40F6E9A1D59D}" dt="2023-03-02T09:20:57.277" v="4650" actId="47"/>
-        <pc:sldMkLst>
-          <pc:docMk/>
-          <pc:sldMk cId="1786940851" sldId="286"/>
-        </pc:sldMkLst>
-      </pc:sldChg>
-      <pc:sldChg chg="addSp delSp modSp add del mod">
-        <pc:chgData name="Matthieu De Mari" userId="dfb708c9-d8dc-439f-9a3b-c772bf4a311c" providerId="ADAL" clId="{5AF9E225-0E3D-4808-B523-40F6E9A1D59D}" dt="2023-03-02T07:52:04.495" v="2352" actId="47"/>
-        <pc:sldMkLst>
-          <pc:docMk/>
-          <pc:sldMk cId="2521085326" sldId="286"/>
-        </pc:sldMkLst>
-      </pc:sldChg>
-      <pc:sldChg chg="add">
-        <pc:chgData name="Matthieu De Mari" userId="dfb708c9-d8dc-439f-9a3b-c772bf4a311c" providerId="ADAL" clId="{5AF9E225-0E3D-4808-B523-40F6E9A1D59D}" dt="2023-03-02T08:31:29.223" v="2595" actId="2890"/>
-        <pc:sldMkLst>
-          <pc:docMk/>
-          <pc:sldMk cId="2870852187" sldId="287"/>
-        </pc:sldMkLst>
-      </pc:sldChg>
-      <pc:sldChg chg="addSp delSp modSp new mod modClrScheme chgLayout">
-        <pc:chgData name="Matthieu De Mari" userId="dfb708c9-d8dc-439f-9a3b-c772bf4a311c" providerId="ADAL" clId="{5AF9E225-0E3D-4808-B523-40F6E9A1D59D}" dt="2023-03-02T08:35:16.091" v="2758" actId="20577"/>
-        <pc:sldMkLst>
-          <pc:docMk/>
-          <pc:sldMk cId="3486387661" sldId="288"/>
-        </pc:sldMkLst>
-      </pc:sldChg>
-      <pc:sldChg chg="addSp delSp modSp add mod">
-        <pc:chgData name="Matthieu De Mari" userId="dfb708c9-d8dc-439f-9a3b-c772bf4a311c" providerId="ADAL" clId="{5AF9E225-0E3D-4808-B523-40F6E9A1D59D}" dt="2023-03-02T08:38:16.072" v="2894" actId="113"/>
-        <pc:sldMkLst>
-          <pc:docMk/>
-          <pc:sldMk cId="2118681498" sldId="289"/>
-        </pc:sldMkLst>
-      </pc:sldChg>
-      <pc:sldChg chg="addSp delSp modSp new mod modClrScheme chgLayout">
-        <pc:chgData name="Matthieu De Mari" userId="dfb708c9-d8dc-439f-9a3b-c772bf4a311c" providerId="ADAL" clId="{5AF9E225-0E3D-4808-B523-40F6E9A1D59D}" dt="2023-03-02T08:44:18.884" v="3062" actId="1036"/>
-        <pc:sldMkLst>
-          <pc:docMk/>
-          <pc:sldMk cId="2562857934" sldId="290"/>
-        </pc:sldMkLst>
-      </pc:sldChg>
-      <pc:sldChg chg="delSp modSp add mod">
-        <pc:chgData name="Matthieu De Mari" userId="dfb708c9-d8dc-439f-9a3b-c772bf4a311c" providerId="ADAL" clId="{5AF9E225-0E3D-4808-B523-40F6E9A1D59D}" dt="2023-03-02T08:47:27.886" v="3225" actId="20577"/>
-        <pc:sldMkLst>
-          <pc:docMk/>
-          <pc:sldMk cId="3292482358" sldId="291"/>
-        </pc:sldMkLst>
-      </pc:sldChg>
-      <pc:sldChg chg="addSp delSp modSp add mod">
-        <pc:chgData name="Matthieu De Mari" userId="dfb708c9-d8dc-439f-9a3b-c772bf4a311c" providerId="ADAL" clId="{5AF9E225-0E3D-4808-B523-40F6E9A1D59D}" dt="2023-03-02T08:44:21.897" v="3064"/>
-        <pc:sldMkLst>
-          <pc:docMk/>
-          <pc:sldMk cId="3520355124" sldId="292"/>
-        </pc:sldMkLst>
-      </pc:sldChg>
-      <pc:sldChg chg="modSp new mod">
-        <pc:chgData name="Matthieu De Mari" userId="dfb708c9-d8dc-439f-9a3b-c772bf4a311c" providerId="ADAL" clId="{5AF9E225-0E3D-4808-B523-40F6E9A1D59D}" dt="2023-03-02T08:47:53.024" v="3226" actId="114"/>
-        <pc:sldMkLst>
-          <pc:docMk/>
-          <pc:sldMk cId="3046349634" sldId="293"/>
-        </pc:sldMkLst>
-      </pc:sldChg>
-      <pc:sldChg chg="modSp add mod">
-        <pc:chgData name="Matthieu De Mari" userId="dfb708c9-d8dc-439f-9a3b-c772bf4a311c" providerId="ADAL" clId="{5AF9E225-0E3D-4808-B523-40F6E9A1D59D}" dt="2023-03-02T09:04:46.904" v="4174" actId="27636"/>
-        <pc:sldMkLst>
-          <pc:docMk/>
-          <pc:sldMk cId="427136966" sldId="294"/>
-        </pc:sldMkLst>
-      </pc:sldChg>
-      <pc:sldChg chg="addSp delSp modSp new mod modClrScheme chgLayout">
-        <pc:chgData name="Matthieu De Mari" userId="dfb708c9-d8dc-439f-9a3b-c772bf4a311c" providerId="ADAL" clId="{5AF9E225-0E3D-4808-B523-40F6E9A1D59D}" dt="2023-03-02T09:05:33.864" v="4216" actId="20577"/>
-        <pc:sldMkLst>
-          <pc:docMk/>
-          <pc:sldMk cId="323951598" sldId="295"/>
-        </pc:sldMkLst>
-      </pc:sldChg>
-      <pc:sldChg chg="addSp delSp modSp new mod modClrScheme chgLayout">
-        <pc:chgData name="Matthieu De Mari" userId="dfb708c9-d8dc-439f-9a3b-c772bf4a311c" providerId="ADAL" clId="{5AF9E225-0E3D-4808-B523-40F6E9A1D59D}" dt="2023-03-02T09:06:28.328" v="4228" actId="20577"/>
-        <pc:sldMkLst>
-          <pc:docMk/>
-          <pc:sldMk cId="1855779909" sldId="296"/>
-        </pc:sldMkLst>
-      </pc:sldChg>
-      <pc:sldChg chg="modSp add mod">
-        <pc:chgData name="Matthieu De Mari" userId="dfb708c9-d8dc-439f-9a3b-c772bf4a311c" providerId="ADAL" clId="{5AF9E225-0E3D-4808-B523-40F6E9A1D59D}" dt="2023-03-02T08:56:04.515" v="3607" actId="20577"/>
-        <pc:sldMkLst>
-          <pc:docMk/>
-          <pc:sldMk cId="1514077654" sldId="297"/>
-        </pc:sldMkLst>
-      </pc:sldChg>
-      <pc:sldChg chg="modSp new mod">
-        <pc:chgData name="Matthieu De Mari" userId="dfb708c9-d8dc-439f-9a3b-c772bf4a311c" providerId="ADAL" clId="{5AF9E225-0E3D-4808-B523-40F6E9A1D59D}" dt="2023-03-02T08:56:36.889" v="3652" actId="14100"/>
-        <pc:sldMkLst>
-          <pc:docMk/>
-          <pc:sldMk cId="2514894683" sldId="298"/>
-        </pc:sldMkLst>
-      </pc:sldChg>
-      <pc:sldChg chg="addSp delSp modSp new mod">
-        <pc:chgData name="Matthieu De Mari" userId="dfb708c9-d8dc-439f-9a3b-c772bf4a311c" providerId="ADAL" clId="{5AF9E225-0E3D-4808-B523-40F6E9A1D59D}" dt="2023-03-02T08:59:30.392" v="3889" actId="21"/>
-        <pc:sldMkLst>
-          <pc:docMk/>
-          <pc:sldMk cId="1452574487" sldId="299"/>
-        </pc:sldMkLst>
-      </pc:sldChg>
-      <pc:sldChg chg="addSp delSp modSp add mod modClrScheme chgLayout">
-        <pc:chgData name="Matthieu De Mari" userId="dfb708c9-d8dc-439f-9a3b-c772bf4a311c" providerId="ADAL" clId="{5AF9E225-0E3D-4808-B523-40F6E9A1D59D}" dt="2023-03-02T09:03:33.636" v="4087" actId="20577"/>
-        <pc:sldMkLst>
-          <pc:docMk/>
-          <pc:sldMk cId="1699114457" sldId="300"/>
-        </pc:sldMkLst>
-      </pc:sldChg>
-      <pc:sldChg chg="addSp delSp modSp add mod modClrScheme chgLayout">
-        <pc:chgData name="Matthieu De Mari" userId="dfb708c9-d8dc-439f-9a3b-c772bf4a311c" providerId="ADAL" clId="{5AF9E225-0E3D-4808-B523-40F6E9A1D59D}" dt="2023-03-02T09:03:43.897" v="4104" actId="20577"/>
-        <pc:sldMkLst>
-          <pc:docMk/>
-          <pc:sldMk cId="1276239023" sldId="301"/>
-        </pc:sldMkLst>
-      </pc:sldChg>
-      <pc:sldChg chg="addSp delSp modSp add mod modClrScheme chgLayout">
-        <pc:chgData name="Matthieu De Mari" userId="dfb708c9-d8dc-439f-9a3b-c772bf4a311c" providerId="ADAL" clId="{5AF9E225-0E3D-4808-B523-40F6E9A1D59D}" dt="2023-03-02T09:04:08.494" v="4134" actId="20577"/>
-        <pc:sldMkLst>
-          <pc:docMk/>
-          <pc:sldMk cId="3968924669" sldId="302"/>
-        </pc:sldMkLst>
-      </pc:sldChg>
-      <pc:sldChg chg="modSp new mod">
-        <pc:chgData name="Matthieu De Mari" userId="dfb708c9-d8dc-439f-9a3b-c772bf4a311c" providerId="ADAL" clId="{5AF9E225-0E3D-4808-B523-40F6E9A1D59D}" dt="2023-03-02T09:09:23.148" v="4269" actId="113"/>
-        <pc:sldMkLst>
-          <pc:docMk/>
-          <pc:sldMk cId="4232115997" sldId="303"/>
-        </pc:sldMkLst>
-      </pc:sldChg>
-      <pc:sldChg chg="modSp add mod">
-        <pc:chgData name="Matthieu De Mari" userId="dfb708c9-d8dc-439f-9a3b-c772bf4a311c" providerId="ADAL" clId="{5AF9E225-0E3D-4808-B523-40F6E9A1D59D}" dt="2023-03-02T09:06:47.611" v="4234" actId="20577"/>
-        <pc:sldMkLst>
-          <pc:docMk/>
-          <pc:sldMk cId="354883896" sldId="304"/>
-        </pc:sldMkLst>
-      </pc:sldChg>
-      <pc:sldChg chg="modSp add mod">
-        <pc:chgData name="Matthieu De Mari" userId="dfb708c9-d8dc-439f-9a3b-c772bf4a311c" providerId="ADAL" clId="{5AF9E225-0E3D-4808-B523-40F6E9A1D59D}" dt="2023-03-02T09:10:35.361" v="4304" actId="27636"/>
-        <pc:sldMkLst>
-          <pc:docMk/>
-          <pc:sldMk cId="4099824996" sldId="305"/>
-        </pc:sldMkLst>
-      </pc:sldChg>
-      <pc:sldChg chg="modSp add mod">
-        <pc:chgData name="Matthieu De Mari" userId="dfb708c9-d8dc-439f-9a3b-c772bf4a311c" providerId="ADAL" clId="{5AF9E225-0E3D-4808-B523-40F6E9A1D59D}" dt="2023-03-02T09:09:27.720" v="4270" actId="207"/>
-        <pc:sldMkLst>
-          <pc:docMk/>
-          <pc:sldMk cId="4051912021" sldId="306"/>
-        </pc:sldMkLst>
-      </pc:sldChg>
-      <pc:sldChg chg="modSp add mod">
-        <pc:chgData name="Matthieu De Mari" userId="dfb708c9-d8dc-439f-9a3b-c772bf4a311c" providerId="ADAL" clId="{5AF9E225-0E3D-4808-B523-40F6E9A1D59D}" dt="2023-03-02T09:11:43.126" v="4415" actId="20577"/>
-        <pc:sldMkLst>
-          <pc:docMk/>
-          <pc:sldMk cId="2900176786" sldId="307"/>
-        </pc:sldMkLst>
-      </pc:sldChg>
-      <pc:sldChg chg="modSp add mod">
-        <pc:chgData name="Matthieu De Mari" userId="dfb708c9-d8dc-439f-9a3b-c772bf4a311c" providerId="ADAL" clId="{5AF9E225-0E3D-4808-B523-40F6E9A1D59D}" dt="2023-03-02T09:10:43.209" v="4307" actId="207"/>
-        <pc:sldMkLst>
-          <pc:docMk/>
-          <pc:sldMk cId="1601297533" sldId="308"/>
-        </pc:sldMkLst>
-      </pc:sldChg>
-      <pc:sldChg chg="modSp add mod ord">
-        <pc:chgData name="Matthieu De Mari" userId="dfb708c9-d8dc-439f-9a3b-c772bf4a311c" providerId="ADAL" clId="{5AF9E225-0E3D-4808-B523-40F6E9A1D59D}" dt="2023-03-02T09:20:16.513" v="4645"/>
-        <pc:sldMkLst>
-          <pc:docMk/>
-          <pc:sldMk cId="3331075550" sldId="309"/>
-        </pc:sldMkLst>
-      </pc:sldChg>
-      <pc:sldChg chg="modSp add mod">
-        <pc:chgData name="Matthieu De Mari" userId="dfb708c9-d8dc-439f-9a3b-c772bf4a311c" providerId="ADAL" clId="{5AF9E225-0E3D-4808-B523-40F6E9A1D59D}" dt="2023-03-02T09:13:28.270" v="4475" actId="20577"/>
-        <pc:sldMkLst>
-          <pc:docMk/>
-          <pc:sldMk cId="4251184714" sldId="310"/>
-        </pc:sldMkLst>
-      </pc:sldChg>
-      <pc:sldChg chg="modSp add mod ord">
-        <pc:chgData name="Matthieu De Mari" userId="dfb708c9-d8dc-439f-9a3b-c772bf4a311c" providerId="ADAL" clId="{5AF9E225-0E3D-4808-B523-40F6E9A1D59D}" dt="2023-03-02T09:20:16.513" v="4645"/>
-        <pc:sldMkLst>
-          <pc:docMk/>
-          <pc:sldMk cId="3629183510" sldId="311"/>
-        </pc:sldMkLst>
-      </pc:sldChg>
-      <pc:sldChg chg="modSp add mod">
-        <pc:chgData name="Matthieu De Mari" userId="dfb708c9-d8dc-439f-9a3b-c772bf4a311c" providerId="ADAL" clId="{5AF9E225-0E3D-4808-B523-40F6E9A1D59D}" dt="2023-03-02T09:14:09.472" v="4486" actId="207"/>
-        <pc:sldMkLst>
-          <pc:docMk/>
-          <pc:sldMk cId="7996884" sldId="312"/>
-        </pc:sldMkLst>
-      </pc:sldChg>
-      <pc:sldChg chg="add">
-        <pc:chgData name="Matthieu De Mari" userId="dfb708c9-d8dc-439f-9a3b-c772bf4a311c" providerId="ADAL" clId="{5AF9E225-0E3D-4808-B523-40F6E9A1D59D}" dt="2023-03-02T09:14:04.028" v="4484" actId="2890"/>
-        <pc:sldMkLst>
-          <pc:docMk/>
-          <pc:sldMk cId="1140638742" sldId="313"/>
-        </pc:sldMkLst>
-      </pc:sldChg>
-      <pc:sldChg chg="modSp new mod">
-        <pc:chgData name="Matthieu De Mari" userId="dfb708c9-d8dc-439f-9a3b-c772bf4a311c" providerId="ADAL" clId="{5AF9E225-0E3D-4808-B523-40F6E9A1D59D}" dt="2023-03-02T09:19:43.572" v="4643" actId="20577"/>
-        <pc:sldMkLst>
-          <pc:docMk/>
-          <pc:sldMk cId="2858358615" sldId="314"/>
-        </pc:sldMkLst>
-      </pc:sldChg>
-      <pc:sldChg chg="add ord">
-        <pc:chgData name="Matthieu De Mari" userId="dfb708c9-d8dc-439f-9a3b-c772bf4a311c" providerId="ADAL" clId="{5AF9E225-0E3D-4808-B523-40F6E9A1D59D}" dt="2023-03-02T09:20:56.065" v="4649" actId="20578"/>
-        <pc:sldMkLst>
-          <pc:docMk/>
-          <pc:sldMk cId="3338565690" sldId="378"/>
-        </pc:sldMkLst>
-      </pc:sldChg>
-      <pc:sldMasterChg chg="addSp mod">
-        <pc:chgData name="Matthieu De Mari" userId="dfb708c9-d8dc-439f-9a3b-c772bf4a311c" providerId="ADAL" clId="{5AF9E225-0E3D-4808-B523-40F6E9A1D59D}" dt="2023-03-02T06:54:28.184" v="0" actId="33475"/>
-        <pc:sldMasterMkLst>
-          <pc:docMk/>
-          <pc:sldMasterMk cId="1162895350" sldId="2147483648"/>
-        </pc:sldMasterMkLst>
-      </pc:sldMasterChg>
-    </pc:docChg>
-  </pc:docChgLst>
-  <pc:docChgLst>
-    <pc:chgData name="Matthieu De Mari" userId="dfb708c9-d8dc-439f-9a3b-c772bf4a311c" providerId="ADAL" clId="{9C56ED94-FF08-4311-A90D-5831E9560329}"/>
-    <pc:docChg chg="undo custSel addSld delSld modSld sldOrd addSection delSection modSection">
-      <pc:chgData name="Matthieu De Mari" userId="dfb708c9-d8dc-439f-9a3b-c772bf4a311c" providerId="ADAL" clId="{9C56ED94-FF08-4311-A90D-5831E9560329}" dt="2023-03-15T08:55:10.511" v="4302" actId="5793"/>
-      <pc:docMkLst>
-        <pc:docMk/>
-      </pc:docMkLst>
-      <pc:sldChg chg="del">
-        <pc:chgData name="Matthieu De Mari" userId="dfb708c9-d8dc-439f-9a3b-c772bf4a311c" providerId="ADAL" clId="{9C56ED94-FF08-4311-A90D-5831E9560329}" dt="2023-03-09T09:12:53.243" v="23" actId="47"/>
-        <pc:sldMkLst>
-          <pc:docMk/>
-          <pc:sldMk cId="3739270414" sldId="258"/>
-        </pc:sldMkLst>
-      </pc:sldChg>
-      <pc:sldChg chg="del">
-        <pc:chgData name="Matthieu De Mari" userId="dfb708c9-d8dc-439f-9a3b-c772bf4a311c" providerId="ADAL" clId="{9C56ED94-FF08-4311-A90D-5831E9560329}" dt="2023-03-09T09:12:53.243" v="23" actId="47"/>
-        <pc:sldMkLst>
-          <pc:docMk/>
-          <pc:sldMk cId="3115582948" sldId="259"/>
-        </pc:sldMkLst>
-      </pc:sldChg>
-      <pc:sldChg chg="del">
-        <pc:chgData name="Matthieu De Mari" userId="dfb708c9-d8dc-439f-9a3b-c772bf4a311c" providerId="ADAL" clId="{9C56ED94-FF08-4311-A90D-5831E9560329}" dt="2023-03-09T09:12:53.243" v="23" actId="47"/>
-        <pc:sldMkLst>
-          <pc:docMk/>
-          <pc:sldMk cId="2366002138" sldId="265"/>
-        </pc:sldMkLst>
-      </pc:sldChg>
-      <pc:sldChg chg="del">
-        <pc:chgData name="Matthieu De Mari" userId="dfb708c9-d8dc-439f-9a3b-c772bf4a311c" providerId="ADAL" clId="{9C56ED94-FF08-4311-A90D-5831E9560329}" dt="2023-03-09T09:12:53.243" v="23" actId="47"/>
-        <pc:sldMkLst>
-          <pc:docMk/>
-          <pc:sldMk cId="1944673108" sldId="268"/>
-        </pc:sldMkLst>
-      </pc:sldChg>
-      <pc:sldChg chg="del">
-        <pc:chgData name="Matthieu De Mari" userId="dfb708c9-d8dc-439f-9a3b-c772bf4a311c" providerId="ADAL" clId="{9C56ED94-FF08-4311-A90D-5831E9560329}" dt="2023-03-09T09:12:53.243" v="23" actId="47"/>
-        <pc:sldMkLst>
-          <pc:docMk/>
-          <pc:sldMk cId="16380507" sldId="270"/>
-        </pc:sldMkLst>
-      </pc:sldChg>
-      <pc:sldChg chg="del">
-        <pc:chgData name="Matthieu De Mari" userId="dfb708c9-d8dc-439f-9a3b-c772bf4a311c" providerId="ADAL" clId="{9C56ED94-FF08-4311-A90D-5831E9560329}" dt="2023-03-09T09:12:53.243" v="23" actId="47"/>
-        <pc:sldMkLst>
-          <pc:docMk/>
-          <pc:sldMk cId="483806848" sldId="271"/>
-        </pc:sldMkLst>
-      </pc:sldChg>
-      <pc:sldChg chg="del">
-        <pc:chgData name="Matthieu De Mari" userId="dfb708c9-d8dc-439f-9a3b-c772bf4a311c" providerId="ADAL" clId="{9C56ED94-FF08-4311-A90D-5831E9560329}" dt="2023-03-09T09:12:53.243" v="23" actId="47"/>
-        <pc:sldMkLst>
-          <pc:docMk/>
-          <pc:sldMk cId="2105998534" sldId="379"/>
-        </pc:sldMkLst>
-      </pc:sldChg>
-      <pc:sldChg chg="del">
-        <pc:chgData name="Matthieu De Mari" userId="dfb708c9-d8dc-439f-9a3b-c772bf4a311c" providerId="ADAL" clId="{9C56ED94-FF08-4311-A90D-5831E9560329}" dt="2023-03-09T09:12:53.243" v="23" actId="47"/>
-        <pc:sldMkLst>
-          <pc:docMk/>
-          <pc:sldMk cId="1213996271" sldId="382"/>
-        </pc:sldMkLst>
-      </pc:sldChg>
-      <pc:sldChg chg="add del">
-        <pc:chgData name="Matthieu De Mari" userId="dfb708c9-d8dc-439f-9a3b-c772bf4a311c" providerId="ADAL" clId="{9C56ED94-FF08-4311-A90D-5831E9560329}" dt="2023-03-15T08:26:47.736" v="3032"/>
-        <pc:sldMkLst>
-          <pc:docMk/>
-          <pc:sldMk cId="4226169062" sldId="423"/>
-        </pc:sldMkLst>
-      </pc:sldChg>
-      <pc:sldChg chg="del">
-        <pc:chgData name="Matthieu De Mari" userId="dfb708c9-d8dc-439f-9a3b-c772bf4a311c" providerId="ADAL" clId="{9C56ED94-FF08-4311-A90D-5831E9560329}" dt="2023-03-09T09:13:01.286" v="30" actId="47"/>
-        <pc:sldMkLst>
-          <pc:docMk/>
-          <pc:sldMk cId="4050696508" sldId="424"/>
-        </pc:sldMkLst>
-      </pc:sldChg>
-      <pc:sldChg chg="add del">
-        <pc:chgData name="Matthieu De Mari" userId="dfb708c9-d8dc-439f-9a3b-c772bf4a311c" providerId="ADAL" clId="{9C56ED94-FF08-4311-A90D-5831E9560329}" dt="2023-03-15T08:26:47.736" v="3032"/>
-        <pc:sldMkLst>
-          <pc:docMk/>
-          <pc:sldMk cId="2244529904" sldId="425"/>
-        </pc:sldMkLst>
-      </pc:sldChg>
-      <pc:sldChg chg="add del">
-        <pc:chgData name="Matthieu De Mari" userId="dfb708c9-d8dc-439f-9a3b-c772bf4a311c" providerId="ADAL" clId="{9C56ED94-FF08-4311-A90D-5831E9560329}" dt="2023-03-15T08:54:36.658" v="4246"/>
-        <pc:sldMkLst>
-          <pc:docMk/>
-          <pc:sldMk cId="1586635455" sldId="427"/>
-        </pc:sldMkLst>
-      </pc:sldChg>
-      <pc:sldChg chg="del">
-        <pc:chgData name="Matthieu De Mari" userId="dfb708c9-d8dc-439f-9a3b-c772bf4a311c" providerId="ADAL" clId="{9C56ED94-FF08-4311-A90D-5831E9560329}" dt="2023-03-09T09:12:56.596" v="25" actId="47"/>
-        <pc:sldMkLst>
-          <pc:docMk/>
-          <pc:sldMk cId="76065098" sldId="429"/>
-        </pc:sldMkLst>
-      </pc:sldChg>
-      <pc:sldChg chg="del">
-        <pc:chgData name="Matthieu De Mari" userId="dfb708c9-d8dc-439f-9a3b-c772bf4a311c" providerId="ADAL" clId="{9C56ED94-FF08-4311-A90D-5831E9560329}" dt="2023-03-09T09:12:56.916" v="26" actId="47"/>
-        <pc:sldMkLst>
-          <pc:docMk/>
-          <pc:sldMk cId="600619302" sldId="430"/>
-        </pc:sldMkLst>
-      </pc:sldChg>
-      <pc:sldChg chg="del">
-        <pc:chgData name="Matthieu De Mari" userId="dfb708c9-d8dc-439f-9a3b-c772bf4a311c" providerId="ADAL" clId="{9C56ED94-FF08-4311-A90D-5831E9560329}" dt="2023-03-09T09:12:57.296" v="27" actId="47"/>
-        <pc:sldMkLst>
-          <pc:docMk/>
-          <pc:sldMk cId="2954873226" sldId="431"/>
-        </pc:sldMkLst>
-      </pc:sldChg>
-      <pc:sldChg chg="del">
-        <pc:chgData name="Matthieu De Mari" userId="dfb708c9-d8dc-439f-9a3b-c772bf4a311c" providerId="ADAL" clId="{9C56ED94-FF08-4311-A90D-5831E9560329}" dt="2023-03-09T09:12:58.368" v="28" actId="47"/>
-        <pc:sldMkLst>
-          <pc:docMk/>
-          <pc:sldMk cId="2366763698" sldId="432"/>
-        </pc:sldMkLst>
-      </pc:sldChg>
-      <pc:sldChg chg="del">
-        <pc:chgData name="Matthieu De Mari" userId="dfb708c9-d8dc-439f-9a3b-c772bf4a311c" providerId="ADAL" clId="{9C56ED94-FF08-4311-A90D-5831E9560329}" dt="2023-03-09T09:12:58.368" v="28" actId="47"/>
-        <pc:sldMkLst>
-          <pc:docMk/>
-          <pc:sldMk cId="1791834708" sldId="433"/>
-        </pc:sldMkLst>
-      </pc:sldChg>
-      <pc:sldChg chg="del">
-        <pc:chgData name="Matthieu De Mari" userId="dfb708c9-d8dc-439f-9a3b-c772bf4a311c" providerId="ADAL" clId="{9C56ED94-FF08-4311-A90D-5831E9560329}" dt="2023-03-09T09:12:58.368" v="28" actId="47"/>
-        <pc:sldMkLst>
-          <pc:docMk/>
-          <pc:sldMk cId="2266139316" sldId="434"/>
-        </pc:sldMkLst>
-      </pc:sldChg>
-      <pc:sldChg chg="del">
-        <pc:chgData name="Matthieu De Mari" userId="dfb708c9-d8dc-439f-9a3b-c772bf4a311c" providerId="ADAL" clId="{9C56ED94-FF08-4311-A90D-5831E9560329}" dt="2023-03-09T09:13:00.279" v="29" actId="47"/>
-        <pc:sldMkLst>
-          <pc:docMk/>
-          <pc:sldMk cId="282863324" sldId="437"/>
-        </pc:sldMkLst>
-      </pc:sldChg>
-      <pc:sldChg chg="del">
-        <pc:chgData name="Matthieu De Mari" userId="dfb708c9-d8dc-439f-9a3b-c772bf4a311c" providerId="ADAL" clId="{9C56ED94-FF08-4311-A90D-5831E9560329}" dt="2023-03-09T09:13:00.279" v="29" actId="47"/>
-        <pc:sldMkLst>
-          <pc:docMk/>
-          <pc:sldMk cId="1648531005" sldId="438"/>
-        </pc:sldMkLst>
-      </pc:sldChg>
-      <pc:sldChg chg="del">
-        <pc:chgData name="Matthieu De Mari" userId="dfb708c9-d8dc-439f-9a3b-c772bf4a311c" providerId="ADAL" clId="{9C56ED94-FF08-4311-A90D-5831E9560329}" dt="2023-03-09T09:13:00.279" v="29" actId="47"/>
-        <pc:sldMkLst>
-          <pc:docMk/>
-          <pc:sldMk cId="2577277130" sldId="439"/>
-        </pc:sldMkLst>
-      </pc:sldChg>
-      <pc:sldChg chg="del">
-        <pc:chgData name="Matthieu De Mari" userId="dfb708c9-d8dc-439f-9a3b-c772bf4a311c" providerId="ADAL" clId="{9C56ED94-FF08-4311-A90D-5831E9560329}" dt="2023-03-09T09:13:00.279" v="29" actId="47"/>
-        <pc:sldMkLst>
-          <pc:docMk/>
-          <pc:sldMk cId="2191919470" sldId="440"/>
-        </pc:sldMkLst>
-      </pc:sldChg>
-      <pc:sldChg chg="del">
-        <pc:chgData name="Matthieu De Mari" userId="dfb708c9-d8dc-439f-9a3b-c772bf4a311c" providerId="ADAL" clId="{9C56ED94-FF08-4311-A90D-5831E9560329}" dt="2023-03-09T09:13:00.279" v="29" actId="47"/>
-        <pc:sldMkLst>
-          <pc:docMk/>
-          <pc:sldMk cId="2257941384" sldId="441"/>
-        </pc:sldMkLst>
-      </pc:sldChg>
-      <pc:sldChg chg="del">
-        <pc:chgData name="Matthieu De Mari" userId="dfb708c9-d8dc-439f-9a3b-c772bf4a311c" providerId="ADAL" clId="{9C56ED94-FF08-4311-A90D-5831E9560329}" dt="2023-03-09T09:13:00.279" v="29" actId="47"/>
-        <pc:sldMkLst>
-          <pc:docMk/>
-          <pc:sldMk cId="3705292892" sldId="444"/>
-        </pc:sldMkLst>
-      </pc:sldChg>
-      <pc:sldChg chg="del">
-        <pc:chgData name="Matthieu De Mari" userId="dfb708c9-d8dc-439f-9a3b-c772bf4a311c" providerId="ADAL" clId="{9C56ED94-FF08-4311-A90D-5831E9560329}" dt="2023-03-09T09:13:01.286" v="30" actId="47"/>
-        <pc:sldMkLst>
-          <pc:docMk/>
-          <pc:sldMk cId="3585737502" sldId="445"/>
-        </pc:sldMkLst>
-      </pc:sldChg>
-      <pc:sldChg chg="del">
-        <pc:chgData name="Matthieu De Mari" userId="dfb708c9-d8dc-439f-9a3b-c772bf4a311c" providerId="ADAL" clId="{9C56ED94-FF08-4311-A90D-5831E9560329}" dt="2023-03-09T09:13:01.286" v="30" actId="47"/>
-        <pc:sldMkLst>
-          <pc:docMk/>
-          <pc:sldMk cId="1738845767" sldId="448"/>
-        </pc:sldMkLst>
-      </pc:sldChg>
-      <pc:sldChg chg="del">
-        <pc:chgData name="Matthieu De Mari" userId="dfb708c9-d8dc-439f-9a3b-c772bf4a311c" providerId="ADAL" clId="{9C56ED94-FF08-4311-A90D-5831E9560329}" dt="2023-03-09T09:13:08.399" v="31" actId="47"/>
-        <pc:sldMkLst>
-          <pc:docMk/>
-          <pc:sldMk cId="1242261096" sldId="451"/>
-        </pc:sldMkLst>
-      </pc:sldChg>
-      <pc:sldChg chg="del">
-        <pc:chgData name="Matthieu De Mari" userId="dfb708c9-d8dc-439f-9a3b-c772bf4a311c" providerId="ADAL" clId="{9C56ED94-FF08-4311-A90D-5831E9560329}" dt="2023-03-09T09:13:09.478" v="32" actId="47"/>
-        <pc:sldMkLst>
-          <pc:docMk/>
-          <pc:sldMk cId="3102642038" sldId="453"/>
-        </pc:sldMkLst>
-      </pc:sldChg>
-      <pc:sldChg chg="modSp add del mod">
-        <pc:chgData name="Matthieu De Mari" userId="dfb708c9-d8dc-439f-9a3b-c772bf4a311c" providerId="ADAL" clId="{9C56ED94-FF08-4311-A90D-5831E9560329}" dt="2023-03-15T07:34:48.554" v="547" actId="20577"/>
-        <pc:sldMkLst>
-          <pc:docMk/>
-          <pc:sldMk cId="4072425385" sldId="454"/>
-        </pc:sldMkLst>
-      </pc:sldChg>
-      <pc:sldChg chg="del">
-        <pc:chgData name="Matthieu De Mari" userId="dfb708c9-d8dc-439f-9a3b-c772bf4a311c" providerId="ADAL" clId="{9C56ED94-FF08-4311-A90D-5831E9560329}" dt="2023-03-09T09:12:56.076" v="24" actId="47"/>
-        <pc:sldMkLst>
-          <pc:docMk/>
-          <pc:sldMk cId="1628282840" sldId="455"/>
-        </pc:sldMkLst>
-      </pc:sldChg>
-      <pc:sldChg chg="add del ord">
-        <pc:chgData name="Matthieu De Mari" userId="dfb708c9-d8dc-439f-9a3b-c772bf4a311c" providerId="ADAL" clId="{9C56ED94-FF08-4311-A90D-5831E9560329}" dt="2023-03-15T08:54:40.966" v="4248"/>
-        <pc:sldMkLst>
-          <pc:docMk/>
-          <pc:sldMk cId="1474802136" sldId="456"/>
-        </pc:sldMkLst>
-      </pc:sldChg>
-      <pc:sldChg chg="ord">
-        <pc:chgData name="Matthieu De Mari" userId="dfb708c9-d8dc-439f-9a3b-c772bf4a311c" providerId="ADAL" clId="{9C56ED94-FF08-4311-A90D-5831E9560329}" dt="2023-03-15T07:25:11.614" v="122"/>
-        <pc:sldMkLst>
-          <pc:docMk/>
-          <pc:sldMk cId="3858745428" sldId="457"/>
-        </pc:sldMkLst>
-      </pc:sldChg>
-      <pc:sldChg chg="ord">
-        <pc:chgData name="Matthieu De Mari" userId="dfb708c9-d8dc-439f-9a3b-c772bf4a311c" providerId="ADAL" clId="{9C56ED94-FF08-4311-A90D-5831E9560329}" dt="2023-03-15T07:25:11.614" v="122"/>
-        <pc:sldMkLst>
-          <pc:docMk/>
-          <pc:sldMk cId="3624547080" sldId="459"/>
-        </pc:sldMkLst>
-      </pc:sldChg>
-      <pc:sldChg chg="add del ord">
-        <pc:chgData name="Matthieu De Mari" userId="dfb708c9-d8dc-439f-9a3b-c772bf4a311c" providerId="ADAL" clId="{9C56ED94-FF08-4311-A90D-5831E9560329}" dt="2023-03-15T07:25:11.614" v="122"/>
-        <pc:sldMkLst>
-          <pc:docMk/>
-          <pc:sldMk cId="727967492" sldId="460"/>
-        </pc:sldMkLst>
-      </pc:sldChg>
-      <pc:sldChg chg="delSp modSp add del mod">
-        <pc:chgData name="Matthieu De Mari" userId="dfb708c9-d8dc-439f-9a3b-c772bf4a311c" providerId="ADAL" clId="{9C56ED94-FF08-4311-A90D-5831E9560329}" dt="2023-03-15T08:33:25.545" v="3179"/>
-        <pc:sldMkLst>
-          <pc:docMk/>
-          <pc:sldMk cId="813445278" sldId="461"/>
-        </pc:sldMkLst>
-      </pc:sldChg>
-      <pc:sldChg chg="add del ord">
-        <pc:chgData name="Matthieu De Mari" userId="dfb708c9-d8dc-439f-9a3b-c772bf4a311c" providerId="ADAL" clId="{9C56ED94-FF08-4311-A90D-5831E9560329}" dt="2023-03-15T07:25:11.614" v="122"/>
-        <pc:sldMkLst>
-          <pc:docMk/>
-          <pc:sldMk cId="2989704858" sldId="462"/>
-        </pc:sldMkLst>
-      </pc:sldChg>
-      <pc:sldChg chg="del">
-        <pc:chgData name="Matthieu De Mari" userId="dfb708c9-d8dc-439f-9a3b-c772bf4a311c" providerId="ADAL" clId="{9C56ED94-FF08-4311-A90D-5831E9560329}" dt="2023-03-09T09:13:18.719" v="34" actId="47"/>
-        <pc:sldMkLst>
-          <pc:docMk/>
-          <pc:sldMk cId="3007767847" sldId="463"/>
-        </pc:sldMkLst>
-      </pc:sldChg>
-      <pc:sldChg chg="new del">
-        <pc:chgData name="Matthieu De Mari" userId="dfb708c9-d8dc-439f-9a3b-c772bf4a311c" providerId="ADAL" clId="{9C56ED94-FF08-4311-A90D-5831E9560329}" dt="2023-03-15T07:01:03.866" v="62" actId="47"/>
-        <pc:sldMkLst>
-          <pc:docMk/>
-          <pc:sldMk cId="4122694519" sldId="463"/>
-        </pc:sldMkLst>
-      </pc:sldChg>
-      <pc:sldChg chg="add del">
-        <pc:chgData name="Matthieu De Mari" userId="dfb708c9-d8dc-439f-9a3b-c772bf4a311c" providerId="ADAL" clId="{9C56ED94-FF08-4311-A90D-5831E9560329}" dt="2023-03-15T08:53:39.294" v="4245" actId="47"/>
-        <pc:sldMkLst>
-          <pc:docMk/>
-          <pc:sldMk cId="47889816" sldId="464"/>
-        </pc:sldMkLst>
-      </pc:sldChg>
-      <pc:sldChg chg="del">
-        <pc:chgData name="Matthieu De Mari" userId="dfb708c9-d8dc-439f-9a3b-c772bf4a311c" providerId="ADAL" clId="{9C56ED94-FF08-4311-A90D-5831E9560329}" dt="2023-03-09T09:13:21.335" v="36" actId="47"/>
-        <pc:sldMkLst>
-          <pc:docMk/>
-          <pc:sldMk cId="4050530474" sldId="465"/>
-        </pc:sldMkLst>
-      </pc:sldChg>
-      <pc:sldChg chg="del">
-        <pc:chgData name="Matthieu De Mari" userId="dfb708c9-d8dc-439f-9a3b-c772bf4a311c" providerId="ADAL" clId="{9C56ED94-FF08-4311-A90D-5831E9560329}" dt="2023-03-09T09:13:21.335" v="36" actId="47"/>
-        <pc:sldMkLst>
-          <pc:docMk/>
-          <pc:sldMk cId="4107990403" sldId="466"/>
-        </pc:sldMkLst>
-      </pc:sldChg>
-      <pc:sldChg chg="del">
-        <pc:chgData name="Matthieu De Mari" userId="dfb708c9-d8dc-439f-9a3b-c772bf4a311c" providerId="ADAL" clId="{9C56ED94-FF08-4311-A90D-5831E9560329}" dt="2023-03-09T09:13:21.335" v="36" actId="47"/>
-        <pc:sldMkLst>
-          <pc:docMk/>
-          <pc:sldMk cId="4111616225" sldId="467"/>
-        </pc:sldMkLst>
-      </pc:sldChg>
-      <pc:sldChg chg="del">
-        <pc:chgData name="Matthieu De Mari" userId="dfb708c9-d8dc-439f-9a3b-c772bf4a311c" providerId="ADAL" clId="{9C56ED94-FF08-4311-A90D-5831E9560329}" dt="2023-03-09T09:13:21.335" v="36" actId="47"/>
-        <pc:sldMkLst>
-          <pc:docMk/>
-          <pc:sldMk cId="1345006296" sldId="468"/>
-        </pc:sldMkLst>
-      </pc:sldChg>
-      <pc:sldChg chg="del">
-        <pc:chgData name="Matthieu De Mari" userId="dfb708c9-d8dc-439f-9a3b-c772bf4a311c" providerId="ADAL" clId="{9C56ED94-FF08-4311-A90D-5831E9560329}" dt="2023-03-09T09:13:21.335" v="36" actId="47"/>
-        <pc:sldMkLst>
-          <pc:docMk/>
-          <pc:sldMk cId="1003937956" sldId="469"/>
-        </pc:sldMkLst>
-      </pc:sldChg>
-      <pc:sldChg chg="del">
-        <pc:chgData name="Matthieu De Mari" userId="dfb708c9-d8dc-439f-9a3b-c772bf4a311c" providerId="ADAL" clId="{9C56ED94-FF08-4311-A90D-5831E9560329}" dt="2023-03-09T09:13:21.335" v="36" actId="47"/>
-        <pc:sldMkLst>
-          <pc:docMk/>
-          <pc:sldMk cId="1494991067" sldId="470"/>
-        </pc:sldMkLst>
-      </pc:sldChg>
-      <pc:sldChg chg="add del">
-        <pc:chgData name="Matthieu De Mari" userId="dfb708c9-d8dc-439f-9a3b-c772bf4a311c" providerId="ADAL" clId="{9C56ED94-FF08-4311-A90D-5831E9560329}" dt="2023-03-15T08:54:36.658" v="4246"/>
-        <pc:sldMkLst>
-          <pc:docMk/>
-          <pc:sldMk cId="3221576718" sldId="471"/>
-        </pc:sldMkLst>
-      </pc:sldChg>
-      <pc:sldChg chg="del">
-        <pc:chgData name="Matthieu De Mari" userId="dfb708c9-d8dc-439f-9a3b-c772bf4a311c" providerId="ADAL" clId="{9C56ED94-FF08-4311-A90D-5831E9560329}" dt="2023-03-09T09:13:22.605" v="37" actId="47"/>
-        <pc:sldMkLst>
-          <pc:docMk/>
-          <pc:sldMk cId="2469439250" sldId="472"/>
-        </pc:sldMkLst>
-      </pc:sldChg>
-      <pc:sldChg chg="add ord">
-        <pc:chgData name="Matthieu De Mari" userId="dfb708c9-d8dc-439f-9a3b-c772bf4a311c" providerId="ADAL" clId="{9C56ED94-FF08-4311-A90D-5831E9560329}" dt="2023-03-15T07:25:11.614" v="122"/>
-        <pc:sldMkLst>
-          <pc:docMk/>
-          <pc:sldMk cId="2053185467" sldId="473"/>
-        </pc:sldMkLst>
-      </pc:sldChg>
-      <pc:sldChg chg="addSp delSp modSp new mod">
-        <pc:chgData name="Matthieu De Mari" userId="dfb708c9-d8dc-439f-9a3b-c772bf4a311c" providerId="ADAL" clId="{9C56ED94-FF08-4311-A90D-5831E9560329}" dt="2023-03-15T07:35:50.258" v="664" actId="207"/>
-        <pc:sldMkLst>
-          <pc:docMk/>
-          <pc:sldMk cId="1094051178" sldId="474"/>
-        </pc:sldMkLst>
-      </pc:sldChg>
-      <pc:sldChg chg="addSp delSp modSp new mod">
-        <pc:chgData name="Matthieu De Mari" userId="dfb708c9-d8dc-439f-9a3b-c772bf4a311c" providerId="ADAL" clId="{9C56ED94-FF08-4311-A90D-5831E9560329}" dt="2023-03-15T08:02:03.444" v="2145" actId="5793"/>
-        <pc:sldMkLst>
-          <pc:docMk/>
-          <pc:sldMk cId="125150915" sldId="475"/>
-        </pc:sldMkLst>
-      </pc:sldChg>
-      <pc:sldChg chg="new del">
-        <pc:chgData name="Matthieu De Mari" userId="dfb708c9-d8dc-439f-9a3b-c772bf4a311c" providerId="ADAL" clId="{9C56ED94-FF08-4311-A90D-5831E9560329}" dt="2023-03-15T08:25:46.274" v="3025" actId="47"/>
-        <pc:sldMkLst>
-          <pc:docMk/>
-          <pc:sldMk cId="1973789673" sldId="476"/>
-        </pc:sldMkLst>
-      </pc:sldChg>
-      <pc:sldChg chg="addSp delSp modSp new mod modClrScheme chgLayout">
-        <pc:chgData name="Matthieu De Mari" userId="dfb708c9-d8dc-439f-9a3b-c772bf4a311c" providerId="ADAL" clId="{9C56ED94-FF08-4311-A90D-5831E9560329}" dt="2023-03-15T08:12:07.464" v="2680" actId="6549"/>
-        <pc:sldMkLst>
-          <pc:docMk/>
-          <pc:sldMk cId="3237795424" sldId="477"/>
-        </pc:sldMkLst>
-      </pc:sldChg>
-      <pc:sldChg chg="modSp add mod">
-        <pc:chgData name="Matthieu De Mari" userId="dfb708c9-d8dc-439f-9a3b-c772bf4a311c" providerId="ADAL" clId="{9C56ED94-FF08-4311-A90D-5831E9560329}" dt="2023-03-15T07:35:21.456" v="627" actId="20577"/>
-        <pc:sldMkLst>
-          <pc:docMk/>
-          <pc:sldMk cId="932509960" sldId="478"/>
-        </pc:sldMkLst>
-      </pc:sldChg>
-      <pc:sldChg chg="modSp new del mod">
-        <pc:chgData name="Matthieu De Mari" userId="dfb708c9-d8dc-439f-9a3b-c772bf4a311c" providerId="ADAL" clId="{9C56ED94-FF08-4311-A90D-5831E9560329}" dt="2023-03-15T07:34:40.126" v="536" actId="47"/>
-        <pc:sldMkLst>
-          <pc:docMk/>
-          <pc:sldMk cId="3161737942" sldId="478"/>
-        </pc:sldMkLst>
-      </pc:sldChg>
-      <pc:sldChg chg="modSp add mod">
-        <pc:chgData name="Matthieu De Mari" userId="dfb708c9-d8dc-439f-9a3b-c772bf4a311c" providerId="ADAL" clId="{9C56ED94-FF08-4311-A90D-5831E9560329}" dt="2023-03-15T07:39:15.899" v="959" actId="20577"/>
-        <pc:sldMkLst>
-          <pc:docMk/>
-          <pc:sldMk cId="1275862355" sldId="479"/>
-        </pc:sldMkLst>
-      </pc:sldChg>
-      <pc:sldChg chg="addSp delSp modSp add mod">
-        <pc:chgData name="Matthieu De Mari" userId="dfb708c9-d8dc-439f-9a3b-c772bf4a311c" providerId="ADAL" clId="{9C56ED94-FF08-4311-A90D-5831E9560329}" dt="2023-03-15T07:39:21.442" v="963" actId="20577"/>
-        <pc:sldMkLst>
-          <pc:docMk/>
-          <pc:sldMk cId="2239257233" sldId="480"/>
-        </pc:sldMkLst>
-      </pc:sldChg>
-      <pc:sldChg chg="addSp delSp modSp add mod">
-        <pc:chgData name="Matthieu De Mari" userId="dfb708c9-d8dc-439f-9a3b-c772bf4a311c" providerId="ADAL" clId="{9C56ED94-FF08-4311-A90D-5831E9560329}" dt="2023-03-15T07:40:48.087" v="1126" actId="27636"/>
-        <pc:sldMkLst>
-          <pc:docMk/>
-          <pc:sldMk cId="2562768069" sldId="481"/>
-        </pc:sldMkLst>
-      </pc:sldChg>
-      <pc:sldChg chg="addSp delSp modSp add mod">
-        <pc:chgData name="Matthieu De Mari" userId="dfb708c9-d8dc-439f-9a3b-c772bf4a311c" providerId="ADAL" clId="{9C56ED94-FF08-4311-A90D-5831E9560329}" dt="2023-03-15T07:43:27.385" v="1438" actId="20577"/>
-        <pc:sldMkLst>
-          <pc:docMk/>
-          <pc:sldMk cId="3541171842" sldId="482"/>
-        </pc:sldMkLst>
-      </pc:sldChg>
-      <pc:sldChg chg="new del">
-        <pc:chgData name="Matthieu De Mari" userId="dfb708c9-d8dc-439f-9a3b-c772bf4a311c" providerId="ADAL" clId="{9C56ED94-FF08-4311-A90D-5831E9560329}" dt="2023-03-15T07:46:27.128" v="1604" actId="47"/>
-        <pc:sldMkLst>
-          <pc:docMk/>
-          <pc:sldMk cId="2031272788" sldId="483"/>
-        </pc:sldMkLst>
-      </pc:sldChg>
-      <pc:sldChg chg="addSp delSp modSp add mod modClrScheme chgLayout">
-        <pc:chgData name="Matthieu De Mari" userId="dfb708c9-d8dc-439f-9a3b-c772bf4a311c" providerId="ADAL" clId="{9C56ED94-FF08-4311-A90D-5831E9560329}" dt="2023-03-15T07:45:04.987" v="1602" actId="700"/>
-        <pc:sldMkLst>
-          <pc:docMk/>
-          <pc:sldMk cId="199935466" sldId="484"/>
-        </pc:sldMkLst>
-      </pc:sldChg>
-      <pc:sldChg chg="addSp delSp modSp add mod">
-        <pc:chgData name="Matthieu De Mari" userId="dfb708c9-d8dc-439f-9a3b-c772bf4a311c" providerId="ADAL" clId="{9C56ED94-FF08-4311-A90D-5831E9560329}" dt="2023-03-15T07:49:26.059" v="1814" actId="20577"/>
-        <pc:sldMkLst>
-          <pc:docMk/>
-          <pc:sldMk cId="3459688009" sldId="485"/>
-        </pc:sldMkLst>
-      </pc:sldChg>
-      <pc:sldChg chg="addSp delSp modSp add mod">
-        <pc:chgData name="Matthieu De Mari" userId="dfb708c9-d8dc-439f-9a3b-c772bf4a311c" providerId="ADAL" clId="{9C56ED94-FF08-4311-A90D-5831E9560329}" dt="2023-03-15T08:00:49.814" v="1940" actId="20577"/>
-        <pc:sldMkLst>
-          <pc:docMk/>
-          <pc:sldMk cId="3530460312" sldId="486"/>
-        </pc:sldMkLst>
-      </pc:sldChg>
-      <pc:sldChg chg="addSp delSp modSp add mod modClrScheme chgLayout">
-        <pc:chgData name="Matthieu De Mari" userId="dfb708c9-d8dc-439f-9a3b-c772bf4a311c" providerId="ADAL" clId="{9C56ED94-FF08-4311-A90D-5831E9560329}" dt="2023-03-15T08:03:21.135" v="2300" actId="20577"/>
-        <pc:sldMkLst>
-          <pc:docMk/>
-          <pc:sldMk cId="1228659976" sldId="487"/>
-        </pc:sldMkLst>
-      </pc:sldChg>
-      <pc:sldChg chg="addSp delSp modSp add mod">
-        <pc:chgData name="Matthieu De Mari" userId="dfb708c9-d8dc-439f-9a3b-c772bf4a311c" providerId="ADAL" clId="{9C56ED94-FF08-4311-A90D-5831E9560329}" dt="2023-03-15T08:04:07.317" v="2362" actId="1076"/>
-        <pc:sldMkLst>
-          <pc:docMk/>
-          <pc:sldMk cId="3872619914" sldId="488"/>
-        </pc:sldMkLst>
-      </pc:sldChg>
-      <pc:sldChg chg="modSp add mod">
-        <pc:chgData name="Matthieu De Mari" userId="dfb708c9-d8dc-439f-9a3b-c772bf4a311c" providerId="ADAL" clId="{9C56ED94-FF08-4311-A90D-5831E9560329}" dt="2023-03-15T08:25:40.698" v="3024" actId="114"/>
-        <pc:sldMkLst>
-          <pc:docMk/>
-          <pc:sldMk cId="3076288606" sldId="489"/>
-        </pc:sldMkLst>
-      </pc:sldChg>
-      <pc:sldChg chg="addSp delSp modSp new mod">
-        <pc:chgData name="Matthieu De Mari" userId="dfb708c9-d8dc-439f-9a3b-c772bf4a311c" providerId="ADAL" clId="{9C56ED94-FF08-4311-A90D-5831E9560329}" dt="2023-03-15T08:37:04.723" v="3587" actId="20577"/>
-        <pc:sldMkLst>
-          <pc:docMk/>
-          <pc:sldMk cId="2543628540" sldId="490"/>
-        </pc:sldMkLst>
-      </pc:sldChg>
-      <pc:sldChg chg="addSp delSp modSp new mod modClrScheme chgLayout">
-        <pc:chgData name="Matthieu De Mari" userId="dfb708c9-d8dc-439f-9a3b-c772bf4a311c" providerId="ADAL" clId="{9C56ED94-FF08-4311-A90D-5831E9560329}" dt="2023-03-15T08:55:10.511" v="4302" actId="5793"/>
-        <pc:sldMkLst>
-          <pc:docMk/>
-          <pc:sldMk cId="3043047677" sldId="491"/>
-        </pc:sldMkLst>
-      </pc:sldChg>
-      <pc:sldChg chg="add ord">
-        <pc:chgData name="Matthieu De Mari" userId="dfb708c9-d8dc-439f-9a3b-c772bf4a311c" providerId="ADAL" clId="{9C56ED94-FF08-4311-A90D-5831E9560329}" dt="2023-03-15T08:54:44.451" v="4250"/>
-        <pc:sldMkLst>
-          <pc:docMk/>
-          <pc:sldMk cId="453310084" sldId="492"/>
-        </pc:sldMkLst>
-      </pc:sldChg>
-      <pc:sldChg chg="modSp add mod">
-        <pc:chgData name="Matthieu De Mari" userId="dfb708c9-d8dc-439f-9a3b-c772bf4a311c" providerId="ADAL" clId="{9C56ED94-FF08-4311-A90D-5831E9560329}" dt="2023-03-15T08:54:55.299" v="4253" actId="20577"/>
-        <pc:sldMkLst>
-          <pc:docMk/>
-          <pc:sldMk cId="197640958" sldId="493"/>
-        </pc:sldMkLst>
-      </pc:sldChg>
-      <pc:sldChg chg="delSp modSp add mod">
-        <pc:chgData name="Matthieu De Mari" userId="dfb708c9-d8dc-439f-9a3b-c772bf4a311c" providerId="ADAL" clId="{9C56ED94-FF08-4311-A90D-5831E9560329}" dt="2023-03-15T08:39:30.883" v="3980" actId="20577"/>
-        <pc:sldMkLst>
-          <pc:docMk/>
-          <pc:sldMk cId="4277571336" sldId="494"/>
-        </pc:sldMkLst>
-      </pc:sldChg>
-      <pc:sldChg chg="modSp add mod">
-        <pc:chgData name="Matthieu De Mari" userId="dfb708c9-d8dc-439f-9a3b-c772bf4a311c" providerId="ADAL" clId="{9C56ED94-FF08-4311-A90D-5831E9560329}" dt="2023-03-15T08:40:43.675" v="4244" actId="20577"/>
-        <pc:sldMkLst>
-          <pc:docMk/>
-          <pc:sldMk cId="4253433879" sldId="495"/>
-        </pc:sldMkLst>
-      </pc:sldChg>
-    </pc:docChg>
-  </pc:docChgLst>
-  <pc:docChgLst>
-    <pc:chgData name="Matthieu De Mari" userId="dfb708c9-d8dc-439f-9a3b-c772bf4a311c" providerId="ADAL" clId="{40E9C98C-1652-419C-B5C1-C59CBEC5B35C}"/>
-    <pc:docChg chg="modSld">
-      <pc:chgData name="Matthieu De Mari" userId="dfb708c9-d8dc-439f-9a3b-c772bf4a311c" providerId="ADAL" clId="{40E9C98C-1652-419C-B5C1-C59CBEC5B35C}" dt="2023-03-27T06:28:45.260" v="14" actId="20577"/>
-      <pc:docMkLst>
-        <pc:docMk/>
-      </pc:docMkLst>
-    </pc:docChg>
-  </pc:docChgLst>
-  <pc:docChgLst>
-    <pc:chgData name="Matthieu De Mari" userId="dfb708c9-d8dc-439f-9a3b-c772bf4a311c" providerId="ADAL" clId="{A7A059E7-93C7-4781-9870-5EC88FF7F596}"/>
-    <pc:docChg chg="undo custSel addSld delSld modSld sldOrd addSection delSection modSection">
-      <pc:chgData name="Matthieu De Mari" userId="dfb708c9-d8dc-439f-9a3b-c772bf4a311c" providerId="ADAL" clId="{A7A059E7-93C7-4781-9870-5EC88FF7F596}" dt="2023-03-17T13:16:13.601" v="7173" actId="20577"/>
-      <pc:docMkLst>
-        <pc:docMk/>
-      </pc:docMkLst>
-      <pc:sldChg chg="modSp mod">
-        <pc:chgData name="Matthieu De Mari" userId="dfb708c9-d8dc-439f-9a3b-c772bf4a311c" providerId="ADAL" clId="{A7A059E7-93C7-4781-9870-5EC88FF7F596}" dt="2023-03-15T08:57:07.331" v="55" actId="20577"/>
-        <pc:sldMkLst>
-          <pc:docMk/>
-          <pc:sldMk cId="1040156172" sldId="377"/>
-        </pc:sldMkLst>
-      </pc:sldChg>
-      <pc:sldChg chg="modSp new mod">
-        <pc:chgData name="Matthieu De Mari" userId="dfb708c9-d8dc-439f-9a3b-c772bf4a311c" providerId="ADAL" clId="{A7A059E7-93C7-4781-9870-5EC88FF7F596}" dt="2023-03-15T09:07:48.119" v="380" actId="20577"/>
-        <pc:sldMkLst>
-          <pc:docMk/>
-          <pc:sldMk cId="3431685878" sldId="378"/>
-        </pc:sldMkLst>
-      </pc:sldChg>
-      <pc:sldChg chg="addSp delSp modSp new mod modClrScheme chgLayout">
-        <pc:chgData name="Matthieu De Mari" userId="dfb708c9-d8dc-439f-9a3b-c772bf4a311c" providerId="ADAL" clId="{A7A059E7-93C7-4781-9870-5EC88FF7F596}" dt="2023-03-15T09:20:50.395" v="1333" actId="478"/>
-        <pc:sldMkLst>
-          <pc:docMk/>
-          <pc:sldMk cId="2656047251" sldId="379"/>
-        </pc:sldMkLst>
-      </pc:sldChg>
-      <pc:sldChg chg="addSp delSp modSp new mod">
-        <pc:chgData name="Matthieu De Mari" userId="dfb708c9-d8dc-439f-9a3b-c772bf4a311c" providerId="ADAL" clId="{A7A059E7-93C7-4781-9870-5EC88FF7F596}" dt="2023-03-17T11:38:54.610" v="7159" actId="20577"/>
-        <pc:sldMkLst>
-          <pc:docMk/>
-          <pc:sldMk cId="3478712926" sldId="380"/>
-        </pc:sldMkLst>
-      </pc:sldChg>
-      <pc:sldChg chg="addSp delSp modSp new mod modClrScheme chgLayout">
-        <pc:chgData name="Matthieu De Mari" userId="dfb708c9-d8dc-439f-9a3b-c772bf4a311c" providerId="ADAL" clId="{A7A059E7-93C7-4781-9870-5EC88FF7F596}" dt="2023-03-16T07:27:15.751" v="6169" actId="14100"/>
-        <pc:sldMkLst>
-          <pc:docMk/>
-          <pc:sldMk cId="687323073" sldId="381"/>
-        </pc:sldMkLst>
-      </pc:sldChg>
-      <pc:sldChg chg="addSp delSp modSp new mod ord modClrScheme chgLayout">
-        <pc:chgData name="Matthieu De Mari" userId="dfb708c9-d8dc-439f-9a3b-c772bf4a311c" providerId="ADAL" clId="{A7A059E7-93C7-4781-9870-5EC88FF7F596}" dt="2023-03-16T06:54:26.009" v="4372"/>
-        <pc:sldMkLst>
-          <pc:docMk/>
-          <pc:sldMk cId="1749567037" sldId="382"/>
-        </pc:sldMkLst>
-      </pc:sldChg>
-      <pc:sldChg chg="addSp delSp modSp new mod modClrScheme chgLayout">
-        <pc:chgData name="Matthieu De Mari" userId="dfb708c9-d8dc-439f-9a3b-c772bf4a311c" providerId="ADAL" clId="{A7A059E7-93C7-4781-9870-5EC88FF7F596}" dt="2023-03-16T07:25:30.605" v="6050" actId="113"/>
-        <pc:sldMkLst>
-          <pc:docMk/>
-          <pc:sldMk cId="3718139832" sldId="383"/>
-        </pc:sldMkLst>
-      </pc:sldChg>
-      <pc:sldChg chg="modSp new mod">
-        <pc:chgData name="Matthieu De Mari" userId="dfb708c9-d8dc-439f-9a3b-c772bf4a311c" providerId="ADAL" clId="{A7A059E7-93C7-4781-9870-5EC88FF7F596}" dt="2023-03-16T07:46:26.728" v="7140" actId="20577"/>
-        <pc:sldMkLst>
-          <pc:docMk/>
-          <pc:sldMk cId="3649959589" sldId="384"/>
-        </pc:sldMkLst>
-      </pc:sldChg>
-      <pc:sldChg chg="new">
-        <pc:chgData name="Matthieu De Mari" userId="dfb708c9-d8dc-439f-9a3b-c772bf4a311c" providerId="ADAL" clId="{A7A059E7-93C7-4781-9870-5EC88FF7F596}" dt="2023-03-15T09:04:11.964" v="90" actId="680"/>
-        <pc:sldMkLst>
-          <pc:docMk/>
-          <pc:sldMk cId="3174082147" sldId="385"/>
-        </pc:sldMkLst>
-      </pc:sldChg>
-      <pc:sldChg chg="new">
-        <pc:chgData name="Matthieu De Mari" userId="dfb708c9-d8dc-439f-9a3b-c772bf4a311c" providerId="ADAL" clId="{A7A059E7-93C7-4781-9870-5EC88FF7F596}" dt="2023-03-15T09:04:21.070" v="93" actId="680"/>
-        <pc:sldMkLst>
-          <pc:docMk/>
-          <pc:sldMk cId="540619278" sldId="386"/>
-        </pc:sldMkLst>
-      </pc:sldChg>
-      <pc:sldChg chg="del">
-        <pc:chgData name="Matthieu De Mari" userId="dfb708c9-d8dc-439f-9a3b-c772bf4a311c" providerId="ADAL" clId="{A7A059E7-93C7-4781-9870-5EC88FF7F596}" dt="2023-03-15T08:57:13.501" v="56" actId="47"/>
-        <pc:sldMkLst>
-          <pc:docMk/>
-          <pc:sldMk cId="1161233365" sldId="422"/>
-        </pc:sldMkLst>
-      </pc:sldChg>
-      <pc:sldChg chg="modSp add del mod">
-        <pc:chgData name="Matthieu De Mari" userId="dfb708c9-d8dc-439f-9a3b-c772bf4a311c" providerId="ADAL" clId="{A7A059E7-93C7-4781-9870-5EC88FF7F596}" dt="2023-03-15T09:12:47.160" v="1023" actId="20577"/>
-        <pc:sldMkLst>
-          <pc:docMk/>
-          <pc:sldMk cId="4226169062" sldId="423"/>
-        </pc:sldMkLst>
-      </pc:sldChg>
-      <pc:sldChg chg="add">
-        <pc:chgData name="Matthieu De Mari" userId="dfb708c9-d8dc-439f-9a3b-c772bf4a311c" providerId="ADAL" clId="{A7A059E7-93C7-4781-9870-5EC88FF7F596}" dt="2023-03-15T09:08:43.289" v="464" actId="2890"/>
-        <pc:sldMkLst>
-          <pc:docMk/>
-          <pc:sldMk cId="1794465962" sldId="424"/>
-        </pc:sldMkLst>
-      </pc:sldChg>
-      <pc:sldChg chg="modSp add mod">
-        <pc:chgData name="Matthieu De Mari" userId="dfb708c9-d8dc-439f-9a3b-c772bf4a311c" providerId="ADAL" clId="{A7A059E7-93C7-4781-9870-5EC88FF7F596}" dt="2023-03-15T09:12:24.800" v="1004" actId="113"/>
-        <pc:sldMkLst>
-          <pc:docMk/>
-          <pc:sldMk cId="909573732" sldId="425"/>
-        </pc:sldMkLst>
-      </pc:sldChg>
-      <pc:sldChg chg="del">
-        <pc:chgData name="Matthieu De Mari" userId="dfb708c9-d8dc-439f-9a3b-c772bf4a311c" providerId="ADAL" clId="{A7A059E7-93C7-4781-9870-5EC88FF7F596}" dt="2023-03-15T08:57:19.715" v="64" actId="47"/>
-        <pc:sldMkLst>
-          <pc:docMk/>
-          <pc:sldMk cId="2244529904" sldId="425"/>
-        </pc:sldMkLst>
-      </pc:sldChg>
-      <pc:sldChg chg="addSp delSp modSp add mod chgLayout">
-        <pc:chgData name="Matthieu De Mari" userId="dfb708c9-d8dc-439f-9a3b-c772bf4a311c" providerId="ADAL" clId="{A7A059E7-93C7-4781-9870-5EC88FF7F596}" dt="2023-03-16T06:14:32.325" v="2330" actId="1076"/>
-        <pc:sldMkLst>
-          <pc:docMk/>
-          <pc:sldMk cId="730515734" sldId="426"/>
-        </pc:sldMkLst>
-      </pc:sldChg>
-      <pc:sldChg chg="del">
-        <pc:chgData name="Matthieu De Mari" userId="dfb708c9-d8dc-439f-9a3b-c772bf4a311c" providerId="ADAL" clId="{A7A059E7-93C7-4781-9870-5EC88FF7F596}" dt="2023-03-15T08:57:19.715" v="64" actId="47"/>
-        <pc:sldMkLst>
-          <pc:docMk/>
-          <pc:sldMk cId="1586635455" sldId="427"/>
-        </pc:sldMkLst>
-      </pc:sldChg>
-      <pc:sldChg chg="addSp delSp modSp add mod">
-        <pc:chgData name="Matthieu De Mari" userId="dfb708c9-d8dc-439f-9a3b-c772bf4a311c" providerId="ADAL" clId="{A7A059E7-93C7-4781-9870-5EC88FF7F596}" dt="2023-03-15T09:36:58.580" v="2090" actId="22"/>
-        <pc:sldMkLst>
-          <pc:docMk/>
-          <pc:sldMk cId="1865957258" sldId="427"/>
-        </pc:sldMkLst>
-      </pc:sldChg>
-      <pc:sldChg chg="addSp delSp add mod">
-        <pc:chgData name="Matthieu De Mari" userId="dfb708c9-d8dc-439f-9a3b-c772bf4a311c" providerId="ADAL" clId="{A7A059E7-93C7-4781-9870-5EC88FF7F596}" dt="2023-03-15T09:35:32.235" v="2056" actId="22"/>
-        <pc:sldMkLst>
-          <pc:docMk/>
-          <pc:sldMk cId="2022369352" sldId="428"/>
-        </pc:sldMkLst>
-      </pc:sldChg>
-      <pc:sldChg chg="addSp modSp add mod">
-        <pc:chgData name="Matthieu De Mari" userId="dfb708c9-d8dc-439f-9a3b-c772bf4a311c" providerId="ADAL" clId="{A7A059E7-93C7-4781-9870-5EC88FF7F596}" dt="2023-03-16T06:53:24.649" v="4365" actId="20577"/>
-        <pc:sldMkLst>
-          <pc:docMk/>
-          <pc:sldMk cId="1549216935" sldId="429"/>
-        </pc:sldMkLst>
-      </pc:sldChg>
-      <pc:sldChg chg="addSp delSp modSp new mod modClrScheme chgLayout">
-        <pc:chgData name="Matthieu De Mari" userId="dfb708c9-d8dc-439f-9a3b-c772bf4a311c" providerId="ADAL" clId="{A7A059E7-93C7-4781-9870-5EC88FF7F596}" dt="2023-03-16T06:25:07.488" v="2943" actId="20577"/>
-        <pc:sldMkLst>
-          <pc:docMk/>
-          <pc:sldMk cId="2376719029" sldId="430"/>
-        </pc:sldMkLst>
-      </pc:sldChg>
-      <pc:sldChg chg="modSp add mod">
-        <pc:chgData name="Matthieu De Mari" userId="dfb708c9-d8dc-439f-9a3b-c772bf4a311c" providerId="ADAL" clId="{A7A059E7-93C7-4781-9870-5EC88FF7F596}" dt="2023-03-16T06:25:39.554" v="2951" actId="20577"/>
-        <pc:sldMkLst>
-          <pc:docMk/>
-          <pc:sldMk cId="133940590" sldId="431"/>
-        </pc:sldMkLst>
-      </pc:sldChg>
-      <pc:sldChg chg="modSp add mod">
-        <pc:chgData name="Matthieu De Mari" userId="dfb708c9-d8dc-439f-9a3b-c772bf4a311c" providerId="ADAL" clId="{A7A059E7-93C7-4781-9870-5EC88FF7F596}" dt="2023-03-16T06:26:34.363" v="3090" actId="113"/>
-        <pc:sldMkLst>
-          <pc:docMk/>
-          <pc:sldMk cId="2188406462" sldId="432"/>
-        </pc:sldMkLst>
-      </pc:sldChg>
-      <pc:sldChg chg="modSp add mod">
-        <pc:chgData name="Matthieu De Mari" userId="dfb708c9-d8dc-439f-9a3b-c772bf4a311c" providerId="ADAL" clId="{A7A059E7-93C7-4781-9870-5EC88FF7F596}" dt="2023-03-16T06:39:38.270" v="3576" actId="20577"/>
-        <pc:sldMkLst>
-          <pc:docMk/>
-          <pc:sldMk cId="1769846722" sldId="433"/>
-        </pc:sldMkLst>
-      </pc:sldChg>
-      <pc:sldChg chg="addSp delSp modSp add mod">
-        <pc:chgData name="Matthieu De Mari" userId="dfb708c9-d8dc-439f-9a3b-c772bf4a311c" providerId="ADAL" clId="{A7A059E7-93C7-4781-9870-5EC88FF7F596}" dt="2023-03-16T07:21:15.148" v="5706" actId="20577"/>
-        <pc:sldMkLst>
-          <pc:docMk/>
-          <pc:sldMk cId="3094800006" sldId="434"/>
-        </pc:sldMkLst>
-      </pc:sldChg>
-      <pc:sldChg chg="addSp delSp modSp add mod">
-        <pc:chgData name="Matthieu De Mari" userId="dfb708c9-d8dc-439f-9a3b-c772bf4a311c" providerId="ADAL" clId="{A7A059E7-93C7-4781-9870-5EC88FF7F596}" dt="2023-03-16T06:53:52.843" v="4371" actId="207"/>
-        <pc:sldMkLst>
-          <pc:docMk/>
-          <pc:sldMk cId="3322702571" sldId="435"/>
-        </pc:sldMkLst>
-      </pc:sldChg>
-      <pc:sldChg chg="modSp new del mod">
-        <pc:chgData name="Matthieu De Mari" userId="dfb708c9-d8dc-439f-9a3b-c772bf4a311c" providerId="ADAL" clId="{A7A059E7-93C7-4781-9870-5EC88FF7F596}" dt="2023-03-16T06:51:32.545" v="4341" actId="47"/>
-        <pc:sldMkLst>
-          <pc:docMk/>
-          <pc:sldMk cId="1876045740" sldId="436"/>
-        </pc:sldMkLst>
-      </pc:sldChg>
-      <pc:sldChg chg="modSp add mod">
-        <pc:chgData name="Matthieu De Mari" userId="dfb708c9-d8dc-439f-9a3b-c772bf4a311c" providerId="ADAL" clId="{A7A059E7-93C7-4781-9870-5EC88FF7F596}" dt="2023-03-16T06:51:28.732" v="4340" actId="20577"/>
-        <pc:sldMkLst>
-          <pc:docMk/>
-          <pc:sldMk cId="861916422" sldId="437"/>
-        </pc:sldMkLst>
-      </pc:sldChg>
-      <pc:sldChg chg="delSp modSp new mod modClrScheme chgLayout">
-        <pc:chgData name="Matthieu De Mari" userId="dfb708c9-d8dc-439f-9a3b-c772bf4a311c" providerId="ADAL" clId="{A7A059E7-93C7-4781-9870-5EC88FF7F596}" dt="2023-03-16T07:23:00.246" v="5833" actId="20577"/>
-        <pc:sldMkLst>
-          <pc:docMk/>
-          <pc:sldMk cId="671110687" sldId="438"/>
-        </pc:sldMkLst>
-      </pc:sldChg>
-      <pc:sldChg chg="modSp add mod">
-        <pc:chgData name="Matthieu De Mari" userId="dfb708c9-d8dc-439f-9a3b-c772bf4a311c" providerId="ADAL" clId="{A7A059E7-93C7-4781-9870-5EC88FF7F596}" dt="2023-03-16T07:23:04.229" v="5835"/>
-        <pc:sldMkLst>
-          <pc:docMk/>
-          <pc:sldMk cId="1589725218" sldId="439"/>
-        </pc:sldMkLst>
-      </pc:sldChg>
-      <pc:sldChg chg="modSp add mod ord">
-        <pc:chgData name="Matthieu De Mari" userId="dfb708c9-d8dc-439f-9a3b-c772bf4a311c" providerId="ADAL" clId="{A7A059E7-93C7-4781-9870-5EC88FF7F596}" dt="2023-03-16T07:22:56.535" v="5826" actId="20577"/>
-        <pc:sldMkLst>
-          <pc:docMk/>
-          <pc:sldMk cId="2955466283" sldId="440"/>
-        </pc:sldMkLst>
-      </pc:sldChg>
-      <pc:sldChg chg="modSp new mod">
-        <pc:chgData name="Matthieu De Mari" userId="dfb708c9-d8dc-439f-9a3b-c772bf4a311c" providerId="ADAL" clId="{A7A059E7-93C7-4781-9870-5EC88FF7F596}" dt="2023-03-16T07:37:50.621" v="6552" actId="20577"/>
-        <pc:sldMkLst>
-          <pc:docMk/>
-          <pc:sldMk cId="1448790682" sldId="441"/>
-        </pc:sldMkLst>
-      </pc:sldChg>
-      <pc:sldChg chg="addSp delSp modSp add mod">
-        <pc:chgData name="Matthieu De Mari" userId="dfb708c9-d8dc-439f-9a3b-c772bf4a311c" providerId="ADAL" clId="{A7A059E7-93C7-4781-9870-5EC88FF7F596}" dt="2023-03-16T07:29:34.178" v="6239" actId="478"/>
-        <pc:sldMkLst>
-          <pc:docMk/>
-          <pc:sldMk cId="75594367" sldId="442"/>
-        </pc:sldMkLst>
-      </pc:sldChg>
-      <pc:sldChg chg="modSp add mod">
-        <pc:chgData name="Matthieu De Mari" userId="dfb708c9-d8dc-439f-9a3b-c772bf4a311c" providerId="ADAL" clId="{A7A059E7-93C7-4781-9870-5EC88FF7F596}" dt="2023-03-16T07:37:53.817" v="6554"/>
-        <pc:sldMkLst>
-          <pc:docMk/>
-          <pc:sldMk cId="110232736" sldId="443"/>
-        </pc:sldMkLst>
-      </pc:sldChg>
-      <pc:sldChg chg="modSp add mod">
-        <pc:chgData name="Matthieu De Mari" userId="dfb708c9-d8dc-439f-9a3b-c772bf4a311c" providerId="ADAL" clId="{A7A059E7-93C7-4781-9870-5EC88FF7F596}" dt="2023-03-16T07:33:40.151" v="6351" actId="20577"/>
-        <pc:sldMkLst>
-          <pc:docMk/>
-          <pc:sldMk cId="1237963508" sldId="444"/>
-        </pc:sldMkLst>
-      </pc:sldChg>
-      <pc:sldChg chg="modSp add mod">
-        <pc:chgData name="Matthieu De Mari" userId="dfb708c9-d8dc-439f-9a3b-c772bf4a311c" providerId="ADAL" clId="{A7A059E7-93C7-4781-9870-5EC88FF7F596}" dt="2023-03-16T07:33:46.815" v="6354" actId="207"/>
-        <pc:sldMkLst>
-          <pc:docMk/>
-          <pc:sldMk cId="1417587332" sldId="445"/>
-        </pc:sldMkLst>
-      </pc:sldChg>
-      <pc:sldChg chg="modSp new del mod">
-        <pc:chgData name="Matthieu De Mari" userId="dfb708c9-d8dc-439f-9a3b-c772bf4a311c" providerId="ADAL" clId="{A7A059E7-93C7-4781-9870-5EC88FF7F596}" dt="2023-03-16T07:38:37.318" v="6557" actId="47"/>
-        <pc:sldMkLst>
-          <pc:docMk/>
-          <pc:sldMk cId="1902125911" sldId="446"/>
-        </pc:sldMkLst>
-      </pc:sldChg>
-      <pc:sldChg chg="addSp delSp modSp add mod modClrScheme chgLayout">
-        <pc:chgData name="Matthieu De Mari" userId="dfb708c9-d8dc-439f-9a3b-c772bf4a311c" providerId="ADAL" clId="{A7A059E7-93C7-4781-9870-5EC88FF7F596}" dt="2023-03-16T07:45:56.353" v="7110" actId="20577"/>
-        <pc:sldMkLst>
-          <pc:docMk/>
-          <pc:sldMk cId="1624935982" sldId="447"/>
-        </pc:sldMkLst>
-      </pc:sldChg>
-      <pc:sldChg chg="modSp add mod ord">
-        <pc:chgData name="Matthieu De Mari" userId="dfb708c9-d8dc-439f-9a3b-c772bf4a311c" providerId="ADAL" clId="{A7A059E7-93C7-4781-9870-5EC88FF7F596}" dt="2023-03-16T07:39:03.276" v="6598"/>
-        <pc:sldMkLst>
-          <pc:docMk/>
-          <pc:sldMk cId="4016554108" sldId="448"/>
-        </pc:sldMkLst>
-      </pc:sldChg>
-      <pc:sldChg chg="modSp add mod">
-        <pc:chgData name="Matthieu De Mari" userId="dfb708c9-d8dc-439f-9a3b-c772bf4a311c" providerId="ADAL" clId="{A7A059E7-93C7-4781-9870-5EC88FF7F596}" dt="2023-03-16T07:39:01.857" v="6597"/>
-        <pc:sldMkLst>
-          <pc:docMk/>
-          <pc:sldMk cId="512281156" sldId="449"/>
-        </pc:sldMkLst>
-      </pc:sldChg>
-      <pc:sldChg chg="del">
-        <pc:chgData name="Matthieu De Mari" userId="dfb708c9-d8dc-439f-9a3b-c772bf4a311c" providerId="ADAL" clId="{A7A059E7-93C7-4781-9870-5EC88FF7F596}" dt="2023-03-15T08:57:14.502" v="57" actId="47"/>
-        <pc:sldMkLst>
-          <pc:docMk/>
-          <pc:sldMk cId="3149159304" sldId="449"/>
-        </pc:sldMkLst>
-      </pc:sldChg>
-      <pc:sldChg chg="del">
-        <pc:chgData name="Matthieu De Mari" userId="dfb708c9-d8dc-439f-9a3b-c772bf4a311c" providerId="ADAL" clId="{A7A059E7-93C7-4781-9870-5EC88FF7F596}" dt="2023-03-15T08:57:14.502" v="57" actId="47"/>
-        <pc:sldMkLst>
-          <pc:docMk/>
-          <pc:sldMk cId="2020760118" sldId="450"/>
-        </pc:sldMkLst>
-      </pc:sldChg>
-      <pc:sldChg chg="modSp add mod">
-        <pc:chgData name="Matthieu De Mari" userId="dfb708c9-d8dc-439f-9a3b-c772bf4a311c" providerId="ADAL" clId="{A7A059E7-93C7-4781-9870-5EC88FF7F596}" dt="2023-03-16T07:45:46.004" v="7108" actId="20577"/>
-        <pc:sldMkLst>
-          <pc:docMk/>
-          <pc:sldMk cId="3938870733" sldId="450"/>
-        </pc:sldMkLst>
-      </pc:sldChg>
-      <pc:sldChg chg="modSp add mod">
-        <pc:chgData name="Matthieu De Mari" userId="dfb708c9-d8dc-439f-9a3b-c772bf4a311c" providerId="ADAL" clId="{A7A059E7-93C7-4781-9870-5EC88FF7F596}" dt="2023-03-16T07:42:09.377" v="6775" actId="207"/>
-        <pc:sldMkLst>
-          <pc:docMk/>
-          <pc:sldMk cId="3522887232" sldId="451"/>
-        </pc:sldMkLst>
-      </pc:sldChg>
-      <pc:sldChg chg="modSp add mod">
-        <pc:chgData name="Matthieu De Mari" userId="dfb708c9-d8dc-439f-9a3b-c772bf4a311c" providerId="ADAL" clId="{A7A059E7-93C7-4781-9870-5EC88FF7F596}" dt="2023-03-17T13:16:13.601" v="7173" actId="20577"/>
-        <pc:sldMkLst>
-          <pc:docMk/>
-          <pc:sldMk cId="216138188" sldId="452"/>
-        </pc:sldMkLst>
-      </pc:sldChg>
-      <pc:sldChg chg="del">
-        <pc:chgData name="Matthieu De Mari" userId="dfb708c9-d8dc-439f-9a3b-c772bf4a311c" providerId="ADAL" clId="{A7A059E7-93C7-4781-9870-5EC88FF7F596}" dt="2023-03-15T08:57:15.514" v="58" actId="47"/>
-        <pc:sldMkLst>
-          <pc:docMk/>
-          <pc:sldMk cId="4072425385" sldId="454"/>
-        </pc:sldMkLst>
-      </pc:sldChg>
-      <pc:sldChg chg="del">
-        <pc:chgData name="Matthieu De Mari" userId="dfb708c9-d8dc-439f-9a3b-c772bf4a311c" providerId="ADAL" clId="{A7A059E7-93C7-4781-9870-5EC88FF7F596}" dt="2023-03-15T08:57:19.715" v="64" actId="47"/>
-        <pc:sldMkLst>
-          <pc:docMk/>
-          <pc:sldMk cId="1474802136" sldId="456"/>
-        </pc:sldMkLst>
-      </pc:sldChg>
-      <pc:sldChg chg="del">
-        <pc:chgData name="Matthieu De Mari" userId="dfb708c9-d8dc-439f-9a3b-c772bf4a311c" providerId="ADAL" clId="{A7A059E7-93C7-4781-9870-5EC88FF7F596}" dt="2023-03-15T08:57:18.497" v="62" actId="47"/>
-        <pc:sldMkLst>
-          <pc:docMk/>
-          <pc:sldMk cId="3858745428" sldId="457"/>
-        </pc:sldMkLst>
-      </pc:sldChg>
-      <pc:sldChg chg="del">
-        <pc:chgData name="Matthieu De Mari" userId="dfb708c9-d8dc-439f-9a3b-c772bf4a311c" providerId="ADAL" clId="{A7A059E7-93C7-4781-9870-5EC88FF7F596}" dt="2023-03-15T08:57:18.497" v="62" actId="47"/>
-        <pc:sldMkLst>
-          <pc:docMk/>
-          <pc:sldMk cId="3624547080" sldId="459"/>
-        </pc:sldMkLst>
-      </pc:sldChg>
-      <pc:sldChg chg="del">
-        <pc:chgData name="Matthieu De Mari" userId="dfb708c9-d8dc-439f-9a3b-c772bf4a311c" providerId="ADAL" clId="{A7A059E7-93C7-4781-9870-5EC88FF7F596}" dt="2023-03-15T08:57:18.497" v="62" actId="47"/>
-        <pc:sldMkLst>
-          <pc:docMk/>
-          <pc:sldMk cId="727967492" sldId="460"/>
-        </pc:sldMkLst>
-      </pc:sldChg>
-      <pc:sldChg chg="del">
-        <pc:chgData name="Matthieu De Mari" userId="dfb708c9-d8dc-439f-9a3b-c772bf4a311c" providerId="ADAL" clId="{A7A059E7-93C7-4781-9870-5EC88FF7F596}" dt="2023-03-15T08:57:17.764" v="61" actId="47"/>
-        <pc:sldMkLst>
-          <pc:docMk/>
-          <pc:sldMk cId="813445278" sldId="461"/>
-        </pc:sldMkLst>
-      </pc:sldChg>
-      <pc:sldChg chg="del">
-        <pc:chgData name="Matthieu De Mari" userId="dfb708c9-d8dc-439f-9a3b-c772bf4a311c" providerId="ADAL" clId="{A7A059E7-93C7-4781-9870-5EC88FF7F596}" dt="2023-03-15T08:57:18.497" v="62" actId="47"/>
-        <pc:sldMkLst>
-          <pc:docMk/>
-          <pc:sldMk cId="2989704858" sldId="462"/>
-        </pc:sldMkLst>
-      </pc:sldChg>
-      <pc:sldChg chg="del">
-        <pc:chgData name="Matthieu De Mari" userId="dfb708c9-d8dc-439f-9a3b-c772bf4a311c" providerId="ADAL" clId="{A7A059E7-93C7-4781-9870-5EC88FF7F596}" dt="2023-03-15T08:57:19.715" v="64" actId="47"/>
-        <pc:sldMkLst>
-          <pc:docMk/>
-          <pc:sldMk cId="3221576718" sldId="471"/>
-        </pc:sldMkLst>
-      </pc:sldChg>
-      <pc:sldChg chg="del">
-        <pc:chgData name="Matthieu De Mari" userId="dfb708c9-d8dc-439f-9a3b-c772bf4a311c" providerId="ADAL" clId="{A7A059E7-93C7-4781-9870-5EC88FF7F596}" dt="2023-03-15T08:57:18.497" v="62" actId="47"/>
-        <pc:sldMkLst>
-          <pc:docMk/>
-          <pc:sldMk cId="2053185467" sldId="473"/>
-        </pc:sldMkLst>
-      </pc:sldChg>
-      <pc:sldChg chg="del">
-        <pc:chgData name="Matthieu De Mari" userId="dfb708c9-d8dc-439f-9a3b-c772bf4a311c" providerId="ADAL" clId="{A7A059E7-93C7-4781-9870-5EC88FF7F596}" dt="2023-03-15T08:57:15.514" v="58" actId="47"/>
-        <pc:sldMkLst>
-          <pc:docMk/>
-          <pc:sldMk cId="1094051178" sldId="474"/>
-        </pc:sldMkLst>
-      </pc:sldChg>
-      <pc:sldChg chg="del">
-        <pc:chgData name="Matthieu De Mari" userId="dfb708c9-d8dc-439f-9a3b-c772bf4a311c" providerId="ADAL" clId="{A7A059E7-93C7-4781-9870-5EC88FF7F596}" dt="2023-03-15T08:57:16.272" v="59" actId="47"/>
-        <pc:sldMkLst>
-          <pc:docMk/>
-          <pc:sldMk cId="125150915" sldId="475"/>
-        </pc:sldMkLst>
-      </pc:sldChg>
-      <pc:sldChg chg="del">
-        <pc:chgData name="Matthieu De Mari" userId="dfb708c9-d8dc-439f-9a3b-c772bf4a311c" providerId="ADAL" clId="{A7A059E7-93C7-4781-9870-5EC88FF7F596}" dt="2023-03-15T08:57:16.929" v="60" actId="47"/>
-        <pc:sldMkLst>
-          <pc:docMk/>
-          <pc:sldMk cId="3237795424" sldId="477"/>
-        </pc:sldMkLst>
-      </pc:sldChg>
-      <pc:sldChg chg="del">
-        <pc:chgData name="Matthieu De Mari" userId="dfb708c9-d8dc-439f-9a3b-c772bf4a311c" providerId="ADAL" clId="{A7A059E7-93C7-4781-9870-5EC88FF7F596}" dt="2023-03-15T08:57:15.514" v="58" actId="47"/>
-        <pc:sldMkLst>
-          <pc:docMk/>
-          <pc:sldMk cId="932509960" sldId="478"/>
-        </pc:sldMkLst>
-      </pc:sldChg>
-      <pc:sldChg chg="del">
-        <pc:chgData name="Matthieu De Mari" userId="dfb708c9-d8dc-439f-9a3b-c772bf4a311c" providerId="ADAL" clId="{A7A059E7-93C7-4781-9870-5EC88FF7F596}" dt="2023-03-15T08:57:15.514" v="58" actId="47"/>
-        <pc:sldMkLst>
-          <pc:docMk/>
-          <pc:sldMk cId="1275862355" sldId="479"/>
-        </pc:sldMkLst>
-      </pc:sldChg>
-      <pc:sldChg chg="del">
-        <pc:chgData name="Matthieu De Mari" userId="dfb708c9-d8dc-439f-9a3b-c772bf4a311c" providerId="ADAL" clId="{A7A059E7-93C7-4781-9870-5EC88FF7F596}" dt="2023-03-15T08:57:15.514" v="58" actId="47"/>
-        <pc:sldMkLst>
-          <pc:docMk/>
-          <pc:sldMk cId="2239257233" sldId="480"/>
-        </pc:sldMkLst>
-      </pc:sldChg>
-      <pc:sldChg chg="del">
-        <pc:chgData name="Matthieu De Mari" userId="dfb708c9-d8dc-439f-9a3b-c772bf4a311c" providerId="ADAL" clId="{A7A059E7-93C7-4781-9870-5EC88FF7F596}" dt="2023-03-15T08:57:15.514" v="58" actId="47"/>
-        <pc:sldMkLst>
-          <pc:docMk/>
-          <pc:sldMk cId="2562768069" sldId="481"/>
-        </pc:sldMkLst>
-      </pc:sldChg>
-      <pc:sldChg chg="del">
-        <pc:chgData name="Matthieu De Mari" userId="dfb708c9-d8dc-439f-9a3b-c772bf4a311c" providerId="ADAL" clId="{A7A059E7-93C7-4781-9870-5EC88FF7F596}" dt="2023-03-15T08:57:15.514" v="58" actId="47"/>
-        <pc:sldMkLst>
-          <pc:docMk/>
-          <pc:sldMk cId="3541171842" sldId="482"/>
-        </pc:sldMkLst>
-      </pc:sldChg>
-      <pc:sldChg chg="del">
-        <pc:chgData name="Matthieu De Mari" userId="dfb708c9-d8dc-439f-9a3b-c772bf4a311c" providerId="ADAL" clId="{A7A059E7-93C7-4781-9870-5EC88FF7F596}" dt="2023-03-15T08:57:15.514" v="58" actId="47"/>
-        <pc:sldMkLst>
-          <pc:docMk/>
-          <pc:sldMk cId="199935466" sldId="484"/>
-        </pc:sldMkLst>
-      </pc:sldChg>
-      <pc:sldChg chg="del">
-        <pc:chgData name="Matthieu De Mari" userId="dfb708c9-d8dc-439f-9a3b-c772bf4a311c" providerId="ADAL" clId="{A7A059E7-93C7-4781-9870-5EC88FF7F596}" dt="2023-03-15T08:57:15.514" v="58" actId="47"/>
-        <pc:sldMkLst>
-          <pc:docMk/>
-          <pc:sldMk cId="3459688009" sldId="485"/>
-        </pc:sldMkLst>
-      </pc:sldChg>
-      <pc:sldChg chg="del">
-        <pc:chgData name="Matthieu De Mari" userId="dfb708c9-d8dc-439f-9a3b-c772bf4a311c" providerId="ADAL" clId="{A7A059E7-93C7-4781-9870-5EC88FF7F596}" dt="2023-03-15T08:57:15.514" v="58" actId="47"/>
-        <pc:sldMkLst>
-          <pc:docMk/>
-          <pc:sldMk cId="3530460312" sldId="486"/>
-        </pc:sldMkLst>
-      </pc:sldChg>
-      <pc:sldChg chg="del">
-        <pc:chgData name="Matthieu De Mari" userId="dfb708c9-d8dc-439f-9a3b-c772bf4a311c" providerId="ADAL" clId="{A7A059E7-93C7-4781-9870-5EC88FF7F596}" dt="2023-03-15T08:57:16.272" v="59" actId="47"/>
-        <pc:sldMkLst>
-          <pc:docMk/>
-          <pc:sldMk cId="1228659976" sldId="487"/>
-        </pc:sldMkLst>
-      </pc:sldChg>
-      <pc:sldChg chg="del">
-        <pc:chgData name="Matthieu De Mari" userId="dfb708c9-d8dc-439f-9a3b-c772bf4a311c" providerId="ADAL" clId="{A7A059E7-93C7-4781-9870-5EC88FF7F596}" dt="2023-03-15T08:57:16.272" v="59" actId="47"/>
-        <pc:sldMkLst>
-          <pc:docMk/>
-          <pc:sldMk cId="3872619914" sldId="488"/>
-        </pc:sldMkLst>
-      </pc:sldChg>
-      <pc:sldChg chg="del">
-        <pc:chgData name="Matthieu De Mari" userId="dfb708c9-d8dc-439f-9a3b-c772bf4a311c" providerId="ADAL" clId="{A7A059E7-93C7-4781-9870-5EC88FF7F596}" dt="2023-03-15T08:57:17.764" v="61" actId="47"/>
-        <pc:sldMkLst>
-          <pc:docMk/>
-          <pc:sldMk cId="3076288606" sldId="489"/>
-        </pc:sldMkLst>
-      </pc:sldChg>
-      <pc:sldChg chg="del">
-        <pc:chgData name="Matthieu De Mari" userId="dfb708c9-d8dc-439f-9a3b-c772bf4a311c" providerId="ADAL" clId="{A7A059E7-93C7-4781-9870-5EC88FF7F596}" dt="2023-03-15T08:57:19.131" v="63" actId="47"/>
-        <pc:sldMkLst>
-          <pc:docMk/>
-          <pc:sldMk cId="2543628540" sldId="490"/>
-        </pc:sldMkLst>
-      </pc:sldChg>
-      <pc:sldChg chg="del">
-        <pc:chgData name="Matthieu De Mari" userId="dfb708c9-d8dc-439f-9a3b-c772bf4a311c" providerId="ADAL" clId="{A7A059E7-93C7-4781-9870-5EC88FF7F596}" dt="2023-03-15T08:57:19.715" v="64" actId="47"/>
-        <pc:sldMkLst>
-          <pc:docMk/>
-          <pc:sldMk cId="3043047677" sldId="491"/>
-        </pc:sldMkLst>
-      </pc:sldChg>
-      <pc:sldChg chg="del">
-        <pc:chgData name="Matthieu De Mari" userId="dfb708c9-d8dc-439f-9a3b-c772bf4a311c" providerId="ADAL" clId="{A7A059E7-93C7-4781-9870-5EC88FF7F596}" dt="2023-03-15T08:57:19.715" v="64" actId="47"/>
-        <pc:sldMkLst>
-          <pc:docMk/>
-          <pc:sldMk cId="453310084" sldId="492"/>
-        </pc:sldMkLst>
-      </pc:sldChg>
-      <pc:sldChg chg="del">
-        <pc:chgData name="Matthieu De Mari" userId="dfb708c9-d8dc-439f-9a3b-c772bf4a311c" providerId="ADAL" clId="{A7A059E7-93C7-4781-9870-5EC88FF7F596}" dt="2023-03-15T08:57:19.715" v="64" actId="47"/>
-        <pc:sldMkLst>
-          <pc:docMk/>
-          <pc:sldMk cId="197640958" sldId="493"/>
-        </pc:sldMkLst>
-      </pc:sldChg>
-      <pc:sldChg chg="del">
-        <pc:chgData name="Matthieu De Mari" userId="dfb708c9-d8dc-439f-9a3b-c772bf4a311c" providerId="ADAL" clId="{A7A059E7-93C7-4781-9870-5EC88FF7F596}" dt="2023-03-15T08:57:19.131" v="63" actId="47"/>
-        <pc:sldMkLst>
-          <pc:docMk/>
-          <pc:sldMk cId="4277571336" sldId="494"/>
-        </pc:sldMkLst>
-      </pc:sldChg>
-      <pc:sldChg chg="del">
-        <pc:chgData name="Matthieu De Mari" userId="dfb708c9-d8dc-439f-9a3b-c772bf4a311c" providerId="ADAL" clId="{A7A059E7-93C7-4781-9870-5EC88FF7F596}" dt="2023-03-15T08:57:19.131" v="63" actId="47"/>
-        <pc:sldMkLst>
-          <pc:docMk/>
-          <pc:sldMk cId="4253433879" sldId="495"/>
-        </pc:sldMkLst>
-      </pc:sldChg>
-    </pc:docChg>
-  </pc:docChgLst>
-  <pc:docChgLst>
-    <pc:chgData name="Matthieu De Mari" userId="dfb708c9-d8dc-439f-9a3b-c772bf4a311c" providerId="ADAL" clId="{A29F1DA3-46ED-49E1-9076-FD8C4CFEDB88}"/>
-    <pc:docChg chg="custSel delSld modSld modSection">
-      <pc:chgData name="Matthieu De Mari" userId="dfb708c9-d8dc-439f-9a3b-c772bf4a311c" providerId="ADAL" clId="{A29F1DA3-46ED-49E1-9076-FD8C4CFEDB88}" dt="2024-04-04T06:34:18.133" v="292" actId="20577"/>
-      <pc:docMkLst>
-        <pc:docMk/>
-      </pc:docMkLst>
-      <pc:sldChg chg="modSp mod">
-        <pc:chgData name="Matthieu De Mari" userId="dfb708c9-d8dc-439f-9a3b-c772bf4a311c" providerId="ADAL" clId="{A29F1DA3-46ED-49E1-9076-FD8C4CFEDB88}" dt="2024-04-04T06:34:18.133" v="292" actId="20577"/>
-        <pc:sldMkLst>
-          <pc:docMk/>
-          <pc:sldMk cId="1040156172" sldId="377"/>
-        </pc:sldMkLst>
-      </pc:sldChg>
-      <pc:sldChg chg="modSp mod">
-        <pc:chgData name="Matthieu De Mari" userId="dfb708c9-d8dc-439f-9a3b-c772bf4a311c" providerId="ADAL" clId="{A29F1DA3-46ED-49E1-9076-FD8C4CFEDB88}" dt="2024-04-04T06:26:35.549" v="67" actId="20577"/>
-        <pc:sldMkLst>
-          <pc:docMk/>
-          <pc:sldMk cId="3624888120" sldId="378"/>
-        </pc:sldMkLst>
-      </pc:sldChg>
-      <pc:sldChg chg="modSp mod">
-        <pc:chgData name="Matthieu De Mari" userId="dfb708c9-d8dc-439f-9a3b-c772bf4a311c" providerId="ADAL" clId="{A29F1DA3-46ED-49E1-9076-FD8C4CFEDB88}" dt="2024-04-04T06:27:11.444" v="98" actId="20577"/>
-        <pc:sldMkLst>
-          <pc:docMk/>
-          <pc:sldMk cId="672202442" sldId="381"/>
-        </pc:sldMkLst>
-      </pc:sldChg>
-      <pc:sldChg chg="modSp mod">
-        <pc:chgData name="Matthieu De Mari" userId="dfb708c9-d8dc-439f-9a3b-c772bf4a311c" providerId="ADAL" clId="{A29F1DA3-46ED-49E1-9076-FD8C4CFEDB88}" dt="2024-04-04T06:18:16.856" v="14" actId="5793"/>
-        <pc:sldMkLst>
-          <pc:docMk/>
-          <pc:sldMk cId="1493428235" sldId="382"/>
-        </pc:sldMkLst>
-      </pc:sldChg>
-      <pc:sldChg chg="modSp mod">
-        <pc:chgData name="Matthieu De Mari" userId="dfb708c9-d8dc-439f-9a3b-c772bf4a311c" providerId="ADAL" clId="{A29F1DA3-46ED-49E1-9076-FD8C4CFEDB88}" dt="2024-04-04T06:27:34.149" v="130" actId="20577"/>
-        <pc:sldMkLst>
-          <pc:docMk/>
-          <pc:sldMk cId="1695873005" sldId="383"/>
-        </pc:sldMkLst>
-      </pc:sldChg>
-      <pc:sldChg chg="modSp mod">
-        <pc:chgData name="Matthieu De Mari" userId="dfb708c9-d8dc-439f-9a3b-c772bf4a311c" providerId="ADAL" clId="{A29F1DA3-46ED-49E1-9076-FD8C4CFEDB88}" dt="2024-04-04T06:27:55.638" v="167" actId="20577"/>
-        <pc:sldMkLst>
-          <pc:docMk/>
-          <pc:sldMk cId="406923035" sldId="556"/>
-        </pc:sldMkLst>
-      </pc:sldChg>
-      <pc:sldChg chg="del">
-        <pc:chgData name="Matthieu De Mari" userId="dfb708c9-d8dc-439f-9a3b-c772bf4a311c" providerId="ADAL" clId="{A29F1DA3-46ED-49E1-9076-FD8C4CFEDB88}" dt="2024-04-04T06:28:09.642" v="168" actId="47"/>
-        <pc:sldMkLst>
-          <pc:docMk/>
-          <pc:sldMk cId="1427723061" sldId="562"/>
-        </pc:sldMkLst>
-      </pc:sldChg>
-      <pc:sldChg chg="modSp mod">
-        <pc:chgData name="Matthieu De Mari" userId="dfb708c9-d8dc-439f-9a3b-c772bf4a311c" providerId="ADAL" clId="{A29F1DA3-46ED-49E1-9076-FD8C4CFEDB88}" dt="2024-04-04T06:28:34.617" v="220" actId="20577"/>
-        <pc:sldMkLst>
-          <pc:docMk/>
-          <pc:sldMk cId="629787424" sldId="564"/>
-        </pc:sldMkLst>
-      </pc:sldChg>
-      <pc:sldChg chg="modSp mod">
-        <pc:chgData name="Matthieu De Mari" userId="dfb708c9-d8dc-439f-9a3b-c772bf4a311c" providerId="ADAL" clId="{A29F1DA3-46ED-49E1-9076-FD8C4CFEDB88}" dt="2024-04-04T06:29:03.375" v="246" actId="20577"/>
-        <pc:sldMkLst>
-          <pc:docMk/>
-          <pc:sldMk cId="380386528" sldId="566"/>
-        </pc:sldMkLst>
-      </pc:sldChg>
-      <pc:sldChg chg="modSp mod">
-        <pc:chgData name="Matthieu De Mari" userId="dfb708c9-d8dc-439f-9a3b-c772bf4a311c" providerId="ADAL" clId="{A29F1DA3-46ED-49E1-9076-FD8C4CFEDB88}" dt="2024-04-04T06:31:03.189" v="255" actId="20577"/>
-        <pc:sldMkLst>
-          <pc:docMk/>
-          <pc:sldMk cId="4062348375" sldId="589"/>
-        </pc:sldMkLst>
-      </pc:sldChg>
-      <pc:sldChg chg="modSp mod">
-        <pc:chgData name="Matthieu De Mari" userId="dfb708c9-d8dc-439f-9a3b-c772bf4a311c" providerId="ADAL" clId="{A29F1DA3-46ED-49E1-9076-FD8C4CFEDB88}" dt="2024-04-04T06:32:27.950" v="290" actId="20577"/>
-        <pc:sldMkLst>
-          <pc:docMk/>
-          <pc:sldMk cId="354933213" sldId="618"/>
-        </pc:sldMkLst>
-      </pc:sldChg>
-    </pc:docChg>
-  </pc:docChgLst>
-  <pc:docChgLst>
-    <pc:chgData name="Matthieu De Mari" userId="dfb708c9-d8dc-439f-9a3b-c772bf4a311c" providerId="ADAL" clId="{A47A6B7A-BB49-46B6-95C9-1A9A2555371D}"/>
-    <pc:docChg chg="custSel addSld delSld modSld addSection delSection modSection">
-      <pc:chgData name="Matthieu De Mari" userId="dfb708c9-d8dc-439f-9a3b-c772bf4a311c" providerId="ADAL" clId="{A47A6B7A-BB49-46B6-95C9-1A9A2555371D}" dt="2023-03-22T06:20:12.258" v="251" actId="20577"/>
-      <pc:docMkLst>
-        <pc:docMk/>
-      </pc:docMkLst>
-      <pc:sldChg chg="modSp mod">
-        <pc:chgData name="Matthieu De Mari" userId="dfb708c9-d8dc-439f-9a3b-c772bf4a311c" providerId="ADAL" clId="{A47A6B7A-BB49-46B6-95C9-1A9A2555371D}" dt="2023-03-22T06:17:27.275" v="32" actId="20577"/>
-        <pc:sldMkLst>
-          <pc:docMk/>
-          <pc:sldMk cId="1040156172" sldId="377"/>
-        </pc:sldMkLst>
-      </pc:sldChg>
-      <pc:sldChg chg="del">
-        <pc:chgData name="Matthieu De Mari" userId="dfb708c9-d8dc-439f-9a3b-c772bf4a311c" providerId="ADAL" clId="{A47A6B7A-BB49-46B6-95C9-1A9A2555371D}" dt="2023-03-22T06:17:29.842" v="33" actId="47"/>
-        <pc:sldMkLst>
-          <pc:docMk/>
-          <pc:sldMk cId="1571224013" sldId="378"/>
-        </pc:sldMkLst>
-      </pc:sldChg>
-      <pc:sldChg chg="new">
-        <pc:chgData name="Matthieu De Mari" userId="dfb708c9-d8dc-439f-9a3b-c772bf4a311c" providerId="ADAL" clId="{A47A6B7A-BB49-46B6-95C9-1A9A2555371D}" dt="2023-03-22T06:17:45.723" v="44" actId="680"/>
-        <pc:sldMkLst>
-          <pc:docMk/>
-          <pc:sldMk cId="3951386030" sldId="378"/>
-        </pc:sldMkLst>
-      </pc:sldChg>
-      <pc:sldChg chg="del">
-        <pc:chgData name="Matthieu De Mari" userId="dfb708c9-d8dc-439f-9a3b-c772bf4a311c" providerId="ADAL" clId="{A47A6B7A-BB49-46B6-95C9-1A9A2555371D}" dt="2023-03-22T06:17:36.347" v="41" actId="47"/>
-        <pc:sldMkLst>
-          <pc:docMk/>
-          <pc:sldMk cId="319636625" sldId="379"/>
-        </pc:sldMkLst>
-      </pc:sldChg>
-      <pc:sldChg chg="modSp new mod">
-        <pc:chgData name="Matthieu De Mari" userId="dfb708c9-d8dc-439f-9a3b-c772bf4a311c" providerId="ADAL" clId="{A47A6B7A-BB49-46B6-95C9-1A9A2555371D}" dt="2023-03-22T06:18:25.179" v="81" actId="20577"/>
-        <pc:sldMkLst>
-          <pc:docMk/>
-          <pc:sldMk cId="3273590381" sldId="379"/>
-        </pc:sldMkLst>
-      </pc:sldChg>
-      <pc:sldChg chg="addSp delSp modSp new mod modClrScheme chgLayout">
-        <pc:chgData name="Matthieu De Mari" userId="dfb708c9-d8dc-439f-9a3b-c772bf4a311c" providerId="ADAL" clId="{A47A6B7A-BB49-46B6-95C9-1A9A2555371D}" dt="2023-03-22T06:18:52.522" v="148" actId="478"/>
-        <pc:sldMkLst>
-          <pc:docMk/>
-          <pc:sldMk cId="560452419" sldId="380"/>
-        </pc:sldMkLst>
-      </pc:sldChg>
-      <pc:sldChg chg="del">
-        <pc:chgData name="Matthieu De Mari" userId="dfb708c9-d8dc-439f-9a3b-c772bf4a311c" providerId="ADAL" clId="{A47A6B7A-BB49-46B6-95C9-1A9A2555371D}" dt="2023-03-22T06:17:29.842" v="33" actId="47"/>
-        <pc:sldMkLst>
-          <pc:docMk/>
-          <pc:sldMk cId="2412436523" sldId="380"/>
-        </pc:sldMkLst>
-      </pc:sldChg>
-      <pc:sldChg chg="del">
-        <pc:chgData name="Matthieu De Mari" userId="dfb708c9-d8dc-439f-9a3b-c772bf4a311c" providerId="ADAL" clId="{A47A6B7A-BB49-46B6-95C9-1A9A2555371D}" dt="2023-03-22T06:17:30.749" v="34" actId="47"/>
-        <pc:sldMkLst>
-          <pc:docMk/>
-          <pc:sldMk cId="3929722451" sldId="381"/>
-        </pc:sldMkLst>
-      </pc:sldChg>
-      <pc:sldChg chg="modSp add mod">
-        <pc:chgData name="Matthieu De Mari" userId="dfb708c9-d8dc-439f-9a3b-c772bf4a311c" providerId="ADAL" clId="{A47A6B7A-BB49-46B6-95C9-1A9A2555371D}" dt="2023-03-22T06:19:44.888" v="226" actId="255"/>
-        <pc:sldMkLst>
-          <pc:docMk/>
-          <pc:sldMk cId="3980915418" sldId="381"/>
-        </pc:sldMkLst>
-      </pc:sldChg>
-      <pc:sldChg chg="modSp add mod">
-        <pc:chgData name="Matthieu De Mari" userId="dfb708c9-d8dc-439f-9a3b-c772bf4a311c" providerId="ADAL" clId="{A47A6B7A-BB49-46B6-95C9-1A9A2555371D}" dt="2023-03-22T06:20:12.258" v="251" actId="20577"/>
-        <pc:sldMkLst>
-          <pc:docMk/>
-          <pc:sldMk cId="173920476" sldId="382"/>
-        </pc:sldMkLst>
-      </pc:sldChg>
-      <pc:sldChg chg="del">
-        <pc:chgData name="Matthieu De Mari" userId="dfb708c9-d8dc-439f-9a3b-c772bf4a311c" providerId="ADAL" clId="{A47A6B7A-BB49-46B6-95C9-1A9A2555371D}" dt="2023-03-22T06:17:32.893" v="37" actId="47"/>
-        <pc:sldMkLst>
-          <pc:docMk/>
-          <pc:sldMk cId="2291200604" sldId="382"/>
-        </pc:sldMkLst>
-      </pc:sldChg>
-      <pc:sldChg chg="del">
-        <pc:chgData name="Matthieu De Mari" userId="dfb708c9-d8dc-439f-9a3b-c772bf4a311c" providerId="ADAL" clId="{A47A6B7A-BB49-46B6-95C9-1A9A2555371D}" dt="2023-03-22T06:17:33.550" v="38" actId="47"/>
-        <pc:sldMkLst>
-          <pc:docMk/>
-          <pc:sldMk cId="3242948426" sldId="383"/>
-        </pc:sldMkLst>
-      </pc:sldChg>
-      <pc:sldChg chg="del">
-        <pc:chgData name="Matthieu De Mari" userId="dfb708c9-d8dc-439f-9a3b-c772bf4a311c" providerId="ADAL" clId="{A47A6B7A-BB49-46B6-95C9-1A9A2555371D}" dt="2023-03-22T06:17:34.594" v="39" actId="47"/>
-        <pc:sldMkLst>
-          <pc:docMk/>
-          <pc:sldMk cId="1463768414" sldId="384"/>
-        </pc:sldMkLst>
-      </pc:sldChg>
-      <pc:sldChg chg="del">
-        <pc:chgData name="Matthieu De Mari" userId="dfb708c9-d8dc-439f-9a3b-c772bf4a311c" providerId="ADAL" clId="{A47A6B7A-BB49-46B6-95C9-1A9A2555371D}" dt="2023-03-22T06:17:35.483" v="40" actId="47"/>
-        <pc:sldMkLst>
-          <pc:docMk/>
-          <pc:sldMk cId="1117217621" sldId="385"/>
-        </pc:sldMkLst>
-      </pc:sldChg>
-      <pc:sldChg chg="del">
-        <pc:chgData name="Matthieu De Mari" userId="dfb708c9-d8dc-439f-9a3b-c772bf4a311c" providerId="ADAL" clId="{A47A6B7A-BB49-46B6-95C9-1A9A2555371D}" dt="2023-03-22T06:17:31.628" v="35" actId="47"/>
-        <pc:sldMkLst>
-          <pc:docMk/>
-          <pc:sldMk cId="1472440386" sldId="386"/>
-        </pc:sldMkLst>
-      </pc:sldChg>
-      <pc:sldChg chg="del">
-        <pc:chgData name="Matthieu De Mari" userId="dfb708c9-d8dc-439f-9a3b-c772bf4a311c" providerId="ADAL" clId="{A47A6B7A-BB49-46B6-95C9-1A9A2555371D}" dt="2023-03-22T06:17:32.256" v="36" actId="47"/>
-        <pc:sldMkLst>
-          <pc:docMk/>
-          <pc:sldMk cId="3529830610" sldId="387"/>
-        </pc:sldMkLst>
-      </pc:sldChg>
-    </pc:docChg>
-  </pc:docChgLst>
-  <pc:docChgLst>
-    <pc:chgData name="Matthieu De Mari" userId="dfb708c9-d8dc-439f-9a3b-c772bf4a311c" providerId="ADAL" clId="{CF6A5140-9227-409F-9187-B98CCD837415}"/>
-    <pc:docChg chg="undo redo custSel addSld delSld modSld sldOrd addSection delSection modSection">
-      <pc:chgData name="Matthieu De Mari" userId="dfb708c9-d8dc-439f-9a3b-c772bf4a311c" providerId="ADAL" clId="{CF6A5140-9227-409F-9187-B98CCD837415}" dt="2023-03-09T08:45:37.083" v="10704" actId="20577"/>
-      <pc:docMkLst>
-        <pc:docMk/>
-      </pc:docMkLst>
-      <pc:sldChg chg="add">
-        <pc:chgData name="Matthieu De Mari" userId="dfb708c9-d8dc-439f-9a3b-c772bf4a311c" providerId="ADAL" clId="{CF6A5140-9227-409F-9187-B98CCD837415}" dt="2023-03-08T06:42:49.197" v="464"/>
-        <pc:sldMkLst>
-          <pc:docMk/>
-          <pc:sldMk cId="3739270414" sldId="258"/>
-        </pc:sldMkLst>
-      </pc:sldChg>
-      <pc:sldChg chg="modSp add mod">
-        <pc:chgData name="Matthieu De Mari" userId="dfb708c9-d8dc-439f-9a3b-c772bf4a311c" providerId="ADAL" clId="{CF6A5140-9227-409F-9187-B98CCD837415}" dt="2023-03-08T06:45:03.461" v="613" actId="20577"/>
-        <pc:sldMkLst>
-          <pc:docMk/>
-          <pc:sldMk cId="3115582948" sldId="259"/>
-        </pc:sldMkLst>
-      </pc:sldChg>
-      <pc:sldChg chg="add">
-        <pc:chgData name="Matthieu De Mari" userId="dfb708c9-d8dc-439f-9a3b-c772bf4a311c" providerId="ADAL" clId="{CF6A5140-9227-409F-9187-B98CCD837415}" dt="2023-03-08T06:42:49.197" v="464"/>
-        <pc:sldMkLst>
-          <pc:docMk/>
-          <pc:sldMk cId="2366002138" sldId="265"/>
-        </pc:sldMkLst>
-      </pc:sldChg>
-      <pc:sldChg chg="add">
-        <pc:chgData name="Matthieu De Mari" userId="dfb708c9-d8dc-439f-9a3b-c772bf4a311c" providerId="ADAL" clId="{CF6A5140-9227-409F-9187-B98CCD837415}" dt="2023-03-08T06:42:49.197" v="464"/>
-        <pc:sldMkLst>
-          <pc:docMk/>
-          <pc:sldMk cId="1944673108" sldId="268"/>
-        </pc:sldMkLst>
-      </pc:sldChg>
-      <pc:sldChg chg="modSp add mod">
-        <pc:chgData name="Matthieu De Mari" userId="dfb708c9-d8dc-439f-9a3b-c772bf4a311c" providerId="ADAL" clId="{CF6A5140-9227-409F-9187-B98CCD837415}" dt="2023-03-08T06:45:38.844" v="651" actId="20577"/>
-        <pc:sldMkLst>
-          <pc:docMk/>
-          <pc:sldMk cId="16380507" sldId="270"/>
-        </pc:sldMkLst>
-      </pc:sldChg>
-      <pc:sldChg chg="add">
-        <pc:chgData name="Matthieu De Mari" userId="dfb708c9-d8dc-439f-9a3b-c772bf4a311c" providerId="ADAL" clId="{CF6A5140-9227-409F-9187-B98CCD837415}" dt="2023-03-08T06:42:49.197" v="464"/>
-        <pc:sldMkLst>
-          <pc:docMk/>
-          <pc:sldMk cId="483806848" sldId="271"/>
-        </pc:sldMkLst>
-      </pc:sldChg>
-      <pc:sldChg chg="del">
-        <pc:chgData name="Matthieu De Mari" userId="dfb708c9-d8dc-439f-9a3b-c772bf4a311c" providerId="ADAL" clId="{CF6A5140-9227-409F-9187-B98CCD837415}" dt="2023-03-08T06:05:16.161" v="65" actId="47"/>
-        <pc:sldMkLst>
-          <pc:docMk/>
-          <pc:sldMk cId="1628130454" sldId="272"/>
-        </pc:sldMkLst>
-      </pc:sldChg>
-      <pc:sldChg chg="del">
-        <pc:chgData name="Matthieu De Mari" userId="dfb708c9-d8dc-439f-9a3b-c772bf4a311c" providerId="ADAL" clId="{CF6A5140-9227-409F-9187-B98CCD837415}" dt="2023-03-08T06:05:16.161" v="65" actId="47"/>
-        <pc:sldMkLst>
-          <pc:docMk/>
-          <pc:sldMk cId="3014069118" sldId="273"/>
-        </pc:sldMkLst>
-      </pc:sldChg>
-      <pc:sldChg chg="del">
-        <pc:chgData name="Matthieu De Mari" userId="dfb708c9-d8dc-439f-9a3b-c772bf4a311c" providerId="ADAL" clId="{CF6A5140-9227-409F-9187-B98CCD837415}" dt="2023-03-08T06:05:16.161" v="65" actId="47"/>
-        <pc:sldMkLst>
-          <pc:docMk/>
-          <pc:sldMk cId="1813455260" sldId="274"/>
-        </pc:sldMkLst>
-      </pc:sldChg>
-      <pc:sldChg chg="add del">
-        <pc:chgData name="Matthieu De Mari" userId="dfb708c9-d8dc-439f-9a3b-c772bf4a311c" providerId="ADAL" clId="{CF6A5140-9227-409F-9187-B98CCD837415}" dt="2023-03-09T08:09:47.699" v="10404" actId="47"/>
-        <pc:sldMkLst>
-          <pc:docMk/>
-          <pc:sldMk cId="4232115997" sldId="303"/>
-        </pc:sldMkLst>
-      </pc:sldChg>
-      <pc:sldChg chg="modSp del mod">
-        <pc:chgData name="Matthieu De Mari" userId="dfb708c9-d8dc-439f-9a3b-c772bf4a311c" providerId="ADAL" clId="{CF6A5140-9227-409F-9187-B98CCD837415}" dt="2023-03-09T08:10:07.550" v="10409" actId="47"/>
-        <pc:sldMkLst>
-          <pc:docMk/>
-          <pc:sldMk cId="2858358615" sldId="314"/>
-        </pc:sldMkLst>
-      </pc:sldChg>
-      <pc:sldChg chg="modSp mod">
-        <pc:chgData name="Matthieu De Mari" userId="dfb708c9-d8dc-439f-9a3b-c772bf4a311c" providerId="ADAL" clId="{CF6A5140-9227-409F-9187-B98CCD837415}" dt="2023-03-09T08:31:34.970" v="10417" actId="20577"/>
-        <pc:sldMkLst>
-          <pc:docMk/>
-          <pc:sldMk cId="1040156172" sldId="377"/>
-        </pc:sldMkLst>
-      </pc:sldChg>
-      <pc:sldChg chg="del">
-        <pc:chgData name="Matthieu De Mari" userId="dfb708c9-d8dc-439f-9a3b-c772bf4a311c" providerId="ADAL" clId="{CF6A5140-9227-409F-9187-B98CCD837415}" dt="2023-03-08T06:05:17.999" v="67" actId="47"/>
-        <pc:sldMkLst>
-          <pc:docMk/>
-          <pc:sldMk cId="820057187" sldId="378"/>
-        </pc:sldMkLst>
-      </pc:sldChg>
-      <pc:sldChg chg="del">
-        <pc:chgData name="Matthieu De Mari" userId="dfb708c9-d8dc-439f-9a3b-c772bf4a311c" providerId="ADAL" clId="{CF6A5140-9227-409F-9187-B98CCD837415}" dt="2023-03-08T06:05:24.214" v="74" actId="47"/>
-        <pc:sldMkLst>
-          <pc:docMk/>
-          <pc:sldMk cId="691565538" sldId="379"/>
-        </pc:sldMkLst>
-      </pc:sldChg>
-      <pc:sldChg chg="add">
-        <pc:chgData name="Matthieu De Mari" userId="dfb708c9-d8dc-439f-9a3b-c772bf4a311c" providerId="ADAL" clId="{CF6A5140-9227-409F-9187-B98CCD837415}" dt="2023-03-08T06:42:49.197" v="464"/>
-        <pc:sldMkLst>
-          <pc:docMk/>
-          <pc:sldMk cId="2105998534" sldId="379"/>
-        </pc:sldMkLst>
-      </pc:sldChg>
-      <pc:sldChg chg="del">
-        <pc:chgData name="Matthieu De Mari" userId="dfb708c9-d8dc-439f-9a3b-c772bf4a311c" providerId="ADAL" clId="{CF6A5140-9227-409F-9187-B98CCD837415}" dt="2023-03-08T06:05:17.054" v="66" actId="47"/>
-        <pc:sldMkLst>
-          <pc:docMk/>
-          <pc:sldMk cId="4217274173" sldId="380"/>
-        </pc:sldMkLst>
-      </pc:sldChg>
-      <pc:sldChg chg="del">
-        <pc:chgData name="Matthieu De Mari" userId="dfb708c9-d8dc-439f-9a3b-c772bf4a311c" providerId="ADAL" clId="{CF6A5140-9227-409F-9187-B98CCD837415}" dt="2023-03-08T06:05:21.493" v="71" actId="47"/>
-        <pc:sldMkLst>
-          <pc:docMk/>
-          <pc:sldMk cId="1253114987" sldId="381"/>
-        </pc:sldMkLst>
-      </pc:sldChg>
-      <pc:sldChg chg="del">
-        <pc:chgData name="Matthieu De Mari" userId="dfb708c9-d8dc-439f-9a3b-c772bf4a311c" providerId="ADAL" clId="{CF6A5140-9227-409F-9187-B98CCD837415}" dt="2023-03-08T06:05:18.882" v="68" actId="47"/>
-        <pc:sldMkLst>
-          <pc:docMk/>
-          <pc:sldMk cId="336152115" sldId="382"/>
-        </pc:sldMkLst>
-      </pc:sldChg>
-      <pc:sldChg chg="modSp add mod">
-        <pc:chgData name="Matthieu De Mari" userId="dfb708c9-d8dc-439f-9a3b-c772bf4a311c" providerId="ADAL" clId="{CF6A5140-9227-409F-9187-B98CCD837415}" dt="2023-03-08T06:44:39.947" v="606" actId="20577"/>
-        <pc:sldMkLst>
-          <pc:docMk/>
-          <pc:sldMk cId="1213996271" sldId="382"/>
-        </pc:sldMkLst>
-      </pc:sldChg>
-      <pc:sldChg chg="del">
-        <pc:chgData name="Matthieu De Mari" userId="dfb708c9-d8dc-439f-9a3b-c772bf4a311c" providerId="ADAL" clId="{CF6A5140-9227-409F-9187-B98CCD837415}" dt="2023-03-08T06:05:20.621" v="70" actId="47"/>
-        <pc:sldMkLst>
-          <pc:docMk/>
-          <pc:sldMk cId="1681210728" sldId="383"/>
-        </pc:sldMkLst>
-      </pc:sldChg>
-      <pc:sldChg chg="del">
-        <pc:chgData name="Matthieu De Mari" userId="dfb708c9-d8dc-439f-9a3b-c772bf4a311c" providerId="ADAL" clId="{CF6A5140-9227-409F-9187-B98CCD837415}" dt="2023-03-08T06:05:19.819" v="69" actId="47"/>
-        <pc:sldMkLst>
-          <pc:docMk/>
-          <pc:sldMk cId="1342602480" sldId="384"/>
-        </pc:sldMkLst>
-      </pc:sldChg>
-      <pc:sldChg chg="del">
-        <pc:chgData name="Matthieu De Mari" userId="dfb708c9-d8dc-439f-9a3b-c772bf4a311c" providerId="ADAL" clId="{CF6A5140-9227-409F-9187-B98CCD837415}" dt="2023-03-08T06:05:17.999" v="67" actId="47"/>
-        <pc:sldMkLst>
-          <pc:docMk/>
-          <pc:sldMk cId="3061177336" sldId="385"/>
-        </pc:sldMkLst>
-      </pc:sldChg>
-      <pc:sldChg chg="del">
-        <pc:chgData name="Matthieu De Mari" userId="dfb708c9-d8dc-439f-9a3b-c772bf4a311c" providerId="ADAL" clId="{CF6A5140-9227-409F-9187-B98CCD837415}" dt="2023-03-08T06:05:18.882" v="68" actId="47"/>
-        <pc:sldMkLst>
-          <pc:docMk/>
-          <pc:sldMk cId="1114751945" sldId="386"/>
-        </pc:sldMkLst>
-      </pc:sldChg>
-      <pc:sldChg chg="del">
-        <pc:chgData name="Matthieu De Mari" userId="dfb708c9-d8dc-439f-9a3b-c772bf4a311c" providerId="ADAL" clId="{CF6A5140-9227-409F-9187-B98CCD837415}" dt="2023-03-08T06:05:18.882" v="68" actId="47"/>
-        <pc:sldMkLst>
-          <pc:docMk/>
-          <pc:sldMk cId="881014307" sldId="387"/>
-        </pc:sldMkLst>
-      </pc:sldChg>
-      <pc:sldChg chg="del">
-        <pc:chgData name="Matthieu De Mari" userId="dfb708c9-d8dc-439f-9a3b-c772bf4a311c" providerId="ADAL" clId="{CF6A5140-9227-409F-9187-B98CCD837415}" dt="2023-03-08T06:05:18.882" v="68" actId="47"/>
-        <pc:sldMkLst>
-          <pc:docMk/>
-          <pc:sldMk cId="1359818059" sldId="389"/>
-        </pc:sldMkLst>
-      </pc:sldChg>
-      <pc:sldChg chg="del">
-        <pc:chgData name="Matthieu De Mari" userId="dfb708c9-d8dc-439f-9a3b-c772bf4a311c" providerId="ADAL" clId="{CF6A5140-9227-409F-9187-B98CCD837415}" dt="2023-03-08T06:05:18.882" v="68" actId="47"/>
-        <pc:sldMkLst>
-          <pc:docMk/>
-          <pc:sldMk cId="1233822438" sldId="390"/>
-        </pc:sldMkLst>
-      </pc:sldChg>
-      <pc:sldChg chg="del">
-        <pc:chgData name="Matthieu De Mari" userId="dfb708c9-d8dc-439f-9a3b-c772bf4a311c" providerId="ADAL" clId="{CF6A5140-9227-409F-9187-B98CCD837415}" dt="2023-03-08T06:05:18.882" v="68" actId="47"/>
-        <pc:sldMkLst>
-          <pc:docMk/>
-          <pc:sldMk cId="2406012581" sldId="391"/>
-        </pc:sldMkLst>
-      </pc:sldChg>
-      <pc:sldChg chg="del">
-        <pc:chgData name="Matthieu De Mari" userId="dfb708c9-d8dc-439f-9a3b-c772bf4a311c" providerId="ADAL" clId="{CF6A5140-9227-409F-9187-B98CCD837415}" dt="2023-03-08T06:05:18.882" v="68" actId="47"/>
-        <pc:sldMkLst>
-          <pc:docMk/>
-          <pc:sldMk cId="1269624659" sldId="392"/>
-        </pc:sldMkLst>
-      </pc:sldChg>
-      <pc:sldChg chg="del">
-        <pc:chgData name="Matthieu De Mari" userId="dfb708c9-d8dc-439f-9a3b-c772bf4a311c" providerId="ADAL" clId="{CF6A5140-9227-409F-9187-B98CCD837415}" dt="2023-03-08T06:05:19.819" v="69" actId="47"/>
-        <pc:sldMkLst>
-          <pc:docMk/>
-          <pc:sldMk cId="1060213588" sldId="393"/>
-        </pc:sldMkLst>
-      </pc:sldChg>
-      <pc:sldChg chg="del">
-        <pc:chgData name="Matthieu De Mari" userId="dfb708c9-d8dc-439f-9a3b-c772bf4a311c" providerId="ADAL" clId="{CF6A5140-9227-409F-9187-B98CCD837415}" dt="2023-03-08T06:05:19.819" v="69" actId="47"/>
-        <pc:sldMkLst>
-          <pc:docMk/>
-          <pc:sldMk cId="1215328976" sldId="394"/>
-        </pc:sldMkLst>
-      </pc:sldChg>
-      <pc:sldChg chg="del">
-        <pc:chgData name="Matthieu De Mari" userId="dfb708c9-d8dc-439f-9a3b-c772bf4a311c" providerId="ADAL" clId="{CF6A5140-9227-409F-9187-B98CCD837415}" dt="2023-03-08T06:05:19.819" v="69" actId="47"/>
-        <pc:sldMkLst>
-          <pc:docMk/>
-          <pc:sldMk cId="3544056403" sldId="395"/>
-        </pc:sldMkLst>
-      </pc:sldChg>
-      <pc:sldChg chg="del">
-        <pc:chgData name="Matthieu De Mari" userId="dfb708c9-d8dc-439f-9a3b-c772bf4a311c" providerId="ADAL" clId="{CF6A5140-9227-409F-9187-B98CCD837415}" dt="2023-03-08T06:05:19.819" v="69" actId="47"/>
-        <pc:sldMkLst>
-          <pc:docMk/>
-          <pc:sldMk cId="511100047" sldId="397"/>
-        </pc:sldMkLst>
-      </pc:sldChg>
-      <pc:sldChg chg="del">
-        <pc:chgData name="Matthieu De Mari" userId="dfb708c9-d8dc-439f-9a3b-c772bf4a311c" providerId="ADAL" clId="{CF6A5140-9227-409F-9187-B98CCD837415}" dt="2023-03-08T06:05:18.882" v="68" actId="47"/>
-        <pc:sldMkLst>
-          <pc:docMk/>
-          <pc:sldMk cId="2174133860" sldId="398"/>
-        </pc:sldMkLst>
-      </pc:sldChg>
-      <pc:sldChg chg="del">
-        <pc:chgData name="Matthieu De Mari" userId="dfb708c9-d8dc-439f-9a3b-c772bf4a311c" providerId="ADAL" clId="{CF6A5140-9227-409F-9187-B98CCD837415}" dt="2023-03-08T06:05:18.882" v="68" actId="47"/>
-        <pc:sldMkLst>
-          <pc:docMk/>
-          <pc:sldMk cId="1114255243" sldId="399"/>
-        </pc:sldMkLst>
-      </pc:sldChg>
-      <pc:sldChg chg="del">
-        <pc:chgData name="Matthieu De Mari" userId="dfb708c9-d8dc-439f-9a3b-c772bf4a311c" providerId="ADAL" clId="{CF6A5140-9227-409F-9187-B98CCD837415}" dt="2023-03-08T06:05:18.882" v="68" actId="47"/>
-        <pc:sldMkLst>
-          <pc:docMk/>
-          <pc:sldMk cId="3412258979" sldId="400"/>
-        </pc:sldMkLst>
-      </pc:sldChg>
-      <pc:sldChg chg="del">
-        <pc:chgData name="Matthieu De Mari" userId="dfb708c9-d8dc-439f-9a3b-c772bf4a311c" providerId="ADAL" clId="{CF6A5140-9227-409F-9187-B98CCD837415}" dt="2023-03-08T06:05:19.819" v="69" actId="47"/>
-        <pc:sldMkLst>
-          <pc:docMk/>
-          <pc:sldMk cId="2615177350" sldId="401"/>
-        </pc:sldMkLst>
-      </pc:sldChg>
-      <pc:sldChg chg="del">
-        <pc:chgData name="Matthieu De Mari" userId="dfb708c9-d8dc-439f-9a3b-c772bf4a311c" providerId="ADAL" clId="{CF6A5140-9227-409F-9187-B98CCD837415}" dt="2023-03-08T06:05:19.819" v="69" actId="47"/>
-        <pc:sldMkLst>
-          <pc:docMk/>
-          <pc:sldMk cId="792071299" sldId="402"/>
-        </pc:sldMkLst>
-      </pc:sldChg>
-      <pc:sldChg chg="del">
-        <pc:chgData name="Matthieu De Mari" userId="dfb708c9-d8dc-439f-9a3b-c772bf4a311c" providerId="ADAL" clId="{CF6A5140-9227-409F-9187-B98CCD837415}" dt="2023-03-08T06:05:19.819" v="69" actId="47"/>
-        <pc:sldMkLst>
-          <pc:docMk/>
-          <pc:sldMk cId="990763623" sldId="403"/>
-        </pc:sldMkLst>
-      </pc:sldChg>
-      <pc:sldChg chg="del">
-        <pc:chgData name="Matthieu De Mari" userId="dfb708c9-d8dc-439f-9a3b-c772bf4a311c" providerId="ADAL" clId="{CF6A5140-9227-409F-9187-B98CCD837415}" dt="2023-03-08T06:05:19.819" v="69" actId="47"/>
-        <pc:sldMkLst>
-          <pc:docMk/>
-          <pc:sldMk cId="3762706142" sldId="404"/>
-        </pc:sldMkLst>
-      </pc:sldChg>
-      <pc:sldChg chg="del">
-        <pc:chgData name="Matthieu De Mari" userId="dfb708c9-d8dc-439f-9a3b-c772bf4a311c" providerId="ADAL" clId="{CF6A5140-9227-409F-9187-B98CCD837415}" dt="2023-03-08T06:05:20.621" v="70" actId="47"/>
-        <pc:sldMkLst>
-          <pc:docMk/>
-          <pc:sldMk cId="4232193198" sldId="405"/>
-        </pc:sldMkLst>
-      </pc:sldChg>
-      <pc:sldChg chg="del">
-        <pc:chgData name="Matthieu De Mari" userId="dfb708c9-d8dc-439f-9a3b-c772bf4a311c" providerId="ADAL" clId="{CF6A5140-9227-409F-9187-B98CCD837415}" dt="2023-03-08T06:05:20.621" v="70" actId="47"/>
-        <pc:sldMkLst>
-          <pc:docMk/>
-          <pc:sldMk cId="1511321219" sldId="406"/>
-        </pc:sldMkLst>
-      </pc:sldChg>
-      <pc:sldChg chg="del">
-        <pc:chgData name="Matthieu De Mari" userId="dfb708c9-d8dc-439f-9a3b-c772bf4a311c" providerId="ADAL" clId="{CF6A5140-9227-409F-9187-B98CCD837415}" dt="2023-03-08T06:05:20.621" v="70" actId="47"/>
-        <pc:sldMkLst>
-          <pc:docMk/>
-          <pc:sldMk cId="3233841990" sldId="407"/>
-        </pc:sldMkLst>
-      </pc:sldChg>
-      <pc:sldChg chg="del">
-        <pc:chgData name="Matthieu De Mari" userId="dfb708c9-d8dc-439f-9a3b-c772bf4a311c" providerId="ADAL" clId="{CF6A5140-9227-409F-9187-B98CCD837415}" dt="2023-03-08T06:05:20.621" v="70" actId="47"/>
-        <pc:sldMkLst>
-          <pc:docMk/>
-          <pc:sldMk cId="1609989787" sldId="408"/>
-        </pc:sldMkLst>
-      </pc:sldChg>
-      <pc:sldChg chg="del">
-        <pc:chgData name="Matthieu De Mari" userId="dfb708c9-d8dc-439f-9a3b-c772bf4a311c" providerId="ADAL" clId="{CF6A5140-9227-409F-9187-B98CCD837415}" dt="2023-03-08T06:05:18.882" v="68" actId="47"/>
-        <pc:sldMkLst>
-          <pc:docMk/>
-          <pc:sldMk cId="3853734329" sldId="409"/>
-        </pc:sldMkLst>
-      </pc:sldChg>
-      <pc:sldChg chg="del">
-        <pc:chgData name="Matthieu De Mari" userId="dfb708c9-d8dc-439f-9a3b-c772bf4a311c" providerId="ADAL" clId="{CF6A5140-9227-409F-9187-B98CCD837415}" dt="2023-03-08T06:05:23.379" v="73" actId="47"/>
-        <pc:sldMkLst>
-          <pc:docMk/>
-          <pc:sldMk cId="4281175894" sldId="410"/>
-        </pc:sldMkLst>
-      </pc:sldChg>
-      <pc:sldChg chg="del">
-        <pc:chgData name="Matthieu De Mari" userId="dfb708c9-d8dc-439f-9a3b-c772bf4a311c" providerId="ADAL" clId="{CF6A5140-9227-409F-9187-B98CCD837415}" dt="2023-03-08T06:05:22.321" v="72" actId="47"/>
-        <pc:sldMkLst>
-          <pc:docMk/>
-          <pc:sldMk cId="3863789620" sldId="411"/>
-        </pc:sldMkLst>
-      </pc:sldChg>
-      <pc:sldChg chg="del">
-        <pc:chgData name="Matthieu De Mari" userId="dfb708c9-d8dc-439f-9a3b-c772bf4a311c" providerId="ADAL" clId="{CF6A5140-9227-409F-9187-B98CCD837415}" dt="2023-03-08T06:05:22.321" v="72" actId="47"/>
-        <pc:sldMkLst>
-          <pc:docMk/>
-          <pc:sldMk cId="3522054596" sldId="412"/>
-        </pc:sldMkLst>
-      </pc:sldChg>
-      <pc:sldChg chg="del">
-        <pc:chgData name="Matthieu De Mari" userId="dfb708c9-d8dc-439f-9a3b-c772bf4a311c" providerId="ADAL" clId="{CF6A5140-9227-409F-9187-B98CCD837415}" dt="2023-03-08T06:05:24.214" v="74" actId="47"/>
-        <pc:sldMkLst>
-          <pc:docMk/>
-          <pc:sldMk cId="2221766967" sldId="413"/>
-        </pc:sldMkLst>
-      </pc:sldChg>
-      <pc:sldChg chg="del">
-        <pc:chgData name="Matthieu De Mari" userId="dfb708c9-d8dc-439f-9a3b-c772bf4a311c" providerId="ADAL" clId="{CF6A5140-9227-409F-9187-B98CCD837415}" dt="2023-03-08T06:05:24.214" v="74" actId="47"/>
-        <pc:sldMkLst>
-          <pc:docMk/>
-          <pc:sldMk cId="912972080" sldId="414"/>
-        </pc:sldMkLst>
-      </pc:sldChg>
-      <pc:sldChg chg="del">
-        <pc:chgData name="Matthieu De Mari" userId="dfb708c9-d8dc-439f-9a3b-c772bf4a311c" providerId="ADAL" clId="{CF6A5140-9227-409F-9187-B98CCD837415}" dt="2023-03-08T06:05:24.214" v="74" actId="47"/>
-        <pc:sldMkLst>
-          <pc:docMk/>
-          <pc:sldMk cId="71985707" sldId="415"/>
-        </pc:sldMkLst>
-      </pc:sldChg>
-      <pc:sldChg chg="del">
-        <pc:chgData name="Matthieu De Mari" userId="dfb708c9-d8dc-439f-9a3b-c772bf4a311c" providerId="ADAL" clId="{CF6A5140-9227-409F-9187-B98CCD837415}" dt="2023-03-08T06:05:24.214" v="74" actId="47"/>
-        <pc:sldMkLst>
-          <pc:docMk/>
-          <pc:sldMk cId="1311368978" sldId="416"/>
-        </pc:sldMkLst>
-      </pc:sldChg>
-      <pc:sldChg chg="del">
-        <pc:chgData name="Matthieu De Mari" userId="dfb708c9-d8dc-439f-9a3b-c772bf4a311c" providerId="ADAL" clId="{CF6A5140-9227-409F-9187-B98CCD837415}" dt="2023-03-08T06:05:22.321" v="72" actId="47"/>
-        <pc:sldMkLst>
-          <pc:docMk/>
-          <pc:sldMk cId="3072427418" sldId="417"/>
-        </pc:sldMkLst>
-      </pc:sldChg>
-      <pc:sldChg chg="del">
-        <pc:chgData name="Matthieu De Mari" userId="dfb708c9-d8dc-439f-9a3b-c772bf4a311c" providerId="ADAL" clId="{CF6A5140-9227-409F-9187-B98CCD837415}" dt="2023-03-08T06:05:22.321" v="72" actId="47"/>
-        <pc:sldMkLst>
-          <pc:docMk/>
-          <pc:sldMk cId="298499389" sldId="418"/>
-        </pc:sldMkLst>
-      </pc:sldChg>
-      <pc:sldChg chg="del">
-        <pc:chgData name="Matthieu De Mari" userId="dfb708c9-d8dc-439f-9a3b-c772bf4a311c" providerId="ADAL" clId="{CF6A5140-9227-409F-9187-B98CCD837415}" dt="2023-03-08T06:05:22.321" v="72" actId="47"/>
-        <pc:sldMkLst>
-          <pc:docMk/>
-          <pc:sldMk cId="3069423319" sldId="419"/>
-        </pc:sldMkLst>
-      </pc:sldChg>
-      <pc:sldChg chg="add del">
-        <pc:chgData name="Matthieu De Mari" userId="dfb708c9-d8dc-439f-9a3b-c772bf4a311c" providerId="ADAL" clId="{CF6A5140-9227-409F-9187-B98CCD837415}" dt="2023-03-08T06:05:53.727" v="81" actId="47"/>
-        <pc:sldMkLst>
-          <pc:docMk/>
-          <pc:sldMk cId="485649805" sldId="420"/>
-        </pc:sldMkLst>
-      </pc:sldChg>
-      <pc:sldChg chg="add del">
-        <pc:chgData name="Matthieu De Mari" userId="dfb708c9-d8dc-439f-9a3b-c772bf4a311c" providerId="ADAL" clId="{CF6A5140-9227-409F-9187-B98CCD837415}" dt="2023-03-09T08:09:47.699" v="10404" actId="47"/>
-        <pc:sldMkLst>
-          <pc:docMk/>
-          <pc:sldMk cId="3351792085" sldId="421"/>
-        </pc:sldMkLst>
-      </pc:sldChg>
-      <pc:sldChg chg="modSp new mod">
-        <pc:chgData name="Matthieu De Mari" userId="dfb708c9-d8dc-439f-9a3b-c772bf4a311c" providerId="ADAL" clId="{CF6A5140-9227-409F-9187-B98CCD837415}" dt="2023-03-08T06:44:09.169" v="552" actId="113"/>
-        <pc:sldMkLst>
-          <pc:docMk/>
-          <pc:sldMk cId="1161233365" sldId="422"/>
-        </pc:sldMkLst>
-      </pc:sldChg>
-      <pc:sldChg chg="add del">
-        <pc:chgData name="Matthieu De Mari" userId="dfb708c9-d8dc-439f-9a3b-c772bf4a311c" providerId="ADAL" clId="{CF6A5140-9227-409F-9187-B98CCD837415}" dt="2023-03-08T06:05:56.432" v="84" actId="47"/>
-        <pc:sldMkLst>
-          <pc:docMk/>
-          <pc:sldMk cId="3421583851" sldId="423"/>
-        </pc:sldMkLst>
-      </pc:sldChg>
-      <pc:sldChg chg="modSp new mod ord">
-        <pc:chgData name="Matthieu De Mari" userId="dfb708c9-d8dc-439f-9a3b-c772bf4a311c" providerId="ADAL" clId="{CF6A5140-9227-409F-9187-B98CCD837415}" dt="2023-03-09T07:32:17.764" v="6693" actId="27636"/>
-        <pc:sldMkLst>
-          <pc:docMk/>
-          <pc:sldMk cId="4226169062" sldId="423"/>
-        </pc:sldMkLst>
-      </pc:sldChg>
-      <pc:sldChg chg="add del">
-        <pc:chgData name="Matthieu De Mari" userId="dfb708c9-d8dc-439f-9a3b-c772bf4a311c" providerId="ADAL" clId="{CF6A5140-9227-409F-9187-B98CCD837415}" dt="2023-03-08T06:05:57.037" v="85" actId="47"/>
-        <pc:sldMkLst>
-          <pc:docMk/>
-          <pc:sldMk cId="2106229472" sldId="424"/>
-        </pc:sldMkLst>
-      </pc:sldChg>
-      <pc:sldChg chg="addSp delSp modSp new mod modClrScheme chgLayout">
-        <pc:chgData name="Matthieu De Mari" userId="dfb708c9-d8dc-439f-9a3b-c772bf4a311c" providerId="ADAL" clId="{CF6A5140-9227-409F-9187-B98CCD837415}" dt="2023-03-08T10:26:23.292" v="3939" actId="313"/>
-        <pc:sldMkLst>
-          <pc:docMk/>
-          <pc:sldMk cId="4050696508" sldId="424"/>
-        </pc:sldMkLst>
-      </pc:sldChg>
-      <pc:sldChg chg="add del">
-        <pc:chgData name="Matthieu De Mari" userId="dfb708c9-d8dc-439f-9a3b-c772bf4a311c" providerId="ADAL" clId="{CF6A5140-9227-409F-9187-B98CCD837415}" dt="2023-03-08T06:05:55.165" v="82" actId="47"/>
-        <pc:sldMkLst>
-          <pc:docMk/>
-          <pc:sldMk cId="833550183" sldId="425"/>
-        </pc:sldMkLst>
-      </pc:sldChg>
-      <pc:sldChg chg="modSp new mod ord">
-        <pc:chgData name="Matthieu De Mari" userId="dfb708c9-d8dc-439f-9a3b-c772bf4a311c" providerId="ADAL" clId="{CF6A5140-9227-409F-9187-B98CCD837415}" dt="2023-03-09T07:46:53.901" v="8162" actId="20577"/>
-        <pc:sldMkLst>
-          <pc:docMk/>
-          <pc:sldMk cId="2244529904" sldId="425"/>
-        </pc:sldMkLst>
-      </pc:sldChg>
-      <pc:sldChg chg="new del">
-        <pc:chgData name="Matthieu De Mari" userId="dfb708c9-d8dc-439f-9a3b-c772bf4a311c" providerId="ADAL" clId="{CF6A5140-9227-409F-9187-B98CCD837415}" dt="2023-03-09T07:46:49.192" v="8160" actId="47"/>
-        <pc:sldMkLst>
-          <pc:docMk/>
-          <pc:sldMk cId="316413211" sldId="426"/>
-        </pc:sldMkLst>
-      </pc:sldChg>
-      <pc:sldChg chg="add del">
-        <pc:chgData name="Matthieu De Mari" userId="dfb708c9-d8dc-439f-9a3b-c772bf4a311c" providerId="ADAL" clId="{CF6A5140-9227-409F-9187-B98CCD837415}" dt="2023-03-08T06:05:55.848" v="83" actId="47"/>
-        <pc:sldMkLst>
-          <pc:docMk/>
-          <pc:sldMk cId="1650955281" sldId="426"/>
-        </pc:sldMkLst>
-      </pc:sldChg>
-      <pc:sldChg chg="del">
-        <pc:chgData name="Matthieu De Mari" userId="dfb708c9-d8dc-439f-9a3b-c772bf4a311c" providerId="ADAL" clId="{CF6A5140-9227-409F-9187-B98CCD837415}" dt="2023-03-08T06:05:18.882" v="68" actId="47"/>
-        <pc:sldMkLst>
-          <pc:docMk/>
-          <pc:sldMk cId="25607758" sldId="427"/>
-        </pc:sldMkLst>
-      </pc:sldChg>
-      <pc:sldChg chg="addSp modSp new mod modClrScheme chgLayout">
-        <pc:chgData name="Matthieu De Mari" userId="dfb708c9-d8dc-439f-9a3b-c772bf4a311c" providerId="ADAL" clId="{CF6A5140-9227-409F-9187-B98CCD837415}" dt="2023-03-09T08:02:24.370" v="9484" actId="20577"/>
-        <pc:sldMkLst>
-          <pc:docMk/>
-          <pc:sldMk cId="1586635455" sldId="427"/>
-        </pc:sldMkLst>
-      </pc:sldChg>
-      <pc:sldChg chg="new del ord">
-        <pc:chgData name="Matthieu De Mari" userId="dfb708c9-d8dc-439f-9a3b-c772bf4a311c" providerId="ADAL" clId="{CF6A5140-9227-409F-9187-B98CCD837415}" dt="2023-03-09T08:09:50.895" v="10405" actId="47"/>
-        <pc:sldMkLst>
-          <pc:docMk/>
-          <pc:sldMk cId="1021753143" sldId="428"/>
-        </pc:sldMkLst>
-      </pc:sldChg>
-      <pc:sldChg chg="add del">
-        <pc:chgData name="Matthieu De Mari" userId="dfb708c9-d8dc-439f-9a3b-c772bf4a311c" providerId="ADAL" clId="{CF6A5140-9227-409F-9187-B98CCD837415}" dt="2023-03-08T06:05:52.107" v="80" actId="47"/>
-        <pc:sldMkLst>
-          <pc:docMk/>
-          <pc:sldMk cId="2580070337" sldId="428"/>
-        </pc:sldMkLst>
-      </pc:sldChg>
-      <pc:sldChg chg="addSp delSp modSp new mod ord modClrScheme chgLayout">
-        <pc:chgData name="Matthieu De Mari" userId="dfb708c9-d8dc-439f-9a3b-c772bf4a311c" providerId="ADAL" clId="{CF6A5140-9227-409F-9187-B98CCD837415}" dt="2023-03-09T07:13:51.803" v="5418" actId="20577"/>
-        <pc:sldMkLst>
-          <pc:docMk/>
-          <pc:sldMk cId="76065098" sldId="429"/>
-        </pc:sldMkLst>
-      </pc:sldChg>
-      <pc:sldChg chg="add del">
-        <pc:chgData name="Matthieu De Mari" userId="dfb708c9-d8dc-439f-9a3b-c772bf4a311c" providerId="ADAL" clId="{CF6A5140-9227-409F-9187-B98CCD837415}" dt="2023-03-08T06:05:57.672" v="86" actId="47"/>
-        <pc:sldMkLst>
-          <pc:docMk/>
-          <pc:sldMk cId="2609747574" sldId="429"/>
-        </pc:sldMkLst>
-      </pc:sldChg>
-      <pc:sldChg chg="addSp modSp add mod">
-        <pc:chgData name="Matthieu De Mari" userId="dfb708c9-d8dc-439f-9a3b-c772bf4a311c" providerId="ADAL" clId="{CF6A5140-9227-409F-9187-B98CCD837415}" dt="2023-03-08T06:54:24.985" v="1279"/>
-        <pc:sldMkLst>
-          <pc:docMk/>
-          <pc:sldMk cId="600619302" sldId="430"/>
-        </pc:sldMkLst>
-      </pc:sldChg>
-      <pc:sldChg chg="add del">
-        <pc:chgData name="Matthieu De Mari" userId="dfb708c9-d8dc-439f-9a3b-c772bf4a311c" providerId="ADAL" clId="{CF6A5140-9227-409F-9187-B98CCD837415}" dt="2023-03-08T06:05:58.319" v="87" actId="47"/>
-        <pc:sldMkLst>
-          <pc:docMk/>
-          <pc:sldMk cId="1298953197" sldId="430"/>
-        </pc:sldMkLst>
-      </pc:sldChg>
-      <pc:sldChg chg="new del">
-        <pc:chgData name="Matthieu De Mari" userId="dfb708c9-d8dc-439f-9a3b-c772bf4a311c" providerId="ADAL" clId="{CF6A5140-9227-409F-9187-B98CCD837415}" dt="2023-03-08T06:45:49.355" v="652" actId="47"/>
-        <pc:sldMkLst>
-          <pc:docMk/>
-          <pc:sldMk cId="4142767097" sldId="430"/>
-        </pc:sldMkLst>
-      </pc:sldChg>
-      <pc:sldChg chg="add del">
-        <pc:chgData name="Matthieu De Mari" userId="dfb708c9-d8dc-439f-9a3b-c772bf4a311c" providerId="ADAL" clId="{CF6A5140-9227-409F-9187-B98CCD837415}" dt="2023-03-08T06:05:49.339" v="78" actId="47"/>
-        <pc:sldMkLst>
-          <pc:docMk/>
-          <pc:sldMk cId="349686524" sldId="431"/>
-        </pc:sldMkLst>
-      </pc:sldChg>
-      <pc:sldChg chg="addSp delSp modSp add mod">
-        <pc:chgData name="Matthieu De Mari" userId="dfb708c9-d8dc-439f-9a3b-c772bf4a311c" providerId="ADAL" clId="{CF6A5140-9227-409F-9187-B98CCD837415}" dt="2023-03-09T07:14:00.657" v="5421" actId="114"/>
-        <pc:sldMkLst>
-          <pc:docMk/>
-          <pc:sldMk cId="2954873226" sldId="431"/>
-        </pc:sldMkLst>
-      </pc:sldChg>
-      <pc:sldChg chg="addSp modSp add mod">
-        <pc:chgData name="Matthieu De Mari" userId="dfb708c9-d8dc-439f-9a3b-c772bf4a311c" providerId="ADAL" clId="{CF6A5140-9227-409F-9187-B98CCD837415}" dt="2023-03-08T07:14:41.818" v="2737" actId="207"/>
-        <pc:sldMkLst>
-          <pc:docMk/>
-          <pc:sldMk cId="2366763698" sldId="432"/>
-        </pc:sldMkLst>
-      </pc:sldChg>
-      <pc:sldChg chg="add del">
-        <pc:chgData name="Matthieu De Mari" userId="dfb708c9-d8dc-439f-9a3b-c772bf4a311c" providerId="ADAL" clId="{CF6A5140-9227-409F-9187-B98CCD837415}" dt="2023-03-08T06:05:50.083" v="79" actId="47"/>
-        <pc:sldMkLst>
-          <pc:docMk/>
-          <pc:sldMk cId="3417944735" sldId="432"/>
-        </pc:sldMkLst>
-      </pc:sldChg>
-      <pc:sldChg chg="add del">
-        <pc:chgData name="Matthieu De Mari" userId="dfb708c9-d8dc-439f-9a3b-c772bf4a311c" providerId="ADAL" clId="{CF6A5140-9227-409F-9187-B98CCD837415}" dt="2023-03-08T06:58:06.054" v="1587" actId="47"/>
-        <pc:sldMkLst>
-          <pc:docMk/>
-          <pc:sldMk cId="576554638" sldId="433"/>
-        </pc:sldMkLst>
-      </pc:sldChg>
-      <pc:sldChg chg="modSp add mod">
-        <pc:chgData name="Matthieu De Mari" userId="dfb708c9-d8dc-439f-9a3b-c772bf4a311c" providerId="ADAL" clId="{CF6A5140-9227-409F-9187-B98CCD837415}" dt="2023-03-08T07:14:48.710" v="2750" actId="20577"/>
-        <pc:sldMkLst>
-          <pc:docMk/>
-          <pc:sldMk cId="1791834708" sldId="433"/>
-        </pc:sldMkLst>
-      </pc:sldChg>
-      <pc:sldChg chg="add del">
-        <pc:chgData name="Matthieu De Mari" userId="dfb708c9-d8dc-439f-9a3b-c772bf4a311c" providerId="ADAL" clId="{CF6A5140-9227-409F-9187-B98CCD837415}" dt="2023-03-08T06:05:48.218" v="77" actId="47"/>
-        <pc:sldMkLst>
-          <pc:docMk/>
-          <pc:sldMk cId="2653152999" sldId="433"/>
-        </pc:sldMkLst>
-      </pc:sldChg>
-      <pc:sldChg chg="addSp modSp add mod">
-        <pc:chgData name="Matthieu De Mari" userId="dfb708c9-d8dc-439f-9a3b-c772bf4a311c" providerId="ADAL" clId="{CF6A5140-9227-409F-9187-B98CCD837415}" dt="2023-03-09T07:14:13.158" v="5422" actId="20577"/>
-        <pc:sldMkLst>
-          <pc:docMk/>
-          <pc:sldMk cId="2266139316" sldId="434"/>
-        </pc:sldMkLst>
-      </pc:sldChg>
-      <pc:sldChg chg="add del">
-        <pc:chgData name="Matthieu De Mari" userId="dfb708c9-d8dc-439f-9a3b-c772bf4a311c" providerId="ADAL" clId="{CF6A5140-9227-409F-9187-B98CCD837415}" dt="2023-03-08T06:05:48.218" v="77" actId="47"/>
-        <pc:sldMkLst>
-          <pc:docMk/>
-          <pc:sldMk cId="2305199698" sldId="434"/>
-        </pc:sldMkLst>
-      </pc:sldChg>
-      <pc:sldChg chg="add del">
-        <pc:chgData name="Matthieu De Mari" userId="dfb708c9-d8dc-439f-9a3b-c772bf4a311c" providerId="ADAL" clId="{CF6A5140-9227-409F-9187-B98CCD837415}" dt="2023-03-08T06:05:48.218" v="77" actId="47"/>
-        <pc:sldMkLst>
-          <pc:docMk/>
-          <pc:sldMk cId="2095478576" sldId="435"/>
-        </pc:sldMkLst>
-      </pc:sldChg>
-      <pc:sldChg chg="new del">
-        <pc:chgData name="Matthieu De Mari" userId="dfb708c9-d8dc-439f-9a3b-c772bf4a311c" providerId="ADAL" clId="{CF6A5140-9227-409F-9187-B98CCD837415}" dt="2023-03-08T10:36:29.111" v="4632" actId="47"/>
-        <pc:sldMkLst>
-          <pc:docMk/>
-          <pc:sldMk cId="3544061180" sldId="435"/>
-        </pc:sldMkLst>
-      </pc:sldChg>
-      <pc:sldChg chg="add del">
-        <pc:chgData name="Matthieu De Mari" userId="dfb708c9-d8dc-439f-9a3b-c772bf4a311c" providerId="ADAL" clId="{CF6A5140-9227-409F-9187-B98CCD837415}" dt="2023-03-08T06:05:48.218" v="77" actId="47"/>
-        <pc:sldMkLst>
-          <pc:docMk/>
-          <pc:sldMk cId="2087017446" sldId="436"/>
-        </pc:sldMkLst>
-      </pc:sldChg>
-      <pc:sldChg chg="modSp add del mod ord">
-        <pc:chgData name="Matthieu De Mari" userId="dfb708c9-d8dc-439f-9a3b-c772bf4a311c" providerId="ADAL" clId="{CF6A5140-9227-409F-9187-B98CCD837415}" dt="2023-03-08T07:09:45.301" v="2382" actId="47"/>
-        <pc:sldMkLst>
-          <pc:docMk/>
-          <pc:sldMk cId="4002996775" sldId="436"/>
-        </pc:sldMkLst>
-      </pc:sldChg>
-      <pc:sldChg chg="modSp add mod">
-        <pc:chgData name="Matthieu De Mari" userId="dfb708c9-d8dc-439f-9a3b-c772bf4a311c" providerId="ADAL" clId="{CF6A5140-9227-409F-9187-B98CCD837415}" dt="2023-03-08T07:11:01.712" v="2477" actId="207"/>
-        <pc:sldMkLst>
-          <pc:docMk/>
-          <pc:sldMk cId="282863324" sldId="437"/>
-        </pc:sldMkLst>
-      </pc:sldChg>
-      <pc:sldChg chg="add del">
-        <pc:chgData name="Matthieu De Mari" userId="dfb708c9-d8dc-439f-9a3b-c772bf4a311c" providerId="ADAL" clId="{CF6A5140-9227-409F-9187-B98CCD837415}" dt="2023-03-08T06:05:48.218" v="77" actId="47"/>
-        <pc:sldMkLst>
-          <pc:docMk/>
-          <pc:sldMk cId="2927953506" sldId="437"/>
-        </pc:sldMkLst>
-      </pc:sldChg>
-      <pc:sldChg chg="modSp add mod">
-        <pc:chgData name="Matthieu De Mari" userId="dfb708c9-d8dc-439f-9a3b-c772bf4a311c" providerId="ADAL" clId="{CF6A5140-9227-409F-9187-B98CCD837415}" dt="2023-03-08T07:11:06.553" v="2478" actId="207"/>
-        <pc:sldMkLst>
-          <pc:docMk/>
-          <pc:sldMk cId="1648531005" sldId="438"/>
-        </pc:sldMkLst>
-      </pc:sldChg>
-      <pc:sldChg chg="modSp add mod">
-        <pc:chgData name="Matthieu De Mari" userId="dfb708c9-d8dc-439f-9a3b-c772bf4a311c" providerId="ADAL" clId="{CF6A5140-9227-409F-9187-B98CCD837415}" dt="2023-03-08T07:12:30.112" v="2535" actId="20577"/>
-        <pc:sldMkLst>
-          <pc:docMk/>
-          <pc:sldMk cId="2577277130" sldId="439"/>
-        </pc:sldMkLst>
-      </pc:sldChg>
-      <pc:sldChg chg="modSp add mod">
-        <pc:chgData name="Matthieu De Mari" userId="dfb708c9-d8dc-439f-9a3b-c772bf4a311c" providerId="ADAL" clId="{CF6A5140-9227-409F-9187-B98CCD837415}" dt="2023-03-08T07:17:23.864" v="2958" actId="20577"/>
-        <pc:sldMkLst>
-          <pc:docMk/>
-          <pc:sldMk cId="2191919470" sldId="440"/>
-        </pc:sldMkLst>
-      </pc:sldChg>
-      <pc:sldChg chg="modSp add mod">
-        <pc:chgData name="Matthieu De Mari" userId="dfb708c9-d8dc-439f-9a3b-c772bf4a311c" providerId="ADAL" clId="{CF6A5140-9227-409F-9187-B98CCD837415}" dt="2023-03-09T07:37:08.037" v="7042" actId="20577"/>
-        <pc:sldMkLst>
-          <pc:docMk/>
-          <pc:sldMk cId="2257941384" sldId="441"/>
-        </pc:sldMkLst>
-      </pc:sldChg>
-      <pc:sldChg chg="add del">
-        <pc:chgData name="Matthieu De Mari" userId="dfb708c9-d8dc-439f-9a3b-c772bf4a311c" providerId="ADAL" clId="{CF6A5140-9227-409F-9187-B98CCD837415}" dt="2023-03-09T07:37:39.854" v="7046" actId="47"/>
-        <pc:sldMkLst>
-          <pc:docMk/>
-          <pc:sldMk cId="1481206085" sldId="442"/>
-        </pc:sldMkLst>
-      </pc:sldChg>
-      <pc:sldChg chg="new del">
-        <pc:chgData name="Matthieu De Mari" userId="dfb708c9-d8dc-439f-9a3b-c772bf4a311c" providerId="ADAL" clId="{CF6A5140-9227-409F-9187-B98CCD837415}" dt="2023-03-08T10:12:58.043" v="3162" actId="47"/>
-        <pc:sldMkLst>
-          <pc:docMk/>
-          <pc:sldMk cId="2699636064" sldId="443"/>
-        </pc:sldMkLst>
-      </pc:sldChg>
-      <pc:sldChg chg="addSp modSp add mod">
-        <pc:chgData name="Matthieu De Mari" userId="dfb708c9-d8dc-439f-9a3b-c772bf4a311c" providerId="ADAL" clId="{CF6A5140-9227-409F-9187-B98CCD837415}" dt="2023-03-08T10:26:38.681" v="3947" actId="1076"/>
-        <pc:sldMkLst>
-          <pc:docMk/>
-          <pc:sldMk cId="3705292892" sldId="444"/>
-        </pc:sldMkLst>
-      </pc:sldChg>
-      <pc:sldChg chg="addSp delSp modSp add mod">
-        <pc:chgData name="Matthieu De Mari" userId="dfb708c9-d8dc-439f-9a3b-c772bf4a311c" providerId="ADAL" clId="{CF6A5140-9227-409F-9187-B98CCD837415}" dt="2023-03-08T10:28:53.636" v="4097" actId="1036"/>
-        <pc:sldMkLst>
-          <pc:docMk/>
-          <pc:sldMk cId="3585737502" sldId="445"/>
-        </pc:sldMkLst>
-      </pc:sldChg>
-      <pc:sldChg chg="new del">
-        <pc:chgData name="Matthieu De Mari" userId="dfb708c9-d8dc-439f-9a3b-c772bf4a311c" providerId="ADAL" clId="{CF6A5140-9227-409F-9187-B98CCD837415}" dt="2023-03-08T10:38:28.282" v="4951" actId="47"/>
-        <pc:sldMkLst>
-          <pc:docMk/>
-          <pc:sldMk cId="2236602308" sldId="446"/>
-        </pc:sldMkLst>
-      </pc:sldChg>
-      <pc:sldChg chg="new del">
-        <pc:chgData name="Matthieu De Mari" userId="dfb708c9-d8dc-439f-9a3b-c772bf4a311c" providerId="ADAL" clId="{CF6A5140-9227-409F-9187-B98CCD837415}" dt="2023-03-08T10:30:25.245" v="4107" actId="47"/>
-        <pc:sldMkLst>
-          <pc:docMk/>
-          <pc:sldMk cId="4140690872" sldId="447"/>
-        </pc:sldMkLst>
-      </pc:sldChg>
-      <pc:sldChg chg="modSp add mod">
-        <pc:chgData name="Matthieu De Mari" userId="dfb708c9-d8dc-439f-9a3b-c772bf4a311c" providerId="ADAL" clId="{CF6A5140-9227-409F-9187-B98CCD837415}" dt="2023-03-08T10:31:27.605" v="4223" actId="20577"/>
-        <pc:sldMkLst>
-          <pc:docMk/>
-          <pc:sldMk cId="1738845767" sldId="448"/>
-        </pc:sldMkLst>
-      </pc:sldChg>
-      <pc:sldChg chg="addSp delSp modSp add mod">
-        <pc:chgData name="Matthieu De Mari" userId="dfb708c9-d8dc-439f-9a3b-c772bf4a311c" providerId="ADAL" clId="{CF6A5140-9227-409F-9187-B98CCD837415}" dt="2023-03-08T10:33:37.218" v="4438" actId="207"/>
-        <pc:sldMkLst>
-          <pc:docMk/>
-          <pc:sldMk cId="3149159304" sldId="449"/>
-        </pc:sldMkLst>
-      </pc:sldChg>
-      <pc:sldChg chg="modSp add mod">
-        <pc:chgData name="Matthieu De Mari" userId="dfb708c9-d8dc-439f-9a3b-c772bf4a311c" providerId="ADAL" clId="{CF6A5140-9227-409F-9187-B98CCD837415}" dt="2023-03-08T10:36:08.637" v="4631" actId="20577"/>
-        <pc:sldMkLst>
-          <pc:docMk/>
-          <pc:sldMk cId="2020760118" sldId="450"/>
-        </pc:sldMkLst>
-      </pc:sldChg>
-      <pc:sldChg chg="modSp add mod ord">
-        <pc:chgData name="Matthieu De Mari" userId="dfb708c9-d8dc-439f-9a3b-c772bf4a311c" providerId="ADAL" clId="{CF6A5140-9227-409F-9187-B98CCD837415}" dt="2023-03-09T07:15:07.649" v="5433" actId="20577"/>
-        <pc:sldMkLst>
-          <pc:docMk/>
-          <pc:sldMk cId="1242261096" sldId="451"/>
-        </pc:sldMkLst>
-      </pc:sldChg>
-      <pc:sldChg chg="add del">
-        <pc:chgData name="Matthieu De Mari" userId="dfb708c9-d8dc-439f-9a3b-c772bf4a311c" providerId="ADAL" clId="{CF6A5140-9227-409F-9187-B98CCD837415}" dt="2023-03-08T10:38:34.488" v="4952" actId="2696"/>
-        <pc:sldMkLst>
-          <pc:docMk/>
-          <pc:sldMk cId="2550081157" sldId="452"/>
-        </pc:sldMkLst>
-      </pc:sldChg>
-      <pc:sldChg chg="new del">
-        <pc:chgData name="Matthieu De Mari" userId="dfb708c9-d8dc-439f-9a3b-c772bf4a311c" providerId="ADAL" clId="{CF6A5140-9227-409F-9187-B98CCD837415}" dt="2023-03-08T10:40:23.119" v="5298" actId="47"/>
-        <pc:sldMkLst>
-          <pc:docMk/>
-          <pc:sldMk cId="3361891129" sldId="452"/>
-        </pc:sldMkLst>
-      </pc:sldChg>
-      <pc:sldChg chg="modSp add mod">
-        <pc:chgData name="Matthieu De Mari" userId="dfb708c9-d8dc-439f-9a3b-c772bf4a311c" providerId="ADAL" clId="{CF6A5140-9227-409F-9187-B98CCD837415}" dt="2023-03-09T07:15:16.543" v="5435"/>
-        <pc:sldMkLst>
-          <pc:docMk/>
-          <pc:sldMk cId="3102642038" sldId="453"/>
-        </pc:sldMkLst>
-      </pc:sldChg>
-      <pc:sldChg chg="add del">
-        <pc:chgData name="Matthieu De Mari" userId="dfb708c9-d8dc-439f-9a3b-c772bf4a311c" providerId="ADAL" clId="{CF6A5140-9227-409F-9187-B98CCD837415}" dt="2023-03-08T10:38:34.488" v="4952" actId="2696"/>
-        <pc:sldMkLst>
-          <pc:docMk/>
-          <pc:sldMk cId="3145888360" sldId="453"/>
-        </pc:sldMkLst>
-      </pc:sldChg>
-      <pc:sldChg chg="modSp add mod">
-        <pc:chgData name="Matthieu De Mari" userId="dfb708c9-d8dc-439f-9a3b-c772bf4a311c" providerId="ADAL" clId="{CF6A5140-9227-409F-9187-B98CCD837415}" dt="2023-03-09T07:15:11.396" v="5434"/>
-        <pc:sldMkLst>
-          <pc:docMk/>
-          <pc:sldMk cId="4072425385" sldId="454"/>
-        </pc:sldMkLst>
-      </pc:sldChg>
-      <pc:sldChg chg="modSp add mod">
-        <pc:chgData name="Matthieu De Mari" userId="dfb708c9-d8dc-439f-9a3b-c772bf4a311c" providerId="ADAL" clId="{CF6A5140-9227-409F-9187-B98CCD837415}" dt="2023-03-09T07:08:43.528" v="5311" actId="20577"/>
-        <pc:sldMkLst>
-          <pc:docMk/>
-          <pc:sldMk cId="1628282840" sldId="455"/>
-        </pc:sldMkLst>
-      </pc:sldChg>
-      <pc:sldChg chg="modSp add mod">
-        <pc:chgData name="Matthieu De Mari" userId="dfb708c9-d8dc-439f-9a3b-c772bf4a311c" providerId="ADAL" clId="{CF6A5140-9227-409F-9187-B98CCD837415}" dt="2023-03-09T07:46:56.471" v="8164" actId="20577"/>
-        <pc:sldMkLst>
-          <pc:docMk/>
-          <pc:sldMk cId="1474802136" sldId="456"/>
-        </pc:sldMkLst>
-      </pc:sldChg>
-      <pc:sldChg chg="modSp new del mod">
-        <pc:chgData name="Matthieu De Mari" userId="dfb708c9-d8dc-439f-9a3b-c772bf4a311c" providerId="ADAL" clId="{CF6A5140-9227-409F-9187-B98CCD837415}" dt="2023-03-09T07:10:26.032" v="5340" actId="47"/>
-        <pc:sldMkLst>
-          <pc:docMk/>
-          <pc:sldMk cId="1747564226" sldId="456"/>
-        </pc:sldMkLst>
-      </pc:sldChg>
-      <pc:sldChg chg="modSp add mod">
-        <pc:chgData name="Matthieu De Mari" userId="dfb708c9-d8dc-439f-9a3b-c772bf4a311c" providerId="ADAL" clId="{CF6A5140-9227-409F-9187-B98CCD837415}" dt="2023-03-09T07:30:09.207" v="6594" actId="113"/>
-        <pc:sldMkLst>
-          <pc:docMk/>
-          <pc:sldMk cId="3858745428" sldId="457"/>
-        </pc:sldMkLst>
-      </pc:sldChg>
-      <pc:sldChg chg="add del">
-        <pc:chgData name="Matthieu De Mari" userId="dfb708c9-d8dc-439f-9a3b-c772bf4a311c" providerId="ADAL" clId="{CF6A5140-9227-409F-9187-B98CCD837415}" dt="2023-03-09T07:28:59.004" v="6288" actId="47"/>
-        <pc:sldMkLst>
-          <pc:docMk/>
-          <pc:sldMk cId="3308586578" sldId="458"/>
-        </pc:sldMkLst>
-      </pc:sldChg>
-      <pc:sldChg chg="modSp add mod">
-        <pc:chgData name="Matthieu De Mari" userId="dfb708c9-d8dc-439f-9a3b-c772bf4a311c" providerId="ADAL" clId="{CF6A5140-9227-409F-9187-B98CCD837415}" dt="2023-03-09T07:34:47.515" v="6856" actId="20577"/>
-        <pc:sldMkLst>
-          <pc:docMk/>
-          <pc:sldMk cId="3624547080" sldId="459"/>
-        </pc:sldMkLst>
-      </pc:sldChg>
-      <pc:sldChg chg="modSp add mod">
-        <pc:chgData name="Matthieu De Mari" userId="dfb708c9-d8dc-439f-9a3b-c772bf4a311c" providerId="ADAL" clId="{CF6A5140-9227-409F-9187-B98CCD837415}" dt="2023-03-09T07:38:31.942" v="7116" actId="114"/>
-        <pc:sldMkLst>
-          <pc:docMk/>
-          <pc:sldMk cId="727967492" sldId="460"/>
-        </pc:sldMkLst>
-      </pc:sldChg>
-      <pc:sldChg chg="modSp add mod">
-        <pc:chgData name="Matthieu De Mari" userId="dfb708c9-d8dc-439f-9a3b-c772bf4a311c" providerId="ADAL" clId="{CF6A5140-9227-409F-9187-B98CCD837415}" dt="2023-03-09T07:46:59.325" v="8166" actId="20577"/>
-        <pc:sldMkLst>
-          <pc:docMk/>
-          <pc:sldMk cId="813445278" sldId="461"/>
-        </pc:sldMkLst>
-      </pc:sldChg>
-      <pc:sldChg chg="addSp delSp modSp add mod">
-        <pc:chgData name="Matthieu De Mari" userId="dfb708c9-d8dc-439f-9a3b-c772bf4a311c" providerId="ADAL" clId="{CF6A5140-9227-409F-9187-B98CCD837415}" dt="2023-03-09T07:42:40.760" v="7446" actId="1582"/>
-        <pc:sldMkLst>
-          <pc:docMk/>
-          <pc:sldMk cId="2989704858" sldId="462"/>
-        </pc:sldMkLst>
-      </pc:sldChg>
-      <pc:sldChg chg="modSp add mod">
-        <pc:chgData name="Matthieu De Mari" userId="dfb708c9-d8dc-439f-9a3b-c772bf4a311c" providerId="ADAL" clId="{CF6A5140-9227-409F-9187-B98CCD837415}" dt="2023-03-09T07:45:07.795" v="7919" actId="20577"/>
-        <pc:sldMkLst>
-          <pc:docMk/>
-          <pc:sldMk cId="3007767847" sldId="463"/>
-        </pc:sldMkLst>
-      </pc:sldChg>
-      <pc:sldChg chg="modSp add mod">
-        <pc:chgData name="Matthieu De Mari" userId="dfb708c9-d8dc-439f-9a3b-c772bf4a311c" providerId="ADAL" clId="{CF6A5140-9227-409F-9187-B98CCD837415}" dt="2023-03-09T07:46:43.776" v="8159" actId="20577"/>
-        <pc:sldMkLst>
-          <pc:docMk/>
-          <pc:sldMk cId="47889816" sldId="464"/>
-        </pc:sldMkLst>
-      </pc:sldChg>
-      <pc:sldChg chg="addSp delSp modSp new mod">
-        <pc:chgData name="Matthieu De Mari" userId="dfb708c9-d8dc-439f-9a3b-c772bf4a311c" providerId="ADAL" clId="{CF6A5140-9227-409F-9187-B98CCD837415}" dt="2023-03-09T07:51:15.835" v="8554" actId="5793"/>
-        <pc:sldMkLst>
-          <pc:docMk/>
-          <pc:sldMk cId="4050530474" sldId="465"/>
-        </pc:sldMkLst>
-      </pc:sldChg>
-      <pc:sldChg chg="addSp delSp modSp add mod modClrScheme chgLayout">
-        <pc:chgData name="Matthieu De Mari" userId="dfb708c9-d8dc-439f-9a3b-c772bf4a311c" providerId="ADAL" clId="{CF6A5140-9227-409F-9187-B98CCD837415}" dt="2023-03-09T07:53:36" v="8647" actId="20577"/>
-        <pc:sldMkLst>
-          <pc:docMk/>
-          <pc:sldMk cId="4107990403" sldId="466"/>
-        </pc:sldMkLst>
-      </pc:sldChg>
-      <pc:sldChg chg="modSp add mod">
-        <pc:chgData name="Matthieu De Mari" userId="dfb708c9-d8dc-439f-9a3b-c772bf4a311c" providerId="ADAL" clId="{CF6A5140-9227-409F-9187-B98CCD837415}" dt="2023-03-09T07:54:53.992" v="8766" actId="20577"/>
-        <pc:sldMkLst>
-          <pc:docMk/>
-          <pc:sldMk cId="4111616225" sldId="467"/>
-        </pc:sldMkLst>
-      </pc:sldChg>
-      <pc:sldChg chg="modSp add mod">
-        <pc:chgData name="Matthieu De Mari" userId="dfb708c9-d8dc-439f-9a3b-c772bf4a311c" providerId="ADAL" clId="{CF6A5140-9227-409F-9187-B98CCD837415}" dt="2023-03-09T07:50:34.790" v="8460" actId="12"/>
-        <pc:sldMkLst>
-          <pc:docMk/>
-          <pc:sldMk cId="1345006296" sldId="468"/>
-        </pc:sldMkLst>
-      </pc:sldChg>
-      <pc:sldChg chg="modSp add mod">
-        <pc:chgData name="Matthieu De Mari" userId="dfb708c9-d8dc-439f-9a3b-c772bf4a311c" providerId="ADAL" clId="{CF6A5140-9227-409F-9187-B98CCD837415}" dt="2023-03-09T08:09:33.176" v="10403" actId="20577"/>
-        <pc:sldMkLst>
-          <pc:docMk/>
-          <pc:sldMk cId="1003937956" sldId="469"/>
-        </pc:sldMkLst>
-      </pc:sldChg>
-      <pc:sldChg chg="modSp add mod">
-        <pc:chgData name="Matthieu De Mari" userId="dfb708c9-d8dc-439f-9a3b-c772bf4a311c" providerId="ADAL" clId="{CF6A5140-9227-409F-9187-B98CCD837415}" dt="2023-03-09T07:59:32.806" v="9051" actId="20577"/>
-        <pc:sldMkLst>
-          <pc:docMk/>
-          <pc:sldMk cId="1494991067" sldId="470"/>
-        </pc:sldMkLst>
-      </pc:sldChg>
-      <pc:sldChg chg="delSp modSp add mod modClrScheme chgLayout">
-        <pc:chgData name="Matthieu De Mari" userId="dfb708c9-d8dc-439f-9a3b-c772bf4a311c" providerId="ADAL" clId="{CF6A5140-9227-409F-9187-B98CCD837415}" dt="2023-03-09T08:07:31.497" v="10354" actId="20577"/>
-        <pc:sldMkLst>
-          <pc:docMk/>
-          <pc:sldMk cId="3221576718" sldId="471"/>
-        </pc:sldMkLst>
-      </pc:sldChg>
-      <pc:sldChg chg="modSp add mod">
-        <pc:chgData name="Matthieu De Mari" userId="dfb708c9-d8dc-439f-9a3b-c772bf4a311c" providerId="ADAL" clId="{CF6A5140-9227-409F-9187-B98CCD837415}" dt="2023-03-09T08:45:37.083" v="10704" actId="20577"/>
-        <pc:sldMkLst>
-          <pc:docMk/>
-          <pc:sldMk cId="2469439250" sldId="472"/>
-        </pc:sldMkLst>
-      </pc:sldChg>
-      <pc:sldChg chg="modSp add del mod">
-        <pc:chgData name="Matthieu De Mari" userId="dfb708c9-d8dc-439f-9a3b-c772bf4a311c" providerId="ADAL" clId="{CF6A5140-9227-409F-9187-B98CCD837415}" dt="2023-03-09T08:07:37.150" v="10355" actId="47"/>
-        <pc:sldMkLst>
-          <pc:docMk/>
-          <pc:sldMk cId="2634163908" sldId="472"/>
-        </pc:sldMkLst>
-      </pc:sldChg>
-    </pc:docChg>
-  </pc:docChgLst>
-  <pc:docChgLst>
-    <pc:chgData name="Matthieu De Mari" userId="dfb708c9-d8dc-439f-9a3b-c772bf4a311c" providerId="ADAL" clId="{28B8DD55-849E-4DFE-B1CF-B34A69E4996E}"/>
-    <pc:docChg chg="modSld">
-      <pc:chgData name="Matthieu De Mari" userId="dfb708c9-d8dc-439f-9a3b-c772bf4a311c" providerId="ADAL" clId="{28B8DD55-849E-4DFE-B1CF-B34A69E4996E}" dt="2023-03-27T06:29:05.150" v="16" actId="20577"/>
-      <pc:docMkLst>
-        <pc:docMk/>
-      </pc:docMkLst>
-      <pc:sldChg chg="modSp mod">
-        <pc:chgData name="Matthieu De Mari" userId="dfb708c9-d8dc-439f-9a3b-c772bf4a311c" providerId="ADAL" clId="{28B8DD55-849E-4DFE-B1CF-B34A69E4996E}" dt="2023-03-27T06:29:05.150" v="16" actId="20577"/>
-        <pc:sldMkLst>
-          <pc:docMk/>
-          <pc:sldMk cId="1040156172" sldId="377"/>
-        </pc:sldMkLst>
-      </pc:sldChg>
-    </pc:docChg>
-  </pc:docChgLst>
-  <pc:docChgLst>
-    <pc:chgData name="Matthieu De Mari" userId="dfb708c9-d8dc-439f-9a3b-c772bf4a311c" providerId="ADAL" clId="{CA675C04-326A-42C1-AA09-9DC60FC4C1C8}"/>
-    <pc:docChg chg="undo custSel addSld delSld addSection delSection modSection">
-      <pc:chgData name="Matthieu De Mari" userId="dfb708c9-d8dc-439f-9a3b-c772bf4a311c" providerId="ADAL" clId="{CA675C04-326A-42C1-AA09-9DC60FC4C1C8}" dt="2025-04-14T11:27:24.371" v="1" actId="47"/>
-      <pc:docMkLst>
-        <pc:docMk/>
-      </pc:docMkLst>
-      <pc:sldChg chg="add del">
-        <pc:chgData name="Matthieu De Mari" userId="dfb708c9-d8dc-439f-9a3b-c772bf4a311c" providerId="ADAL" clId="{CA675C04-326A-42C1-AA09-9DC60FC4C1C8}" dt="2025-04-14T11:27:24.371" v="1" actId="47"/>
-        <pc:sldMkLst>
-          <pc:docMk/>
-          <pc:sldMk cId="1261878350" sldId="639"/>
-        </pc:sldMkLst>
-      </pc:sldChg>
-      <pc:sldChg chg="add del">
-        <pc:chgData name="Matthieu De Mari" userId="dfb708c9-d8dc-439f-9a3b-c772bf4a311c" providerId="ADAL" clId="{CA675C04-326A-42C1-AA09-9DC60FC4C1C8}" dt="2025-04-14T11:27:24.371" v="1" actId="47"/>
-        <pc:sldMkLst>
-          <pc:docMk/>
-          <pc:sldMk cId="1776332178" sldId="640"/>
-        </pc:sldMkLst>
-      </pc:sldChg>
-      <pc:sldChg chg="add del">
-        <pc:chgData name="Matthieu De Mari" userId="dfb708c9-d8dc-439f-9a3b-c772bf4a311c" providerId="ADAL" clId="{CA675C04-326A-42C1-AA09-9DC60FC4C1C8}" dt="2025-04-14T11:27:24.371" v="1" actId="47"/>
-        <pc:sldMkLst>
-          <pc:docMk/>
-          <pc:sldMk cId="2313253270" sldId="641"/>
-        </pc:sldMkLst>
-      </pc:sldChg>
-    </pc:docChg>
-  </pc:docChgLst>
-  <pc:docChgLst>
-    <pc:chgData name="Matthieu De Mari" userId="dfb708c9-d8dc-439f-9a3b-c772bf4a311c" providerId="ADAL" clId="{1888DEAD-E307-4CA6-AFF5-49DFF9FCD3C3}"/>
-    <pc:docChg chg="undo redo custSel addSld delSld modSld sldOrd addSection delSection modSection">
-      <pc:chgData name="Matthieu De Mari" userId="dfb708c9-d8dc-439f-9a3b-c772bf4a311c" providerId="ADAL" clId="{1888DEAD-E307-4CA6-AFF5-49DFF9FCD3C3}" dt="2023-03-20T11:56:54.486" v="10255" actId="1076"/>
-      <pc:docMkLst>
-        <pc:docMk/>
-      </pc:docMkLst>
-      <pc:sldChg chg="add">
-        <pc:chgData name="Matthieu De Mari" userId="dfb708c9-d8dc-439f-9a3b-c772bf4a311c" providerId="ADAL" clId="{1888DEAD-E307-4CA6-AFF5-49DFF9FCD3C3}" dt="2023-03-20T08:27:47.519" v="2239"/>
-        <pc:sldMkLst>
-          <pc:docMk/>
-          <pc:sldMk cId="1813455260" sldId="274"/>
-        </pc:sldMkLst>
-      </pc:sldChg>
-      <pc:sldChg chg="add">
-        <pc:chgData name="Matthieu De Mari" userId="dfb708c9-d8dc-439f-9a3b-c772bf4a311c" providerId="ADAL" clId="{1888DEAD-E307-4CA6-AFF5-49DFF9FCD3C3}" dt="2023-03-20T08:27:47.519" v="2239"/>
-        <pc:sldMkLst>
-          <pc:docMk/>
-          <pc:sldMk cId="144954399" sldId="275"/>
-        </pc:sldMkLst>
-      </pc:sldChg>
-      <pc:sldChg chg="add">
-        <pc:chgData name="Matthieu De Mari" userId="dfb708c9-d8dc-439f-9a3b-c772bf4a311c" providerId="ADAL" clId="{1888DEAD-E307-4CA6-AFF5-49DFF9FCD3C3}" dt="2023-03-20T08:27:47.519" v="2239"/>
-        <pc:sldMkLst>
-          <pc:docMk/>
-          <pc:sldMk cId="885607022" sldId="278"/>
-        </pc:sldMkLst>
-      </pc:sldChg>
-      <pc:sldChg chg="modSp add mod">
-        <pc:chgData name="Matthieu De Mari" userId="dfb708c9-d8dc-439f-9a3b-c772bf4a311c" providerId="ADAL" clId="{1888DEAD-E307-4CA6-AFF5-49DFF9FCD3C3}" dt="2023-03-20T08:28:17.622" v="2251" actId="27636"/>
-        <pc:sldMkLst>
-          <pc:docMk/>
-          <pc:sldMk cId="3941141626" sldId="279"/>
-        </pc:sldMkLst>
-      </pc:sldChg>
-      <pc:sldChg chg="add">
-        <pc:chgData name="Matthieu De Mari" userId="dfb708c9-d8dc-439f-9a3b-c772bf4a311c" providerId="ADAL" clId="{1888DEAD-E307-4CA6-AFF5-49DFF9FCD3C3}" dt="2023-03-20T08:27:47.519" v="2239"/>
-        <pc:sldMkLst>
-          <pc:docMk/>
-          <pc:sldMk cId="2409304258" sldId="280"/>
-        </pc:sldMkLst>
-      </pc:sldChg>
-      <pc:sldChg chg="add">
-        <pc:chgData name="Matthieu De Mari" userId="dfb708c9-d8dc-439f-9a3b-c772bf4a311c" providerId="ADAL" clId="{1888DEAD-E307-4CA6-AFF5-49DFF9FCD3C3}" dt="2023-03-20T08:27:47.519" v="2239"/>
-        <pc:sldMkLst>
-          <pc:docMk/>
-          <pc:sldMk cId="2949375831" sldId="281"/>
-        </pc:sldMkLst>
-      </pc:sldChg>
-      <pc:sldChg chg="add">
-        <pc:chgData name="Matthieu De Mari" userId="dfb708c9-d8dc-439f-9a3b-c772bf4a311c" providerId="ADAL" clId="{1888DEAD-E307-4CA6-AFF5-49DFF9FCD3C3}" dt="2023-03-20T08:27:47.519" v="2239"/>
-        <pc:sldMkLst>
-          <pc:docMk/>
-          <pc:sldMk cId="1567445271" sldId="285"/>
-        </pc:sldMkLst>
-      </pc:sldChg>
-      <pc:sldChg chg="del">
-        <pc:chgData name="Matthieu De Mari" userId="dfb708c9-d8dc-439f-9a3b-c772bf4a311c" providerId="ADAL" clId="{1888DEAD-E307-4CA6-AFF5-49DFF9FCD3C3}" dt="2023-03-17T13:16:50.686" v="14" actId="47"/>
-        <pc:sldMkLst>
-          <pc:docMk/>
-          <pc:sldMk cId="3431685878" sldId="378"/>
-        </pc:sldMkLst>
-      </pc:sldChg>
-      <pc:sldChg chg="del">
-        <pc:chgData name="Matthieu De Mari" userId="dfb708c9-d8dc-439f-9a3b-c772bf4a311c" providerId="ADAL" clId="{1888DEAD-E307-4CA6-AFF5-49DFF9FCD3C3}" dt="2023-03-17T13:16:51.617" v="15" actId="47"/>
-        <pc:sldMkLst>
-          <pc:docMk/>
-          <pc:sldMk cId="2656047251" sldId="379"/>
-        </pc:sldMkLst>
-      </pc:sldChg>
-      <pc:sldChg chg="add">
-        <pc:chgData name="Matthieu De Mari" userId="dfb708c9-d8dc-439f-9a3b-c772bf4a311c" providerId="ADAL" clId="{1888DEAD-E307-4CA6-AFF5-49DFF9FCD3C3}" dt="2023-03-20T08:27:47.519" v="2239"/>
-        <pc:sldMkLst>
-          <pc:docMk/>
-          <pc:sldMk cId="3856210223" sldId="379"/>
-        </pc:sldMkLst>
-      </pc:sldChg>
-      <pc:sldChg chg="del">
-        <pc:chgData name="Matthieu De Mari" userId="dfb708c9-d8dc-439f-9a3b-c772bf4a311c" providerId="ADAL" clId="{1888DEAD-E307-4CA6-AFF5-49DFF9FCD3C3}" dt="2023-03-17T13:16:52.409" v="16" actId="47"/>
-        <pc:sldMkLst>
-          <pc:docMk/>
-          <pc:sldMk cId="3478712926" sldId="380"/>
-        </pc:sldMkLst>
-      </pc:sldChg>
-      <pc:sldChg chg="del">
-        <pc:chgData name="Matthieu De Mari" userId="dfb708c9-d8dc-439f-9a3b-c772bf4a311c" providerId="ADAL" clId="{1888DEAD-E307-4CA6-AFF5-49DFF9FCD3C3}" dt="2023-03-17T13:16:53.838" v="18" actId="47"/>
-        <pc:sldMkLst>
-          <pc:docMk/>
-          <pc:sldMk cId="687323073" sldId="381"/>
-        </pc:sldMkLst>
-      </pc:sldChg>
-      <pc:sldChg chg="del">
-        <pc:chgData name="Matthieu De Mari" userId="dfb708c9-d8dc-439f-9a3b-c772bf4a311c" providerId="ADAL" clId="{1888DEAD-E307-4CA6-AFF5-49DFF9FCD3C3}" dt="2023-03-17T13:16:53.123" v="17" actId="47"/>
-        <pc:sldMkLst>
-          <pc:docMk/>
-          <pc:sldMk cId="1749567037" sldId="382"/>
-        </pc:sldMkLst>
-      </pc:sldChg>
-      <pc:sldChg chg="del">
-        <pc:chgData name="Matthieu De Mari" userId="dfb708c9-d8dc-439f-9a3b-c772bf4a311c" providerId="ADAL" clId="{1888DEAD-E307-4CA6-AFF5-49DFF9FCD3C3}" dt="2023-03-17T13:16:54.511" v="19" actId="47"/>
-        <pc:sldMkLst>
-          <pc:docMk/>
-          <pc:sldMk cId="3718139832" sldId="383"/>
-        </pc:sldMkLst>
-      </pc:sldChg>
-      <pc:sldChg chg="del">
-        <pc:chgData name="Matthieu De Mari" userId="dfb708c9-d8dc-439f-9a3b-c772bf4a311c" providerId="ADAL" clId="{1888DEAD-E307-4CA6-AFF5-49DFF9FCD3C3}" dt="2023-03-17T13:16:56.717" v="21" actId="47"/>
-        <pc:sldMkLst>
-          <pc:docMk/>
-          <pc:sldMk cId="3649959589" sldId="384"/>
-        </pc:sldMkLst>
-      </pc:sldChg>
-      <pc:sldChg chg="del">
-        <pc:chgData name="Matthieu De Mari" userId="dfb708c9-d8dc-439f-9a3b-c772bf4a311c" providerId="ADAL" clId="{1888DEAD-E307-4CA6-AFF5-49DFF9FCD3C3}" dt="2023-03-17T13:16:57.867" v="22" actId="47"/>
-        <pc:sldMkLst>
-          <pc:docMk/>
-          <pc:sldMk cId="3174082147" sldId="385"/>
-        </pc:sldMkLst>
-      </pc:sldChg>
-      <pc:sldChg chg="addSp delSp modSp new mod modClrScheme chgLayout">
-        <pc:chgData name="Matthieu De Mari" userId="dfb708c9-d8dc-439f-9a3b-c772bf4a311c" providerId="ADAL" clId="{1888DEAD-E307-4CA6-AFF5-49DFF9FCD3C3}" dt="2023-03-20T08:05:01.065" v="2236" actId="20577"/>
-        <pc:sldMkLst>
-          <pc:docMk/>
-          <pc:sldMk cId="4192428753" sldId="387"/>
-        </pc:sldMkLst>
-      </pc:sldChg>
-      <pc:sldChg chg="addSp delSp modSp new add del mod">
-        <pc:chgData name="Matthieu De Mari" userId="dfb708c9-d8dc-439f-9a3b-c772bf4a311c" providerId="ADAL" clId="{1888DEAD-E307-4CA6-AFF5-49DFF9FCD3C3}" dt="2023-03-20T10:50:34.324" v="3370" actId="113"/>
-        <pc:sldMkLst>
-          <pc:docMk/>
-          <pc:sldMk cId="1602756966" sldId="388"/>
-        </pc:sldMkLst>
-      </pc:sldChg>
-      <pc:sldChg chg="modSp new mod">
-        <pc:chgData name="Matthieu De Mari" userId="dfb708c9-d8dc-439f-9a3b-c772bf4a311c" providerId="ADAL" clId="{1888DEAD-E307-4CA6-AFF5-49DFF9FCD3C3}" dt="2023-03-20T10:58:09.013" v="3972" actId="114"/>
-        <pc:sldMkLst>
-          <pc:docMk/>
-          <pc:sldMk cId="1922111427" sldId="389"/>
-        </pc:sldMkLst>
-      </pc:sldChg>
-      <pc:sldChg chg="addSp delSp modSp new mod">
-        <pc:chgData name="Matthieu De Mari" userId="dfb708c9-d8dc-439f-9a3b-c772bf4a311c" providerId="ADAL" clId="{1888DEAD-E307-4CA6-AFF5-49DFF9FCD3C3}" dt="2023-03-20T11:30:35.918" v="7869" actId="20577"/>
-        <pc:sldMkLst>
-          <pc:docMk/>
-          <pc:sldMk cId="664874362" sldId="390"/>
-        </pc:sldMkLst>
-      </pc:sldChg>
-      <pc:sldChg chg="modSp new mod ord">
-        <pc:chgData name="Matthieu De Mari" userId="dfb708c9-d8dc-439f-9a3b-c772bf4a311c" providerId="ADAL" clId="{1888DEAD-E307-4CA6-AFF5-49DFF9FCD3C3}" dt="2023-03-20T11:31:40.045" v="7976" actId="20577"/>
-        <pc:sldMkLst>
-          <pc:docMk/>
-          <pc:sldMk cId="2030689423" sldId="391"/>
-        </pc:sldMkLst>
-      </pc:sldChg>
-      <pc:sldChg chg="addSp modSp new mod modClrScheme chgLayout">
-        <pc:chgData name="Matthieu De Mari" userId="dfb708c9-d8dc-439f-9a3b-c772bf4a311c" providerId="ADAL" clId="{1888DEAD-E307-4CA6-AFF5-49DFF9FCD3C3}" dt="2023-03-20T11:22:46.019" v="7008" actId="21"/>
-        <pc:sldMkLst>
-          <pc:docMk/>
-          <pc:sldMk cId="715460662" sldId="392"/>
-        </pc:sldMkLst>
-      </pc:sldChg>
-      <pc:sldChg chg="modSp new del mod">
-        <pc:chgData name="Matthieu De Mari" userId="dfb708c9-d8dc-439f-9a3b-c772bf4a311c" providerId="ADAL" clId="{1888DEAD-E307-4CA6-AFF5-49DFF9FCD3C3}" dt="2023-03-20T11:22:30.141" v="6981" actId="47"/>
-        <pc:sldMkLst>
-          <pc:docMk/>
-          <pc:sldMk cId="2534803411" sldId="393"/>
-        </pc:sldMkLst>
-      </pc:sldChg>
-      <pc:sldChg chg="addSp modSp new mod">
-        <pc:chgData name="Matthieu De Mari" userId="dfb708c9-d8dc-439f-9a3b-c772bf4a311c" providerId="ADAL" clId="{1888DEAD-E307-4CA6-AFF5-49DFF9FCD3C3}" dt="2023-03-20T11:44:12.116" v="8898" actId="1076"/>
-        <pc:sldMkLst>
-          <pc:docMk/>
-          <pc:sldMk cId="2284998225" sldId="394"/>
-        </pc:sldMkLst>
-      </pc:sldChg>
-      <pc:sldChg chg="addSp delSp modSp new mod">
-        <pc:chgData name="Matthieu De Mari" userId="dfb708c9-d8dc-439f-9a3b-c772bf4a311c" providerId="ADAL" clId="{1888DEAD-E307-4CA6-AFF5-49DFF9FCD3C3}" dt="2023-03-20T11:32:09" v="7983" actId="478"/>
-        <pc:sldMkLst>
-          <pc:docMk/>
-          <pc:sldMk cId="351971478" sldId="395"/>
-        </pc:sldMkLst>
-      </pc:sldChg>
-      <pc:sldChg chg="modSp new mod">
-        <pc:chgData name="Matthieu De Mari" userId="dfb708c9-d8dc-439f-9a3b-c772bf4a311c" providerId="ADAL" clId="{1888DEAD-E307-4CA6-AFF5-49DFF9FCD3C3}" dt="2023-03-20T11:34:51.404" v="8197" actId="20577"/>
-        <pc:sldMkLst>
-          <pc:docMk/>
-          <pc:sldMk cId="1697348003" sldId="396"/>
-        </pc:sldMkLst>
-      </pc:sldChg>
-      <pc:sldChg chg="modSp add mod">
-        <pc:chgData name="Matthieu De Mari" userId="dfb708c9-d8dc-439f-9a3b-c772bf4a311c" providerId="ADAL" clId="{1888DEAD-E307-4CA6-AFF5-49DFF9FCD3C3}" dt="2023-03-20T11:39:08.989" v="8632" actId="20577"/>
-        <pc:sldMkLst>
-          <pc:docMk/>
-          <pc:sldMk cId="190215950" sldId="397"/>
-        </pc:sldMkLst>
-      </pc:sldChg>
-      <pc:sldChg chg="addSp delSp modSp new mod">
-        <pc:chgData name="Matthieu De Mari" userId="dfb708c9-d8dc-439f-9a3b-c772bf4a311c" providerId="ADAL" clId="{1888DEAD-E307-4CA6-AFF5-49DFF9FCD3C3}" dt="2023-03-20T11:51:03.070" v="9608" actId="20577"/>
-        <pc:sldMkLst>
-          <pc:docMk/>
-          <pc:sldMk cId="745490463" sldId="398"/>
-        </pc:sldMkLst>
-      </pc:sldChg>
-      <pc:sldChg chg="addSp delSp modSp new mod">
-        <pc:chgData name="Matthieu De Mari" userId="dfb708c9-d8dc-439f-9a3b-c772bf4a311c" providerId="ADAL" clId="{1888DEAD-E307-4CA6-AFF5-49DFF9FCD3C3}" dt="2023-03-20T11:53:36.273" v="9937" actId="20577"/>
-        <pc:sldMkLst>
-          <pc:docMk/>
-          <pc:sldMk cId="1555117061" sldId="399"/>
-        </pc:sldMkLst>
-      </pc:sldChg>
-      <pc:sldChg chg="addSp delSp modSp new mod modClrScheme chgLayout">
-        <pc:chgData name="Matthieu De Mari" userId="dfb708c9-d8dc-439f-9a3b-c772bf4a311c" providerId="ADAL" clId="{1888DEAD-E307-4CA6-AFF5-49DFF9FCD3C3}" dt="2023-03-20T11:47:10.922" v="9250" actId="14100"/>
-        <pc:sldMkLst>
-          <pc:docMk/>
-          <pc:sldMk cId="18795257" sldId="400"/>
-        </pc:sldMkLst>
-      </pc:sldChg>
-      <pc:sldChg chg="modSp new del mod">
-        <pc:chgData name="Matthieu De Mari" userId="dfb708c9-d8dc-439f-9a3b-c772bf4a311c" providerId="ADAL" clId="{1888DEAD-E307-4CA6-AFF5-49DFF9FCD3C3}" dt="2023-03-20T11:54:02.201" v="9953" actId="47"/>
-        <pc:sldMkLst>
-          <pc:docMk/>
-          <pc:sldMk cId="67563267" sldId="401"/>
-        </pc:sldMkLst>
-      </pc:sldChg>
-      <pc:sldChg chg="modSp new mod">
-        <pc:chgData name="Matthieu De Mari" userId="dfb708c9-d8dc-439f-9a3b-c772bf4a311c" providerId="ADAL" clId="{1888DEAD-E307-4CA6-AFF5-49DFF9FCD3C3}" dt="2023-03-17T14:54:51.086" v="1008" actId="20577"/>
-        <pc:sldMkLst>
-          <pc:docMk/>
-          <pc:sldMk cId="522259521" sldId="402"/>
-        </pc:sldMkLst>
-      </pc:sldChg>
-      <pc:sldChg chg="modSp new mod">
-        <pc:chgData name="Matthieu De Mari" userId="dfb708c9-d8dc-439f-9a3b-c772bf4a311c" providerId="ADAL" clId="{1888DEAD-E307-4CA6-AFF5-49DFF9FCD3C3}" dt="2023-03-17T15:01:26.660" v="1134" actId="20577"/>
-        <pc:sldMkLst>
-          <pc:docMk/>
-          <pc:sldMk cId="3794044645" sldId="403"/>
-        </pc:sldMkLst>
-      </pc:sldChg>
-      <pc:sldChg chg="addSp delSp modSp new mod">
-        <pc:chgData name="Matthieu De Mari" userId="dfb708c9-d8dc-439f-9a3b-c772bf4a311c" providerId="ADAL" clId="{1888DEAD-E307-4CA6-AFF5-49DFF9FCD3C3}" dt="2023-03-17T15:02:43.250" v="1188" actId="20577"/>
-        <pc:sldMkLst>
-          <pc:docMk/>
-          <pc:sldMk cId="3564327451" sldId="404"/>
-        </pc:sldMkLst>
-      </pc:sldChg>
-      <pc:sldChg chg="new">
-        <pc:chgData name="Matthieu De Mari" userId="dfb708c9-d8dc-439f-9a3b-c772bf4a311c" providerId="ADAL" clId="{1888DEAD-E307-4CA6-AFF5-49DFF9FCD3C3}" dt="2023-03-17T15:04:52.111" v="1191" actId="680"/>
-        <pc:sldMkLst>
-          <pc:docMk/>
-          <pc:sldMk cId="3917151320" sldId="405"/>
-        </pc:sldMkLst>
-      </pc:sldChg>
-      <pc:sldChg chg="new">
-        <pc:chgData name="Matthieu De Mari" userId="dfb708c9-d8dc-439f-9a3b-c772bf4a311c" providerId="ADAL" clId="{1888DEAD-E307-4CA6-AFF5-49DFF9FCD3C3}" dt="2023-03-17T15:05:09.158" v="1194" actId="680"/>
-        <pc:sldMkLst>
-          <pc:docMk/>
-          <pc:sldMk cId="1053501067" sldId="406"/>
-        </pc:sldMkLst>
-      </pc:sldChg>
-      <pc:sldChg chg="new">
-        <pc:chgData name="Matthieu De Mari" userId="dfb708c9-d8dc-439f-9a3b-c772bf4a311c" providerId="ADAL" clId="{1888DEAD-E307-4CA6-AFF5-49DFF9FCD3C3}" dt="2023-03-17T15:05:19.721" v="1197" actId="680"/>
-        <pc:sldMkLst>
-          <pc:docMk/>
-          <pc:sldMk cId="2333808755" sldId="407"/>
-        </pc:sldMkLst>
-      </pc:sldChg>
-      <pc:sldChg chg="new">
-        <pc:chgData name="Matthieu De Mari" userId="dfb708c9-d8dc-439f-9a3b-c772bf4a311c" providerId="ADAL" clId="{1888DEAD-E307-4CA6-AFF5-49DFF9FCD3C3}" dt="2023-03-17T15:05:42.509" v="1201" actId="680"/>
-        <pc:sldMkLst>
-          <pc:docMk/>
-          <pc:sldMk cId="2257717264" sldId="408"/>
-        </pc:sldMkLst>
-      </pc:sldChg>
-      <pc:sldChg chg="new">
-        <pc:chgData name="Matthieu De Mari" userId="dfb708c9-d8dc-439f-9a3b-c772bf4a311c" providerId="ADAL" clId="{1888DEAD-E307-4CA6-AFF5-49DFF9FCD3C3}" dt="2023-03-17T15:09:16.341" v="1204" actId="680"/>
-        <pc:sldMkLst>
-          <pc:docMk/>
-          <pc:sldMk cId="495269238" sldId="409"/>
-        </pc:sldMkLst>
-      </pc:sldChg>
-      <pc:sldChg chg="modSp new mod">
-        <pc:chgData name="Matthieu De Mari" userId="dfb708c9-d8dc-439f-9a3b-c772bf4a311c" providerId="ADAL" clId="{1888DEAD-E307-4CA6-AFF5-49DFF9FCD3C3}" dt="2023-03-20T11:17:55.593" v="6342" actId="20577"/>
-        <pc:sldMkLst>
-          <pc:docMk/>
-          <pc:sldMk cId="2277689196" sldId="410"/>
-        </pc:sldMkLst>
-      </pc:sldChg>
-      <pc:sldChg chg="new">
-        <pc:chgData name="Matthieu De Mari" userId="dfb708c9-d8dc-439f-9a3b-c772bf4a311c" providerId="ADAL" clId="{1888DEAD-E307-4CA6-AFF5-49DFF9FCD3C3}" dt="2023-03-20T08:36:59.226" v="2254" actId="680"/>
-        <pc:sldMkLst>
-          <pc:docMk/>
-          <pc:sldMk cId="4052331108" sldId="411"/>
-        </pc:sldMkLst>
-      </pc:sldChg>
-      <pc:sldChg chg="addSp delSp modSp new mod">
-        <pc:chgData name="Matthieu De Mari" userId="dfb708c9-d8dc-439f-9a3b-c772bf4a311c" providerId="ADAL" clId="{1888DEAD-E307-4CA6-AFF5-49DFF9FCD3C3}" dt="2023-03-20T10:43:02.012" v="2489" actId="1076"/>
-        <pc:sldMkLst>
-          <pc:docMk/>
-          <pc:sldMk cId="224038096" sldId="412"/>
-        </pc:sldMkLst>
-      </pc:sldChg>
-      <pc:sldChg chg="new del">
-        <pc:chgData name="Matthieu De Mari" userId="dfb708c9-d8dc-439f-9a3b-c772bf4a311c" providerId="ADAL" clId="{1888DEAD-E307-4CA6-AFF5-49DFF9FCD3C3}" dt="2023-03-20T08:37:09.342" v="2258" actId="47"/>
-        <pc:sldMkLst>
-          <pc:docMk/>
-          <pc:sldMk cId="2849533176" sldId="412"/>
-        </pc:sldMkLst>
-      </pc:sldChg>
-      <pc:sldChg chg="addSp delSp add mod">
-        <pc:chgData name="Matthieu De Mari" userId="dfb708c9-d8dc-439f-9a3b-c772bf4a311c" providerId="ADAL" clId="{1888DEAD-E307-4CA6-AFF5-49DFF9FCD3C3}" dt="2023-03-20T10:40:31.046" v="2452" actId="22"/>
-        <pc:sldMkLst>
-          <pc:docMk/>
-          <pc:sldMk cId="1129488317" sldId="413"/>
-        </pc:sldMkLst>
-      </pc:sldChg>
-      <pc:sldChg chg="modSp add del mod">
-        <pc:chgData name="Matthieu De Mari" userId="dfb708c9-d8dc-439f-9a3b-c772bf4a311c" providerId="ADAL" clId="{1888DEAD-E307-4CA6-AFF5-49DFF9FCD3C3}" dt="2023-03-20T10:39:59.757" v="2441" actId="47"/>
-        <pc:sldMkLst>
-          <pc:docMk/>
-          <pc:sldMk cId="1763533000" sldId="413"/>
-        </pc:sldMkLst>
-      </pc:sldChg>
-      <pc:sldChg chg="delSp modSp add del mod">
-        <pc:chgData name="Matthieu De Mari" userId="dfb708c9-d8dc-439f-9a3b-c772bf4a311c" providerId="ADAL" clId="{1888DEAD-E307-4CA6-AFF5-49DFF9FCD3C3}" dt="2023-03-20T10:40:03.135" v="2444" actId="47"/>
-        <pc:sldMkLst>
-          <pc:docMk/>
-          <pc:sldMk cId="840977672" sldId="414"/>
-        </pc:sldMkLst>
-      </pc:sldChg>
-      <pc:sldChg chg="addSp delSp modSp add mod">
-        <pc:chgData name="Matthieu De Mari" userId="dfb708c9-d8dc-439f-9a3b-c772bf4a311c" providerId="ADAL" clId="{1888DEAD-E307-4CA6-AFF5-49DFF9FCD3C3}" dt="2023-03-20T10:42:31.921" v="2465" actId="1440"/>
-        <pc:sldMkLst>
-          <pc:docMk/>
-          <pc:sldMk cId="1383390466" sldId="414"/>
-        </pc:sldMkLst>
-      </pc:sldChg>
-      <pc:sldChg chg="addSp delSp modSp new mod ord">
-        <pc:chgData name="Matthieu De Mari" userId="dfb708c9-d8dc-439f-9a3b-c772bf4a311c" providerId="ADAL" clId="{1888DEAD-E307-4CA6-AFF5-49DFF9FCD3C3}" dt="2023-03-20T10:55:23.741" v="3767" actId="20577"/>
-        <pc:sldMkLst>
-          <pc:docMk/>
-          <pc:sldMk cId="1808429987" sldId="415"/>
-        </pc:sldMkLst>
-      </pc:sldChg>
-      <pc:sldChg chg="modSp add mod ord">
-        <pc:chgData name="Matthieu De Mari" userId="dfb708c9-d8dc-439f-9a3b-c772bf4a311c" providerId="ADAL" clId="{1888DEAD-E307-4CA6-AFF5-49DFF9FCD3C3}" dt="2023-03-20T11:19:06.612" v="6456" actId="20577"/>
-        <pc:sldMkLst>
-          <pc:docMk/>
-          <pc:sldMk cId="1582022426" sldId="416"/>
-        </pc:sldMkLst>
-      </pc:sldChg>
-      <pc:sldChg chg="addSp modSp add mod">
-        <pc:chgData name="Matthieu De Mari" userId="dfb708c9-d8dc-439f-9a3b-c772bf4a311c" providerId="ADAL" clId="{1888DEAD-E307-4CA6-AFF5-49DFF9FCD3C3}" dt="2023-03-20T10:53:41.165" v="3592" actId="14100"/>
-        <pc:sldMkLst>
-          <pc:docMk/>
-          <pc:sldMk cId="1158748637" sldId="417"/>
-        </pc:sldMkLst>
-      </pc:sldChg>
-      <pc:sldChg chg="addSp delSp new mod">
-        <pc:chgData name="Matthieu De Mari" userId="dfb708c9-d8dc-439f-9a3b-c772bf4a311c" providerId="ADAL" clId="{1888DEAD-E307-4CA6-AFF5-49DFF9FCD3C3}" dt="2023-03-20T10:55:07.743" v="3763" actId="22"/>
-        <pc:sldMkLst>
-          <pc:docMk/>
-          <pc:sldMk cId="508583681" sldId="418"/>
-        </pc:sldMkLst>
-      </pc:sldChg>
-      <pc:sldChg chg="addSp delSp modSp add mod ord">
-        <pc:chgData name="Matthieu De Mari" userId="dfb708c9-d8dc-439f-9a3b-c772bf4a311c" providerId="ADAL" clId="{1888DEAD-E307-4CA6-AFF5-49DFF9FCD3C3}" dt="2023-03-20T10:59:08.845" v="3978" actId="1076"/>
-        <pc:sldMkLst>
-          <pc:docMk/>
-          <pc:sldMk cId="2453299544" sldId="419"/>
-        </pc:sldMkLst>
-      </pc:sldChg>
-      <pc:sldChg chg="add del">
-        <pc:chgData name="Matthieu De Mari" userId="dfb708c9-d8dc-439f-9a3b-c772bf4a311c" providerId="ADAL" clId="{1888DEAD-E307-4CA6-AFF5-49DFF9FCD3C3}" dt="2023-03-20T10:58:44.540" v="3974" actId="47"/>
-        <pc:sldMkLst>
-          <pc:docMk/>
-          <pc:sldMk cId="860446693" sldId="420"/>
-        </pc:sldMkLst>
-      </pc:sldChg>
-      <pc:sldChg chg="modSp new mod">
-        <pc:chgData name="Matthieu De Mari" userId="dfb708c9-d8dc-439f-9a3b-c772bf4a311c" providerId="ADAL" clId="{1888DEAD-E307-4CA6-AFF5-49DFF9FCD3C3}" dt="2023-03-20T11:05:38.379" v="4785" actId="20577"/>
-        <pc:sldMkLst>
-          <pc:docMk/>
-          <pc:sldMk cId="2455924593" sldId="420"/>
-        </pc:sldMkLst>
-      </pc:sldChg>
-      <pc:sldChg chg="addSp delSp modSp new mod">
-        <pc:chgData name="Matthieu De Mari" userId="dfb708c9-d8dc-439f-9a3b-c772bf4a311c" providerId="ADAL" clId="{1888DEAD-E307-4CA6-AFF5-49DFF9FCD3C3}" dt="2023-03-20T11:01:03.311" v="3996" actId="20577"/>
-        <pc:sldMkLst>
-          <pc:docMk/>
-          <pc:sldMk cId="3719237298" sldId="421"/>
-        </pc:sldMkLst>
-      </pc:sldChg>
-      <pc:sldChg chg="modSp add mod">
-        <pc:chgData name="Matthieu De Mari" userId="dfb708c9-d8dc-439f-9a3b-c772bf4a311c" providerId="ADAL" clId="{1888DEAD-E307-4CA6-AFF5-49DFF9FCD3C3}" dt="2023-03-20T11:06:58.547" v="5094" actId="113"/>
-        <pc:sldMkLst>
-          <pc:docMk/>
-          <pc:sldMk cId="2067717828" sldId="422"/>
-        </pc:sldMkLst>
-      </pc:sldChg>
-      <pc:sldChg chg="modSp add mod">
-        <pc:chgData name="Matthieu De Mari" userId="dfb708c9-d8dc-439f-9a3b-c772bf4a311c" providerId="ADAL" clId="{1888DEAD-E307-4CA6-AFF5-49DFF9FCD3C3}" dt="2023-03-20T11:11:21.696" v="5781" actId="113"/>
-        <pc:sldMkLst>
-          <pc:docMk/>
-          <pc:sldMk cId="2542189070" sldId="423"/>
-        </pc:sldMkLst>
-      </pc:sldChg>
-      <pc:sldChg chg="del">
-        <pc:chgData name="Matthieu De Mari" userId="dfb708c9-d8dc-439f-9a3b-c772bf4a311c" providerId="ADAL" clId="{1888DEAD-E307-4CA6-AFF5-49DFF9FCD3C3}" dt="2023-03-17T13:16:50.686" v="14" actId="47"/>
-        <pc:sldMkLst>
-          <pc:docMk/>
-          <pc:sldMk cId="4226169062" sldId="423"/>
-        </pc:sldMkLst>
-      </pc:sldChg>
-      <pc:sldChg chg="addSp delSp add mod ord">
-        <pc:chgData name="Matthieu De Mari" userId="dfb708c9-d8dc-439f-9a3b-c772bf4a311c" providerId="ADAL" clId="{1888DEAD-E307-4CA6-AFF5-49DFF9FCD3C3}" dt="2023-03-20T11:15:49.756" v="6267" actId="22"/>
-        <pc:sldMkLst>
-          <pc:docMk/>
-          <pc:sldMk cId="218642185" sldId="424"/>
-        </pc:sldMkLst>
-      </pc:sldChg>
-      <pc:sldChg chg="del">
-        <pc:chgData name="Matthieu De Mari" userId="dfb708c9-d8dc-439f-9a3b-c772bf4a311c" providerId="ADAL" clId="{1888DEAD-E307-4CA6-AFF5-49DFF9FCD3C3}" dt="2023-03-17T13:16:50.686" v="14" actId="47"/>
-        <pc:sldMkLst>
-          <pc:docMk/>
-          <pc:sldMk cId="1794465962" sldId="424"/>
-        </pc:sldMkLst>
-      </pc:sldChg>
-      <pc:sldChg chg="addSp delSp modSp new mod">
-        <pc:chgData name="Matthieu De Mari" userId="dfb708c9-d8dc-439f-9a3b-c772bf4a311c" providerId="ADAL" clId="{1888DEAD-E307-4CA6-AFF5-49DFF9FCD3C3}" dt="2023-03-20T11:16:35.793" v="6273" actId="1076"/>
-        <pc:sldMkLst>
-          <pc:docMk/>
-          <pc:sldMk cId="424111310" sldId="425"/>
-        </pc:sldMkLst>
-      </pc:sldChg>
-      <pc:sldChg chg="del">
-        <pc:chgData name="Matthieu De Mari" userId="dfb708c9-d8dc-439f-9a3b-c772bf4a311c" providerId="ADAL" clId="{1888DEAD-E307-4CA6-AFF5-49DFF9FCD3C3}" dt="2023-03-17T13:16:50.686" v="14" actId="47"/>
-        <pc:sldMkLst>
-          <pc:docMk/>
-          <pc:sldMk cId="909573732" sldId="425"/>
-        </pc:sldMkLst>
-      </pc:sldChg>
-      <pc:sldChg chg="addSp modSp add mod ord">
-        <pc:chgData name="Matthieu De Mari" userId="dfb708c9-d8dc-439f-9a3b-c772bf4a311c" providerId="ADAL" clId="{1888DEAD-E307-4CA6-AFF5-49DFF9FCD3C3}" dt="2023-03-20T11:31:44.551" v="7978"/>
-        <pc:sldMkLst>
-          <pc:docMk/>
-          <pc:sldMk cId="451959142" sldId="426"/>
-        </pc:sldMkLst>
-      </pc:sldChg>
-      <pc:sldChg chg="del">
-        <pc:chgData name="Matthieu De Mari" userId="dfb708c9-d8dc-439f-9a3b-c772bf4a311c" providerId="ADAL" clId="{1888DEAD-E307-4CA6-AFF5-49DFF9FCD3C3}" dt="2023-03-17T13:16:51.617" v="15" actId="47"/>
-        <pc:sldMkLst>
-          <pc:docMk/>
-          <pc:sldMk cId="730515734" sldId="426"/>
-        </pc:sldMkLst>
-      </pc:sldChg>
-      <pc:sldChg chg="del">
-        <pc:chgData name="Matthieu De Mari" userId="dfb708c9-d8dc-439f-9a3b-c772bf4a311c" providerId="ADAL" clId="{1888DEAD-E307-4CA6-AFF5-49DFF9FCD3C3}" dt="2023-03-17T13:16:51.617" v="15" actId="47"/>
-        <pc:sldMkLst>
-          <pc:docMk/>
-          <pc:sldMk cId="1865957258" sldId="427"/>
-        </pc:sldMkLst>
-      </pc:sldChg>
-      <pc:sldChg chg="addSp delSp modSp new mod">
-        <pc:chgData name="Matthieu De Mari" userId="dfb708c9-d8dc-439f-9a3b-c772bf4a311c" providerId="ADAL" clId="{1888DEAD-E307-4CA6-AFF5-49DFF9FCD3C3}" dt="2023-03-20T11:24:16.430" v="7017" actId="1076"/>
-        <pc:sldMkLst>
-          <pc:docMk/>
-          <pc:sldMk cId="2562731947" sldId="427"/>
-        </pc:sldMkLst>
-      </pc:sldChg>
-      <pc:sldChg chg="modSp new del mod">
-        <pc:chgData name="Matthieu De Mari" userId="dfb708c9-d8dc-439f-9a3b-c772bf4a311c" providerId="ADAL" clId="{1888DEAD-E307-4CA6-AFF5-49DFF9FCD3C3}" dt="2023-03-20T11:35:02.260" v="8198" actId="47"/>
-        <pc:sldMkLst>
-          <pc:docMk/>
-          <pc:sldMk cId="561984200" sldId="428"/>
-        </pc:sldMkLst>
-      </pc:sldChg>
-      <pc:sldChg chg="modSp new mod">
-        <pc:chgData name="Matthieu De Mari" userId="dfb708c9-d8dc-439f-9a3b-c772bf4a311c" providerId="ADAL" clId="{1888DEAD-E307-4CA6-AFF5-49DFF9FCD3C3}" dt="2023-03-20T11:41:28.532" v="8847" actId="115"/>
-        <pc:sldMkLst>
-          <pc:docMk/>
-          <pc:sldMk cId="1434956895" sldId="428"/>
-        </pc:sldMkLst>
-      </pc:sldChg>
-      <pc:sldChg chg="del">
-        <pc:chgData name="Matthieu De Mari" userId="dfb708c9-d8dc-439f-9a3b-c772bf4a311c" providerId="ADAL" clId="{1888DEAD-E307-4CA6-AFF5-49DFF9FCD3C3}" dt="2023-03-17T13:16:51.617" v="15" actId="47"/>
-        <pc:sldMkLst>
-          <pc:docMk/>
-          <pc:sldMk cId="2022369352" sldId="428"/>
-        </pc:sldMkLst>
-      </pc:sldChg>
-      <pc:sldChg chg="modSp add del mod ord">
-        <pc:chgData name="Matthieu De Mari" userId="dfb708c9-d8dc-439f-9a3b-c772bf4a311c" providerId="ADAL" clId="{1888DEAD-E307-4CA6-AFF5-49DFF9FCD3C3}" dt="2023-03-20T11:31:52.701" v="7979" actId="47"/>
-        <pc:sldMkLst>
-          <pc:docMk/>
-          <pc:sldMk cId="3326665352" sldId="428"/>
-        </pc:sldMkLst>
-      </pc:sldChg>
-      <pc:sldChg chg="del">
-        <pc:chgData name="Matthieu De Mari" userId="dfb708c9-d8dc-439f-9a3b-c772bf4a311c" providerId="ADAL" clId="{1888DEAD-E307-4CA6-AFF5-49DFF9FCD3C3}" dt="2023-03-17T13:16:51.617" v="15" actId="47"/>
-        <pc:sldMkLst>
-          <pc:docMk/>
-          <pc:sldMk cId="1549216935" sldId="429"/>
-        </pc:sldMkLst>
-      </pc:sldChg>
-      <pc:sldChg chg="add">
-        <pc:chgData name="Matthieu De Mari" userId="dfb708c9-d8dc-439f-9a3b-c772bf4a311c" providerId="ADAL" clId="{1888DEAD-E307-4CA6-AFF5-49DFF9FCD3C3}" dt="2023-03-20T11:43:41.160" v="8891" actId="2890"/>
-        <pc:sldMkLst>
-          <pc:docMk/>
-          <pc:sldMk cId="2281408142" sldId="429"/>
-        </pc:sldMkLst>
-      </pc:sldChg>
-      <pc:sldChg chg="modSp add mod">
-        <pc:chgData name="Matthieu De Mari" userId="dfb708c9-d8dc-439f-9a3b-c772bf4a311c" providerId="ADAL" clId="{1888DEAD-E307-4CA6-AFF5-49DFF9FCD3C3}" dt="2023-03-20T11:53:55.106" v="9951" actId="20577"/>
-        <pc:sldMkLst>
-          <pc:docMk/>
-          <pc:sldMk cId="1452149184" sldId="430"/>
-        </pc:sldMkLst>
-      </pc:sldChg>
-      <pc:sldChg chg="del">
-        <pc:chgData name="Matthieu De Mari" userId="dfb708c9-d8dc-439f-9a3b-c772bf4a311c" providerId="ADAL" clId="{1888DEAD-E307-4CA6-AFF5-49DFF9FCD3C3}" dt="2023-03-17T13:16:52.409" v="16" actId="47"/>
-        <pc:sldMkLst>
-          <pc:docMk/>
-          <pc:sldMk cId="2376719029" sldId="430"/>
-        </pc:sldMkLst>
-      </pc:sldChg>
-      <pc:sldChg chg="delSp new del mod">
-        <pc:chgData name="Matthieu De Mari" userId="dfb708c9-d8dc-439f-9a3b-c772bf4a311c" providerId="ADAL" clId="{1888DEAD-E307-4CA6-AFF5-49DFF9FCD3C3}" dt="2023-03-20T11:43:53.598" v="8896" actId="47"/>
-        <pc:sldMkLst>
-          <pc:docMk/>
-          <pc:sldMk cId="2515683071" sldId="430"/>
-        </pc:sldMkLst>
-      </pc:sldChg>
-      <pc:sldChg chg="add del">
-        <pc:chgData name="Matthieu De Mari" userId="dfb708c9-d8dc-439f-9a3b-c772bf4a311c" providerId="ADAL" clId="{1888DEAD-E307-4CA6-AFF5-49DFF9FCD3C3}" dt="2023-03-20T11:51:10.039" v="9609" actId="47"/>
-        <pc:sldMkLst>
-          <pc:docMk/>
-          <pc:sldMk cId="2552322506" sldId="430"/>
-        </pc:sldMkLst>
-      </pc:sldChg>
-      <pc:sldChg chg="del">
-        <pc:chgData name="Matthieu De Mari" userId="dfb708c9-d8dc-439f-9a3b-c772bf4a311c" providerId="ADAL" clId="{1888DEAD-E307-4CA6-AFF5-49DFF9FCD3C3}" dt="2023-03-17T13:16:52.409" v="16" actId="47"/>
-        <pc:sldMkLst>
-          <pc:docMk/>
-          <pc:sldMk cId="133940590" sldId="431"/>
-        </pc:sldMkLst>
-      </pc:sldChg>
-      <pc:sldChg chg="addSp delSp modSp new mod">
-        <pc:chgData name="Matthieu De Mari" userId="dfb708c9-d8dc-439f-9a3b-c772bf4a311c" providerId="ADAL" clId="{1888DEAD-E307-4CA6-AFF5-49DFF9FCD3C3}" dt="2023-03-20T11:56:54.486" v="10255" actId="1076"/>
-        <pc:sldMkLst>
-          <pc:docMk/>
-          <pc:sldMk cId="1438970372" sldId="431"/>
-        </pc:sldMkLst>
-      </pc:sldChg>
-      <pc:sldChg chg="modSp add mod">
-        <pc:chgData name="Matthieu De Mari" userId="dfb708c9-d8dc-439f-9a3b-c772bf4a311c" providerId="ADAL" clId="{1888DEAD-E307-4CA6-AFF5-49DFF9FCD3C3}" dt="2023-03-20T11:54:59.208" v="10122" actId="20577"/>
-        <pc:sldMkLst>
-          <pc:docMk/>
-          <pc:sldMk cId="1303576390" sldId="432"/>
-        </pc:sldMkLst>
-      </pc:sldChg>
-      <pc:sldChg chg="del">
-        <pc:chgData name="Matthieu De Mari" userId="dfb708c9-d8dc-439f-9a3b-c772bf4a311c" providerId="ADAL" clId="{1888DEAD-E307-4CA6-AFF5-49DFF9FCD3C3}" dt="2023-03-17T13:16:52.409" v="16" actId="47"/>
-        <pc:sldMkLst>
-          <pc:docMk/>
-          <pc:sldMk cId="2188406462" sldId="432"/>
-        </pc:sldMkLst>
-      </pc:sldChg>
-      <pc:sldChg chg="del">
-        <pc:chgData name="Matthieu De Mari" userId="dfb708c9-d8dc-439f-9a3b-c772bf4a311c" providerId="ADAL" clId="{1888DEAD-E307-4CA6-AFF5-49DFF9FCD3C3}" dt="2023-03-17T13:16:52.409" v="16" actId="47"/>
-        <pc:sldMkLst>
-          <pc:docMk/>
-          <pc:sldMk cId="1769846722" sldId="433"/>
-        </pc:sldMkLst>
-      </pc:sldChg>
-      <pc:sldChg chg="del">
-        <pc:chgData name="Matthieu De Mari" userId="dfb708c9-d8dc-439f-9a3b-c772bf4a311c" providerId="ADAL" clId="{1888DEAD-E307-4CA6-AFF5-49DFF9FCD3C3}" dt="2023-03-17T13:16:53.123" v="17" actId="47"/>
-        <pc:sldMkLst>
-          <pc:docMk/>
-          <pc:sldMk cId="3094800006" sldId="434"/>
-        </pc:sldMkLst>
-      </pc:sldChg>
-      <pc:sldChg chg="del">
-        <pc:chgData name="Matthieu De Mari" userId="dfb708c9-d8dc-439f-9a3b-c772bf4a311c" providerId="ADAL" clId="{1888DEAD-E307-4CA6-AFF5-49DFF9FCD3C3}" dt="2023-03-17T13:16:53.123" v="17" actId="47"/>
-        <pc:sldMkLst>
-          <pc:docMk/>
-          <pc:sldMk cId="3322702571" sldId="435"/>
-        </pc:sldMkLst>
-      </pc:sldChg>
-      <pc:sldChg chg="del">
-        <pc:chgData name="Matthieu De Mari" userId="dfb708c9-d8dc-439f-9a3b-c772bf4a311c" providerId="ADAL" clId="{1888DEAD-E307-4CA6-AFF5-49DFF9FCD3C3}" dt="2023-03-17T13:16:53.123" v="17" actId="47"/>
-        <pc:sldMkLst>
-          <pc:docMk/>
-          <pc:sldMk cId="861916422" sldId="437"/>
-        </pc:sldMkLst>
-      </pc:sldChg>
-      <pc:sldChg chg="del">
-        <pc:chgData name="Matthieu De Mari" userId="dfb708c9-d8dc-439f-9a3b-c772bf4a311c" providerId="ADAL" clId="{1888DEAD-E307-4CA6-AFF5-49DFF9FCD3C3}" dt="2023-03-17T13:16:53.838" v="18" actId="47"/>
-        <pc:sldMkLst>
-          <pc:docMk/>
-          <pc:sldMk cId="671110687" sldId="438"/>
-        </pc:sldMkLst>
-      </pc:sldChg>
-      <pc:sldChg chg="del">
-        <pc:chgData name="Matthieu De Mari" userId="dfb708c9-d8dc-439f-9a3b-c772bf4a311c" providerId="ADAL" clId="{1888DEAD-E307-4CA6-AFF5-49DFF9FCD3C3}" dt="2023-03-17T13:16:53.838" v="18" actId="47"/>
-        <pc:sldMkLst>
-          <pc:docMk/>
-          <pc:sldMk cId="1589725218" sldId="439"/>
-        </pc:sldMkLst>
-      </pc:sldChg>
-      <pc:sldChg chg="del">
-        <pc:chgData name="Matthieu De Mari" userId="dfb708c9-d8dc-439f-9a3b-c772bf4a311c" providerId="ADAL" clId="{1888DEAD-E307-4CA6-AFF5-49DFF9FCD3C3}" dt="2023-03-17T13:16:53.838" v="18" actId="47"/>
-        <pc:sldMkLst>
-          <pc:docMk/>
-          <pc:sldMk cId="2955466283" sldId="440"/>
-        </pc:sldMkLst>
-      </pc:sldChg>
-      <pc:sldChg chg="del">
-        <pc:chgData name="Matthieu De Mari" userId="dfb708c9-d8dc-439f-9a3b-c772bf4a311c" providerId="ADAL" clId="{1888DEAD-E307-4CA6-AFF5-49DFF9FCD3C3}" dt="2023-03-17T13:16:55.180" v="20" actId="47"/>
-        <pc:sldMkLst>
-          <pc:docMk/>
-          <pc:sldMk cId="1448790682" sldId="441"/>
-        </pc:sldMkLst>
-      </pc:sldChg>
-      <pc:sldChg chg="del">
-        <pc:chgData name="Matthieu De Mari" userId="dfb708c9-d8dc-439f-9a3b-c772bf4a311c" providerId="ADAL" clId="{1888DEAD-E307-4CA6-AFF5-49DFF9FCD3C3}" dt="2023-03-17T13:16:54.511" v="19" actId="47"/>
-        <pc:sldMkLst>
-          <pc:docMk/>
-          <pc:sldMk cId="75594367" sldId="442"/>
-        </pc:sldMkLst>
-      </pc:sldChg>
-      <pc:sldChg chg="del">
-        <pc:chgData name="Matthieu De Mari" userId="dfb708c9-d8dc-439f-9a3b-c772bf4a311c" providerId="ADAL" clId="{1888DEAD-E307-4CA6-AFF5-49DFF9FCD3C3}" dt="2023-03-17T13:16:55.180" v="20" actId="47"/>
-        <pc:sldMkLst>
-          <pc:docMk/>
-          <pc:sldMk cId="110232736" sldId="443"/>
-        </pc:sldMkLst>
-      </pc:sldChg>
-      <pc:sldChg chg="del">
-        <pc:chgData name="Matthieu De Mari" userId="dfb708c9-d8dc-439f-9a3b-c772bf4a311c" providerId="ADAL" clId="{1888DEAD-E307-4CA6-AFF5-49DFF9FCD3C3}" dt="2023-03-17T13:16:55.180" v="20" actId="47"/>
-        <pc:sldMkLst>
-          <pc:docMk/>
-          <pc:sldMk cId="1237963508" sldId="444"/>
-        </pc:sldMkLst>
-      </pc:sldChg>
-      <pc:sldChg chg="del">
-        <pc:chgData name="Matthieu De Mari" userId="dfb708c9-d8dc-439f-9a3b-c772bf4a311c" providerId="ADAL" clId="{1888DEAD-E307-4CA6-AFF5-49DFF9FCD3C3}" dt="2023-03-17T13:16:55.180" v="20" actId="47"/>
-        <pc:sldMkLst>
-          <pc:docMk/>
-          <pc:sldMk cId="1417587332" sldId="445"/>
-        </pc:sldMkLst>
-      </pc:sldChg>
-      <pc:sldChg chg="del">
-        <pc:chgData name="Matthieu De Mari" userId="dfb708c9-d8dc-439f-9a3b-c772bf4a311c" providerId="ADAL" clId="{1888DEAD-E307-4CA6-AFF5-49DFF9FCD3C3}" dt="2023-03-17T13:16:54.511" v="19" actId="47"/>
-        <pc:sldMkLst>
-          <pc:docMk/>
-          <pc:sldMk cId="1624935982" sldId="447"/>
-        </pc:sldMkLst>
-      </pc:sldChg>
-      <pc:sldChg chg="del">
-        <pc:chgData name="Matthieu De Mari" userId="dfb708c9-d8dc-439f-9a3b-c772bf4a311c" providerId="ADAL" clId="{1888DEAD-E307-4CA6-AFF5-49DFF9FCD3C3}" dt="2023-03-17T13:16:55.180" v="20" actId="47"/>
-        <pc:sldMkLst>
-          <pc:docMk/>
-          <pc:sldMk cId="4016554108" sldId="448"/>
-        </pc:sldMkLst>
-      </pc:sldChg>
-      <pc:sldChg chg="del">
-        <pc:chgData name="Matthieu De Mari" userId="dfb708c9-d8dc-439f-9a3b-c772bf4a311c" providerId="ADAL" clId="{1888DEAD-E307-4CA6-AFF5-49DFF9FCD3C3}" dt="2023-03-17T13:16:55.180" v="20" actId="47"/>
-        <pc:sldMkLst>
-          <pc:docMk/>
-          <pc:sldMk cId="512281156" sldId="449"/>
-        </pc:sldMkLst>
-      </pc:sldChg>
-      <pc:sldChg chg="del">
-        <pc:chgData name="Matthieu De Mari" userId="dfb708c9-d8dc-439f-9a3b-c772bf4a311c" providerId="ADAL" clId="{1888DEAD-E307-4CA6-AFF5-49DFF9FCD3C3}" dt="2023-03-17T13:16:55.180" v="20" actId="47"/>
-        <pc:sldMkLst>
-          <pc:docMk/>
-          <pc:sldMk cId="3938870733" sldId="450"/>
-        </pc:sldMkLst>
-      </pc:sldChg>
-      <pc:sldChg chg="del">
-        <pc:chgData name="Matthieu De Mari" userId="dfb708c9-d8dc-439f-9a3b-c772bf4a311c" providerId="ADAL" clId="{1888DEAD-E307-4CA6-AFF5-49DFF9FCD3C3}" dt="2023-03-17T13:16:55.180" v="20" actId="47"/>
-        <pc:sldMkLst>
-          <pc:docMk/>
-          <pc:sldMk cId="3522887232" sldId="451"/>
-        </pc:sldMkLst>
-      </pc:sldChg>
-      <pc:sldChg chg="del">
-        <pc:chgData name="Matthieu De Mari" userId="dfb708c9-d8dc-439f-9a3b-c772bf4a311c" providerId="ADAL" clId="{1888DEAD-E307-4CA6-AFF5-49DFF9FCD3C3}" dt="2023-03-17T13:16:52.409" v="16" actId="47"/>
-        <pc:sldMkLst>
-          <pc:docMk/>
-          <pc:sldMk cId="216138188" sldId="452"/>
-        </pc:sldMkLst>
-      </pc:sldChg>
-    </pc:docChg>
-  </pc:docChgLst>
-  <pc:docChgLst>
-    <pc:chgData name="Matthieu De Mari" userId="dfb708c9-d8dc-439f-9a3b-c772bf4a311c" providerId="ADAL" clId="{2E25C175-47A3-4BC7-8EFD-372D97A42A64}"/>
-    <pc:docChg chg="undo custSel addSld delSld modSld sldOrd addSection delSection modSection">
-      <pc:chgData name="Matthieu De Mari" userId="dfb708c9-d8dc-439f-9a3b-c772bf4a311c" providerId="ADAL" clId="{2E25C175-47A3-4BC7-8EFD-372D97A42A64}" dt="2023-03-07T10:46:51.155" v="7359" actId="20577"/>
-      <pc:docMkLst>
-        <pc:docMk/>
-      </pc:docMkLst>
-      <pc:sldChg chg="del">
-        <pc:chgData name="Matthieu De Mari" userId="dfb708c9-d8dc-439f-9a3b-c772bf4a311c" providerId="ADAL" clId="{2E25C175-47A3-4BC7-8EFD-372D97A42A64}" dt="2023-03-07T06:12:37.449" v="3" actId="47"/>
-        <pc:sldMkLst>
-          <pc:docMk/>
-          <pc:sldMk cId="3239548726" sldId="257"/>
-        </pc:sldMkLst>
-      </pc:sldChg>
-      <pc:sldChg chg="del">
-        <pc:chgData name="Matthieu De Mari" userId="dfb708c9-d8dc-439f-9a3b-c772bf4a311c" providerId="ADAL" clId="{2E25C175-47A3-4BC7-8EFD-372D97A42A64}" dt="2023-03-07T06:13:07.499" v="6" actId="47"/>
-        <pc:sldMkLst>
-          <pc:docMk/>
-          <pc:sldMk cId="1495819743" sldId="258"/>
-        </pc:sldMkLst>
-      </pc:sldChg>
-      <pc:sldChg chg="del">
-        <pc:chgData name="Matthieu De Mari" userId="dfb708c9-d8dc-439f-9a3b-c772bf4a311c" providerId="ADAL" clId="{2E25C175-47A3-4BC7-8EFD-372D97A42A64}" dt="2023-03-07T06:12:37.449" v="3" actId="47"/>
-        <pc:sldMkLst>
-          <pc:docMk/>
-          <pc:sldMk cId="609186567" sldId="259"/>
-        </pc:sldMkLst>
-      </pc:sldChg>
-      <pc:sldChg chg="del">
-        <pc:chgData name="Matthieu De Mari" userId="dfb708c9-d8dc-439f-9a3b-c772bf4a311c" providerId="ADAL" clId="{2E25C175-47A3-4BC7-8EFD-372D97A42A64}" dt="2023-03-07T06:12:37.449" v="3" actId="47"/>
-        <pc:sldMkLst>
-          <pc:docMk/>
-          <pc:sldMk cId="1812694891" sldId="260"/>
-        </pc:sldMkLst>
-      </pc:sldChg>
-      <pc:sldChg chg="del">
-        <pc:chgData name="Matthieu De Mari" userId="dfb708c9-d8dc-439f-9a3b-c772bf4a311c" providerId="ADAL" clId="{2E25C175-47A3-4BC7-8EFD-372D97A42A64}" dt="2023-03-07T06:12:37.449" v="3" actId="47"/>
-        <pc:sldMkLst>
-          <pc:docMk/>
-          <pc:sldMk cId="2172647381" sldId="261"/>
-        </pc:sldMkLst>
-      </pc:sldChg>
-      <pc:sldChg chg="del">
-        <pc:chgData name="Matthieu De Mari" userId="dfb708c9-d8dc-439f-9a3b-c772bf4a311c" providerId="ADAL" clId="{2E25C175-47A3-4BC7-8EFD-372D97A42A64}" dt="2023-03-07T06:12:37.449" v="3" actId="47"/>
-        <pc:sldMkLst>
-          <pc:docMk/>
-          <pc:sldMk cId="3166947328" sldId="262"/>
-        </pc:sldMkLst>
-      </pc:sldChg>
-      <pc:sldChg chg="del">
-        <pc:chgData name="Matthieu De Mari" userId="dfb708c9-d8dc-439f-9a3b-c772bf4a311c" providerId="ADAL" clId="{2E25C175-47A3-4BC7-8EFD-372D97A42A64}" dt="2023-03-07T06:12:41.881" v="4" actId="47"/>
-        <pc:sldMkLst>
-          <pc:docMk/>
-          <pc:sldMk cId="2723458640" sldId="263"/>
-        </pc:sldMkLst>
-      </pc:sldChg>
-      <pc:sldChg chg="del">
-        <pc:chgData name="Matthieu De Mari" userId="dfb708c9-d8dc-439f-9a3b-c772bf4a311c" providerId="ADAL" clId="{2E25C175-47A3-4BC7-8EFD-372D97A42A64}" dt="2023-03-07T06:12:37.449" v="3" actId="47"/>
-        <pc:sldMkLst>
-          <pc:docMk/>
-          <pc:sldMk cId="649892368" sldId="264"/>
-        </pc:sldMkLst>
-      </pc:sldChg>
-      <pc:sldChg chg="del">
-        <pc:chgData name="Matthieu De Mari" userId="dfb708c9-d8dc-439f-9a3b-c772bf4a311c" providerId="ADAL" clId="{2E25C175-47A3-4BC7-8EFD-372D97A42A64}" dt="2023-03-07T06:12:41.881" v="4" actId="47"/>
-        <pc:sldMkLst>
-          <pc:docMk/>
-          <pc:sldMk cId="4127898596" sldId="265"/>
-        </pc:sldMkLst>
-      </pc:sldChg>
-      <pc:sldChg chg="del">
-        <pc:chgData name="Matthieu De Mari" userId="dfb708c9-d8dc-439f-9a3b-c772bf4a311c" providerId="ADAL" clId="{2E25C175-47A3-4BC7-8EFD-372D97A42A64}" dt="2023-03-07T06:12:41.881" v="4" actId="47"/>
-        <pc:sldMkLst>
-          <pc:docMk/>
-          <pc:sldMk cId="256269341" sldId="266"/>
-        </pc:sldMkLst>
-      </pc:sldChg>
-      <pc:sldChg chg="del">
-        <pc:chgData name="Matthieu De Mari" userId="dfb708c9-d8dc-439f-9a3b-c772bf4a311c" providerId="ADAL" clId="{2E25C175-47A3-4BC7-8EFD-372D97A42A64}" dt="2023-03-07T06:12:44.957" v="5" actId="47"/>
-        <pc:sldMkLst>
-          <pc:docMk/>
-          <pc:sldMk cId="2566504203" sldId="267"/>
-        </pc:sldMkLst>
-      </pc:sldChg>
-      <pc:sldChg chg="del">
-        <pc:chgData name="Matthieu De Mari" userId="dfb708c9-d8dc-439f-9a3b-c772bf4a311c" providerId="ADAL" clId="{2E25C175-47A3-4BC7-8EFD-372D97A42A64}" dt="2023-03-07T06:12:37.449" v="3" actId="47"/>
-        <pc:sldMkLst>
-          <pc:docMk/>
-          <pc:sldMk cId="1205920737" sldId="268"/>
-        </pc:sldMkLst>
-      </pc:sldChg>
-      <pc:sldChg chg="del">
-        <pc:chgData name="Matthieu De Mari" userId="dfb708c9-d8dc-439f-9a3b-c772bf4a311c" providerId="ADAL" clId="{2E25C175-47A3-4BC7-8EFD-372D97A42A64}" dt="2023-03-07T06:12:44.957" v="5" actId="47"/>
-        <pc:sldMkLst>
-          <pc:docMk/>
-          <pc:sldMk cId="4188287311" sldId="269"/>
-        </pc:sldMkLst>
-      </pc:sldChg>
-      <pc:sldChg chg="del">
-        <pc:chgData name="Matthieu De Mari" userId="dfb708c9-d8dc-439f-9a3b-c772bf4a311c" providerId="ADAL" clId="{2E25C175-47A3-4BC7-8EFD-372D97A42A64}" dt="2023-03-07T06:12:41.881" v="4" actId="47"/>
-        <pc:sldMkLst>
-          <pc:docMk/>
-          <pc:sldMk cId="997896339" sldId="270"/>
-        </pc:sldMkLst>
-      </pc:sldChg>
-      <pc:sldChg chg="del">
-        <pc:chgData name="Matthieu De Mari" userId="dfb708c9-d8dc-439f-9a3b-c772bf4a311c" providerId="ADAL" clId="{2E25C175-47A3-4BC7-8EFD-372D97A42A64}" dt="2023-03-07T06:12:41.881" v="4" actId="47"/>
-        <pc:sldMkLst>
-          <pc:docMk/>
-          <pc:sldMk cId="961845771" sldId="271"/>
-        </pc:sldMkLst>
-      </pc:sldChg>
-      <pc:sldChg chg="modSp add del mod ord">
-        <pc:chgData name="Matthieu De Mari" userId="dfb708c9-d8dc-439f-9a3b-c772bf4a311c" providerId="ADAL" clId="{2E25C175-47A3-4BC7-8EFD-372D97A42A64}" dt="2023-03-07T06:35:53.661" v="220"/>
-        <pc:sldMkLst>
-          <pc:docMk/>
-          <pc:sldMk cId="1813455260" sldId="274"/>
-        </pc:sldMkLst>
-      </pc:sldChg>
-      <pc:sldChg chg="del">
-        <pc:chgData name="Matthieu De Mari" userId="dfb708c9-d8dc-439f-9a3b-c772bf4a311c" providerId="ADAL" clId="{2E25C175-47A3-4BC7-8EFD-372D97A42A64}" dt="2023-03-07T06:13:16.183" v="8" actId="47"/>
-        <pc:sldMkLst>
-          <pc:docMk/>
-          <pc:sldMk cId="144954399" sldId="275"/>
-        </pc:sldMkLst>
-      </pc:sldChg>
-      <pc:sldChg chg="del">
-        <pc:chgData name="Matthieu De Mari" userId="dfb708c9-d8dc-439f-9a3b-c772bf4a311c" providerId="ADAL" clId="{2E25C175-47A3-4BC7-8EFD-372D97A42A64}" dt="2023-03-07T06:13:17.350" v="9" actId="47"/>
-        <pc:sldMkLst>
-          <pc:docMk/>
-          <pc:sldMk cId="4217769597" sldId="276"/>
-        </pc:sldMkLst>
-      </pc:sldChg>
-      <pc:sldChg chg="del">
-        <pc:chgData name="Matthieu De Mari" userId="dfb708c9-d8dc-439f-9a3b-c772bf4a311c" providerId="ADAL" clId="{2E25C175-47A3-4BC7-8EFD-372D97A42A64}" dt="2023-03-07T06:13:18.262" v="10" actId="47"/>
-        <pc:sldMkLst>
-          <pc:docMk/>
-          <pc:sldMk cId="1233188664" sldId="277"/>
-        </pc:sldMkLst>
-      </pc:sldChg>
-      <pc:sldChg chg="del">
-        <pc:chgData name="Matthieu De Mari" userId="dfb708c9-d8dc-439f-9a3b-c772bf4a311c" providerId="ADAL" clId="{2E25C175-47A3-4BC7-8EFD-372D97A42A64}" dt="2023-03-07T06:13:16.183" v="8" actId="47"/>
-        <pc:sldMkLst>
-          <pc:docMk/>
-          <pc:sldMk cId="885607022" sldId="278"/>
-        </pc:sldMkLst>
-      </pc:sldChg>
-      <pc:sldChg chg="del">
-        <pc:chgData name="Matthieu De Mari" userId="dfb708c9-d8dc-439f-9a3b-c772bf4a311c" providerId="ADAL" clId="{2E25C175-47A3-4BC7-8EFD-372D97A42A64}" dt="2023-03-07T06:13:16.183" v="8" actId="47"/>
-        <pc:sldMkLst>
-          <pc:docMk/>
-          <pc:sldMk cId="3941141626" sldId="279"/>
-        </pc:sldMkLst>
-      </pc:sldChg>
-      <pc:sldChg chg="del">
-        <pc:chgData name="Matthieu De Mari" userId="dfb708c9-d8dc-439f-9a3b-c772bf4a311c" providerId="ADAL" clId="{2E25C175-47A3-4BC7-8EFD-372D97A42A64}" dt="2023-03-07T06:13:16.183" v="8" actId="47"/>
-        <pc:sldMkLst>
-          <pc:docMk/>
-          <pc:sldMk cId="2409304258" sldId="280"/>
-        </pc:sldMkLst>
-      </pc:sldChg>
-      <pc:sldChg chg="del">
-        <pc:chgData name="Matthieu De Mari" userId="dfb708c9-d8dc-439f-9a3b-c772bf4a311c" providerId="ADAL" clId="{2E25C175-47A3-4BC7-8EFD-372D97A42A64}" dt="2023-03-07T06:13:16.183" v="8" actId="47"/>
-        <pc:sldMkLst>
-          <pc:docMk/>
-          <pc:sldMk cId="2949375831" sldId="281"/>
-        </pc:sldMkLst>
-      </pc:sldChg>
-      <pc:sldChg chg="del">
-        <pc:chgData name="Matthieu De Mari" userId="dfb708c9-d8dc-439f-9a3b-c772bf4a311c" providerId="ADAL" clId="{2E25C175-47A3-4BC7-8EFD-372D97A42A64}" dt="2023-03-07T06:13:16.183" v="8" actId="47"/>
-        <pc:sldMkLst>
-          <pc:docMk/>
-          <pc:sldMk cId="2432782764" sldId="282"/>
-        </pc:sldMkLst>
-      </pc:sldChg>
-      <pc:sldChg chg="del">
-        <pc:chgData name="Matthieu De Mari" userId="dfb708c9-d8dc-439f-9a3b-c772bf4a311c" providerId="ADAL" clId="{2E25C175-47A3-4BC7-8EFD-372D97A42A64}" dt="2023-03-07T06:13:16.183" v="8" actId="47"/>
-        <pc:sldMkLst>
-          <pc:docMk/>
-          <pc:sldMk cId="3869391851" sldId="284"/>
-        </pc:sldMkLst>
-      </pc:sldChg>
-      <pc:sldChg chg="del">
-        <pc:chgData name="Matthieu De Mari" userId="dfb708c9-d8dc-439f-9a3b-c772bf4a311c" providerId="ADAL" clId="{2E25C175-47A3-4BC7-8EFD-372D97A42A64}" dt="2023-03-07T06:13:16.183" v="8" actId="47"/>
-        <pc:sldMkLst>
-          <pc:docMk/>
-          <pc:sldMk cId="1567445271" sldId="285"/>
-        </pc:sldMkLst>
-      </pc:sldChg>
-      <pc:sldChg chg="del">
-        <pc:chgData name="Matthieu De Mari" userId="dfb708c9-d8dc-439f-9a3b-c772bf4a311c" providerId="ADAL" clId="{2E25C175-47A3-4BC7-8EFD-372D97A42A64}" dt="2023-03-07T06:13:17.350" v="9" actId="47"/>
-        <pc:sldMkLst>
-          <pc:docMk/>
-          <pc:sldMk cId="2870852187" sldId="287"/>
-        </pc:sldMkLst>
-      </pc:sldChg>
-      <pc:sldChg chg="del">
-        <pc:chgData name="Matthieu De Mari" userId="dfb708c9-d8dc-439f-9a3b-c772bf4a311c" providerId="ADAL" clId="{2E25C175-47A3-4BC7-8EFD-372D97A42A64}" dt="2023-03-07T06:13:17.350" v="9" actId="47"/>
-        <pc:sldMkLst>
-          <pc:docMk/>
-          <pc:sldMk cId="3486387661" sldId="288"/>
-        </pc:sldMkLst>
-      </pc:sldChg>
-      <pc:sldChg chg="del">
-        <pc:chgData name="Matthieu De Mari" userId="dfb708c9-d8dc-439f-9a3b-c772bf4a311c" providerId="ADAL" clId="{2E25C175-47A3-4BC7-8EFD-372D97A42A64}" dt="2023-03-07T06:13:17.350" v="9" actId="47"/>
-        <pc:sldMkLst>
-          <pc:docMk/>
-          <pc:sldMk cId="2118681498" sldId="289"/>
-        </pc:sldMkLst>
-      </pc:sldChg>
-      <pc:sldChg chg="del">
-        <pc:chgData name="Matthieu De Mari" userId="dfb708c9-d8dc-439f-9a3b-c772bf4a311c" providerId="ADAL" clId="{2E25C175-47A3-4BC7-8EFD-372D97A42A64}" dt="2023-03-07T06:13:17.350" v="9" actId="47"/>
-        <pc:sldMkLst>
-          <pc:docMk/>
-          <pc:sldMk cId="2562857934" sldId="290"/>
-        </pc:sldMkLst>
-      </pc:sldChg>
-      <pc:sldChg chg="del">
-        <pc:chgData name="Matthieu De Mari" userId="dfb708c9-d8dc-439f-9a3b-c772bf4a311c" providerId="ADAL" clId="{2E25C175-47A3-4BC7-8EFD-372D97A42A64}" dt="2023-03-07T06:13:17.350" v="9" actId="47"/>
-        <pc:sldMkLst>
-          <pc:docMk/>
-          <pc:sldMk cId="3292482358" sldId="291"/>
-        </pc:sldMkLst>
-      </pc:sldChg>
-      <pc:sldChg chg="del">
-        <pc:chgData name="Matthieu De Mari" userId="dfb708c9-d8dc-439f-9a3b-c772bf4a311c" providerId="ADAL" clId="{2E25C175-47A3-4BC7-8EFD-372D97A42A64}" dt="2023-03-07T06:13:17.350" v="9" actId="47"/>
-        <pc:sldMkLst>
-          <pc:docMk/>
-          <pc:sldMk cId="3520355124" sldId="292"/>
-        </pc:sldMkLst>
-      </pc:sldChg>
-      <pc:sldChg chg="del">
-        <pc:chgData name="Matthieu De Mari" userId="dfb708c9-d8dc-439f-9a3b-c772bf4a311c" providerId="ADAL" clId="{2E25C175-47A3-4BC7-8EFD-372D97A42A64}" dt="2023-03-07T06:13:17.350" v="9" actId="47"/>
-        <pc:sldMkLst>
-          <pc:docMk/>
-          <pc:sldMk cId="3046349634" sldId="293"/>
-        </pc:sldMkLst>
-      </pc:sldChg>
-      <pc:sldChg chg="del">
-        <pc:chgData name="Matthieu De Mari" userId="dfb708c9-d8dc-439f-9a3b-c772bf4a311c" providerId="ADAL" clId="{2E25C175-47A3-4BC7-8EFD-372D97A42A64}" dt="2023-03-07T06:13:17.350" v="9" actId="47"/>
-        <pc:sldMkLst>
-          <pc:docMk/>
-          <pc:sldMk cId="427136966" sldId="294"/>
-        </pc:sldMkLst>
-      </pc:sldChg>
-      <pc:sldChg chg="del">
-        <pc:chgData name="Matthieu De Mari" userId="dfb708c9-d8dc-439f-9a3b-c772bf4a311c" providerId="ADAL" clId="{2E25C175-47A3-4BC7-8EFD-372D97A42A64}" dt="2023-03-07T06:13:18.262" v="10" actId="47"/>
-        <pc:sldMkLst>
-          <pc:docMk/>
-          <pc:sldMk cId="323951598" sldId="295"/>
-        </pc:sldMkLst>
-      </pc:sldChg>
-      <pc:sldChg chg="del">
-        <pc:chgData name="Matthieu De Mari" userId="dfb708c9-d8dc-439f-9a3b-c772bf4a311c" providerId="ADAL" clId="{2E25C175-47A3-4BC7-8EFD-372D97A42A64}" dt="2023-03-07T06:13:18.262" v="10" actId="47"/>
-        <pc:sldMkLst>
-          <pc:docMk/>
-          <pc:sldMk cId="1855779909" sldId="296"/>
-        </pc:sldMkLst>
-      </pc:sldChg>
-      <pc:sldChg chg="del">
-        <pc:chgData name="Matthieu De Mari" userId="dfb708c9-d8dc-439f-9a3b-c772bf4a311c" providerId="ADAL" clId="{2E25C175-47A3-4BC7-8EFD-372D97A42A64}" dt="2023-03-07T06:13:18.262" v="10" actId="47"/>
-        <pc:sldMkLst>
-          <pc:docMk/>
-          <pc:sldMk cId="1514077654" sldId="297"/>
-        </pc:sldMkLst>
-      </pc:sldChg>
-      <pc:sldChg chg="del">
-        <pc:chgData name="Matthieu De Mari" userId="dfb708c9-d8dc-439f-9a3b-c772bf4a311c" providerId="ADAL" clId="{2E25C175-47A3-4BC7-8EFD-372D97A42A64}" dt="2023-03-07T06:13:18.262" v="10" actId="47"/>
-        <pc:sldMkLst>
-          <pc:docMk/>
-          <pc:sldMk cId="2514894683" sldId="298"/>
-        </pc:sldMkLst>
-      </pc:sldChg>
-      <pc:sldChg chg="del">
-        <pc:chgData name="Matthieu De Mari" userId="dfb708c9-d8dc-439f-9a3b-c772bf4a311c" providerId="ADAL" clId="{2E25C175-47A3-4BC7-8EFD-372D97A42A64}" dt="2023-03-07T06:13:18.262" v="10" actId="47"/>
-        <pc:sldMkLst>
-          <pc:docMk/>
-          <pc:sldMk cId="1452574487" sldId="299"/>
-        </pc:sldMkLst>
-      </pc:sldChg>
-      <pc:sldChg chg="del">
-        <pc:chgData name="Matthieu De Mari" userId="dfb708c9-d8dc-439f-9a3b-c772bf4a311c" providerId="ADAL" clId="{2E25C175-47A3-4BC7-8EFD-372D97A42A64}" dt="2023-03-07T06:13:18.262" v="10" actId="47"/>
-        <pc:sldMkLst>
-          <pc:docMk/>
-          <pc:sldMk cId="1699114457" sldId="300"/>
-        </pc:sldMkLst>
-      </pc:sldChg>
-      <pc:sldChg chg="del">
-        <pc:chgData name="Matthieu De Mari" userId="dfb708c9-d8dc-439f-9a3b-c772bf4a311c" providerId="ADAL" clId="{2E25C175-47A3-4BC7-8EFD-372D97A42A64}" dt="2023-03-07T06:13:18.262" v="10" actId="47"/>
-        <pc:sldMkLst>
-          <pc:docMk/>
-          <pc:sldMk cId="1276239023" sldId="301"/>
-        </pc:sldMkLst>
-      </pc:sldChg>
-      <pc:sldChg chg="del">
-        <pc:chgData name="Matthieu De Mari" userId="dfb708c9-d8dc-439f-9a3b-c772bf4a311c" providerId="ADAL" clId="{2E25C175-47A3-4BC7-8EFD-372D97A42A64}" dt="2023-03-07T06:13:18.262" v="10" actId="47"/>
-        <pc:sldMkLst>
-          <pc:docMk/>
-          <pc:sldMk cId="3968924669" sldId="302"/>
-        </pc:sldMkLst>
-      </pc:sldChg>
-      <pc:sldChg chg="modSp add del mod">
-        <pc:chgData name="Matthieu De Mari" userId="dfb708c9-d8dc-439f-9a3b-c772bf4a311c" providerId="ADAL" clId="{2E25C175-47A3-4BC7-8EFD-372D97A42A64}" dt="2023-03-07T10:16:35.251" v="5714" actId="20577"/>
-        <pc:sldMkLst>
-          <pc:docMk/>
-          <pc:sldMk cId="4232115997" sldId="303"/>
-        </pc:sldMkLst>
-      </pc:sldChg>
-      <pc:sldChg chg="del">
-        <pc:chgData name="Matthieu De Mari" userId="dfb708c9-d8dc-439f-9a3b-c772bf4a311c" providerId="ADAL" clId="{2E25C175-47A3-4BC7-8EFD-372D97A42A64}" dt="2023-03-07T06:13:22.745" v="11" actId="47"/>
-        <pc:sldMkLst>
-          <pc:docMk/>
-          <pc:sldMk cId="354883896" sldId="304"/>
-        </pc:sldMkLst>
-      </pc:sldChg>
-      <pc:sldChg chg="del">
-        <pc:chgData name="Matthieu De Mari" userId="dfb708c9-d8dc-439f-9a3b-c772bf4a311c" providerId="ADAL" clId="{2E25C175-47A3-4BC7-8EFD-372D97A42A64}" dt="2023-03-07T06:13:22.745" v="11" actId="47"/>
-        <pc:sldMkLst>
-          <pc:docMk/>
-          <pc:sldMk cId="4099824996" sldId="305"/>
-        </pc:sldMkLst>
-      </pc:sldChg>
-      <pc:sldChg chg="del">
-        <pc:chgData name="Matthieu De Mari" userId="dfb708c9-d8dc-439f-9a3b-c772bf4a311c" providerId="ADAL" clId="{2E25C175-47A3-4BC7-8EFD-372D97A42A64}" dt="2023-03-07T06:13:22.745" v="11" actId="47"/>
-        <pc:sldMkLst>
-          <pc:docMk/>
-          <pc:sldMk cId="4051912021" sldId="306"/>
-        </pc:sldMkLst>
-      </pc:sldChg>
-      <pc:sldChg chg="del">
-        <pc:chgData name="Matthieu De Mari" userId="dfb708c9-d8dc-439f-9a3b-c772bf4a311c" providerId="ADAL" clId="{2E25C175-47A3-4BC7-8EFD-372D97A42A64}" dt="2023-03-07T06:13:22.745" v="11" actId="47"/>
-        <pc:sldMkLst>
-          <pc:docMk/>
-          <pc:sldMk cId="2900176786" sldId="307"/>
-        </pc:sldMkLst>
-      </pc:sldChg>
-      <pc:sldChg chg="del">
-        <pc:chgData name="Matthieu De Mari" userId="dfb708c9-d8dc-439f-9a3b-c772bf4a311c" providerId="ADAL" clId="{2E25C175-47A3-4BC7-8EFD-372D97A42A64}" dt="2023-03-07T06:13:22.745" v="11" actId="47"/>
-        <pc:sldMkLst>
-          <pc:docMk/>
-          <pc:sldMk cId="1601297533" sldId="308"/>
-        </pc:sldMkLst>
-      </pc:sldChg>
-      <pc:sldChg chg="del">
-        <pc:chgData name="Matthieu De Mari" userId="dfb708c9-d8dc-439f-9a3b-c772bf4a311c" providerId="ADAL" clId="{2E25C175-47A3-4BC7-8EFD-372D97A42A64}" dt="2023-03-07T06:13:22.745" v="11" actId="47"/>
-        <pc:sldMkLst>
-          <pc:docMk/>
-          <pc:sldMk cId="3331075550" sldId="309"/>
-        </pc:sldMkLst>
-      </pc:sldChg>
-      <pc:sldChg chg="del">
-        <pc:chgData name="Matthieu De Mari" userId="dfb708c9-d8dc-439f-9a3b-c772bf4a311c" providerId="ADAL" clId="{2E25C175-47A3-4BC7-8EFD-372D97A42A64}" dt="2023-03-07T06:13:22.745" v="11" actId="47"/>
-        <pc:sldMkLst>
-          <pc:docMk/>
-          <pc:sldMk cId="4251184714" sldId="310"/>
-        </pc:sldMkLst>
-      </pc:sldChg>
-      <pc:sldChg chg="del">
-        <pc:chgData name="Matthieu De Mari" userId="dfb708c9-d8dc-439f-9a3b-c772bf4a311c" providerId="ADAL" clId="{2E25C175-47A3-4BC7-8EFD-372D97A42A64}" dt="2023-03-07T06:13:22.745" v="11" actId="47"/>
-        <pc:sldMkLst>
-          <pc:docMk/>
-          <pc:sldMk cId="3629183510" sldId="311"/>
-        </pc:sldMkLst>
-      </pc:sldChg>
-      <pc:sldChg chg="del">
-        <pc:chgData name="Matthieu De Mari" userId="dfb708c9-d8dc-439f-9a3b-c772bf4a311c" providerId="ADAL" clId="{2E25C175-47A3-4BC7-8EFD-372D97A42A64}" dt="2023-03-07T06:13:22.745" v="11" actId="47"/>
-        <pc:sldMkLst>
-          <pc:docMk/>
-          <pc:sldMk cId="7996884" sldId="312"/>
-        </pc:sldMkLst>
-      </pc:sldChg>
-      <pc:sldChg chg="del">
-        <pc:chgData name="Matthieu De Mari" userId="dfb708c9-d8dc-439f-9a3b-c772bf4a311c" providerId="ADAL" clId="{2E25C175-47A3-4BC7-8EFD-372D97A42A64}" dt="2023-03-07T06:13:22.745" v="11" actId="47"/>
-        <pc:sldMkLst>
-          <pc:docMk/>
-          <pc:sldMk cId="1140638742" sldId="313"/>
-        </pc:sldMkLst>
-      </pc:sldChg>
-      <pc:sldChg chg="modSp mod">
-        <pc:chgData name="Matthieu De Mari" userId="dfb708c9-d8dc-439f-9a3b-c772bf4a311c" providerId="ADAL" clId="{2E25C175-47A3-4BC7-8EFD-372D97A42A64}" dt="2023-03-07T10:46:51.155" v="7359" actId="20577"/>
-        <pc:sldMkLst>
-          <pc:docMk/>
-          <pc:sldMk cId="2858358615" sldId="314"/>
-        </pc:sldMkLst>
-      </pc:sldChg>
-      <pc:sldChg chg="modSp mod">
-        <pc:chgData name="Matthieu De Mari" userId="dfb708c9-d8dc-439f-9a3b-c772bf4a311c" providerId="ADAL" clId="{2E25C175-47A3-4BC7-8EFD-372D97A42A64}" dt="2023-03-07T06:12:25.909" v="1" actId="20577"/>
-        <pc:sldMkLst>
-          <pc:docMk/>
-          <pc:sldMk cId="1040156172" sldId="377"/>
-        </pc:sldMkLst>
-      </pc:sldChg>
-      <pc:sldChg chg="addSp delSp modSp new mod modClrScheme chgLayout">
-        <pc:chgData name="Matthieu De Mari" userId="dfb708c9-d8dc-439f-9a3b-c772bf4a311c" providerId="ADAL" clId="{2E25C175-47A3-4BC7-8EFD-372D97A42A64}" dt="2023-03-07T06:51:43.777" v="743" actId="693"/>
-        <pc:sldMkLst>
-          <pc:docMk/>
-          <pc:sldMk cId="820057187" sldId="378"/>
-        </pc:sldMkLst>
-      </pc:sldChg>
-      <pc:sldChg chg="del">
-        <pc:chgData name="Matthieu De Mari" userId="dfb708c9-d8dc-439f-9a3b-c772bf4a311c" providerId="ADAL" clId="{2E25C175-47A3-4BC7-8EFD-372D97A42A64}" dt="2023-03-07T06:12:31.958" v="2" actId="47"/>
-        <pc:sldMkLst>
-          <pc:docMk/>
-          <pc:sldMk cId="3338565690" sldId="378"/>
-        </pc:sldMkLst>
-      </pc:sldChg>
-      <pc:sldChg chg="addSp delSp modSp new mod modClrScheme chgLayout">
-        <pc:chgData name="Matthieu De Mari" userId="dfb708c9-d8dc-439f-9a3b-c772bf4a311c" providerId="ADAL" clId="{2E25C175-47A3-4BC7-8EFD-372D97A42A64}" dt="2023-03-07T09:36:26.056" v="3847" actId="27636"/>
-        <pc:sldMkLst>
-          <pc:docMk/>
-          <pc:sldMk cId="691565538" sldId="379"/>
-        </pc:sldMkLst>
-      </pc:sldChg>
-      <pc:sldChg chg="addSp delSp modSp add mod">
-        <pc:chgData name="Matthieu De Mari" userId="dfb708c9-d8dc-439f-9a3b-c772bf4a311c" providerId="ADAL" clId="{2E25C175-47A3-4BC7-8EFD-372D97A42A64}" dt="2023-03-07T09:52:47.258" v="4759" actId="20577"/>
-        <pc:sldMkLst>
-          <pc:docMk/>
-          <pc:sldMk cId="4217274173" sldId="380"/>
-        </pc:sldMkLst>
-      </pc:sldChg>
-      <pc:sldChg chg="modSp add mod ord">
-        <pc:chgData name="Matthieu De Mari" userId="dfb708c9-d8dc-439f-9a3b-c772bf4a311c" providerId="ADAL" clId="{2E25C175-47A3-4BC7-8EFD-372D97A42A64}" dt="2023-03-07T09:52:40.373" v="4748" actId="20577"/>
-        <pc:sldMkLst>
-          <pc:docMk/>
-          <pc:sldMk cId="1253114987" sldId="381"/>
-        </pc:sldMkLst>
-      </pc:sldChg>
-      <pc:sldChg chg="add del">
-        <pc:chgData name="Matthieu De Mari" userId="dfb708c9-d8dc-439f-9a3b-c772bf4a311c" providerId="ADAL" clId="{2E25C175-47A3-4BC7-8EFD-372D97A42A64}" dt="2023-03-07T06:33:39.066" v="156"/>
-        <pc:sldMkLst>
-          <pc:docMk/>
-          <pc:sldMk cId="3859619901" sldId="381"/>
-        </pc:sldMkLst>
-      </pc:sldChg>
-      <pc:sldChg chg="modSp add mod">
-        <pc:chgData name="Matthieu De Mari" userId="dfb708c9-d8dc-439f-9a3b-c772bf4a311c" providerId="ADAL" clId="{2E25C175-47A3-4BC7-8EFD-372D97A42A64}" dt="2023-03-07T10:20:58.594" v="5878" actId="20577"/>
-        <pc:sldMkLst>
-          <pc:docMk/>
-          <pc:sldMk cId="336152115" sldId="382"/>
-        </pc:sldMkLst>
-      </pc:sldChg>
-      <pc:sldChg chg="modSp add mod">
-        <pc:chgData name="Matthieu De Mari" userId="dfb708c9-d8dc-439f-9a3b-c772bf4a311c" providerId="ADAL" clId="{2E25C175-47A3-4BC7-8EFD-372D97A42A64}" dt="2023-03-07T09:19:27.741" v="2933"/>
-        <pc:sldMkLst>
-          <pc:docMk/>
-          <pc:sldMk cId="1681210728" sldId="383"/>
-        </pc:sldMkLst>
-      </pc:sldChg>
-      <pc:sldChg chg="modSp new mod ord">
-        <pc:chgData name="Matthieu De Mari" userId="dfb708c9-d8dc-439f-9a3b-c772bf4a311c" providerId="ADAL" clId="{2E25C175-47A3-4BC7-8EFD-372D97A42A64}" dt="2023-03-07T07:15:22.193" v="1643" actId="207"/>
-        <pc:sldMkLst>
-          <pc:docMk/>
-          <pc:sldMk cId="1342602480" sldId="384"/>
-        </pc:sldMkLst>
-      </pc:sldChg>
-      <pc:sldChg chg="modSp add mod">
-        <pc:chgData name="Matthieu De Mari" userId="dfb708c9-d8dc-439f-9a3b-c772bf4a311c" providerId="ADAL" clId="{2E25C175-47A3-4BC7-8EFD-372D97A42A64}" dt="2023-03-07T06:52:07.120" v="746" actId="20577"/>
-        <pc:sldMkLst>
-          <pc:docMk/>
-          <pc:sldMk cId="3061177336" sldId="385"/>
-        </pc:sldMkLst>
-      </pc:sldChg>
-      <pc:sldChg chg="modSp add mod">
-        <pc:chgData name="Matthieu De Mari" userId="dfb708c9-d8dc-439f-9a3b-c772bf4a311c" providerId="ADAL" clId="{2E25C175-47A3-4BC7-8EFD-372D97A42A64}" dt="2023-03-07T10:21:04.127" v="5879"/>
-        <pc:sldMkLst>
-          <pc:docMk/>
-          <pc:sldMk cId="1114751945" sldId="386"/>
-        </pc:sldMkLst>
-      </pc:sldChg>
-      <pc:sldChg chg="modSp add mod">
-        <pc:chgData name="Matthieu De Mari" userId="dfb708c9-d8dc-439f-9a3b-c772bf4a311c" providerId="ADAL" clId="{2E25C175-47A3-4BC7-8EFD-372D97A42A64}" dt="2023-03-07T10:21:07.278" v="5880"/>
-        <pc:sldMkLst>
-          <pc:docMk/>
-          <pc:sldMk cId="881014307" sldId="387"/>
-        </pc:sldMkLst>
-      </pc:sldChg>
-      <pc:sldChg chg="addSp delSp modSp new del mod modClrScheme chgLayout">
-        <pc:chgData name="Matthieu De Mari" userId="dfb708c9-d8dc-439f-9a3b-c772bf4a311c" providerId="ADAL" clId="{2E25C175-47A3-4BC7-8EFD-372D97A42A64}" dt="2023-03-07T07:39:02.444" v="2518" actId="47"/>
-        <pc:sldMkLst>
-          <pc:docMk/>
-          <pc:sldMk cId="2957584795" sldId="388"/>
-        </pc:sldMkLst>
-      </pc:sldChg>
-      <pc:sldChg chg="addSp delSp modSp new mod">
-        <pc:chgData name="Matthieu De Mari" userId="dfb708c9-d8dc-439f-9a3b-c772bf4a311c" providerId="ADAL" clId="{2E25C175-47A3-4BC7-8EFD-372D97A42A64}" dt="2023-03-07T07:36:38.453" v="2381" actId="1076"/>
-        <pc:sldMkLst>
-          <pc:docMk/>
-          <pc:sldMk cId="1359818059" sldId="389"/>
-        </pc:sldMkLst>
-      </pc:sldChg>
-      <pc:sldChg chg="addSp delSp modSp new mod">
-        <pc:chgData name="Matthieu De Mari" userId="dfb708c9-d8dc-439f-9a3b-c772bf4a311c" providerId="ADAL" clId="{2E25C175-47A3-4BC7-8EFD-372D97A42A64}" dt="2023-03-07T07:35:30.101" v="2369" actId="1076"/>
-        <pc:sldMkLst>
-          <pc:docMk/>
-          <pc:sldMk cId="1233822438" sldId="390"/>
-        </pc:sldMkLst>
-      </pc:sldChg>
-      <pc:sldChg chg="addSp delSp modSp add mod ord modClrScheme chgLayout">
-        <pc:chgData name="Matthieu De Mari" userId="dfb708c9-d8dc-439f-9a3b-c772bf4a311c" providerId="ADAL" clId="{2E25C175-47A3-4BC7-8EFD-372D97A42A64}" dt="2023-03-07T07:38:39.051" v="2509" actId="1036"/>
-        <pc:sldMkLst>
-          <pc:docMk/>
-          <pc:sldMk cId="2406012581" sldId="391"/>
-        </pc:sldMkLst>
-      </pc:sldChg>
-      <pc:sldChg chg="addSp delSp modSp add mod">
-        <pc:chgData name="Matthieu De Mari" userId="dfb708c9-d8dc-439f-9a3b-c772bf4a311c" providerId="ADAL" clId="{2E25C175-47A3-4BC7-8EFD-372D97A42A64}" dt="2023-03-07T07:35:59.217" v="2376" actId="14100"/>
-        <pc:sldMkLst>
-          <pc:docMk/>
-          <pc:sldMk cId="1269624659" sldId="392"/>
-        </pc:sldMkLst>
-      </pc:sldChg>
-      <pc:sldChg chg="modSp new mod">
-        <pc:chgData name="Matthieu De Mari" userId="dfb708c9-d8dc-439f-9a3b-c772bf4a311c" providerId="ADAL" clId="{2E25C175-47A3-4BC7-8EFD-372D97A42A64}" dt="2023-03-07T07:45:56.776" v="2772" actId="20577"/>
-        <pc:sldMkLst>
-          <pc:docMk/>
-          <pc:sldMk cId="1060213588" sldId="393"/>
-        </pc:sldMkLst>
-      </pc:sldChg>
-      <pc:sldChg chg="addSp delSp modSp add mod modClrScheme chgLayout">
-        <pc:chgData name="Matthieu De Mari" userId="dfb708c9-d8dc-439f-9a3b-c772bf4a311c" providerId="ADAL" clId="{2E25C175-47A3-4BC7-8EFD-372D97A42A64}" dt="2023-03-07T07:34:46.250" v="2362" actId="1076"/>
-        <pc:sldMkLst>
-          <pc:docMk/>
-          <pc:sldMk cId="1215328976" sldId="394"/>
-        </pc:sldMkLst>
-      </pc:sldChg>
-      <pc:sldChg chg="addSp delSp modSp new mod modClrScheme chgLayout">
-        <pc:chgData name="Matthieu De Mari" userId="dfb708c9-d8dc-439f-9a3b-c772bf4a311c" providerId="ADAL" clId="{2E25C175-47A3-4BC7-8EFD-372D97A42A64}" dt="2023-03-07T07:28:47.793" v="2301" actId="20577"/>
-        <pc:sldMkLst>
-          <pc:docMk/>
-          <pc:sldMk cId="3544056403" sldId="395"/>
-        </pc:sldMkLst>
-      </pc:sldChg>
-      <pc:sldChg chg="addSp delSp modSp add del mod">
-        <pc:chgData name="Matthieu De Mari" userId="dfb708c9-d8dc-439f-9a3b-c772bf4a311c" providerId="ADAL" clId="{2E25C175-47A3-4BC7-8EFD-372D97A42A64}" dt="2023-03-07T07:33:16.168" v="2350" actId="47"/>
-        <pc:sldMkLst>
-          <pc:docMk/>
-          <pc:sldMk cId="1465774430" sldId="396"/>
-        </pc:sldMkLst>
-      </pc:sldChg>
-      <pc:sldChg chg="addSp delSp modSp add mod">
-        <pc:chgData name="Matthieu De Mari" userId="dfb708c9-d8dc-439f-9a3b-c772bf4a311c" providerId="ADAL" clId="{2E25C175-47A3-4BC7-8EFD-372D97A42A64}" dt="2023-03-07T07:44:01.388" v="2686" actId="20577"/>
-        <pc:sldMkLst>
-          <pc:docMk/>
-          <pc:sldMk cId="511100047" sldId="397"/>
-        </pc:sldMkLst>
-      </pc:sldChg>
-      <pc:sldChg chg="addSp delSp modSp add mod ord modClrScheme chgLayout">
-        <pc:chgData name="Matthieu De Mari" userId="dfb708c9-d8dc-439f-9a3b-c772bf4a311c" providerId="ADAL" clId="{2E25C175-47A3-4BC7-8EFD-372D97A42A64}" dt="2023-03-07T07:48:10.066" v="2811" actId="20577"/>
-        <pc:sldMkLst>
-          <pc:docMk/>
-          <pc:sldMk cId="2174133860" sldId="398"/>
-        </pc:sldMkLst>
-      </pc:sldChg>
-      <pc:sldChg chg="addSp delSp modSp add mod ord modClrScheme chgLayout">
-        <pc:chgData name="Matthieu De Mari" userId="dfb708c9-d8dc-439f-9a3b-c772bf4a311c" providerId="ADAL" clId="{2E25C175-47A3-4BC7-8EFD-372D97A42A64}" dt="2023-03-07T07:38:53.195" v="2516" actId="700"/>
-        <pc:sldMkLst>
-          <pc:docMk/>
-          <pc:sldMk cId="1114255243" sldId="399"/>
-        </pc:sldMkLst>
-      </pc:sldChg>
-      <pc:sldChg chg="add">
-        <pc:chgData name="Matthieu De Mari" userId="dfb708c9-d8dc-439f-9a3b-c772bf4a311c" providerId="ADAL" clId="{2E25C175-47A3-4BC7-8EFD-372D97A42A64}" dt="2023-03-07T07:39:00.501" v="2517"/>
-        <pc:sldMkLst>
-          <pc:docMk/>
-          <pc:sldMk cId="3412258979" sldId="400"/>
-        </pc:sldMkLst>
-      </pc:sldChg>
-      <pc:sldChg chg="addSp delSp modSp new mod modClrScheme chgLayout">
-        <pc:chgData name="Matthieu De Mari" userId="dfb708c9-d8dc-439f-9a3b-c772bf4a311c" providerId="ADAL" clId="{2E25C175-47A3-4BC7-8EFD-372D97A42A64}" dt="2023-03-07T07:44:19.570" v="2733" actId="20577"/>
-        <pc:sldMkLst>
-          <pc:docMk/>
-          <pc:sldMk cId="2615177350" sldId="401"/>
-        </pc:sldMkLst>
-      </pc:sldChg>
-      <pc:sldChg chg="addSp delSp modSp add mod ord modClrScheme chgLayout">
-        <pc:chgData name="Matthieu De Mari" userId="dfb708c9-d8dc-439f-9a3b-c772bf4a311c" providerId="ADAL" clId="{2E25C175-47A3-4BC7-8EFD-372D97A42A64}" dt="2023-03-07T07:45:19.255" v="2765"/>
-        <pc:sldMkLst>
-          <pc:docMk/>
-          <pc:sldMk cId="792071299" sldId="402"/>
-        </pc:sldMkLst>
-      </pc:sldChg>
-      <pc:sldChg chg="add del">
-        <pc:chgData name="Matthieu De Mari" userId="dfb708c9-d8dc-439f-9a3b-c772bf4a311c" providerId="ADAL" clId="{2E25C175-47A3-4BC7-8EFD-372D97A42A64}" dt="2023-03-07T07:43:26.095" v="2668" actId="47"/>
-        <pc:sldMkLst>
-          <pc:docMk/>
-          <pc:sldMk cId="2323503086" sldId="402"/>
-        </pc:sldMkLst>
-      </pc:sldChg>
-      <pc:sldChg chg="addSp delSp modSp add mod modClrScheme chgLayout">
-        <pc:chgData name="Matthieu De Mari" userId="dfb708c9-d8dc-439f-9a3b-c772bf4a311c" providerId="ADAL" clId="{2E25C175-47A3-4BC7-8EFD-372D97A42A64}" dt="2023-03-07T07:45:28.874" v="2770" actId="1076"/>
-        <pc:sldMkLst>
-          <pc:docMk/>
-          <pc:sldMk cId="990763623" sldId="403"/>
-        </pc:sldMkLst>
-      </pc:sldChg>
-      <pc:sldChg chg="modSp add mod">
-        <pc:chgData name="Matthieu De Mari" userId="dfb708c9-d8dc-439f-9a3b-c772bf4a311c" providerId="ADAL" clId="{2E25C175-47A3-4BC7-8EFD-372D97A42A64}" dt="2023-03-07T09:27:55.594" v="3381" actId="207"/>
-        <pc:sldMkLst>
-          <pc:docMk/>
-          <pc:sldMk cId="3762706142" sldId="404"/>
-        </pc:sldMkLst>
-      </pc:sldChg>
-      <pc:sldChg chg="addSp delSp modSp new mod modClrScheme chgLayout">
-        <pc:chgData name="Matthieu De Mari" userId="dfb708c9-d8dc-439f-9a3b-c772bf4a311c" providerId="ADAL" clId="{2E25C175-47A3-4BC7-8EFD-372D97A42A64}" dt="2023-03-07T09:21:37.295" v="3027" actId="1076"/>
-        <pc:sldMkLst>
-          <pc:docMk/>
-          <pc:sldMk cId="4232193198" sldId="405"/>
-        </pc:sldMkLst>
-      </pc:sldChg>
-      <pc:sldChg chg="addSp delSp modSp new mod">
-        <pc:chgData name="Matthieu De Mari" userId="dfb708c9-d8dc-439f-9a3b-c772bf4a311c" providerId="ADAL" clId="{2E25C175-47A3-4BC7-8EFD-372D97A42A64}" dt="2023-03-07T09:27:15.834" v="3347" actId="14100"/>
-        <pc:sldMkLst>
-          <pc:docMk/>
-          <pc:sldMk cId="1511321219" sldId="406"/>
-        </pc:sldMkLst>
-      </pc:sldChg>
-      <pc:sldChg chg="modSp add mod">
-        <pc:chgData name="Matthieu De Mari" userId="dfb708c9-d8dc-439f-9a3b-c772bf4a311c" providerId="ADAL" clId="{2E25C175-47A3-4BC7-8EFD-372D97A42A64}" dt="2023-03-07T09:26:18.953" v="3297" actId="27636"/>
-        <pc:sldMkLst>
-          <pc:docMk/>
-          <pc:sldMk cId="3233841990" sldId="407"/>
-        </pc:sldMkLst>
-      </pc:sldChg>
-      <pc:sldChg chg="modSp add mod">
-        <pc:chgData name="Matthieu De Mari" userId="dfb708c9-d8dc-439f-9a3b-c772bf4a311c" providerId="ADAL" clId="{2E25C175-47A3-4BC7-8EFD-372D97A42A64}" dt="2023-03-07T09:27:48.031" v="3380" actId="207"/>
-        <pc:sldMkLst>
-          <pc:docMk/>
-          <pc:sldMk cId="1609989787" sldId="408"/>
-        </pc:sldMkLst>
-      </pc:sldChg>
-      <pc:sldChg chg="addSp delSp modSp add mod modClrScheme chgLayout">
-        <pc:chgData name="Matthieu De Mari" userId="dfb708c9-d8dc-439f-9a3b-c772bf4a311c" providerId="ADAL" clId="{2E25C175-47A3-4BC7-8EFD-372D97A42A64}" dt="2023-03-07T10:24:07.578" v="6039" actId="207"/>
-        <pc:sldMkLst>
-          <pc:docMk/>
-          <pc:sldMk cId="3853734329" sldId="409"/>
-        </pc:sldMkLst>
-      </pc:sldChg>
-      <pc:sldChg chg="modSp add del mod">
-        <pc:chgData name="Matthieu De Mari" userId="dfb708c9-d8dc-439f-9a3b-c772bf4a311c" providerId="ADAL" clId="{2E25C175-47A3-4BC7-8EFD-372D97A42A64}" dt="2023-03-07T09:50:47.923" v="4520" actId="2696"/>
-        <pc:sldMkLst>
-          <pc:docMk/>
-          <pc:sldMk cId="2230671212" sldId="410"/>
-        </pc:sldMkLst>
-      </pc:sldChg>
-      <pc:sldChg chg="modSp add mod">
-        <pc:chgData name="Matthieu De Mari" userId="dfb708c9-d8dc-439f-9a3b-c772bf4a311c" providerId="ADAL" clId="{2E25C175-47A3-4BC7-8EFD-372D97A42A64}" dt="2023-03-07T10:04:11.442" v="5348" actId="20577"/>
-        <pc:sldMkLst>
-          <pc:docMk/>
-          <pc:sldMk cId="4281175894" sldId="410"/>
-        </pc:sldMkLst>
-      </pc:sldChg>
-      <pc:sldChg chg="modSp add del mod">
-        <pc:chgData name="Matthieu De Mari" userId="dfb708c9-d8dc-439f-9a3b-c772bf4a311c" providerId="ADAL" clId="{2E25C175-47A3-4BC7-8EFD-372D97A42A64}" dt="2023-03-07T09:50:47.923" v="4520" actId="2696"/>
-        <pc:sldMkLst>
-          <pc:docMk/>
-          <pc:sldMk cId="2214876847" sldId="411"/>
-        </pc:sldMkLst>
-      </pc:sldChg>
-      <pc:sldChg chg="modSp add mod">
-        <pc:chgData name="Matthieu De Mari" userId="dfb708c9-d8dc-439f-9a3b-c772bf4a311c" providerId="ADAL" clId="{2E25C175-47A3-4BC7-8EFD-372D97A42A64}" dt="2023-03-07T10:01:47.419" v="5118" actId="20577"/>
-        <pc:sldMkLst>
-          <pc:docMk/>
-          <pc:sldMk cId="3863789620" sldId="411"/>
-        </pc:sldMkLst>
-      </pc:sldChg>
-      <pc:sldChg chg="modSp add del mod">
-        <pc:chgData name="Matthieu De Mari" userId="dfb708c9-d8dc-439f-9a3b-c772bf4a311c" providerId="ADAL" clId="{2E25C175-47A3-4BC7-8EFD-372D97A42A64}" dt="2023-03-07T09:50:47.923" v="4520" actId="2696"/>
-        <pc:sldMkLst>
-          <pc:docMk/>
-          <pc:sldMk cId="1824916093" sldId="412"/>
-        </pc:sldMkLst>
-      </pc:sldChg>
-      <pc:sldChg chg="modSp add mod">
-        <pc:chgData name="Matthieu De Mari" userId="dfb708c9-d8dc-439f-9a3b-c772bf4a311c" providerId="ADAL" clId="{2E25C175-47A3-4BC7-8EFD-372D97A42A64}" dt="2023-03-07T10:11:33.236" v="5507" actId="20577"/>
-        <pc:sldMkLst>
-          <pc:docMk/>
-          <pc:sldMk cId="3522054596" sldId="412"/>
-        </pc:sldMkLst>
-      </pc:sldChg>
-      <pc:sldChg chg="addSp delSp modSp add mod">
-        <pc:chgData name="Matthieu De Mari" userId="dfb708c9-d8dc-439f-9a3b-c772bf4a311c" providerId="ADAL" clId="{2E25C175-47A3-4BC7-8EFD-372D97A42A64}" dt="2023-03-07T09:59:16.475" v="4959" actId="1076"/>
-        <pc:sldMkLst>
-          <pc:docMk/>
-          <pc:sldMk cId="2221766967" sldId="413"/>
-        </pc:sldMkLst>
-      </pc:sldChg>
-      <pc:sldChg chg="addSp delSp modSp new mod modClrScheme chgLayout">
-        <pc:chgData name="Matthieu De Mari" userId="dfb708c9-d8dc-439f-9a3b-c772bf4a311c" providerId="ADAL" clId="{2E25C175-47A3-4BC7-8EFD-372D97A42A64}" dt="2023-03-07T09:58:35.438" v="4956" actId="1076"/>
-        <pc:sldMkLst>
-          <pc:docMk/>
-          <pc:sldMk cId="912972080" sldId="414"/>
-        </pc:sldMkLst>
-      </pc:sldChg>
-      <pc:sldChg chg="modSp add mod">
-        <pc:chgData name="Matthieu De Mari" userId="dfb708c9-d8dc-439f-9a3b-c772bf4a311c" providerId="ADAL" clId="{2E25C175-47A3-4BC7-8EFD-372D97A42A64}" dt="2023-03-07T09:53:39.541" v="4799" actId="114"/>
-        <pc:sldMkLst>
-          <pc:docMk/>
-          <pc:sldMk cId="71985707" sldId="415"/>
-        </pc:sldMkLst>
-      </pc:sldChg>
-      <pc:sldChg chg="addSp modSp add mod">
-        <pc:chgData name="Matthieu De Mari" userId="dfb708c9-d8dc-439f-9a3b-c772bf4a311c" providerId="ADAL" clId="{2E25C175-47A3-4BC7-8EFD-372D97A42A64}" dt="2023-03-07T10:05:35.903" v="5356" actId="1076"/>
-        <pc:sldMkLst>
-          <pc:docMk/>
-          <pc:sldMk cId="1311368978" sldId="416"/>
-        </pc:sldMkLst>
-      </pc:sldChg>
-      <pc:sldChg chg="addSp delSp modSp add mod">
-        <pc:chgData name="Matthieu De Mari" userId="dfb708c9-d8dc-439f-9a3b-c772bf4a311c" providerId="ADAL" clId="{2E25C175-47A3-4BC7-8EFD-372D97A42A64}" dt="2023-03-07T10:10:43.605" v="5384" actId="14100"/>
-        <pc:sldMkLst>
-          <pc:docMk/>
-          <pc:sldMk cId="3072427418" sldId="417"/>
-        </pc:sldMkLst>
-      </pc:sldChg>
-      <pc:sldChg chg="addSp modSp add mod">
-        <pc:chgData name="Matthieu De Mari" userId="dfb708c9-d8dc-439f-9a3b-c772bf4a311c" providerId="ADAL" clId="{2E25C175-47A3-4BC7-8EFD-372D97A42A64}" dt="2023-03-07T10:11:59.407" v="5512" actId="207"/>
-        <pc:sldMkLst>
-          <pc:docMk/>
-          <pc:sldMk cId="298499389" sldId="418"/>
-        </pc:sldMkLst>
-      </pc:sldChg>
-      <pc:sldChg chg="modSp add mod">
-        <pc:chgData name="Matthieu De Mari" userId="dfb708c9-d8dc-439f-9a3b-c772bf4a311c" providerId="ADAL" clId="{2E25C175-47A3-4BC7-8EFD-372D97A42A64}" dt="2023-03-07T10:12:50.723" v="5624" actId="20577"/>
-        <pc:sldMkLst>
-          <pc:docMk/>
-          <pc:sldMk cId="3069423319" sldId="419"/>
-        </pc:sldMkLst>
-      </pc:sldChg>
-      <pc:sldChg chg="add">
-        <pc:chgData name="Matthieu De Mari" userId="dfb708c9-d8dc-439f-9a3b-c772bf4a311c" providerId="ADAL" clId="{2E25C175-47A3-4BC7-8EFD-372D97A42A64}" dt="2023-03-07T10:13:31.207" v="5629"/>
-        <pc:sldMkLst>
-          <pc:docMk/>
-          <pc:sldMk cId="485649805" sldId="420"/>
-        </pc:sldMkLst>
-      </pc:sldChg>
-      <pc:sldChg chg="add del">
-        <pc:chgData name="Matthieu De Mari" userId="dfb708c9-d8dc-439f-9a3b-c772bf4a311c" providerId="ADAL" clId="{2E25C175-47A3-4BC7-8EFD-372D97A42A64}" dt="2023-03-07T10:13:21.390" v="5626" actId="2696"/>
-        <pc:sldMkLst>
-          <pc:docMk/>
-          <pc:sldMk cId="1259014801" sldId="420"/>
-        </pc:sldMkLst>
-      </pc:sldChg>
-      <pc:sldChg chg="modSp add mod">
-        <pc:chgData name="Matthieu De Mari" userId="dfb708c9-d8dc-439f-9a3b-c772bf4a311c" providerId="ADAL" clId="{2E25C175-47A3-4BC7-8EFD-372D97A42A64}" dt="2023-03-07T10:16:44.162" v="5758" actId="20577"/>
-        <pc:sldMkLst>
-          <pc:docMk/>
-          <pc:sldMk cId="3351792085" sldId="421"/>
-        </pc:sldMkLst>
-      </pc:sldChg>
-      <pc:sldChg chg="new del">
-        <pc:chgData name="Matthieu De Mari" userId="dfb708c9-d8dc-439f-9a3b-c772bf4a311c" providerId="ADAL" clId="{2E25C175-47A3-4BC7-8EFD-372D97A42A64}" dt="2023-03-07T10:13:52.815" v="5632" actId="47"/>
-        <pc:sldMkLst>
-          <pc:docMk/>
-          <pc:sldMk cId="4263020084" sldId="421"/>
-        </pc:sldMkLst>
-      </pc:sldChg>
-      <pc:sldChg chg="new del">
-        <pc:chgData name="Matthieu De Mari" userId="dfb708c9-d8dc-439f-9a3b-c772bf4a311c" providerId="ADAL" clId="{2E25C175-47A3-4BC7-8EFD-372D97A42A64}" dt="2023-03-07T10:26:41.441" v="6051" actId="47"/>
-        <pc:sldMkLst>
-          <pc:docMk/>
-          <pc:sldMk cId="1402562889" sldId="422"/>
-        </pc:sldMkLst>
-      </pc:sldChg>
-      <pc:sldChg chg="modSp add mod ord">
-        <pc:chgData name="Matthieu De Mari" userId="dfb708c9-d8dc-439f-9a3b-c772bf4a311c" providerId="ADAL" clId="{2E25C175-47A3-4BC7-8EFD-372D97A42A64}" dt="2023-03-07T10:17:54.203" v="5801" actId="20577"/>
-        <pc:sldMkLst>
-          <pc:docMk/>
-          <pc:sldMk cId="3421583851" sldId="423"/>
-        </pc:sldMkLst>
-      </pc:sldChg>
-      <pc:sldChg chg="modSp add mod">
-        <pc:chgData name="Matthieu De Mari" userId="dfb708c9-d8dc-439f-9a3b-c772bf4a311c" providerId="ADAL" clId="{2E25C175-47A3-4BC7-8EFD-372D97A42A64}" dt="2023-03-07T10:18:00.790" v="5804" actId="207"/>
-        <pc:sldMkLst>
-          <pc:docMk/>
-          <pc:sldMk cId="2106229472" sldId="424"/>
-        </pc:sldMkLst>
-      </pc:sldChg>
-      <pc:sldChg chg="modSp add mod">
-        <pc:chgData name="Matthieu De Mari" userId="dfb708c9-d8dc-439f-9a3b-c772bf4a311c" providerId="ADAL" clId="{2E25C175-47A3-4BC7-8EFD-372D97A42A64}" dt="2023-03-07T10:19:35.729" v="5860" actId="113"/>
-        <pc:sldMkLst>
-          <pc:docMk/>
-          <pc:sldMk cId="833550183" sldId="425"/>
-        </pc:sldMkLst>
-      </pc:sldChg>
-      <pc:sldChg chg="modSp add mod">
-        <pc:chgData name="Matthieu De Mari" userId="dfb708c9-d8dc-439f-9a3b-c772bf4a311c" providerId="ADAL" clId="{2E25C175-47A3-4BC7-8EFD-372D97A42A64}" dt="2023-03-07T10:19:50.985" v="5865" actId="14100"/>
-        <pc:sldMkLst>
-          <pc:docMk/>
-          <pc:sldMk cId="1650955281" sldId="426"/>
-        </pc:sldMkLst>
-      </pc:sldChg>
-      <pc:sldChg chg="modSp add mod ord">
-        <pc:chgData name="Matthieu De Mari" userId="dfb708c9-d8dc-439f-9a3b-c772bf4a311c" providerId="ADAL" clId="{2E25C175-47A3-4BC7-8EFD-372D97A42A64}" dt="2023-03-07T10:24:33.206" v="6049" actId="207"/>
-        <pc:sldMkLst>
-          <pc:docMk/>
-          <pc:sldMk cId="25607758" sldId="427"/>
-        </pc:sldMkLst>
-      </pc:sldChg>
-      <pc:sldChg chg="modSp add mod">
-        <pc:chgData name="Matthieu De Mari" userId="dfb708c9-d8dc-439f-9a3b-c772bf4a311c" providerId="ADAL" clId="{2E25C175-47A3-4BC7-8EFD-372D97A42A64}" dt="2023-03-07T10:32:08.804" v="6515" actId="20577"/>
-        <pc:sldMkLst>
-          <pc:docMk/>
-          <pc:sldMk cId="2580070337" sldId="428"/>
-        </pc:sldMkLst>
-      </pc:sldChg>
-      <pc:sldChg chg="modSp add mod">
-        <pc:chgData name="Matthieu De Mari" userId="dfb708c9-d8dc-439f-9a3b-c772bf4a311c" providerId="ADAL" clId="{2E25C175-47A3-4BC7-8EFD-372D97A42A64}" dt="2023-03-07T10:32:13.911" v="6528" actId="20577"/>
-        <pc:sldMkLst>
-          <pc:docMk/>
-          <pc:sldMk cId="2609747574" sldId="429"/>
-        </pc:sldMkLst>
-      </pc:sldChg>
-      <pc:sldChg chg="modSp add mod">
-        <pc:chgData name="Matthieu De Mari" userId="dfb708c9-d8dc-439f-9a3b-c772bf4a311c" providerId="ADAL" clId="{2E25C175-47A3-4BC7-8EFD-372D97A42A64}" dt="2023-03-07T10:32:39.787" v="6641" actId="20577"/>
-        <pc:sldMkLst>
-          <pc:docMk/>
-          <pc:sldMk cId="1298953197" sldId="430"/>
-        </pc:sldMkLst>
-      </pc:sldChg>
-      <pc:sldChg chg="add del">
-        <pc:chgData name="Matthieu De Mari" userId="dfb708c9-d8dc-439f-9a3b-c772bf4a311c" providerId="ADAL" clId="{2E25C175-47A3-4BC7-8EFD-372D97A42A64}" dt="2023-03-07T10:30:25.877" v="6383" actId="47"/>
-        <pc:sldMkLst>
-          <pc:docMk/>
-          <pc:sldMk cId="3766509564" sldId="430"/>
-        </pc:sldMkLst>
-      </pc:sldChg>
-      <pc:sldChg chg="modSp new mod">
-        <pc:chgData name="Matthieu De Mari" userId="dfb708c9-d8dc-439f-9a3b-c772bf4a311c" providerId="ADAL" clId="{2E25C175-47A3-4BC7-8EFD-372D97A42A64}" dt="2023-03-07T10:34:48.172" v="6763" actId="20577"/>
-        <pc:sldMkLst>
-          <pc:docMk/>
-          <pc:sldMk cId="349686524" sldId="431"/>
-        </pc:sldMkLst>
-      </pc:sldChg>
-      <pc:sldChg chg="modSp add mod">
-        <pc:chgData name="Matthieu De Mari" userId="dfb708c9-d8dc-439f-9a3b-c772bf4a311c" providerId="ADAL" clId="{2E25C175-47A3-4BC7-8EFD-372D97A42A64}" dt="2023-03-07T10:33:02.161" v="6657" actId="207"/>
-        <pc:sldMkLst>
-          <pc:docMk/>
-          <pc:sldMk cId="3417944735" sldId="432"/>
-        </pc:sldMkLst>
-      </pc:sldChg>
-      <pc:sldChg chg="modSp add mod">
-        <pc:chgData name="Matthieu De Mari" userId="dfb708c9-d8dc-439f-9a3b-c772bf4a311c" providerId="ADAL" clId="{2E25C175-47A3-4BC7-8EFD-372D97A42A64}" dt="2023-03-07T10:35:45.030" v="6878" actId="207"/>
-        <pc:sldMkLst>
-          <pc:docMk/>
-          <pc:sldMk cId="2653152999" sldId="433"/>
-        </pc:sldMkLst>
-      </pc:sldChg>
-      <pc:sldChg chg="modSp add mod">
-        <pc:chgData name="Matthieu De Mari" userId="dfb708c9-d8dc-439f-9a3b-c772bf4a311c" providerId="ADAL" clId="{2E25C175-47A3-4BC7-8EFD-372D97A42A64}" dt="2023-03-07T10:36:00.421" v="6882" actId="207"/>
-        <pc:sldMkLst>
-          <pc:docMk/>
-          <pc:sldMk cId="2305199698" sldId="434"/>
-        </pc:sldMkLst>
-      </pc:sldChg>
-      <pc:sldChg chg="modSp add mod">
-        <pc:chgData name="Matthieu De Mari" userId="dfb708c9-d8dc-439f-9a3b-c772bf4a311c" providerId="ADAL" clId="{2E25C175-47A3-4BC7-8EFD-372D97A42A64}" dt="2023-03-07T10:39:44.701" v="7119" actId="20577"/>
-        <pc:sldMkLst>
-          <pc:docMk/>
-          <pc:sldMk cId="2095478576" sldId="435"/>
-        </pc:sldMkLst>
-      </pc:sldChg>
-      <pc:sldChg chg="modSp new mod">
-        <pc:chgData name="Matthieu De Mari" userId="dfb708c9-d8dc-439f-9a3b-c772bf4a311c" providerId="ADAL" clId="{2E25C175-47A3-4BC7-8EFD-372D97A42A64}" dt="2023-03-07T10:40:55.253" v="7150" actId="27636"/>
-        <pc:sldMkLst>
-          <pc:docMk/>
-          <pc:sldMk cId="2087017446" sldId="436"/>
-        </pc:sldMkLst>
-      </pc:sldChg>
-      <pc:sldChg chg="modSp add mod">
-        <pc:chgData name="Matthieu De Mari" userId="dfb708c9-d8dc-439f-9a3b-c772bf4a311c" providerId="ADAL" clId="{2E25C175-47A3-4BC7-8EFD-372D97A42A64}" dt="2023-03-07T10:46:33.418" v="7352" actId="20577"/>
-        <pc:sldMkLst>
-          <pc:docMk/>
-          <pc:sldMk cId="2927953506" sldId="437"/>
-        </pc:sldMkLst>
-      </pc:sldChg>
-    </pc:docChg>
-  </pc:docChgLst>
-  <pc:docChgLst>
-    <pc:chgData name="Matthieu De Mari" userId="dfb708c9-d8dc-439f-9a3b-c772bf4a311c" providerId="ADAL" clId="{CF552409-A127-4E9A-B700-AB4BACA41190}"/>
-    <pc:docChg chg="modSld">
-      <pc:chgData name="Matthieu De Mari" userId="dfb708c9-d8dc-439f-9a3b-c772bf4a311c" providerId="ADAL" clId="{CF552409-A127-4E9A-B700-AB4BACA41190}" dt="2023-03-27T06:29:27.380" v="20" actId="20577"/>
-      <pc:docMkLst>
-        <pc:docMk/>
-      </pc:docMkLst>
     </pc:docChg>
   </pc:docChgLst>
 </pc:chgInfo>
@@ -8595,7 +3362,7 @@
           <a:p>
             <a:fld id="{98CFC6A4-B085-437B-8084-693BEB2A32DE}" type="datetimeFigureOut">
               <a:rPr lang="en-SG" smtClean="0"/>
-              <a:t>14/4/2025</a:t>
+              <a:t>14/1/2026</a:t>
             </a:fld>
             <a:endParaRPr lang="en-SG"/>
           </a:p>
@@ -9432,7 +4199,7 @@
           <a:p>
             <a:fld id="{AB35F6B0-D468-4997-9CE3-CF2A1AE5E3F9}" type="datetimeFigureOut">
               <a:rPr lang="en-SG" smtClean="0"/>
-              <a:t>14/4/2025</a:t>
+              <a:t>14/1/2026</a:t>
             </a:fld>
             <a:endParaRPr lang="en-SG"/>
           </a:p>
@@ -9632,7 +4399,7 @@
           <a:p>
             <a:fld id="{AB35F6B0-D468-4997-9CE3-CF2A1AE5E3F9}" type="datetimeFigureOut">
               <a:rPr lang="en-SG" smtClean="0"/>
-              <a:t>14/4/2025</a:t>
+              <a:t>14/1/2026</a:t>
             </a:fld>
             <a:endParaRPr lang="en-SG"/>
           </a:p>
@@ -9842,7 +4609,7 @@
           <a:p>
             <a:fld id="{AB35F6B0-D468-4997-9CE3-CF2A1AE5E3F9}" type="datetimeFigureOut">
               <a:rPr lang="en-SG" smtClean="0"/>
-              <a:t>14/4/2025</a:t>
+              <a:t>14/1/2026</a:t>
             </a:fld>
             <a:endParaRPr lang="en-SG"/>
           </a:p>
@@ -10042,7 +4809,7 @@
           <a:p>
             <a:fld id="{AB35F6B0-D468-4997-9CE3-CF2A1AE5E3F9}" type="datetimeFigureOut">
               <a:rPr lang="en-SG" smtClean="0"/>
-              <a:t>14/4/2025</a:t>
+              <a:t>14/1/2026</a:t>
             </a:fld>
             <a:endParaRPr lang="en-SG"/>
           </a:p>
@@ -10318,7 +5085,7 @@
           <a:p>
             <a:fld id="{AB35F6B0-D468-4997-9CE3-CF2A1AE5E3F9}" type="datetimeFigureOut">
               <a:rPr lang="en-SG" smtClean="0"/>
-              <a:t>14/4/2025</a:t>
+              <a:t>14/1/2026</a:t>
             </a:fld>
             <a:endParaRPr lang="en-SG"/>
           </a:p>
@@ -10586,7 +5353,7 @@
           <a:p>
             <a:fld id="{AB35F6B0-D468-4997-9CE3-CF2A1AE5E3F9}" type="datetimeFigureOut">
               <a:rPr lang="en-SG" smtClean="0"/>
-              <a:t>14/4/2025</a:t>
+              <a:t>14/1/2026</a:t>
             </a:fld>
             <a:endParaRPr lang="en-SG"/>
           </a:p>
@@ -11001,7 +5768,7 @@
           <a:p>
             <a:fld id="{AB35F6B0-D468-4997-9CE3-CF2A1AE5E3F9}" type="datetimeFigureOut">
               <a:rPr lang="en-SG" smtClean="0"/>
-              <a:t>14/4/2025</a:t>
+              <a:t>14/1/2026</a:t>
             </a:fld>
             <a:endParaRPr lang="en-SG"/>
           </a:p>
@@ -11143,7 +5910,7 @@
           <a:p>
             <a:fld id="{AB35F6B0-D468-4997-9CE3-CF2A1AE5E3F9}" type="datetimeFigureOut">
               <a:rPr lang="en-SG" smtClean="0"/>
-              <a:t>14/4/2025</a:t>
+              <a:t>14/1/2026</a:t>
             </a:fld>
             <a:endParaRPr lang="en-SG"/>
           </a:p>
@@ -11256,7 +6023,7 @@
           <a:p>
             <a:fld id="{AB35F6B0-D468-4997-9CE3-CF2A1AE5E3F9}" type="datetimeFigureOut">
               <a:rPr lang="en-SG" smtClean="0"/>
-              <a:t>14/4/2025</a:t>
+              <a:t>14/1/2026</a:t>
             </a:fld>
             <a:endParaRPr lang="en-SG"/>
           </a:p>
@@ -11569,7 +6336,7 @@
           <a:p>
             <a:fld id="{AB35F6B0-D468-4997-9CE3-CF2A1AE5E3F9}" type="datetimeFigureOut">
               <a:rPr lang="en-SG" smtClean="0"/>
-              <a:t>14/4/2025</a:t>
+              <a:t>14/1/2026</a:t>
             </a:fld>
             <a:endParaRPr lang="en-SG"/>
           </a:p>
@@ -11858,7 +6625,7 @@
           <a:p>
             <a:fld id="{AB35F6B0-D468-4997-9CE3-CF2A1AE5E3F9}" type="datetimeFigureOut">
               <a:rPr lang="en-SG" smtClean="0"/>
-              <a:t>14/4/2025</a:t>
+              <a:t>14/1/2026</a:t>
             </a:fld>
             <a:endParaRPr lang="en-SG"/>
           </a:p>
@@ -12101,7 +6868,7 @@
           <a:p>
             <a:fld id="{AB35F6B0-D468-4997-9CE3-CF2A1AE5E3F9}" type="datetimeFigureOut">
               <a:rPr lang="en-SG" smtClean="0"/>
-              <a:t>14/4/2025</a:t>
+              <a:t>14/1/2026</a:t>
             </a:fld>
             <a:endParaRPr lang="en-SG"/>
           </a:p>
@@ -13384,7 +8151,7 @@
             </a:r>
             <a:r>
               <a:rPr lang="en-GB" dirty="0"/>
-              <a:t>The term optimization implies looking for an “optimal” piece of code that could replace a given source program, and produce the exact same outcome.</a:t>
+              <a:t>The term optimization implies looking for an “optimal” piece of code that could replace a given source program and produce the exact same outcome.</a:t>
             </a:r>
           </a:p>
           <a:p>
@@ -17602,7 +12369,7 @@
                   <a:srgbClr val="00B050"/>
                 </a:solidFill>
               </a:rPr>
-              <a:t>w = 4 </a:t>
+              <a:t>w = x </a:t>
             </a:r>
             <a:r>
               <a:rPr lang="en-GB" sz="3200" i="1" dirty="0"/>
@@ -17672,7 +12439,7 @@
                   <a:srgbClr val="00B050"/>
                 </a:solidFill>
               </a:rPr>
-              <a:t>w = x </a:t>
+              <a:t>w = 4 </a:t>
             </a:r>
             <a:r>
               <a:rPr lang="en-GB" sz="3200" i="1" dirty="0"/>
@@ -17959,7 +12726,7 @@
                   <a:srgbClr val="00B050"/>
                 </a:solidFill>
               </a:rPr>
-              <a:t>w = 4 </a:t>
+              <a:t>w = x </a:t>
             </a:r>
             <a:r>
               <a:rPr lang="en-GB" sz="3200" i="1" dirty="0"/>
@@ -18029,7 +12796,7 @@
                   <a:srgbClr val="00B050"/>
                 </a:solidFill>
               </a:rPr>
-              <a:t>w = x </a:t>
+              <a:t>w = 4 </a:t>
             </a:r>
             <a:r>
               <a:rPr lang="en-GB" sz="3200" i="1" dirty="0"/>
@@ -18540,7 +13307,7 @@
                   <a:srgbClr val="00B050"/>
                 </a:solidFill>
               </a:rPr>
-              <a:t>w = 4 </a:t>
+              <a:t>w = x </a:t>
             </a:r>
             <a:r>
               <a:rPr lang="en-GB" sz="3200" i="1" dirty="0"/>
@@ -18610,7 +13377,7 @@
                   <a:srgbClr val="00B050"/>
                 </a:solidFill>
               </a:rPr>
-              <a:t>w = x </a:t>
+              <a:t>w = 4 </a:t>
             </a:r>
             <a:r>
               <a:rPr lang="en-GB" sz="3200" i="1" dirty="0"/>
@@ -19028,15 +13795,7 @@
             </a:r>
             <a:r>
               <a:rPr lang="en-GB" dirty="0"/>
-              <a:t>is then the process of removing parts of the code that do not affect the program's </a:t>
-            </a:r>
-            <a:r>
-              <a:rPr lang="en-GB" dirty="0" err="1"/>
-              <a:t>behavior</a:t>
-            </a:r>
-            <a:r>
-              <a:rPr lang="en-GB" dirty="0"/>
-              <a:t>.</a:t>
+              <a:t>is then the process of removing parts of the code that do not affect the program’s outcome.</a:t>
             </a:r>
           </a:p>
           <a:p>
@@ -19368,7 +14127,7 @@
         <p:spPr>
           <a:xfrm>
             <a:off x="838200" y="1825624"/>
-            <a:ext cx="7860323" cy="5032375"/>
+            <a:ext cx="8134884" cy="5032375"/>
           </a:xfrm>
         </p:spPr>
         <p:txBody>
@@ -19384,11 +14143,18 @@
             </a:r>
             <a:r>
               <a:rPr lang="en-GB" dirty="0"/>
-              <a:t>While this TAC code might be valid in terms of operations and expected outcomes, </a:t>
+              <a:t>The SDT will often produce a TAC code that is valid in terms of operations and expected outcomes, </a:t>
             </a:r>
             <a:r>
               <a:rPr lang="en-GB" b="1" dirty="0"/>
-              <a:t>it is clearly not optimal!</a:t>
+              <a:t>but it will often not be optimal!</a:t>
+            </a:r>
+            <a:br>
+              <a:rPr lang="en-GB" b="1" dirty="0"/>
+            </a:br>
+            <a:r>
+              <a:rPr lang="en-GB" i="1" dirty="0"/>
+              <a:t>(See bonus slides if curious why it is often not optimal)</a:t>
             </a:r>
           </a:p>
           <a:p>
@@ -26463,7 +21229,12 @@
             <p:ph idx="1"/>
           </p:nvPr>
         </p:nvSpPr>
-        <p:spPr/>
+        <p:spPr>
+          <a:xfrm>
+            <a:off x="838200" y="1825625"/>
+            <a:ext cx="10638802" cy="4351338"/>
+          </a:xfrm>
+        </p:spPr>
         <p:txBody>
           <a:bodyPr/>
           <a:lstStyle/>
@@ -27293,7 +22064,7 @@
                   <a:srgbClr val="00B050"/>
                 </a:solidFill>
               </a:rPr>
-              <a:t>w = 4 </a:t>
+              <a:t>w = x </a:t>
             </a:r>
             <a:r>
               <a:rPr lang="en-GB" sz="3200" i="1" dirty="0"/>
@@ -27363,7 +22134,7 @@
                   <a:srgbClr val="00B050"/>
                 </a:solidFill>
               </a:rPr>
-              <a:t>w = x </a:t>
+              <a:t>w = 4 </a:t>
             </a:r>
             <a:r>
               <a:rPr lang="en-GB" sz="3200" i="1" dirty="0"/>
